--- a/slides/WireGuard-udp2raw-detection.pptx
+++ b/slides/WireGuard-udp2raw-detection.pptx
@@ -510,7 +510,7 @@
           <a:lstStyle/>
           <a:p>
             <a:r>
-              <a:t>Hi, I'm Steven, and with me is Nicholas. We spent the semester building</a:t>
+              <a:t>Hello. I'm Steven, this is Nicholas. We spent the semester building</a:t>
             </a:r>
           </a:p>
           <a:p>
@@ -521,43 +521,48 @@
           <a:p/>
           <a:p>
             <a:r>
-              <a:t>The headline: WireGuard's wire format is so regular that a 25-line script</a:t>
-            </a:r>
-          </a:p>
-          <a:p>
-            <a:r>
-              <a:t>detects it. The community fix is an obfuscation tool called udp2raw, which</a:t>
-            </a:r>
-          </a:p>
-          <a:p>
-            <a:r>
-              <a:t>has roughly 8500 GitHub stars and is documented to be actively blocked by</a:t>
-            </a:r>
-          </a:p>
-          <a:p>
-            <a:r>
-              <a:t>the Great Firewall and Iran's DPI. Despite that, no peer-reviewed paper</a:t>
-            </a:r>
-          </a:p>
-          <a:p>
-            <a:r>
-              <a:t>has ever analyzed it.</a:t>
+              <a:t>The headline is in two parts. WireGuard's wire format is regular enough</a:t>
+            </a:r>
+          </a:p>
+          <a:p>
+            <a:r>
+              <a:t>to fingerprint with a 25-line script. The community fix for that is a</a:t>
+            </a:r>
+          </a:p>
+          <a:p>
+            <a:r>
+              <a:t>tool called udp2raw, which has roughly two hundred and sixty thousand</a:t>
+            </a:r>
+          </a:p>
+          <a:p>
+            <a:r>
+              <a:t>binary downloads, is reportedly blocked by state-level DPI in multiple</a:t>
+            </a:r>
+          </a:p>
+          <a:p>
+            <a:r>
+              <a:t>regions, and has zero peer-reviewed analysis.</a:t>
             </a:r>
           </a:p>
           <a:p/>
           <a:p>
             <a:r>
-              <a:t>We did, and the result is in two parts: an active prober that finds udp2raw</a:t>
-            </a:r>
-          </a:p>
-          <a:p>
-            <a:r>
-              <a:t>in 8 seconds, and a passive two-feature classifier that hits 99.9 percent</a:t>
-            </a:r>
-          </a:p>
-          <a:p>
-            <a:r>
-              <a:t>accuracy on real-world background traffic.</a:t>
+              <a:t>We did the analysis. The result is two attacks: an active prober that</a:t>
+            </a:r>
+          </a:p>
+          <a:p>
+            <a:r>
+              <a:t>identifies a udp2raw listener in eight and a half seconds, and a passive</a:t>
+            </a:r>
+          </a:p>
+          <a:p>
+            <a:r>
+              <a:t>two-feature classifier that hits ninety-nine point nine percent accuracy</a:t>
+            </a:r>
+          </a:p>
+          <a:p>
+            <a:r>
+              <a:t>on real-world background traffic.</a:t>
             </a:r>
           </a:p>
         </p:txBody>
@@ -627,55 +632,65 @@
           <a:lstStyle/>
           <a:p>
             <a:r>
-              <a:t>Two important things on this slide.</a:t>
+              <a:t>Two things on this slide.</a:t>
             </a:r>
           </a:p>
           <a:p/>
           <a:p>
             <a:r>
-              <a:t>First, the wire format is *trivial*. One type byte, three zero bytes,</a:t>
-            </a:r>
-          </a:p>
-          <a:p>
-            <a:r>
-              <a:t>fixed lengths for the handshake. Anyone watching UDP can fingerprint it</a:t>
-            </a:r>
-          </a:p>
-          <a:p>
-            <a:r>
-              <a:t>without decrypting anything.</a:t>
+              <a:t>First, the wire format is genuinely trivial. One type byte, three zero</a:t>
+            </a:r>
+          </a:p>
+          <a:p>
+            <a:r>
+              <a:t>bytes, fixed lengths for the handshake. Anyone watching UDP can fingerprint</a:t>
+            </a:r>
+          </a:p>
+          <a:p>
+            <a:r>
+              <a:t>it without decrypting anything. The Wu et al. paper from USENIX Security</a:t>
+            </a:r>
+          </a:p>
+          <a:p>
+            <a:r>
+              <a:t>2023 confirms this is exactly what the Great Firewall does in production.</a:t>
             </a:r>
           </a:p>
           <a:p/>
           <a:p>
             <a:r>
-              <a:t>Second — and this is not a vulnerability — Donenfeld's whitepaper</a:t>
-            </a:r>
-          </a:p>
-          <a:p>
-            <a:r>
-              <a:t>explicitly says obfuscation is out of scope for WireGuard. The community</a:t>
-            </a:r>
-          </a:p>
-          <a:p>
-            <a:r>
-              <a:t>response has been to wrap WireGuard in something else, most prominently</a:t>
-            </a:r>
-          </a:p>
-          <a:p>
-            <a:r>
-              <a:t>the tool called udp2raw.</a:t>
+              <a:t>Second, and importantly, this is not a vulnerability. The WireGuard</a:t>
+            </a:r>
+          </a:p>
+          <a:p>
+            <a:r>
+              <a:t>whitepaper by Jason Donenfeld at NDSS 2017 explicitly says obfuscation</a:t>
+            </a:r>
+          </a:p>
+          <a:p>
+            <a:r>
+              <a:t>is out of scope. Donenfeld's position is that hiding a VPN's existence</a:t>
+            </a:r>
+          </a:p>
+          <a:p>
+            <a:r>
+              <a:t>should be handled by a layer above WireGuard, not by WireGuard itself.</a:t>
             </a:r>
           </a:p>
           <a:p/>
           <a:p>
             <a:r>
-              <a:t>So the question of this paper isn't 'can you detect WireGuard?' That's</a:t>
-            </a:r>
-          </a:p>
-          <a:p>
-            <a:r>
-              <a:t>been done. It's 'can you detect WireGuard once it's hidden inside udp2raw?'</a:t>
+              <a:t>So the question this paper asks isn't 'can you detect WireGuard?' That's</a:t>
+            </a:r>
+          </a:p>
+          <a:p>
+            <a:r>
+              <a:t>been answered. It's 'can you detect WireGuard once it's hidden inside</a:t>
+            </a:r>
+          </a:p>
+          <a:p>
+            <a:r>
+              <a:t>udp2raw?' Two slides from now we get to the answer.</a:t>
             </a:r>
           </a:p>
         </p:txBody>
@@ -745,49 +760,69 @@
           <a:lstStyle/>
           <a:p>
             <a:r>
-              <a:t>Quick orientation. Top of the slide: two paths through our lab. Same</a:t>
-            </a:r>
-          </a:p>
-          <a:p>
-            <a:r>
-              <a:t>WireGuard keys both ways — only the transport changes. The direct path</a:t>
-            </a:r>
-          </a:p>
-          <a:p>
-            <a:r>
-              <a:t>is what censors block. The obfuscated path wraps each WireGuard packet</a:t>
-            </a:r>
-          </a:p>
-          <a:p>
-            <a:r>
-              <a:t>inside what looks like a long-running TCP connection on port 4096.</a:t>
+              <a:t>Top of the slide: two paths through our lab. Same WireGuard keys, same</a:t>
+            </a:r>
+          </a:p>
+          <a:p>
+            <a:r>
+              <a:t>inner addressing both ways; only the transport between client and server</a:t>
+            </a:r>
+          </a:p>
+          <a:p>
+            <a:r>
+              <a:t>changes. The direct path is what the GFW already blocks. The obfuscated</a:t>
+            </a:r>
+          </a:p>
+          <a:p>
+            <a:r>
+              <a:t>path wraps each WireGuard packet inside what looks like a long-running</a:t>
+            </a:r>
+          </a:p>
+          <a:p>
+            <a:r>
+              <a:t>TCP connection on port four thousand ninety-six.</a:t>
             </a:r>
           </a:p>
           <a:p/>
           <a:p>
             <a:r>
-              <a:t>The bullets at the bottom are the gap we identified. udp2raw is a tool</a:t>
-            </a:r>
-          </a:p>
-          <a:p>
-            <a:r>
-              <a:t>that protects roughly eight and a half thousand stars worth of users.</a:t>
-            </a:r>
-          </a:p>
-          <a:p>
-            <a:r>
-              <a:t>It's documented to be blocked. And it's never been formally analyzed.</a:t>
+              <a:t>The bullets at the bottom: udp2raw matters because it's the dominant</a:t>
+            </a:r>
+          </a:p>
+          <a:p>
+            <a:r>
+              <a:t>generic UDP-to-faketcp shim. Two hundred and fifty-nine thousand binary</a:t>
+            </a:r>
+          </a:p>
+          <a:p>
+            <a:r>
+              <a:t>downloads is a real deployment number, not a star count. It's reportedly</a:t>
+            </a:r>
+          </a:p>
+          <a:p>
+            <a:r>
+              <a:t>blocked by state-level DPI. And no academic paper has analyzed it.</a:t>
             </a:r>
           </a:p>
           <a:p/>
           <a:p>
             <a:r>
-              <a:t>Other obfuscators — AmneziaWG, swgp-go, wstunnel — exist, but udp2raw is</a:t>
-            </a:r>
-          </a:p>
-          <a:p>
-            <a:r>
-              <a:t>the dominant one and the one nobody has studied. So we focused there.</a:t>
+              <a:t>Other tools, AmneziaWG and swgp-go, modify WireGuard itself rather than</a:t>
+            </a:r>
+          </a:p>
+          <a:p>
+            <a:r>
+              <a:t>wrap it generically; they're not the same comparison set. We focus on</a:t>
+            </a:r>
+          </a:p>
+          <a:p>
+            <a:r>
+              <a:t>udp2raw because it's the only fully unstudied tool in the generic-shim</a:t>
+            </a:r>
+          </a:p>
+          <a:p>
+            <a:r>
+              <a:t>category.</a:t>
             </a:r>
           </a:p>
         </p:txBody>
@@ -857,59 +892,59 @@
           <a:lstStyle/>
           <a:p>
             <a:r>
-              <a:t>The methodology is borrowed shamelessly from Xue et al.'s 2022 paper that</a:t>
-            </a:r>
-          </a:p>
-          <a:p>
-            <a:r>
-              <a:t>won Distinguished Paper at USENIX. They built passive-then-active detectors</a:t>
-            </a:r>
-          </a:p>
-          <a:p>
-            <a:r>
-              <a:t>for OpenVPN. We do the same pattern, but for WireGuard-in-udp2raw, which</a:t>
-            </a:r>
-          </a:p>
-          <a:p>
-            <a:r>
-              <a:t>they didn't cover.</a:t>
+              <a:t>The methodology is borrowed from the Xue et al. paper that won</a:t>
+            </a:r>
+          </a:p>
+          <a:p>
+            <a:r>
+              <a:t>distinguished paper at USENIX Security 2022. They built passive-then-active</a:t>
+            </a:r>
+          </a:p>
+          <a:p>
+            <a:r>
+              <a:t>detectors for OpenVPN. We do the same pattern for WireGuard-in-udp2raw,</a:t>
+            </a:r>
+          </a:p>
+          <a:p>
+            <a:r>
+              <a:t>which they didn't cover.</a:t>
             </a:r>
           </a:p>
           <a:p/>
           <a:p>
             <a:r>
-              <a:t>Left side: contribution one is an active prober. Five stateless TCP packets,</a:t>
-            </a:r>
-          </a:p>
-          <a:p>
-            <a:r>
-              <a:t>nine seconds, deterministic. I'll show the actual probe outputs in two</a:t>
-            </a:r>
-          </a:p>
-          <a:p>
-            <a:r>
-              <a:t>slides.</a:t>
+              <a:t>Left: contribution one is an active prober. Five stateless TCP packets,</a:t>
+            </a:r>
+          </a:p>
+          <a:p>
+            <a:r>
+              <a:t>nine seconds, deterministic. I'll show the actual probe outputs on the</a:t>
+            </a:r>
+          </a:p>
+          <a:p>
+            <a:r>
+              <a:t>next slide.</a:t>
             </a:r>
           </a:p>
           <a:p/>
           <a:p>
             <a:r>
-              <a:t>Right side: contribution two is a passive classifier with two features.</a:t>
-            </a:r>
-          </a:p>
-          <a:p>
-            <a:r>
-              <a:t>Both features fall out of how the protocols work — WireGuard pads to MTU,</a:t>
-            </a:r>
-          </a:p>
-          <a:p>
-            <a:r>
-              <a:t>udp2raw acks every datagram one-to-one — so they're not statistical luck,</a:t>
-            </a:r>
-          </a:p>
-          <a:p>
-            <a:r>
-              <a:t>they're structural.</a:t>
+              <a:t>Right: contribution two is a passive flow classifier. Two features, both</a:t>
+            </a:r>
+          </a:p>
+          <a:p>
+            <a:r>
+              <a:t>grounded in how WireGuard and udp2raw work. WireGuard pads every packet</a:t>
+            </a:r>
+          </a:p>
+          <a:p>
+            <a:r>
+              <a:t>to MTU; udp2raw acks every datagram one-to-one. Those two facts give us</a:t>
+            </a:r>
+          </a:p>
+          <a:p>
+            <a:r>
+              <a:t>99.9 percent accuracy on real-world traffic.</a:t>
             </a:r>
           </a:p>
           <a:p/>
@@ -990,28 +1025,28 @@
           <a:lstStyle/>
           <a:p>
             <a:r>
-              <a:t>Read the table. Three columns, one for each thing we probed: real SSH,</a:t>
-            </a:r>
-          </a:p>
-          <a:p>
-            <a:r>
-              <a:t>udp2raw, and a closed port.</a:t>
+              <a:t>Three columns: real SSH on port 22, udp2raw on port 4096, and a closed</a:t>
+            </a:r>
+          </a:p>
+          <a:p>
+            <a:r>
+              <a:t>port 9999.</a:t>
             </a:r>
           </a:p>
           <a:p/>
           <a:p>
             <a:r>
-              <a:t>Look at the orange entries. udp2raw answers the SYN, because it has to —</a:t>
-            </a:r>
-          </a:p>
-          <a:p>
-            <a:r>
-              <a:t>that's its disguise. It also answers the bogus ACK because the kernel</a:t>
-            </a:r>
-          </a:p>
-          <a:p>
-            <a:r>
-              <a:t>underneath emits a RST when udp2raw doesn't claim the packet. So those</a:t>
+              <a:t>Look at the orange entries. udp2raw answers the SYN because it has to</a:t>
+            </a:r>
+          </a:p>
+          <a:p>
+            <a:r>
+              <a:t>that's the disguise. It also answers the bogus ACK because the host</a:t>
+            </a:r>
+          </a:p>
+          <a:p>
+            <a:r>
+              <a:t>kernel generates the RST when udp2raw doesn't claim the packet. Those</a:t>
             </a:r>
           </a:p>
           <a:p>
@@ -1022,44 +1057,33 @@
           <a:p/>
           <a:p>
             <a:r>
-              <a:t>The other three — SYN with payload, an unusual window-scale option, FIN</a:t>
-            </a:r>
-          </a:p>
-          <a:p>
-            <a:r>
-              <a:t>to a port with no connection — udp2raw drops every one. A real Linux</a:t>
-            </a:r>
-          </a:p>
-          <a:p>
-            <a:r>
-              <a:t>kernel always answers them. That's the signal.</a:t>
+              <a:t>The other three, SYN with payload, an unusual window-scale option, FIN</a:t>
+            </a:r>
+          </a:p>
+          <a:p>
+            <a:r>
+              <a:t>to a port with no connection, udp2raw drops every one. A real Linux</a:t>
+            </a:r>
+          </a:p>
+          <a:p>
+            <a:r>
+              <a:t>kernel always answers them. That is the signal.</a:t>
             </a:r>
           </a:p>
           <a:p/>
           <a:p>
             <a:r>
-              <a:t>Total time: real TCP is half a second. udp2raw is eight and a half</a:t>
-            </a:r>
-          </a:p>
-          <a:p>
-            <a:r>
-              <a:t>seconds. The closed port times out at fifteen.</a:t>
-            </a:r>
-          </a:p>
-          <a:p/>
-          <a:p>
-            <a:r>
-              <a:t>We ran this five times against udp2raw and got the same verdict five</a:t>
-            </a:r>
-          </a:p>
-          <a:p>
-            <a:r>
-              <a:t>times. It's not statistical, it's structural — udp2raw's userspace state</a:t>
-            </a:r>
-          </a:p>
-          <a:p>
-            <a:r>
-              <a:t>machine simply doesn't recognize these packet shapes.</a:t>
+              <a:t>Total wall-clock times: real TCP, half a second. udp2raw, eight and a</a:t>
+            </a:r>
+          </a:p>
+          <a:p>
+            <a:r>
+              <a:t>half seconds. Closed port, fifteen and a half. Five trials against</a:t>
+            </a:r>
+          </a:p>
+          <a:p>
+            <a:r>
+              <a:t>udp2raw produced the same verdict five out of five times.</a:t>
             </a:r>
           </a:p>
         </p:txBody>
@@ -1129,34 +1153,29 @@
           <a:lstStyle/>
           <a:p>
             <a:r>
-              <a:t>Two features do the work.</a:t>
+              <a:t>Two features carry the whole story.</a:t>
             </a:r>
           </a:p>
           <a:p/>
           <a:p>
             <a:r>
-              <a:t>Bulk fraction — that's the share of packets in a flow that are MTU-sized.</a:t>
-            </a:r>
-          </a:p>
-          <a:p>
-            <a:r>
-              <a:t>For WireGuard it's 55 percent. For non-VPN background it's two percent.</a:t>
-            </a:r>
-          </a:p>
-          <a:p>
-            <a:r>
-              <a:t>That's a 29-fold separation. Why? Because WireGuard pads every packet to</a:t>
-            </a:r>
-          </a:p>
-          <a:p>
-            <a:r>
-              <a:t>the configured MTU. A web browser doesn't.</a:t>
+              <a:t>bulk_fraction is the share of packets at MTU. WireGuard 55 percent.</a:t>
+            </a:r>
+          </a:p>
+          <a:p>
+            <a:r>
+              <a:t>Non-VPN background, 2 percent. Cohen's d of 3.8, which is an enormous</a:t>
+            </a:r>
+          </a:p>
+          <a:p>
+            <a:r>
+              <a:t>effect size. WireGuard pads every packet to MTU. Web browsers don't.</a:t>
             </a:r>
           </a:p>
           <a:p/>
           <a:p>
             <a:r>
-              <a:t>ACK60 fraction — that's the share of 60-byte TCP ACK packets. For</a:t>
+              <a:t>ack60_fraction is the share of sixty-byte TCP ACK packets. For</a:t>
             </a:r>
           </a:p>
           <a:p>
@@ -1166,59 +1185,64 @@
           </a:p>
           <a:p>
             <a:r>
-              <a:t>datagram as one TCP segment, and the receiver's kernel emits a 60-byte</a:t>
-            </a:r>
-          </a:p>
-          <a:p>
-            <a:r>
-              <a:t>ACK for each one. So the ACK ratio is essentially 1 to 1, where real TCP</a:t>
-            </a:r>
-          </a:p>
-          <a:p>
-            <a:r>
-              <a:t>uses delayed ACK and gets to about 1 to 2.</a:t>
+              <a:t>datagram as one TCP segment, and the receiver's kernel acknowledges each</a:t>
+            </a:r>
+          </a:p>
+          <a:p>
+            <a:r>
+              <a:t>one with a sixty-byte ACK. Real bulk TCP uses delayed ACK and runs</a:t>
+            </a:r>
+          </a:p>
+          <a:p>
+            <a:r>
+              <a:t>closer to one-to-two. Cohen's d of 1.27, a large effect.</a:t>
             </a:r>
           </a:p>
           <a:p/>
           <a:p>
             <a:r>
-              <a:t>The greyed-out rows below are the features that DIDN'T separate. The</a:t>
-            </a:r>
-          </a:p>
-          <a:p>
-            <a:r>
-              <a:t>honest finding is that dominant_size_fraction — which I expected to be</a:t>
-            </a:r>
-          </a:p>
-          <a:p>
-            <a:r>
-              <a:t>the killer feature — is actually inverted. ISCXVPN2016 contains a lot of</a:t>
-            </a:r>
-          </a:p>
-          <a:p>
-            <a:r>
-              <a:t>idle TCP keepalives that have ALL packets at one size, more concentrated</a:t>
-            </a:r>
-          </a:p>
-          <a:p>
-            <a:r>
-              <a:t>than WireGuard. Real data inverted my intuition. We left those features</a:t>
-            </a:r>
-          </a:p>
-          <a:p>
-            <a:r>
-              <a:t>out of the headline classifier.</a:t>
+              <a:t>The scatter on the right shows all 1082 flows. Orange dots are WireGuard.</a:t>
+            </a:r>
+          </a:p>
+          <a:p>
+            <a:r>
+              <a:t>Grey dots are non-VPN. They essentially do not overlap. Twenty-four out</a:t>
+            </a:r>
+          </a:p>
+          <a:p>
+            <a:r>
+              <a:t>of twenty-four WG flows have bulk fraction at least 0.32. Only four out</a:t>
+            </a:r>
+          </a:p>
+          <a:p>
+            <a:r>
+              <a:t>of 1058 non-VPN flows fall anywhere near the WG cluster.</a:t>
             </a:r>
           </a:p>
           <a:p/>
           <a:p>
             <a:r>
-              <a:t>The plot on the right is the permutation importance from the 8-feature</a:t>
-            </a:r>
-          </a:p>
-          <a:p>
-            <a:r>
-              <a:t>Random Forest. bulk_fraction sits at the top by a wide margin.</a:t>
+              <a:t>Bottom-left orange note: I expected dominant_size_fraction to be the</a:t>
+            </a:r>
+          </a:p>
+          <a:p>
+            <a:r>
+              <a:t>killer feature. The data actually inverted that, because ISCXVPN2016</a:t>
+            </a:r>
+          </a:p>
+          <a:p>
+            <a:r>
+              <a:t>contains many idle TCP keepalives where every packet is exactly the</a:t>
+            </a:r>
+          </a:p>
+          <a:p>
+            <a:r>
+              <a:t>same size. Real data corrected my intuition. We dropped that feature</a:t>
+            </a:r>
+          </a:p>
+          <a:p>
+            <a:r>
+              <a:t>and three others from the headline classifier.</a:t>
             </a:r>
           </a:p>
         </p:txBody>
@@ -1293,33 +1317,43 @@
           </a:p>
           <a:p>
             <a:r>
-              <a:t>Precision of 1.0 — zero false positives across 1058 background flows.</a:t>
-            </a:r>
-          </a:p>
-          <a:p>
-            <a:r>
-              <a:t>Recall of 0.958 — we caught 23 of 24 WireGuard flows. AUC is 1.0.</a:t>
+              <a:t>Precision of one. Zero false positives across 1058 background flows.</a:t>
+            </a:r>
+          </a:p>
+          <a:p>
+            <a:r>
+              <a:t>Recall of 0.958, twenty-three of twenty-four WG flows correctly classified.</a:t>
+            </a:r>
+          </a:p>
+          <a:p>
+            <a:r>
+              <a:t>AUC is 1.0.</a:t>
             </a:r>
           </a:p>
           <a:p/>
           <a:p>
             <a:r>
-              <a:t>Below that is a small comparison. The 2-feature RF is the headline. The</a:t>
-            </a:r>
-          </a:p>
-          <a:p>
-            <a:r>
-              <a:t>8-feature RF — adding entropy, mode concentration, packet rate, etc. —</a:t>
-            </a:r>
-          </a:p>
-          <a:p>
-            <a:r>
-              <a:t>actually does WORSE. Recall drops from 0.958 to 0.917. The extra features</a:t>
-            </a:r>
-          </a:p>
-          <a:p>
-            <a:r>
-              <a:t>add noise. Logistic regression catches everything but pays for it with</a:t>
+              <a:t>The little table below those: the two-feature Random Forest is the</a:t>
+            </a:r>
+          </a:p>
+          <a:p>
+            <a:r>
+              <a:t>headline. The eight-feature Random Forest, adding entropy, mode</a:t>
+            </a:r>
+          </a:p>
+          <a:p>
+            <a:r>
+              <a:t>concentration, packet rate, and so on, actually does WORSE. Recall drops</a:t>
+            </a:r>
+          </a:p>
+          <a:p>
+            <a:r>
+              <a:t>from 0.958 to 0.917. The extra features add variance without adding</a:t>
+            </a:r>
+          </a:p>
+          <a:p>
+            <a:r>
+              <a:t>signal. Logistic regression catches everything but pays for it with</a:t>
             </a:r>
           </a:p>
           <a:p>
@@ -1330,33 +1364,12 @@
           <a:p/>
           <a:p>
             <a:r>
-              <a:t>On the right: confusion matrix on top — 1058 background correctly</a:t>
-            </a:r>
-          </a:p>
-          <a:p>
-            <a:r>
-              <a:t>classified as background, 23 of 24 WG correctly classified as WG, exactly</a:t>
-            </a:r>
-          </a:p>
-          <a:p>
-            <a:r>
-              <a:t>one missed. ROC curve on the bottom hugs the top-left corner; AUC is 1.0.</a:t>
-            </a:r>
-          </a:p>
-          <a:p/>
-          <a:p>
-            <a:r>
-              <a:t>The take-away: this isn't a fragile statistical artifact. Two features</a:t>
-            </a:r>
-          </a:p>
-          <a:p>
-            <a:r>
-              <a:t>that are mechanical consequences of the protocols' implementations give</a:t>
-            </a:r>
-          </a:p>
-          <a:p>
-            <a:r>
-              <a:t>us essentially perfect separation.</a:t>
+              <a:t>On the right: confusion matrix on top, ROC on the bottom. The ROC hugs</a:t>
+            </a:r>
+          </a:p>
+          <a:p>
+            <a:r>
+              <a:t>the top-left corner.</a:t>
             </a:r>
           </a:p>
         </p:txBody>
@@ -1426,23 +1439,23 @@
           <a:lstStyle/>
           <a:p>
             <a:r>
-              <a:t>Quick lit positioning so the audience knows we did our reading.</a:t>
+              <a:t>Quick lit positioning so the audience knows we read.</a:t>
             </a:r>
           </a:p>
           <a:p/>
           <a:p>
             <a:r>
-              <a:t>Xue's group at Michigan has the dominant line of work on this. Their 2022</a:t>
-            </a:r>
-          </a:p>
-          <a:p>
-            <a:r>
-              <a:t>paper on OpenVPN gave us our methodology template. Their 2024 paper does</a:t>
-            </a:r>
-          </a:p>
-          <a:p>
-            <a:r>
-              <a:t>encapsulated-TLS-handshake fingerprinting — that doesn't fire on WireGuard</a:t>
+              <a:t>The Xue group at Michigan has the dominant line of work. Their 2022 paper</a:t>
+            </a:r>
+          </a:p>
+          <a:p>
+            <a:r>
+              <a:t>on OpenVPN gave us our methodology template. Their 2024 paper does</a:t>
+            </a:r>
+          </a:p>
+          <a:p>
+            <a:r>
+              <a:t>encapsulated-TLS-handshake fingerprinting, which doesn't fire on WireGuard</a:t>
             </a:r>
           </a:p>
           <a:p>
@@ -1452,28 +1465,28 @@
           </a:p>
           <a:p>
             <a:r>
-              <a:t>RTT — that signal attenuates on the short, UDP-only flows we have. So</a:t>
-            </a:r>
-          </a:p>
-          <a:p>
-            <a:r>
-              <a:t>their protocol-AGNOSTIC methods don't already solve the WireGuard-specific</a:t>
-            </a:r>
-          </a:p>
-          <a:p>
-            <a:r>
-              <a:t>case. Protocol-specific structural features remain the available approach.</a:t>
+              <a:t>RTT, which attenuates on the short, UDP-only flows we have. So those</a:t>
+            </a:r>
+          </a:p>
+          <a:p>
+            <a:r>
+              <a:t>protocol-agnostic methods don't already solve the WireGuard-specific case.</a:t>
+            </a:r>
+          </a:p>
+          <a:p>
+            <a:r>
+              <a:t>Protocol-specific structural features remain the available approach.</a:t>
             </a:r>
           </a:p>
           <a:p/>
           <a:p>
             <a:r>
-              <a:t>On the right: the things we are NOT claiming. We don't have ISP-scale</a:t>
-            </a:r>
-          </a:p>
-          <a:p>
-            <a:r>
-              <a:t>deployment. We tested one version of udp2raw. A motivated maintainer</a:t>
+              <a:t>On the right, what we are NOT claiming. We don't have ISP-scale</a:t>
+            </a:r>
+          </a:p>
+          <a:p>
+            <a:r>
+              <a:t>deployment data. We tested one version of udp2raw. A motivated maintainer</a:t>
             </a:r>
           </a:p>
           <a:p>
@@ -1553,40 +1566,40 @@
           <a:lstStyle/>
           <a:p>
             <a:r>
-              <a:t>The four take-aways.</a:t>
+              <a:t>Four takeaways.</a:t>
             </a:r>
           </a:p>
           <a:p/>
           <a:p>
             <a:r>
-              <a:t>One: WireGuard's format leaks. Known result. We re-derived it as our</a:t>
-            </a:r>
-          </a:p>
-          <a:p>
-            <a:r>
-              <a:t>baseline so we could honestly compare against it.</a:t>
+              <a:t>One. WireGuard's format leaks. Known result. We re-implement it as our</a:t>
+            </a:r>
+          </a:p>
+          <a:p>
+            <a:r>
+              <a:t>baseline so we can compare honestly.</a:t>
             </a:r>
           </a:p>
           <a:p/>
           <a:p>
             <a:r>
-              <a:t>Two: udp2raw doesn't actually fix the leak. Eight and a half seconds with</a:t>
-            </a:r>
-          </a:p>
-          <a:p>
-            <a:r>
-              <a:t>a five-packet active prober, or two passive features at AUC 1.0 — pick</a:t>
-            </a:r>
-          </a:p>
-          <a:p>
-            <a:r>
-              <a:t>your weapon.</a:t>
+              <a:t>Two. udp2raw does not actually fix the leak. Eight and a half seconds</a:t>
+            </a:r>
+          </a:p>
+          <a:p>
+            <a:r>
+              <a:t>with a five-packet active prober, or two passive features at AUC 1.0.</a:t>
+            </a:r>
+          </a:p>
+          <a:p>
+            <a:r>
+              <a:t>Pick your weapon.</a:t>
             </a:r>
           </a:p>
           <a:p/>
           <a:p>
             <a:r>
-              <a:t>Three: this isn't a statistical fluke. Both detectors are grounded in</a:t>
+              <a:t>Three. This isn't a statistical fluke. Both detectors are grounded in</a:t>
             </a:r>
           </a:p>
           <a:p>
@@ -1596,33 +1609,38 @@
           </a:p>
           <a:p>
             <a:r>
-              <a:t>udp2raw acks one-to-one because it has to. udp2raw silently drops weird</a:t>
-            </a:r>
-          </a:p>
-          <a:p>
-            <a:r>
-              <a:t>TCP shapes because its parser was written with one shape in mind.</a:t>
+              <a:t>udp2raw acks one-to-one because it has to. udp2raw silently drops</a:t>
+            </a:r>
+          </a:p>
+          <a:p>
+            <a:r>
+              <a:t>unrecognized TCP shapes because its parser was written with one shape</a:t>
+            </a:r>
+          </a:p>
+          <a:p>
+            <a:r>
+              <a:t>in mind.</a:t>
             </a:r>
           </a:p>
           <a:p/>
           <a:p>
             <a:r>
-              <a:t>Four — and this is the constructive note for the upstream maintainers —</a:t>
-            </a:r>
-          </a:p>
-          <a:p>
-            <a:r>
-              <a:t>the defenses are obvious. Delayed ACK and a smaller WG MTU kill C2. More</a:t>
-            </a:r>
-          </a:p>
-          <a:p>
-            <a:r>
-              <a:t>conformant TCP emulation kills C1. We sketch both in the paper but didn't</a:t>
-            </a:r>
-          </a:p>
-          <a:p>
-            <a:r>
-              <a:t>patch the upstream tool. That's somebody else's pull request to write.</a:t>
+              <a:t>Four. The defenses are obvious. Delayed ACK and a smaller WireGuard MTU</a:t>
+            </a:r>
+          </a:p>
+          <a:p>
+            <a:r>
+              <a:t>kill the passive classifier. More conformant TCP emulation kills the</a:t>
+            </a:r>
+          </a:p>
+          <a:p>
+            <a:r>
+              <a:t>active prober. We sketch both in the paper but didn't patch the upstream</a:t>
+            </a:r>
+          </a:p>
+          <a:p>
+            <a:r>
+              <a:t>tool. Somebody else's pull request to write.</a:t>
             </a:r>
           </a:p>
           <a:p/>
@@ -4642,27 +4660,27 @@
         </p:nvSpPr>
         <p:spPr>
           <a:xfrm>
-            <a:off x="548640" y="2011680"/>
-            <a:ext cx="11064240" cy="914400"/>
-          </a:xfrm>
-          <a:prstGeom prst="rect">
-            <a:avLst/>
-          </a:prstGeom>
-          <a:noFill/>
-        </p:spPr>
-        <p:txBody>
-          <a:bodyPr wrap="square" anchor="t" lIns="0" rIns="0" tIns="0" bIns="0">
-            <a:spAutoFit/>
-          </a:bodyPr>
-          <a:lstStyle/>
-          <a:p>
-            <a:pPr algn="l">
-              <a:spcAft>
-                <a:spcPts val="400"/>
-              </a:spcAft>
-            </a:pPr>
-            <a:r>
-              <a:rPr sz="4400" b="1">
+            <a:off x="502920" y="2011680"/>
+            <a:ext cx="11185855" cy="1005840"/>
+          </a:xfrm>
+          <a:prstGeom prst="rect">
+            <a:avLst/>
+          </a:prstGeom>
+          <a:noFill/>
+        </p:spPr>
+        <p:txBody>
+          <a:bodyPr wrap="square" anchor="t" lIns="0" rIns="0" tIns="0" bIns="0">
+            <a:spAutoFit/>
+          </a:bodyPr>
+          <a:lstStyle/>
+          <a:p>
+            <a:pPr algn="l">
+              <a:spcAft>
+                <a:spcPts val="400"/>
+              </a:spcAft>
+            </a:pPr>
+            <a:r>
+              <a:rPr sz="4200" b="1">
                 <a:solidFill>
                   <a:srgbClr val="102A43"/>
                 </a:solidFill>
@@ -4681,27 +4699,27 @@
         </p:nvSpPr>
         <p:spPr>
           <a:xfrm>
-            <a:off x="548640" y="2697480"/>
-            <a:ext cx="11064240" cy="914400"/>
-          </a:xfrm>
-          <a:prstGeom prst="rect">
-            <a:avLst/>
-          </a:prstGeom>
-          <a:noFill/>
-        </p:spPr>
-        <p:txBody>
-          <a:bodyPr wrap="square" anchor="t" lIns="0" rIns="0" tIns="0" bIns="0">
-            <a:spAutoFit/>
-          </a:bodyPr>
-          <a:lstStyle/>
-          <a:p>
-            <a:pPr algn="l">
-              <a:spcAft>
-                <a:spcPts val="400"/>
-              </a:spcAft>
-            </a:pPr>
-            <a:r>
-              <a:rPr sz="4400" b="1">
+            <a:off x="502920" y="2743200"/>
+            <a:ext cx="11185855" cy="1005840"/>
+          </a:xfrm>
+          <a:prstGeom prst="rect">
+            <a:avLst/>
+          </a:prstGeom>
+          <a:noFill/>
+        </p:spPr>
+        <p:txBody>
+          <a:bodyPr wrap="square" anchor="t" lIns="0" rIns="0" tIns="0" bIns="0">
+            <a:spAutoFit/>
+          </a:bodyPr>
+          <a:lstStyle/>
+          <a:p>
+            <a:pPr algn="l">
+              <a:spcAft>
+                <a:spcPts val="400"/>
+              </a:spcAft>
+            </a:pPr>
+            <a:r>
+              <a:rPr sz="4200" b="1">
                 <a:solidFill>
                   <a:srgbClr val="102A43"/>
                 </a:solidFill>
@@ -4720,7 +4738,7 @@
         </p:nvSpPr>
         <p:spPr>
           <a:xfrm>
-            <a:off x="548640" y="3520440"/>
+            <a:off x="502920" y="3703320"/>
             <a:ext cx="2286000" cy="31750"/>
           </a:xfrm>
           <a:prstGeom prst="rect">
@@ -4763,27 +4781,27 @@
         </p:nvSpPr>
         <p:spPr>
           <a:xfrm>
-            <a:off x="548640" y="3703320"/>
-            <a:ext cx="11064240" cy="457200"/>
-          </a:xfrm>
-          <a:prstGeom prst="rect">
-            <a:avLst/>
-          </a:prstGeom>
-          <a:noFill/>
-        </p:spPr>
-        <p:txBody>
-          <a:bodyPr wrap="square" anchor="t" lIns="0" rIns="0" tIns="0" bIns="0">
-            <a:spAutoFit/>
-          </a:bodyPr>
-          <a:lstStyle/>
-          <a:p>
-            <a:pPr algn="l">
-              <a:spcAft>
-                <a:spcPts val="400"/>
-              </a:spcAft>
-            </a:pPr>
-            <a:r>
-              <a:rPr sz="2200" b="0">
+            <a:off x="502920" y="3840480"/>
+            <a:ext cx="11185855" cy="457200"/>
+          </a:xfrm>
+          <a:prstGeom prst="rect">
+            <a:avLst/>
+          </a:prstGeom>
+          <a:noFill/>
+        </p:spPr>
+        <p:txBody>
+          <a:bodyPr wrap="square" anchor="t" lIns="0" rIns="0" tIns="0" bIns="0">
+            <a:spAutoFit/>
+          </a:bodyPr>
+          <a:lstStyle/>
+          <a:p>
+            <a:pPr algn="l">
+              <a:spcAft>
+                <a:spcPts val="400"/>
+              </a:spcAft>
+            </a:pPr>
+            <a:r>
+              <a:rPr sz="2000" b="0">
                 <a:solidFill>
                   <a:srgbClr val="555555"/>
                 </a:solidFill>
@@ -4802,8 +4820,8 @@
         </p:nvSpPr>
         <p:spPr>
           <a:xfrm>
-            <a:off x="548640" y="5120640"/>
-            <a:ext cx="11064240" cy="365760"/>
+            <a:off x="502920" y="5212080"/>
+            <a:ext cx="11185855" cy="365760"/>
           </a:xfrm>
           <a:prstGeom prst="rect">
             <a:avLst/>
@@ -4841,27 +4859,27 @@
         </p:nvSpPr>
         <p:spPr>
           <a:xfrm>
-            <a:off x="548640" y="5486400"/>
-            <a:ext cx="11064240" cy="365760"/>
-          </a:xfrm>
-          <a:prstGeom prst="rect">
-            <a:avLst/>
-          </a:prstGeom>
-          <a:noFill/>
-        </p:spPr>
-        <p:txBody>
-          <a:bodyPr wrap="square" anchor="t" lIns="0" rIns="0" tIns="0" bIns="0">
-            <a:spAutoFit/>
-          </a:bodyPr>
-          <a:lstStyle/>
-          <a:p>
-            <a:pPr algn="l">
-              <a:spcAft>
-                <a:spcPts val="400"/>
-              </a:spcAft>
-            </a:pPr>
-            <a:r>
-              <a:rPr sz="1400" b="0">
+            <a:off x="502920" y="5577840"/>
+            <a:ext cx="11185855" cy="320040"/>
+          </a:xfrm>
+          <a:prstGeom prst="rect">
+            <a:avLst/>
+          </a:prstGeom>
+          <a:noFill/>
+        </p:spPr>
+        <p:txBody>
+          <a:bodyPr wrap="square" anchor="t" lIns="0" rIns="0" tIns="0" bIns="0">
+            <a:spAutoFit/>
+          </a:bodyPr>
+          <a:lstStyle/>
+          <a:p>
+            <a:pPr algn="l">
+              <a:spcAft>
+                <a:spcPts val="400"/>
+              </a:spcAft>
+            </a:pPr>
+            <a:r>
+              <a:rPr sz="1200" b="0">
                 <a:solidFill>
                   <a:srgbClr val="555555"/>
                 </a:solidFill>
@@ -4880,8 +4898,8 @@
         </p:nvSpPr>
         <p:spPr>
           <a:xfrm>
-            <a:off x="548640" y="6446520"/>
-            <a:ext cx="7315200" cy="274320"/>
+            <a:off x="502920" y="6263640"/>
+            <a:ext cx="8229600" cy="274320"/>
           </a:xfrm>
           <a:prstGeom prst="rect">
             <a:avLst/>
@@ -4906,7 +4924,7 @@
                 </a:solidFill>
                 <a:latin typeface="Calibri"/>
               </a:rPr>
-              <a:t>Schiavone &amp; Johannsen — CYB623 — Pace University</a:t>
+              <a:t>Schiavone &amp; Johannsen   ·   CYB623   ·   Pace University</a:t>
             </a:r>
           </a:p>
         </p:txBody>
@@ -4919,8 +4937,8 @@
         </p:nvSpPr>
         <p:spPr>
           <a:xfrm>
-            <a:off x="10515600" y="6446520"/>
-            <a:ext cx="1188720" cy="274320"/>
+            <a:off x="10362895" y="6263640"/>
+            <a:ext cx="1371600" cy="274320"/>
           </a:xfrm>
           <a:prstGeom prst="rect">
             <a:avLst/>
@@ -4976,27 +4994,27 @@
         </p:nvSpPr>
         <p:spPr>
           <a:xfrm>
-            <a:off x="548640" y="320040"/>
-            <a:ext cx="10515600" cy="640080"/>
-          </a:xfrm>
-          <a:prstGeom prst="rect">
-            <a:avLst/>
-          </a:prstGeom>
-          <a:noFill/>
-        </p:spPr>
-        <p:txBody>
-          <a:bodyPr wrap="square" anchor="t" lIns="0" rIns="0" tIns="0" bIns="0">
-            <a:spAutoFit/>
-          </a:bodyPr>
-          <a:lstStyle/>
-          <a:p>
-            <a:pPr algn="l">
-              <a:spcAft>
-                <a:spcPts val="400"/>
-              </a:spcAft>
-            </a:pPr>
-            <a:r>
-              <a:rPr sz="3200" b="1">
+            <a:off x="502920" y="274320"/>
+            <a:ext cx="11185855" cy="731520"/>
+          </a:xfrm>
+          <a:prstGeom prst="rect">
+            <a:avLst/>
+          </a:prstGeom>
+          <a:noFill/>
+        </p:spPr>
+        <p:txBody>
+          <a:bodyPr wrap="square" anchor="t" lIns="0" rIns="0" tIns="0" bIns="0">
+            <a:spAutoFit/>
+          </a:bodyPr>
+          <a:lstStyle/>
+          <a:p>
+            <a:pPr algn="l">
+              <a:spcAft>
+                <a:spcPts val="400"/>
+              </a:spcAft>
+            </a:pPr>
+            <a:r>
+              <a:rPr sz="2800" b="1">
                 <a:solidFill>
                   <a:srgbClr val="102A43"/>
                 </a:solidFill>
@@ -5015,7 +5033,7 @@
         </p:nvSpPr>
         <p:spPr>
           <a:xfrm>
-            <a:off x="548640" y="960120"/>
+            <a:off x="502920" y="1005840"/>
             <a:ext cx="914400" cy="31750"/>
           </a:xfrm>
           <a:prstGeom prst="rect">
@@ -5058,8 +5076,47 @@
         </p:nvSpPr>
         <p:spPr>
           <a:xfrm>
-            <a:off x="548640" y="1051560"/>
-            <a:ext cx="10515600" cy="457200"/>
+            <a:off x="502920" y="1078992"/>
+            <a:ext cx="11185855" cy="365760"/>
+          </a:xfrm>
+          <a:prstGeom prst="rect">
+            <a:avLst/>
+          </a:prstGeom>
+          <a:noFill/>
+        </p:spPr>
+        <p:txBody>
+          <a:bodyPr wrap="square" anchor="t" lIns="0" rIns="0" tIns="0" bIns="0">
+            <a:spAutoFit/>
+          </a:bodyPr>
+          <a:lstStyle/>
+          <a:p>
+            <a:pPr algn="l">
+              <a:spcAft>
+                <a:spcPts val="400"/>
+              </a:spcAft>
+            </a:pPr>
+            <a:r>
+              <a:rPr sz="1400" b="0">
+                <a:solidFill>
+                  <a:srgbClr val="555555"/>
+                </a:solidFill>
+                <a:latin typeface="Calibri"/>
+              </a:rPr>
+              <a:t>Strong cryptography is not the same as traffic that hides itself</a:t>
+            </a:r>
+          </a:p>
+        </p:txBody>
+      </p:sp>
+      <p:sp>
+        <p:nvSpPr>
+          <p:cNvPr id="5" name="TextBox 4"/>
+          <p:cNvSpPr txBox="1"/>
+          <p:nvPr/>
+        </p:nvSpPr>
+        <p:spPr>
+          <a:xfrm>
+            <a:off x="502920" y="1554480"/>
+            <a:ext cx="11185855" cy="365760"/>
           </a:xfrm>
           <a:prstGeom prst="rect">
             <a:avLst/>
@@ -5080,262 +5137,262 @@
             <a:r>
               <a:rPr sz="1600" b="0">
                 <a:solidFill>
+                  <a:srgbClr val="101010"/>
+                </a:solidFill>
+                <a:latin typeface="Calibri"/>
+              </a:rPr>
+              <a:t>Every WireGuard message starts with this 4-byte header:</a:t>
+            </a:r>
+          </a:p>
+        </p:txBody>
+      </p:sp>
+      <p:sp>
+        <p:nvSpPr>
+          <p:cNvPr id="6" name="TextBox 5"/>
+          <p:cNvSpPr txBox="1"/>
+          <p:nvPr/>
+        </p:nvSpPr>
+        <p:spPr>
+          <a:xfrm>
+            <a:off x="502920" y="2011680"/>
+            <a:ext cx="7772400" cy="1188720"/>
+          </a:xfrm>
+          <a:prstGeom prst="rect">
+            <a:avLst/>
+          </a:prstGeom>
+          <a:noFill/>
+        </p:spPr>
+        <p:txBody>
+          <a:bodyPr wrap="square" anchor="t" lIns="0" rIns="0" tIns="0" bIns="0">
+            <a:spAutoFit/>
+          </a:bodyPr>
+          <a:lstStyle/>
+          <a:p>
+            <a:pPr algn="l">
+              <a:spcAft>
+                <a:spcPts val="400"/>
+              </a:spcAft>
+            </a:pPr>
+            <a:r>
+              <a:rPr sz="1600" b="0">
+                <a:solidFill>
+                  <a:srgbClr val="102A43"/>
+                </a:solidFill>
+                <a:latin typeface="Consolas"/>
+              </a:rPr>
+              <a:t>+---------+-------------------+
+| type(1) | reserved zero (3) | …rest of message
++---------+-------------------+</a:t>
+            </a:r>
+          </a:p>
+        </p:txBody>
+      </p:sp>
+      <p:sp>
+        <p:nvSpPr>
+          <p:cNvPr id="7" name="TextBox 6"/>
+          <p:cNvSpPr txBox="1"/>
+          <p:nvPr/>
+        </p:nvSpPr>
+        <p:spPr>
+          <a:xfrm>
+            <a:off x="502920" y="3337560"/>
+            <a:ext cx="11185855" cy="2286000"/>
+          </a:xfrm>
+          <a:prstGeom prst="rect">
+            <a:avLst/>
+          </a:prstGeom>
+          <a:noFill/>
+        </p:spPr>
+        <p:txBody>
+          <a:bodyPr wrap="square" lIns="0" rIns="0" tIns="0" bIns="0">
+            <a:spAutoFit/>
+          </a:bodyPr>
+          <a:lstStyle/>
+          <a:p>
+            <a:pPr algn="l">
+              <a:lnSpc>
+                <a:spcPct val="118000"/>
+              </a:lnSpc>
+              <a:spcAft>
+                <a:spcPts val="600"/>
+              </a:spcAft>
+            </a:pPr>
+            <a:r>
+              <a:rPr sz="1700" b="0">
+                <a:solidFill>
+                  <a:srgbClr val="101010"/>
+                </a:solidFill>
+                <a:latin typeface="Calibri"/>
+              </a:rPr>
+              <a:t>•   type byte ∈ {0x01, 0x02, 0x03, 0x04}; the next three bytes are zero.</a:t>
+            </a:r>
+          </a:p>
+          <a:p>
+            <a:pPr algn="l">
+              <a:lnSpc>
+                <a:spcPct val="118000"/>
+              </a:lnSpc>
+              <a:spcAft>
+                <a:spcPts val="600"/>
+              </a:spcAft>
+            </a:pPr>
+            <a:r>
+              <a:rPr sz="1700" b="0">
+                <a:solidFill>
+                  <a:srgbClr val="101010"/>
+                </a:solidFill>
+                <a:latin typeface="Calibri"/>
+              </a:rPr>
+              <a:t>•   Handshake messages are exactly 148 / 92 / 64 bytes.</a:t>
+            </a:r>
+          </a:p>
+          <a:p>
+            <a:pPr algn="l">
+              <a:lnSpc>
+                <a:spcPct val="118000"/>
+              </a:lnSpc>
+              <a:spcAft>
+                <a:spcPts val="600"/>
+              </a:spcAft>
+            </a:pPr>
+            <a:r>
+              <a:rPr sz="1700" b="0">
+                <a:solidFill>
+                  <a:srgbClr val="101010"/>
+                </a:solidFill>
+                <a:latin typeface="Calibri"/>
+              </a:rPr>
+              <a:t>•   Three concatenated checks identify a WireGuard handshake with negligible false-positive risk.</a:t>
+            </a:r>
+          </a:p>
+          <a:p>
+            <a:pPr algn="l">
+              <a:lnSpc>
+                <a:spcPct val="118000"/>
+              </a:lnSpc>
+              <a:spcAft>
+                <a:spcPts val="600"/>
+              </a:spcAft>
+            </a:pPr>
+            <a:r>
+              <a:rPr sz="1700" b="0">
+                <a:solidFill>
+                  <a:srgbClr val="101010"/>
+                </a:solidFill>
+                <a:latin typeface="Calibri"/>
+              </a:rPr>
+              <a:t>•   A 25-line Python predicate is the full detector. We re-implement it as our baseline.</a:t>
+            </a:r>
+          </a:p>
+          <a:p>
+            <a:pPr algn="l">
+              <a:lnSpc>
+                <a:spcPct val="118000"/>
+              </a:lnSpc>
+              <a:spcAft>
+                <a:spcPts val="600"/>
+              </a:spcAft>
+            </a:pPr>
+            <a:r>
+              <a:rPr sz="1700" b="0">
+                <a:solidFill>
+                  <a:srgbClr val="101010"/>
+                </a:solidFill>
+                <a:latin typeface="Calibri"/>
+              </a:rPr>
+              <a:t>•   Reported in production by the Great Firewall (Wu et al., USENIX Security ’23).</a:t>
+            </a:r>
+          </a:p>
+        </p:txBody>
+      </p:sp>
+      <p:sp>
+        <p:nvSpPr>
+          <p:cNvPr id="8" name="TextBox 7"/>
+          <p:cNvSpPr txBox="1"/>
+          <p:nvPr/>
+        </p:nvSpPr>
+        <p:spPr>
+          <a:xfrm>
+            <a:off x="502920" y="5440680"/>
+            <a:ext cx="11185855" cy="457200"/>
+          </a:xfrm>
+          <a:prstGeom prst="rect">
+            <a:avLst/>
+          </a:prstGeom>
+          <a:noFill/>
+        </p:spPr>
+        <p:txBody>
+          <a:bodyPr wrap="square" anchor="t" lIns="0" rIns="0" tIns="0" bIns="0">
+            <a:spAutoFit/>
+          </a:bodyPr>
+          <a:lstStyle/>
+          <a:p>
+            <a:pPr algn="l">
+              <a:spcAft>
+                <a:spcPts val="400"/>
+              </a:spcAft>
+            </a:pPr>
+            <a:r>
+              <a:rPr sz="1400" b="1">
+                <a:solidFill>
+                  <a:srgbClr val="C9462C"/>
+                </a:solidFill>
+                <a:latin typeface="Calibri"/>
+              </a:rPr>
+              <a:t>Donenfeld’s WireGuard whitepaper (NDSS ’17) explicitly leaves obfuscation out of scope.</a:t>
+            </a:r>
+          </a:p>
+        </p:txBody>
+      </p:sp>
+      <p:sp>
+        <p:nvSpPr>
+          <p:cNvPr id="9" name="TextBox 8"/>
+          <p:cNvSpPr txBox="1"/>
+          <p:nvPr/>
+        </p:nvSpPr>
+        <p:spPr>
+          <a:xfrm>
+            <a:off x="502920" y="6263640"/>
+            <a:ext cx="8229600" cy="274320"/>
+          </a:xfrm>
+          <a:prstGeom prst="rect">
+            <a:avLst/>
+          </a:prstGeom>
+          <a:noFill/>
+        </p:spPr>
+        <p:txBody>
+          <a:bodyPr wrap="square" anchor="t" lIns="0" rIns="0" tIns="0" bIns="0">
+            <a:spAutoFit/>
+          </a:bodyPr>
+          <a:lstStyle/>
+          <a:p>
+            <a:pPr algn="l">
+              <a:spcAft>
+                <a:spcPts val="400"/>
+              </a:spcAft>
+            </a:pPr>
+            <a:r>
+              <a:rPr sz="1000" b="0">
+                <a:solidFill>
                   <a:srgbClr val="555555"/>
                 </a:solidFill>
                 <a:latin typeface="Calibri"/>
               </a:rPr>
-              <a:t>Strong cryptography ≠ traffic that hides itself</a:t>
-            </a:r>
-          </a:p>
-        </p:txBody>
-      </p:sp>
-      <p:sp>
-        <p:nvSpPr>
-          <p:cNvPr id="5" name="TextBox 4"/>
-          <p:cNvSpPr txBox="1"/>
-          <p:nvPr/>
-        </p:nvSpPr>
-        <p:spPr>
-          <a:xfrm>
-            <a:off x="548640" y="1554480"/>
-            <a:ext cx="11064240" cy="365760"/>
-          </a:xfrm>
-          <a:prstGeom prst="rect">
-            <a:avLst/>
-          </a:prstGeom>
-          <a:noFill/>
-        </p:spPr>
-        <p:txBody>
-          <a:bodyPr wrap="square" anchor="t" lIns="0" rIns="0" tIns="0" bIns="0">
-            <a:spAutoFit/>
-          </a:bodyPr>
-          <a:lstStyle/>
-          <a:p>
-            <a:pPr algn="l">
-              <a:spcAft>
-                <a:spcPts val="400"/>
-              </a:spcAft>
-            </a:pPr>
-            <a:r>
-              <a:rPr sz="1800" b="0">
-                <a:solidFill>
-                  <a:srgbClr val="101010"/>
-                </a:solidFill>
-                <a:latin typeface="Calibri"/>
-              </a:rPr>
-              <a:t>Every WireGuard message starts with this 4-byte header:</a:t>
-            </a:r>
-          </a:p>
-        </p:txBody>
-      </p:sp>
-      <p:sp>
-        <p:nvSpPr>
-          <p:cNvPr id="6" name="TextBox 5"/>
-          <p:cNvSpPr txBox="1"/>
-          <p:nvPr/>
-        </p:nvSpPr>
-        <p:spPr>
-          <a:xfrm>
-            <a:off x="548640" y="2011680"/>
-            <a:ext cx="7772400" cy="1280160"/>
-          </a:xfrm>
-          <a:prstGeom prst="rect">
-            <a:avLst/>
-          </a:prstGeom>
-          <a:noFill/>
-        </p:spPr>
-        <p:txBody>
-          <a:bodyPr wrap="square" anchor="t" lIns="0" rIns="0" tIns="0" bIns="0">
-            <a:spAutoFit/>
-          </a:bodyPr>
-          <a:lstStyle/>
-          <a:p>
-            <a:pPr algn="l">
-              <a:spcAft>
-                <a:spcPts val="400"/>
-              </a:spcAft>
-            </a:pPr>
-            <a:r>
-              <a:rPr sz="1800" b="0">
-                <a:solidFill>
-                  <a:srgbClr val="102A43"/>
-                </a:solidFill>
-                <a:latin typeface="Consolas"/>
-              </a:rPr>
-              <a:t>+---------+-------------------+
-| type(1) | reserved zero (3) | … rest of message
-+---------+-------------------+</a:t>
-            </a:r>
-          </a:p>
-        </p:txBody>
-      </p:sp>
-      <p:sp>
-        <p:nvSpPr>
-          <p:cNvPr id="7" name="TextBox 6"/>
-          <p:cNvSpPr txBox="1"/>
-          <p:nvPr/>
-        </p:nvSpPr>
-        <p:spPr>
-          <a:xfrm>
-            <a:off x="548640" y="3383280"/>
-            <a:ext cx="11064240" cy="2286000"/>
-          </a:xfrm>
-          <a:prstGeom prst="rect">
-            <a:avLst/>
-          </a:prstGeom>
-          <a:noFill/>
-        </p:spPr>
-        <p:txBody>
-          <a:bodyPr wrap="square" lIns="0" rIns="0" tIns="0" bIns="0">
-            <a:spAutoFit/>
-          </a:bodyPr>
-          <a:lstStyle/>
-          <a:p>
-            <a:pPr algn="l">
-              <a:lnSpc>
-                <a:spcPct val="115000"/>
-              </a:lnSpc>
-              <a:spcAft>
-                <a:spcPts val="400"/>
-              </a:spcAft>
-            </a:pPr>
-            <a:r>
-              <a:rPr sz="2000" b="0">
-                <a:solidFill>
-                  <a:srgbClr val="101010"/>
-                </a:solidFill>
-                <a:latin typeface="Calibri"/>
-              </a:rPr>
-              <a:t>• type byte ∈ {0x01, 0x02, 0x03, 0x04}; next three bytes are zero.</a:t>
-            </a:r>
-          </a:p>
-          <a:p>
-            <a:pPr algn="l">
-              <a:lnSpc>
-                <a:spcPct val="115000"/>
-              </a:lnSpc>
-              <a:spcAft>
-                <a:spcPts val="400"/>
-              </a:spcAft>
-            </a:pPr>
-            <a:r>
-              <a:rPr sz="2000" b="0">
-                <a:solidFill>
-                  <a:srgbClr val="101010"/>
-                </a:solidFill>
-                <a:latin typeface="Calibri"/>
-              </a:rPr>
-              <a:t>• Handshake messages are exactly 148 / 92 / 64 bytes.</a:t>
-            </a:r>
-          </a:p>
-          <a:p>
-            <a:pPr algn="l">
-              <a:lnSpc>
-                <a:spcPct val="115000"/>
-              </a:lnSpc>
-              <a:spcAft>
-                <a:spcPts val="400"/>
-              </a:spcAft>
-            </a:pPr>
-            <a:r>
-              <a:rPr sz="2000" b="0">
-                <a:solidFill>
-                  <a:srgbClr val="101010"/>
-                </a:solidFill>
-                <a:latin typeface="Calibri"/>
-              </a:rPr>
-              <a:t>• Three concatenated checks identify a WireGuard handshake with negligible false-positive risk.</a:t>
-            </a:r>
-          </a:p>
-          <a:p>
-            <a:pPr algn="l">
-              <a:lnSpc>
-                <a:spcPct val="115000"/>
-              </a:lnSpc>
-              <a:spcAft>
-                <a:spcPts val="400"/>
-              </a:spcAft>
-            </a:pPr>
-            <a:r>
-              <a:rPr sz="2000" b="0">
-                <a:solidFill>
-                  <a:srgbClr val="101010"/>
-                </a:solidFill>
-                <a:latin typeface="Calibri"/>
-              </a:rPr>
-              <a:t>• A 25-line Python predicate gives you the full detector. We re-derived it as our baseline.</a:t>
-            </a:r>
-          </a:p>
-          <a:p>
-            <a:pPr algn="l">
-              <a:lnSpc>
-                <a:spcPct val="115000"/>
-              </a:lnSpc>
-              <a:spcAft>
-                <a:spcPts val="400"/>
-              </a:spcAft>
-            </a:pPr>
-            <a:r>
-              <a:rPr sz="2000" b="0">
-                <a:solidFill>
-                  <a:srgbClr val="101010"/>
-                </a:solidFill>
-                <a:latin typeface="Calibri"/>
-              </a:rPr>
-              <a:t>• Used in production by the Great Firewall (Wu et al., USENIX Security '23).</a:t>
-            </a:r>
-          </a:p>
-        </p:txBody>
-      </p:sp>
-      <p:sp>
-        <p:nvSpPr>
-          <p:cNvPr id="8" name="TextBox 7"/>
-          <p:cNvSpPr txBox="1"/>
-          <p:nvPr/>
-        </p:nvSpPr>
-        <p:spPr>
-          <a:xfrm>
-            <a:off x="548640" y="5989320"/>
-            <a:ext cx="11064240" cy="457200"/>
-          </a:xfrm>
-          <a:prstGeom prst="rect">
-            <a:avLst/>
-          </a:prstGeom>
-          <a:noFill/>
-        </p:spPr>
-        <p:txBody>
-          <a:bodyPr wrap="square" anchor="t" lIns="0" rIns="0" tIns="0" bIns="0">
-            <a:spAutoFit/>
-          </a:bodyPr>
-          <a:lstStyle/>
-          <a:p>
-            <a:pPr algn="l">
-              <a:spcAft>
-                <a:spcPts val="400"/>
-              </a:spcAft>
-            </a:pPr>
-            <a:r>
-              <a:rPr sz="1600" b="1">
-                <a:solidFill>
-                  <a:srgbClr val="C9462C"/>
-                </a:solidFill>
-                <a:latin typeface="Calibri"/>
-              </a:rPr>
-              <a:t>Donenfeld's whitepaper says obfuscation is out of scope. The community wraps WireGuard in udp2raw.</a:t>
-            </a:r>
-          </a:p>
-        </p:txBody>
-      </p:sp>
-      <p:sp>
-        <p:nvSpPr>
-          <p:cNvPr id="9" name="TextBox 8"/>
-          <p:cNvSpPr txBox="1"/>
-          <p:nvPr/>
-        </p:nvSpPr>
-        <p:spPr>
-          <a:xfrm>
-            <a:off x="548640" y="6446520"/>
-            <a:ext cx="7315200" cy="274320"/>
+              <a:t>Schiavone &amp; Johannsen   ·   CYB623   ·   Pace University</a:t>
+            </a:r>
+          </a:p>
+        </p:txBody>
+      </p:sp>
+      <p:sp>
+        <p:nvSpPr>
+          <p:cNvPr id="10" name="TextBox 9"/>
+          <p:cNvSpPr txBox="1"/>
+          <p:nvPr/>
+        </p:nvSpPr>
+        <p:spPr>
+          <a:xfrm>
+            <a:off x="502920" y="6263640"/>
+            <a:ext cx="8229600" cy="274320"/>
           </a:xfrm>
           <a:prstGeom prst="rect">
             <a:avLst/>
@@ -5360,46 +5417,7 @@
                 </a:solidFill>
                 <a:latin typeface="Calibri"/>
               </a:rPr>
-              <a:t>Schiavone &amp; Johannsen — CYB623 — Pace University</a:t>
-            </a:r>
-          </a:p>
-        </p:txBody>
-      </p:sp>
-      <p:sp>
-        <p:nvSpPr>
-          <p:cNvPr id="10" name="TextBox 9"/>
-          <p:cNvSpPr txBox="1"/>
-          <p:nvPr/>
-        </p:nvSpPr>
-        <p:spPr>
-          <a:xfrm>
-            <a:off x="548640" y="6446520"/>
-            <a:ext cx="7315200" cy="274320"/>
-          </a:xfrm>
-          <a:prstGeom prst="rect">
-            <a:avLst/>
-          </a:prstGeom>
-          <a:noFill/>
-        </p:spPr>
-        <p:txBody>
-          <a:bodyPr wrap="square" anchor="t" lIns="0" rIns="0" tIns="0" bIns="0">
-            <a:spAutoFit/>
-          </a:bodyPr>
-          <a:lstStyle/>
-          <a:p>
-            <a:pPr algn="l">
-              <a:spcAft>
-                <a:spcPts val="400"/>
-              </a:spcAft>
-            </a:pPr>
-            <a:r>
-              <a:rPr sz="1000" b="0">
-                <a:solidFill>
-                  <a:srgbClr val="555555"/>
-                </a:solidFill>
-                <a:latin typeface="Calibri"/>
-              </a:rPr>
-              <a:t>Schiavone &amp; Johannsen — CYB623 — Pace University</a:t>
+              <a:t>Schiavone &amp; Johannsen   ·   CYB623   ·   Pace University</a:t>
             </a:r>
           </a:p>
         </p:txBody>
@@ -5412,8 +5430,8 @@
         </p:nvSpPr>
         <p:spPr>
           <a:xfrm>
-            <a:off x="10515600" y="6446520"/>
-            <a:ext cx="1188720" cy="274320"/>
+            <a:off x="10362895" y="6263640"/>
+            <a:ext cx="1371600" cy="274320"/>
           </a:xfrm>
           <a:prstGeom prst="rect">
             <a:avLst/>
@@ -5469,33 +5487,33 @@
         </p:nvSpPr>
         <p:spPr>
           <a:xfrm>
-            <a:off x="548640" y="320040"/>
-            <a:ext cx="10515600" cy="640080"/>
-          </a:xfrm>
-          <a:prstGeom prst="rect">
-            <a:avLst/>
-          </a:prstGeom>
-          <a:noFill/>
-        </p:spPr>
-        <p:txBody>
-          <a:bodyPr wrap="square" anchor="t" lIns="0" rIns="0" tIns="0" bIns="0">
-            <a:spAutoFit/>
-          </a:bodyPr>
-          <a:lstStyle/>
-          <a:p>
-            <a:pPr algn="l">
-              <a:spcAft>
-                <a:spcPts val="400"/>
-              </a:spcAft>
-            </a:pPr>
-            <a:r>
-              <a:rPr sz="3200" b="1">
+            <a:off x="502920" y="274320"/>
+            <a:ext cx="11185855" cy="731520"/>
+          </a:xfrm>
+          <a:prstGeom prst="rect">
+            <a:avLst/>
+          </a:prstGeom>
+          <a:noFill/>
+        </p:spPr>
+        <p:txBody>
+          <a:bodyPr wrap="square" anchor="t" lIns="0" rIns="0" tIns="0" bIns="0">
+            <a:spAutoFit/>
+          </a:bodyPr>
+          <a:lstStyle/>
+          <a:p>
+            <a:pPr algn="l">
+              <a:spcAft>
+                <a:spcPts val="400"/>
+              </a:spcAft>
+            </a:pPr>
+            <a:r>
+              <a:rPr sz="2800" b="1">
                 <a:solidFill>
                   <a:srgbClr val="102A43"/>
                 </a:solidFill>
                 <a:latin typeface="Calibri"/>
               </a:rPr>
-              <a:t>udp2raw is the most-deployed shim — and academically unstudied</a:t>
+              <a:t>udp2raw: the obfuscation shim, and the literature gap</a:t>
             </a:r>
           </a:p>
         </p:txBody>
@@ -5508,7 +5526,7 @@
         </p:nvSpPr>
         <p:spPr>
           <a:xfrm>
-            <a:off x="548640" y="960120"/>
+            <a:off x="502920" y="1005840"/>
             <a:ext cx="914400" cy="31750"/>
           </a:xfrm>
           <a:prstGeom prst="rect">
@@ -5551,27 +5569,27 @@
         </p:nvSpPr>
         <p:spPr>
           <a:xfrm>
-            <a:off x="548640" y="1051560"/>
-            <a:ext cx="10515600" cy="457200"/>
-          </a:xfrm>
-          <a:prstGeom prst="rect">
-            <a:avLst/>
-          </a:prstGeom>
-          <a:noFill/>
-        </p:spPr>
-        <p:txBody>
-          <a:bodyPr wrap="square" anchor="t" lIns="0" rIns="0" tIns="0" bIns="0">
-            <a:spAutoFit/>
-          </a:bodyPr>
-          <a:lstStyle/>
-          <a:p>
-            <a:pPr algn="l">
-              <a:spcAft>
-                <a:spcPts val="400"/>
-              </a:spcAft>
-            </a:pPr>
-            <a:r>
-              <a:rPr sz="1600" b="0">
+            <a:off x="502920" y="1078992"/>
+            <a:ext cx="11185855" cy="365760"/>
+          </a:xfrm>
+          <a:prstGeom prst="rect">
+            <a:avLst/>
+          </a:prstGeom>
+          <a:noFill/>
+        </p:spPr>
+        <p:txBody>
+          <a:bodyPr wrap="square" anchor="t" lIns="0" rIns="0" tIns="0" bIns="0">
+            <a:spAutoFit/>
+          </a:bodyPr>
+          <a:lstStyle/>
+          <a:p>
+            <a:pPr algn="l">
+              <a:spcAft>
+                <a:spcPts val="400"/>
+              </a:spcAft>
+            </a:pPr>
+            <a:r>
+              <a:rPr sz="1400" b="0">
                 <a:solidFill>
                   <a:srgbClr val="555555"/>
                 </a:solidFill>
@@ -5590,33 +5608,33 @@
         </p:nvSpPr>
         <p:spPr>
           <a:xfrm>
-            <a:off x="548640" y="1554480"/>
-            <a:ext cx="11064240" cy="365760"/>
-          </a:xfrm>
-          <a:prstGeom prst="rect">
-            <a:avLst/>
-          </a:prstGeom>
-          <a:noFill/>
-        </p:spPr>
-        <p:txBody>
-          <a:bodyPr wrap="square" anchor="t" lIns="0" rIns="0" tIns="0" bIns="0">
-            <a:spAutoFit/>
-          </a:bodyPr>
-          <a:lstStyle/>
-          <a:p>
-            <a:pPr algn="l">
-              <a:spcAft>
-                <a:spcPts val="400"/>
-              </a:spcAft>
-            </a:pPr>
-            <a:r>
-              <a:rPr sz="1600" b="0">
+            <a:off x="502920" y="1554480"/>
+            <a:ext cx="11185855" cy="365760"/>
+          </a:xfrm>
+          <a:prstGeom prst="rect">
+            <a:avLst/>
+          </a:prstGeom>
+          <a:noFill/>
+        </p:spPr>
+        <p:txBody>
+          <a:bodyPr wrap="square" anchor="t" lIns="0" rIns="0" tIns="0" bIns="0">
+            <a:spAutoFit/>
+          </a:bodyPr>
+          <a:lstStyle/>
+          <a:p>
+            <a:pPr algn="l">
+              <a:spcAft>
+                <a:spcPts val="400"/>
+              </a:spcAft>
+            </a:pPr>
+            <a:r>
+              <a:rPr sz="1400" b="0">
                 <a:solidFill>
                   <a:srgbClr val="555555"/>
                 </a:solidFill>
                 <a:latin typeface="Calibri"/>
               </a:rPr>
-              <a:t>End-to-end paths under test (same WG keys, same inner IPs, only transport differs):</a:t>
+              <a:t>End-to-end paths under test (same WG keys, same inner IPs; only the transport differs):</a:t>
             </a:r>
           </a:p>
         </p:txBody>
@@ -5629,8 +5647,8 @@
         </p:nvSpPr>
         <p:spPr>
           <a:xfrm>
-            <a:off x="548640" y="2011680"/>
-            <a:ext cx="5394960" cy="1280160"/>
+            <a:off x="502920" y="2011680"/>
+            <a:ext cx="5410047" cy="1280160"/>
           </a:xfrm>
           <a:prstGeom prst="roundRect">
             <a:avLst/>
@@ -5659,26 +5677,42 @@
           </a:fontRef>
         </p:style>
         <p:txBody>
-          <a:bodyPr rtlCol="0" anchor="ctr" lIns="101600" tIns="76200"/>
+          <a:bodyPr rtlCol="0" anchor="ctr" lIns="127000" tIns="101600" rIns="127000" wrap="square"/>
           <a:lstStyle/>
           <a:p>
             <a:pPr algn="ctr">
               <a:spcAft>
+                <a:spcPts val="600"/>
+              </a:spcAft>
+            </a:pPr>
+            <a:r>
+              <a:rPr sz="1500" b="1">
+                <a:solidFill>
+                  <a:srgbClr val="102A43"/>
+                </a:solidFill>
+                <a:latin typeface="Calibri"/>
+              </a:rPr>
+              <a:t>Direct (passive-detectable)</a:t>
+            </a:r>
+          </a:p>
+          <a:p>
+            <a:pPr algn="ctr">
+              <a:spcAft>
                 <a:spcPts val="200"/>
               </a:spcAft>
             </a:pPr>
             <a:r>
-              <a:rPr sz="1500" b="1">
-                <a:solidFill>
-                  <a:srgbClr val="102A43"/>
-                </a:solidFill>
-                <a:latin typeface="Calibri"/>
-              </a:rPr>
-              <a:t>Direct (passive-detectable)</a:t>
-            </a:r>
-          </a:p>
-          <a:p>
-            <a:pPr>
+              <a:rPr sz="1400" b="0">
+                <a:solidFill>
+                  <a:srgbClr val="101010"/>
+                </a:solidFill>
+                <a:latin typeface="Consolas"/>
+              </a:rPr>
+              <a:t>Kali wg client</a:t>
+            </a:r>
+          </a:p>
+          <a:p>
+            <a:pPr algn="ctr">
               <a:spcAft>
                 <a:spcPts val="200"/>
               </a:spcAft>
@@ -5686,11 +5720,27 @@
             <a:r>
               <a:rPr sz="1400" b="0">
                 <a:solidFill>
+                  <a:srgbClr val="C9462C"/>
+                </a:solidFill>
+                <a:latin typeface="Consolas"/>
+              </a:rPr>
+              <a:t>↓  UDP / 51820</a:t>
+            </a:r>
+          </a:p>
+          <a:p>
+            <a:pPr algn="ctr">
+              <a:spcAft>
+                <a:spcPts val="200"/>
+              </a:spcAft>
+            </a:pPr>
+            <a:r>
+              <a:rPr sz="1400" b="0">
+                <a:solidFill>
                   <a:srgbClr val="101010"/>
                 </a:solidFill>
                 <a:latin typeface="Consolas"/>
               </a:rPr>
-              <a:t>Kali wg client  ──UDP/51820──▶  OCI wg server</a:t>
+              <a:t>OCI wg server</a:t>
             </a:r>
           </a:p>
         </p:txBody>
@@ -5703,8 +5753,8 @@
         </p:nvSpPr>
         <p:spPr>
           <a:xfrm>
-            <a:off x="6263640" y="2011680"/>
-            <a:ext cx="5486400" cy="1280160"/>
+            <a:off x="6278727" y="2011680"/>
+            <a:ext cx="5410047" cy="1280160"/>
           </a:xfrm>
           <a:prstGeom prst="roundRect">
             <a:avLst/>
@@ -5733,38 +5783,70 @@
           </a:fontRef>
         </p:style>
         <p:txBody>
-          <a:bodyPr rtlCol="0" anchor="ctr" lIns="101600" tIns="76200"/>
+          <a:bodyPr rtlCol="0" anchor="ctr" lIns="127000" tIns="101600" rIns="127000" wrap="square"/>
           <a:lstStyle/>
           <a:p>
             <a:pPr algn="ctr">
               <a:spcAft>
+                <a:spcPts val="600"/>
+              </a:spcAft>
+            </a:pPr>
+            <a:r>
+              <a:rPr sz="1500" b="1">
+                <a:solidFill>
+                  <a:srgbClr val="C9462C"/>
+                </a:solidFill>
+                <a:latin typeface="Calibri"/>
+              </a:rPr>
+              <a:t>Obfuscated (this paper's target)</a:t>
+            </a:r>
+          </a:p>
+          <a:p>
+            <a:pPr algn="ctr">
+              <a:spcAft>
                 <a:spcPts val="200"/>
               </a:spcAft>
             </a:pPr>
             <a:r>
-              <a:rPr sz="1500" b="1">
+              <a:rPr sz="1300" b="0">
+                <a:solidFill>
+                  <a:srgbClr val="101010"/>
+                </a:solidFill>
+                <a:latin typeface="Consolas"/>
+              </a:rPr>
+              <a:t>wg client  →  udp2raw client</a:t>
+            </a:r>
+          </a:p>
+          <a:p>
+            <a:pPr algn="ctr">
+              <a:spcAft>
+                <a:spcPts val="200"/>
+              </a:spcAft>
+            </a:pPr>
+            <a:r>
+              <a:rPr sz="1300" b="0">
                 <a:solidFill>
                   <a:srgbClr val="C9462C"/>
                 </a:solidFill>
-                <a:latin typeface="Calibri"/>
-              </a:rPr>
-              <a:t>Obfuscated (this paper's target)</a:t>
-            </a:r>
-          </a:p>
-          <a:p>
-            <a:pPr>
+                <a:latin typeface="Consolas"/>
+              </a:rPr>
+              <a:t>↓  TCP / 4096  (faketcp)</a:t>
+            </a:r>
+          </a:p>
+          <a:p>
+            <a:pPr algn="ctr">
               <a:spcAft>
                 <a:spcPts val="200"/>
               </a:spcAft>
             </a:pPr>
             <a:r>
-              <a:rPr sz="1200" b="0">
+              <a:rPr sz="1300" b="0">
                 <a:solidFill>
                   <a:srgbClr val="101010"/>
                 </a:solidFill>
                 <a:latin typeface="Consolas"/>
               </a:rPr>
-              <a:t>wg ─lo─▶ udp2raw ─TCP/4096 (faketcp)─▶ udp2raw ─lo─▶ wg</a:t>
+              <a:t>udp2raw server  →  wg server</a:t>
             </a:r>
           </a:p>
         </p:txBody>
@@ -5777,27 +5859,27 @@
         </p:nvSpPr>
         <p:spPr>
           <a:xfrm>
-            <a:off x="548640" y="3611880"/>
-            <a:ext cx="11064240" cy="365760"/>
-          </a:xfrm>
-          <a:prstGeom prst="rect">
-            <a:avLst/>
-          </a:prstGeom>
-          <a:noFill/>
-        </p:spPr>
-        <p:txBody>
-          <a:bodyPr wrap="square" anchor="t" lIns="0" rIns="0" tIns="0" bIns="0">
-            <a:spAutoFit/>
-          </a:bodyPr>
-          <a:lstStyle/>
-          <a:p>
-            <a:pPr algn="l">
-              <a:spcAft>
-                <a:spcPts val="400"/>
-              </a:spcAft>
-            </a:pPr>
-            <a:r>
-              <a:rPr sz="1800" b="1">
+            <a:off x="502920" y="3520440"/>
+            <a:ext cx="11185855" cy="365760"/>
+          </a:xfrm>
+          <a:prstGeom prst="rect">
+            <a:avLst/>
+          </a:prstGeom>
+          <a:noFill/>
+        </p:spPr>
+        <p:txBody>
+          <a:bodyPr wrap="square" anchor="t" lIns="0" rIns="0" tIns="0" bIns="0">
+            <a:spAutoFit/>
+          </a:bodyPr>
+          <a:lstStyle/>
+          <a:p>
+            <a:pPr algn="l">
+              <a:spcAft>
+                <a:spcPts val="400"/>
+              </a:spcAft>
+            </a:pPr>
+            <a:r>
+              <a:rPr sz="1700" b="1">
                 <a:solidFill>
                   <a:srgbClr val="102A43"/>
                 </a:solidFill>
@@ -5816,8 +5898,8 @@
         </p:nvSpPr>
         <p:spPr>
           <a:xfrm>
-            <a:off x="548640" y="4023360"/>
-            <a:ext cx="11064240" cy="2286000"/>
+            <a:off x="502920" y="3931920"/>
+            <a:ext cx="11185855" cy="2011680"/>
           </a:xfrm>
           <a:prstGeom prst="rect">
             <a:avLst/>
@@ -5832,77 +5914,77 @@
           <a:p>
             <a:pPr algn="l">
               <a:lnSpc>
-                <a:spcPct val="115000"/>
+                <a:spcPct val="120000"/>
               </a:lnSpc>
               <a:spcAft>
-                <a:spcPts val="400"/>
-              </a:spcAft>
-            </a:pPr>
-            <a:r>
-              <a:rPr sz="1800" b="0">
+                <a:spcPts val="600"/>
+              </a:spcAft>
+            </a:pPr>
+            <a:r>
+              <a:rPr sz="1500" b="0">
                 <a:solidFill>
                   <a:srgbClr val="101010"/>
                 </a:solidFill>
                 <a:latin typeface="Calibri"/>
               </a:rPr>
-              <a:t>• ≈8.5k GitHub stars; standard recommendation alongside WireGuard in censored regions.</a:t>
+              <a:t>•   ≈259,000 release-binary downloads on the primary repo, +41,000 on the multiplatform fork (GitHub API, May 2026).</a:t>
             </a:r>
           </a:p>
           <a:p>
             <a:pPr algn="l">
               <a:lnSpc>
-                <a:spcPct val="115000"/>
+                <a:spcPct val="120000"/>
               </a:lnSpc>
               <a:spcAft>
-                <a:spcPts val="400"/>
-              </a:spcAft>
-            </a:pPr>
-            <a:r>
-              <a:rPr sz="1800" b="0">
+                <a:spcPts val="600"/>
+              </a:spcAft>
+            </a:pPr>
+            <a:r>
+              <a:rPr sz="1500" b="0">
                 <a:solidFill>
                   <a:srgbClr val="101010"/>
                 </a:solidFill>
                 <a:latin typeface="Calibri"/>
               </a:rPr>
-              <a:t>• Documented to be actively blocked by the Great Firewall and Iran's DPI (gray-literature reports).</a:t>
+              <a:t>•   Reported blocked by state-level DPI in Iran and elsewhere (udp2raw issue #505, net4people thread #253).</a:t>
             </a:r>
           </a:p>
           <a:p>
             <a:pPr algn="l">
               <a:lnSpc>
-                <a:spcPct val="115000"/>
+                <a:spcPct val="120000"/>
               </a:lnSpc>
               <a:spcAft>
-                <a:spcPts val="400"/>
-              </a:spcAft>
-            </a:pPr>
-            <a:r>
-              <a:rPr sz="1800" b="0">
+                <a:spcPts val="600"/>
+              </a:spcAft>
+            </a:pPr>
+            <a:r>
+              <a:rPr sz="1500" b="0">
                 <a:solidFill>
                   <a:srgbClr val="101010"/>
                 </a:solidFill>
                 <a:latin typeface="Calibri"/>
               </a:rPr>
-              <a:t>• Cited once by the WireGuard project's own “Known Limitations” page.</a:t>
+              <a:t>•   Cited in the WireGuard project's own “Known Limitations” page.</a:t>
             </a:r>
           </a:p>
           <a:p>
             <a:pPr algn="l">
               <a:lnSpc>
-                <a:spcPct val="115000"/>
+                <a:spcPct val="120000"/>
               </a:lnSpc>
               <a:spcAft>
-                <a:spcPts val="400"/>
-              </a:spcAft>
-            </a:pPr>
-            <a:r>
-              <a:rPr sz="1800" b="0">
+                <a:spcPts val="600"/>
+              </a:spcAft>
+            </a:pPr>
+            <a:r>
+              <a:rPr sz="1500" b="0">
                 <a:solidFill>
                   <a:srgbClr val="101010"/>
                 </a:solidFill>
                 <a:latin typeface="Calibri"/>
               </a:rPr>
-              <a:t>• But: zero peer-reviewed analysis. We searched USENIX, NDSS, IMC, FOCI, PETS, CCS — nothing.</a:t>
+              <a:t>•   No peer-reviewed analysis. Searched USENIX, NDSS, IMC, FOCI, PETS, CCS.</a:t>
             </a:r>
           </a:p>
         </p:txBody>
@@ -5915,8 +5997,8 @@
         </p:nvSpPr>
         <p:spPr>
           <a:xfrm>
-            <a:off x="548640" y="6446520"/>
-            <a:ext cx="7315200" cy="274320"/>
+            <a:off x="502920" y="6263640"/>
+            <a:ext cx="8229600" cy="274320"/>
           </a:xfrm>
           <a:prstGeom prst="rect">
             <a:avLst/>
@@ -5941,7 +6023,7 @@
                 </a:solidFill>
                 <a:latin typeface="Calibri"/>
               </a:rPr>
-              <a:t>Schiavone &amp; Johannsen — CYB623 — Pace University</a:t>
+              <a:t>Schiavone &amp; Johannsen   ·   CYB623   ·   Pace University</a:t>
             </a:r>
           </a:p>
         </p:txBody>
@@ -5954,8 +6036,8 @@
         </p:nvSpPr>
         <p:spPr>
           <a:xfrm>
-            <a:off x="548640" y="6446520"/>
-            <a:ext cx="7315200" cy="274320"/>
+            <a:off x="502920" y="6263640"/>
+            <a:ext cx="8229600" cy="274320"/>
           </a:xfrm>
           <a:prstGeom prst="rect">
             <a:avLst/>
@@ -5980,7 +6062,7 @@
                 </a:solidFill>
                 <a:latin typeface="Calibri"/>
               </a:rPr>
-              <a:t>Schiavone &amp; Johannsen — CYB623 — Pace University</a:t>
+              <a:t>Schiavone &amp; Johannsen   ·   CYB623   ·   Pace University</a:t>
             </a:r>
           </a:p>
         </p:txBody>
@@ -5993,8 +6075,8 @@
         </p:nvSpPr>
         <p:spPr>
           <a:xfrm>
-            <a:off x="10515600" y="6446520"/>
-            <a:ext cx="1188720" cy="274320"/>
+            <a:off x="10362895" y="6263640"/>
+            <a:ext cx="1371600" cy="274320"/>
           </a:xfrm>
           <a:prstGeom prst="rect">
             <a:avLst/>
@@ -6050,27 +6132,27 @@
         </p:nvSpPr>
         <p:spPr>
           <a:xfrm>
-            <a:off x="548640" y="320040"/>
-            <a:ext cx="10515600" cy="640080"/>
-          </a:xfrm>
-          <a:prstGeom prst="rect">
-            <a:avLst/>
-          </a:prstGeom>
-          <a:noFill/>
-        </p:spPr>
-        <p:txBody>
-          <a:bodyPr wrap="square" anchor="t" lIns="0" rIns="0" tIns="0" bIns="0">
-            <a:spAutoFit/>
-          </a:bodyPr>
-          <a:lstStyle/>
-          <a:p>
-            <a:pPr algn="l">
-              <a:spcAft>
-                <a:spcPts val="400"/>
-              </a:spcAft>
-            </a:pPr>
-            <a:r>
-              <a:rPr sz="3200" b="1">
+            <a:off x="502920" y="274320"/>
+            <a:ext cx="11185855" cy="731520"/>
+          </a:xfrm>
+          <a:prstGeom prst="rect">
+            <a:avLst/>
+          </a:prstGeom>
+          <a:noFill/>
+        </p:spPr>
+        <p:txBody>
+          <a:bodyPr wrap="square" anchor="t" lIns="0" rIns="0" tIns="0" bIns="0">
+            <a:spAutoFit/>
+          </a:bodyPr>
+          <a:lstStyle/>
+          <a:p>
+            <a:pPr algn="l">
+              <a:spcAft>
+                <a:spcPts val="400"/>
+              </a:spcAft>
+            </a:pPr>
+            <a:r>
+              <a:rPr sz="2800" b="1">
                 <a:solidFill>
                   <a:srgbClr val="102A43"/>
                 </a:solidFill>
@@ -6089,7 +6171,7 @@
         </p:nvSpPr>
         <p:spPr>
           <a:xfrm>
-            <a:off x="548640" y="960120"/>
+            <a:off x="502920" y="1005840"/>
             <a:ext cx="914400" cy="31750"/>
           </a:xfrm>
           <a:prstGeom prst="rect">
@@ -6132,33 +6214,33 @@
         </p:nvSpPr>
         <p:spPr>
           <a:xfrm>
-            <a:off x="548640" y="1051560"/>
-            <a:ext cx="10515600" cy="457200"/>
-          </a:xfrm>
-          <a:prstGeom prst="rect">
-            <a:avLst/>
-          </a:prstGeom>
-          <a:noFill/>
-        </p:spPr>
-        <p:txBody>
-          <a:bodyPr wrap="square" anchor="t" lIns="0" rIns="0" tIns="0" bIns="0">
-            <a:spAutoFit/>
-          </a:bodyPr>
-          <a:lstStyle/>
-          <a:p>
-            <a:pPr algn="l">
-              <a:spcAft>
-                <a:spcPts val="400"/>
-              </a:spcAft>
-            </a:pPr>
-            <a:r>
-              <a:rPr sz="1600" b="0">
+            <a:off x="502920" y="1078992"/>
+            <a:ext cx="11185855" cy="365760"/>
+          </a:xfrm>
+          <a:prstGeom prst="rect">
+            <a:avLst/>
+          </a:prstGeom>
+          <a:noFill/>
+        </p:spPr>
+        <p:txBody>
+          <a:bodyPr wrap="square" anchor="t" lIns="0" rIns="0" tIns="0" bIns="0">
+            <a:spAutoFit/>
+          </a:bodyPr>
+          <a:lstStyle/>
+          <a:p>
+            <a:pPr algn="l">
+              <a:spcAft>
+                <a:spcPts val="400"/>
+              </a:spcAft>
+            </a:pPr>
+            <a:r>
+              <a:rPr sz="1400" b="0">
                 <a:solidFill>
                   <a:srgbClr val="555555"/>
                 </a:solidFill>
                 <a:latin typeface="Calibri"/>
               </a:rPr>
-              <a:t>Following Xue et al.'s active-probe-and-passive-classify pattern from USENIX Security '22</a:t>
+              <a:t>Following Xue et al.'s active-then-passive pattern (USENIX Security ’22) for OpenVPN</a:t>
             </a:r>
           </a:p>
         </p:txBody>
@@ -6171,8 +6253,8 @@
         </p:nvSpPr>
         <p:spPr>
           <a:xfrm>
-            <a:off x="548640" y="1508760"/>
-            <a:ext cx="5532120" cy="4572000"/>
+            <a:off x="502920" y="1554480"/>
+            <a:ext cx="5364327" cy="4114800"/>
           </a:xfrm>
           <a:prstGeom prst="roundRect">
             <a:avLst/>
@@ -6201,12 +6283,12 @@
           </a:fontRef>
         </p:style>
         <p:txBody>
-          <a:bodyPr rtlCol="0" anchor="ctr" lIns="177800" tIns="152400" rIns="177800"/>
-          <a:lstStyle/>
-          <a:p>
-            <a:pPr algn="ctr">
-              <a:spcAft>
-                <a:spcPts val="800"/>
+          <a:bodyPr rtlCol="0" anchor="ctr" lIns="203200" tIns="177800" rIns="203200" wrap="square"/>
+          <a:lstStyle/>
+          <a:p>
+            <a:pPr algn="l">
+              <a:spcAft>
+                <a:spcPts val="1000"/>
               </a:spcAft>
             </a:pPr>
             <a:r>
@@ -6216,90 +6298,102 @@
                 </a:solidFill>
                 <a:latin typeface="Calibri"/>
               </a:rPr>
-              <a:t>C1 — Active prober</a:t>
-            </a:r>
-          </a:p>
-          <a:p>
-            <a:pPr>
-              <a:spcAft>
-                <a:spcPts val="400"/>
-              </a:spcAft>
-            </a:pPr>
-            <a:r>
-              <a:rPr sz="1600" b="0">
+              <a:t>C1 · Active prober</a:t>
+            </a:r>
+          </a:p>
+          <a:p>
+            <a:pPr algn="l">
+              <a:lnSpc>
+                <a:spcPct val="118000"/>
+              </a:lnSpc>
+              <a:spcAft>
+                <a:spcPts val="600"/>
+              </a:spcAft>
+            </a:pPr>
+            <a:r>
+              <a:rPr sz="1400" b="0">
                 <a:solidFill>
                   <a:srgbClr val="101010"/>
                 </a:solidFill>
                 <a:latin typeface="Calibri"/>
               </a:rPr>
-              <a:t>•  Send 5 stateless TCP probes to (IP, port).</a:t>
-            </a:r>
-          </a:p>
-          <a:p>
-            <a:pPr>
-              <a:spcAft>
-                <a:spcPts val="400"/>
-              </a:spcAft>
-            </a:pPr>
-            <a:r>
-              <a:rPr sz="1600" b="0">
+              <a:t>•   Send 5 stateless TCP probes to (IP, port).</a:t>
+            </a:r>
+          </a:p>
+          <a:p>
+            <a:pPr algn="l">
+              <a:lnSpc>
+                <a:spcPct val="118000"/>
+              </a:lnSpc>
+              <a:spcAft>
+                <a:spcPts val="600"/>
+              </a:spcAft>
+            </a:pPr>
+            <a:r>
+              <a:rPr sz="1400" b="0">
                 <a:solidFill>
                   <a:srgbClr val="101010"/>
                 </a:solidFill>
                 <a:latin typeface="Calibri"/>
               </a:rPr>
-              <a:t>•  Real Linux TCP answers all 5.</a:t>
-            </a:r>
-          </a:p>
-          <a:p>
-            <a:pPr>
-              <a:spcAft>
-                <a:spcPts val="400"/>
-              </a:spcAft>
-            </a:pPr>
-            <a:r>
-              <a:rPr sz="1600" b="0">
+              <a:t>•   Real Linux TCP answers all 5.</a:t>
+            </a:r>
+          </a:p>
+          <a:p>
+            <a:pPr algn="l">
+              <a:lnSpc>
+                <a:spcPct val="118000"/>
+              </a:lnSpc>
+              <a:spcAft>
+                <a:spcPts val="600"/>
+              </a:spcAft>
+            </a:pPr>
+            <a:r>
+              <a:rPr sz="1400" b="0">
                 <a:solidFill>
                   <a:srgbClr val="101010"/>
                 </a:solidFill>
                 <a:latin typeface="Calibri"/>
               </a:rPr>
-              <a:t>•  udp2raw answers SYN, drops 3 of 4 follow-ups.</a:t>
-            </a:r>
-          </a:p>
-          <a:p>
-            <a:pPr>
-              <a:spcAft>
-                <a:spcPts val="400"/>
-              </a:spcAft>
-            </a:pPr>
-            <a:r>
-              <a:rPr sz="1600" b="0">
+              <a:t>•   udp2raw answers SYN, drops 3 of 4 follow-ups.</a:t>
+            </a:r>
+          </a:p>
+          <a:p>
+            <a:pPr algn="l">
+              <a:lnSpc>
+                <a:spcPct val="118000"/>
+              </a:lnSpc>
+              <a:spcAft>
+                <a:spcPts val="600"/>
+              </a:spcAft>
+            </a:pPr>
+            <a:r>
+              <a:rPr sz="1400" b="0">
                 <a:solidFill>
                   <a:srgbClr val="101010"/>
                 </a:solidFill>
                 <a:latin typeface="Calibri"/>
               </a:rPr>
-              <a:t>•  Verdict in ≤ 9 seconds, deterministic on 5/5 trials.</a:t>
-            </a:r>
-          </a:p>
-          <a:p>
-            <a:pPr>
+              <a:t>•   Verdict in ≤ 9 seconds. Same verdict 5/5 trials.</a:t>
+            </a:r>
+          </a:p>
+          <a:p>
+            <a:pPr algn="l">
               <a:spcBef>
-                <a:spcPts val="1000"/>
+                <a:spcPts val="1200"/>
               </a:spcBef>
               <a:spcAft>
                 <a:spcPts val="200"/>
               </a:spcAft>
             </a:pPr>
             <a:r>
-              <a:rPr sz="1400" b="0">
+              <a:rPr sz="1200" b="0">
                 <a:solidFill>
                   <a:srgbClr val="555555"/>
                 </a:solidFill>
                 <a:latin typeface="Calibri"/>
               </a:rPr>
-              <a:t>Cost to adversary: ~1.7 KB and 9 seconds per host.</a:t>
+              <a:t>Adversary cost:  ≈ 1.7 KB and ≈ 9 s per host.</a:t>
             </a:r>
           </a:p>
         </p:txBody>
@@ -6312,8 +6406,8 @@
         </p:nvSpPr>
         <p:spPr>
           <a:xfrm>
-            <a:off x="6263640" y="1508760"/>
-            <a:ext cx="5486400" cy="4572000"/>
+            <a:off x="6324447" y="1554480"/>
+            <a:ext cx="5364327" cy="4114800"/>
           </a:xfrm>
           <a:prstGeom prst="roundRect">
             <a:avLst/>
@@ -6342,12 +6436,12 @@
           </a:fontRef>
         </p:style>
         <p:txBody>
-          <a:bodyPr rtlCol="0" anchor="ctr" lIns="177800" tIns="152400" rIns="177800"/>
-          <a:lstStyle/>
-          <a:p>
-            <a:pPr algn="ctr">
-              <a:spcAft>
-                <a:spcPts val="800"/>
+          <a:bodyPr rtlCol="0" anchor="ctr" lIns="203200" tIns="177800" rIns="203200" wrap="square"/>
+          <a:lstStyle/>
+          <a:p>
+            <a:pPr algn="l">
+              <a:spcAft>
+                <a:spcPts val="1000"/>
               </a:spcAft>
             </a:pPr>
             <a:r>
@@ -6357,84 +6451,96 @@
                 </a:solidFill>
                 <a:latin typeface="Calibri"/>
               </a:rPr>
-              <a:t>C2 — Two-feature passive classifier</a:t>
-            </a:r>
-          </a:p>
-          <a:p>
-            <a:pPr>
-              <a:spcAft>
-                <a:spcPts val="400"/>
-              </a:spcAft>
-            </a:pPr>
-            <a:r>
-              <a:rPr sz="1600" b="0">
+              <a:t>C2 · Two-feature classifier</a:t>
+            </a:r>
+          </a:p>
+          <a:p>
+            <a:pPr algn="l">
+              <a:lnSpc>
+                <a:spcPct val="118000"/>
+              </a:lnSpc>
+              <a:spcAft>
+                <a:spcPts val="600"/>
+              </a:spcAft>
+            </a:pPr>
+            <a:r>
+              <a:rPr sz="1400" b="0">
                 <a:solidFill>
                   <a:srgbClr val="101010"/>
                 </a:solidFill>
                 <a:latin typeface="Calibri"/>
               </a:rPr>
-              <a:t>•  bulk_fraction:   fraction of MTU-class packets.</a:t>
-            </a:r>
-          </a:p>
-          <a:p>
-            <a:pPr>
-              <a:spcAft>
-                <a:spcPts val="400"/>
-              </a:spcAft>
-            </a:pPr>
-            <a:r>
-              <a:rPr sz="1600" b="0">
+              <a:t>•   bulk_fraction:  share of MTU-class packets.</a:t>
+            </a:r>
+          </a:p>
+          <a:p>
+            <a:pPr algn="l">
+              <a:lnSpc>
+                <a:spcPct val="118000"/>
+              </a:lnSpc>
+              <a:spcAft>
+                <a:spcPts val="600"/>
+              </a:spcAft>
+            </a:pPr>
+            <a:r>
+              <a:rPr sz="1400" b="0">
                 <a:solidFill>
                   <a:srgbClr val="101010"/>
                 </a:solidFill>
                 <a:latin typeface="Calibri"/>
               </a:rPr>
-              <a:t>•  ack60_fraction:  fraction of 60-byte TCP ACKs.</a:t>
-            </a:r>
-          </a:p>
-          <a:p>
-            <a:pPr>
-              <a:spcAft>
-                <a:spcPts val="400"/>
-              </a:spcAft>
-            </a:pPr>
-            <a:r>
-              <a:rPr sz="1600" b="0">
+              <a:t>•   ack60_fraction:  share of 60-byte TCP ACKs.</a:t>
+            </a:r>
+          </a:p>
+          <a:p>
+            <a:pPr algn="l">
+              <a:lnSpc>
+                <a:spcPct val="118000"/>
+              </a:lnSpc>
+              <a:spcAft>
+                <a:spcPts val="600"/>
+              </a:spcAft>
+            </a:pPr>
+            <a:r>
+              <a:rPr sz="1400" b="0">
                 <a:solidFill>
                   <a:srgbClr val="101010"/>
                 </a:solidFill>
                 <a:latin typeface="Calibri"/>
               </a:rPr>
-              <a:t>•  Both are mechanical consequences of how the protocols are written, not statistical regularities.</a:t>
-            </a:r>
-          </a:p>
-          <a:p>
-            <a:pPr>
-              <a:spcAft>
-                <a:spcPts val="400"/>
-              </a:spcAft>
-            </a:pPr>
-            <a:r>
-              <a:rPr sz="1600" b="0">
+              <a:t>•   Both fall out of how the protocols are written, not statistical luck.</a:t>
+            </a:r>
+          </a:p>
+          <a:p>
+            <a:pPr algn="l">
+              <a:lnSpc>
+                <a:spcPct val="118000"/>
+              </a:lnSpc>
+              <a:spcAft>
+                <a:spcPts val="600"/>
+              </a:spcAft>
+            </a:pPr>
+            <a:r>
+              <a:rPr sz="1400" b="0">
                 <a:solidFill>
                   <a:srgbClr val="101010"/>
                 </a:solidFill>
                 <a:latin typeface="Calibri"/>
               </a:rPr>
-              <a:t>•  Random Forest: 99.9 % accuracy, AUC = 1.000.</a:t>
-            </a:r>
-          </a:p>
-          <a:p>
-            <a:pPr>
+              <a:t>•   Random Forest:  99.9 % accuracy, AUC = 1.000.</a:t>
+            </a:r>
+          </a:p>
+          <a:p>
+            <a:pPr algn="l">
               <a:spcBef>
-                <a:spcPts val="1000"/>
+                <a:spcPts val="1200"/>
               </a:spcBef>
               <a:spcAft>
                 <a:spcPts val="200"/>
               </a:spcAft>
             </a:pPr>
             <a:r>
-              <a:rPr sz="1400" b="0">
+              <a:rPr sz="1200" b="0">
                 <a:solidFill>
                   <a:srgbClr val="555555"/>
                 </a:solidFill>
@@ -6453,8 +6559,8 @@
         </p:nvSpPr>
         <p:spPr>
           <a:xfrm>
-            <a:off x="548640" y="6446520"/>
-            <a:ext cx="7315200" cy="274320"/>
+            <a:off x="502920" y="6263640"/>
+            <a:ext cx="8229600" cy="274320"/>
           </a:xfrm>
           <a:prstGeom prst="rect">
             <a:avLst/>
@@ -6479,7 +6585,7 @@
                 </a:solidFill>
                 <a:latin typeface="Calibri"/>
               </a:rPr>
-              <a:t>Schiavone &amp; Johannsen — CYB623 — Pace University</a:t>
+              <a:t>Schiavone &amp; Johannsen   ·   CYB623   ·   Pace University</a:t>
             </a:r>
           </a:p>
         </p:txBody>
@@ -6492,8 +6598,8 @@
         </p:nvSpPr>
         <p:spPr>
           <a:xfrm>
-            <a:off x="548640" y="6446520"/>
-            <a:ext cx="7315200" cy="274320"/>
+            <a:off x="502920" y="6263640"/>
+            <a:ext cx="8229600" cy="274320"/>
           </a:xfrm>
           <a:prstGeom prst="rect">
             <a:avLst/>
@@ -6518,7 +6624,7 @@
                 </a:solidFill>
                 <a:latin typeface="Calibri"/>
               </a:rPr>
-              <a:t>Schiavone &amp; Johannsen — CYB623 — Pace University</a:t>
+              <a:t>Schiavone &amp; Johannsen   ·   CYB623   ·   Pace University</a:t>
             </a:r>
           </a:p>
         </p:txBody>
@@ -6531,8 +6637,8 @@
         </p:nvSpPr>
         <p:spPr>
           <a:xfrm>
-            <a:off x="10515600" y="6446520"/>
-            <a:ext cx="1188720" cy="274320"/>
+            <a:off x="10362895" y="6263640"/>
+            <a:ext cx="1371600" cy="274320"/>
           </a:xfrm>
           <a:prstGeom prst="rect">
             <a:avLst/>
@@ -6588,33 +6694,33 @@
         </p:nvSpPr>
         <p:spPr>
           <a:xfrm>
-            <a:off x="548640" y="320040"/>
-            <a:ext cx="10515600" cy="640080"/>
-          </a:xfrm>
-          <a:prstGeom prst="rect">
-            <a:avLst/>
-          </a:prstGeom>
-          <a:noFill/>
-        </p:spPr>
-        <p:txBody>
-          <a:bodyPr wrap="square" anchor="t" lIns="0" rIns="0" tIns="0" bIns="0">
-            <a:spAutoFit/>
-          </a:bodyPr>
-          <a:lstStyle/>
-          <a:p>
-            <a:pPr algn="l">
-              <a:spcAft>
-                <a:spcPts val="400"/>
-              </a:spcAft>
-            </a:pPr>
-            <a:r>
-              <a:rPr sz="3200" b="1">
+            <a:off x="502920" y="274320"/>
+            <a:ext cx="11185855" cy="731520"/>
+          </a:xfrm>
+          <a:prstGeom prst="rect">
+            <a:avLst/>
+          </a:prstGeom>
+          <a:noFill/>
+        </p:spPr>
+        <p:txBody>
+          <a:bodyPr wrap="square" anchor="t" lIns="0" rIns="0" tIns="0" bIns="0">
+            <a:spAutoFit/>
+          </a:bodyPr>
+          <a:lstStyle/>
+          <a:p>
+            <a:pPr algn="l">
+              <a:spcAft>
+                <a:spcPts val="400"/>
+              </a:spcAft>
+            </a:pPr>
+            <a:r>
+              <a:rPr sz="2800" b="1">
                 <a:solidFill>
                   <a:srgbClr val="102A43"/>
                 </a:solidFill>
                 <a:latin typeface="Calibri"/>
               </a:rPr>
-              <a:t>C1 — One probe distinguishes udp2raw from real TCP</a:t>
+              <a:t>C1: one set of probes distinguishes udp2raw from real TCP</a:t>
             </a:r>
           </a:p>
         </p:txBody>
@@ -6627,7 +6733,7 @@
         </p:nvSpPr>
         <p:spPr>
           <a:xfrm>
-            <a:off x="548640" y="960120"/>
+            <a:off x="502920" y="1005840"/>
             <a:ext cx="914400" cy="31750"/>
           </a:xfrm>
           <a:prstGeom prst="rect">
@@ -6670,33 +6776,33 @@
         </p:nvSpPr>
         <p:spPr>
           <a:xfrm>
-            <a:off x="548640" y="1051560"/>
-            <a:ext cx="10515600" cy="457200"/>
-          </a:xfrm>
-          <a:prstGeom prst="rect">
-            <a:avLst/>
-          </a:prstGeom>
-          <a:noFill/>
-        </p:spPr>
-        <p:txBody>
-          <a:bodyPr wrap="square" anchor="t" lIns="0" rIns="0" tIns="0" bIns="0">
-            <a:spAutoFit/>
-          </a:bodyPr>
-          <a:lstStyle/>
-          <a:p>
-            <a:pPr algn="l">
-              <a:spcAft>
-                <a:spcPts val="400"/>
-              </a:spcAft>
-            </a:pPr>
-            <a:r>
-              <a:rPr sz="1600" b="0">
+            <a:off x="502920" y="1078992"/>
+            <a:ext cx="11185855" cy="365760"/>
+          </a:xfrm>
+          <a:prstGeom prst="rect">
+            <a:avLst/>
+          </a:prstGeom>
+          <a:noFill/>
+        </p:spPr>
+        <p:txBody>
+          <a:bodyPr wrap="square" anchor="t" lIns="0" rIns="0" tIns="0" bIns="0">
+            <a:spAutoFit/>
+          </a:bodyPr>
+          <a:lstStyle/>
+          <a:p>
+            <a:pPr algn="l">
+              <a:spcAft>
+                <a:spcPts val="400"/>
+              </a:spcAft>
+            </a:pPr>
+            <a:r>
+              <a:rPr sz="1400" b="0">
                 <a:solidFill>
                   <a:srgbClr val="555555"/>
                 </a:solidFill>
                 <a:latin typeface="Calibri"/>
               </a:rPr>
-              <a:t>Three targets on the same OCI host; deterministic verdict in 5/5 repeated trials</a:t>
+              <a:t>Three targets on the same OCI host. Same verdict in 5/5 repeated trials.</a:t>
             </a:r>
           </a:p>
         </p:txBody>
@@ -6709,27 +6815,27 @@
         </p:nvSpPr>
         <p:spPr>
           <a:xfrm>
-            <a:off x="548640" y="1463040"/>
-            <a:ext cx="2606040" cy="411480"/>
-          </a:xfrm>
-          <a:prstGeom prst="rect">
-            <a:avLst/>
-          </a:prstGeom>
-          <a:noFill/>
-        </p:spPr>
-        <p:txBody>
-          <a:bodyPr wrap="square" anchor="t" lIns="0" rIns="0" tIns="0" bIns="0">
-            <a:spAutoFit/>
-          </a:bodyPr>
-          <a:lstStyle/>
-          <a:p>
-            <a:pPr algn="l">
-              <a:spcAft>
-                <a:spcPts val="400"/>
-              </a:spcAft>
-            </a:pPr>
-            <a:r>
-              <a:rPr sz="1400" b="1">
+            <a:off x="502920" y="1554480"/>
+            <a:ext cx="2606040" cy="384048"/>
+          </a:xfrm>
+          <a:prstGeom prst="rect">
+            <a:avLst/>
+          </a:prstGeom>
+          <a:noFill/>
+        </p:spPr>
+        <p:txBody>
+          <a:bodyPr wrap="square" anchor="t" lIns="0" rIns="0" tIns="0" bIns="0">
+            <a:spAutoFit/>
+          </a:bodyPr>
+          <a:lstStyle/>
+          <a:p>
+            <a:pPr algn="l">
+              <a:spcAft>
+                <a:spcPts val="400"/>
+              </a:spcAft>
+            </a:pPr>
+            <a:r>
+              <a:rPr sz="1300" b="1">
                 <a:solidFill>
                   <a:srgbClr val="102A43"/>
                 </a:solidFill>
@@ -6748,33 +6854,33 @@
         </p:nvSpPr>
         <p:spPr>
           <a:xfrm>
-            <a:off x="3200400" y="1463040"/>
-            <a:ext cx="2880360" cy="411480"/>
-          </a:xfrm>
-          <a:prstGeom prst="rect">
-            <a:avLst/>
-          </a:prstGeom>
-          <a:noFill/>
-        </p:spPr>
-        <p:txBody>
-          <a:bodyPr wrap="square" anchor="t" lIns="0" rIns="0" tIns="0" bIns="0">
-            <a:spAutoFit/>
-          </a:bodyPr>
-          <a:lstStyle/>
-          <a:p>
-            <a:pPr algn="l">
-              <a:spcAft>
-                <a:spcPts val="400"/>
-              </a:spcAft>
-            </a:pPr>
-            <a:r>
-              <a:rPr sz="1400" b="1">
+            <a:off x="3108960" y="1554480"/>
+            <a:ext cx="2834640" cy="384048"/>
+          </a:xfrm>
+          <a:prstGeom prst="rect">
+            <a:avLst/>
+          </a:prstGeom>
+          <a:noFill/>
+        </p:spPr>
+        <p:txBody>
+          <a:bodyPr wrap="square" anchor="t" lIns="0" rIns="0" tIns="0" bIns="0">
+            <a:spAutoFit/>
+          </a:bodyPr>
+          <a:lstStyle/>
+          <a:p>
+            <a:pPr algn="l">
+              <a:spcAft>
+                <a:spcPts val="400"/>
+              </a:spcAft>
+            </a:pPr>
+            <a:r>
+              <a:rPr sz="1300" b="1">
                 <a:solidFill>
                   <a:srgbClr val="102A43"/>
                 </a:solidFill>
                 <a:latin typeface="Calibri"/>
               </a:rPr>
-              <a:t>TCP/22 (real SSH)</a:t>
+              <a:t>TCP/22  (real SSH)</a:t>
             </a:r>
           </a:p>
         </p:txBody>
@@ -6787,33 +6893,33 @@
         </p:nvSpPr>
         <p:spPr>
           <a:xfrm>
-            <a:off x="6126480" y="1463040"/>
-            <a:ext cx="2971800" cy="411480"/>
-          </a:xfrm>
-          <a:prstGeom prst="rect">
-            <a:avLst/>
-          </a:prstGeom>
-          <a:noFill/>
-        </p:spPr>
-        <p:txBody>
-          <a:bodyPr wrap="square" anchor="t" lIns="0" rIns="0" tIns="0" bIns="0">
-            <a:spAutoFit/>
-          </a:bodyPr>
-          <a:lstStyle/>
-          <a:p>
-            <a:pPr algn="l">
-              <a:spcAft>
-                <a:spcPts val="400"/>
-              </a:spcAft>
-            </a:pPr>
-            <a:r>
-              <a:rPr sz="1400" b="1">
+            <a:off x="5943600" y="1554480"/>
+            <a:ext cx="3017520" cy="384048"/>
+          </a:xfrm>
+          <a:prstGeom prst="rect">
+            <a:avLst/>
+          </a:prstGeom>
+          <a:noFill/>
+        </p:spPr>
+        <p:txBody>
+          <a:bodyPr wrap="square" anchor="t" lIns="0" rIns="0" tIns="0" bIns="0">
+            <a:spAutoFit/>
+          </a:bodyPr>
+          <a:lstStyle/>
+          <a:p>
+            <a:pPr algn="l">
+              <a:spcAft>
+                <a:spcPts val="400"/>
+              </a:spcAft>
+            </a:pPr>
+            <a:r>
+              <a:rPr sz="1300" b="1">
                 <a:solidFill>
                   <a:srgbClr val="102A43"/>
                 </a:solidFill>
                 <a:latin typeface="Calibri"/>
               </a:rPr>
-              <a:t>TCP/4096 (udp2raw)</a:t>
+              <a:t>TCP/4096  (udp2raw)</a:t>
             </a:r>
           </a:p>
         </p:txBody>
@@ -6826,33 +6932,33 @@
         </p:nvSpPr>
         <p:spPr>
           <a:xfrm>
-            <a:off x="9144000" y="1463040"/>
-            <a:ext cx="2606040" cy="411480"/>
-          </a:xfrm>
-          <a:prstGeom prst="rect">
-            <a:avLst/>
-          </a:prstGeom>
-          <a:noFill/>
-        </p:spPr>
-        <p:txBody>
-          <a:bodyPr wrap="square" anchor="t" lIns="0" rIns="0" tIns="0" bIns="0">
-            <a:spAutoFit/>
-          </a:bodyPr>
-          <a:lstStyle/>
-          <a:p>
-            <a:pPr algn="l">
-              <a:spcAft>
-                <a:spcPts val="400"/>
-              </a:spcAft>
-            </a:pPr>
-            <a:r>
-              <a:rPr sz="1400" b="1">
+            <a:off x="8961120" y="1554480"/>
+            <a:ext cx="2606040" cy="384048"/>
+          </a:xfrm>
+          <a:prstGeom prst="rect">
+            <a:avLst/>
+          </a:prstGeom>
+          <a:noFill/>
+        </p:spPr>
+        <p:txBody>
+          <a:bodyPr wrap="square" anchor="t" lIns="0" rIns="0" tIns="0" bIns="0">
+            <a:spAutoFit/>
+          </a:bodyPr>
+          <a:lstStyle/>
+          <a:p>
+            <a:pPr algn="l">
+              <a:spcAft>
+                <a:spcPts val="400"/>
+              </a:spcAft>
+            </a:pPr>
+            <a:r>
+              <a:rPr sz="1300" b="1">
                 <a:solidFill>
                   <a:srgbClr val="102A43"/>
                 </a:solidFill>
                 <a:latin typeface="Calibri"/>
               </a:rPr>
-              <a:t>TCP/9999 (closed)</a:t>
+              <a:t>TCP/9999  (closed)</a:t>
             </a:r>
           </a:p>
         </p:txBody>
@@ -6865,8 +6971,8 @@
         </p:nvSpPr>
         <p:spPr>
           <a:xfrm>
-            <a:off x="548640" y="1874520"/>
-            <a:ext cx="11064240" cy="31750"/>
+            <a:off x="502920" y="1938528"/>
+            <a:ext cx="11185855" cy="31750"/>
           </a:xfrm>
           <a:prstGeom prst="rect">
             <a:avLst/>
@@ -6908,33 +7014,33 @@
         </p:nvSpPr>
         <p:spPr>
           <a:xfrm>
-            <a:off x="548640" y="1965960"/>
-            <a:ext cx="2606040" cy="411480"/>
-          </a:xfrm>
-          <a:prstGeom prst="rect">
-            <a:avLst/>
-          </a:prstGeom>
-          <a:noFill/>
-        </p:spPr>
-        <p:txBody>
-          <a:bodyPr wrap="square" anchor="t" lIns="0" rIns="0" tIns="0" bIns="0">
-            <a:spAutoFit/>
-          </a:bodyPr>
-          <a:lstStyle/>
-          <a:p>
-            <a:pPr algn="l">
-              <a:spcAft>
-                <a:spcPts val="400"/>
-              </a:spcAft>
-            </a:pPr>
-            <a:r>
-              <a:rPr sz="1400" b="0">
+            <a:off x="502920" y="2029968"/>
+            <a:ext cx="2606040" cy="384048"/>
+          </a:xfrm>
+          <a:prstGeom prst="rect">
+            <a:avLst/>
+          </a:prstGeom>
+          <a:noFill/>
+        </p:spPr>
+        <p:txBody>
+          <a:bodyPr wrap="square" anchor="t" lIns="0" rIns="0" tIns="0" bIns="0">
+            <a:spAutoFit/>
+          </a:bodyPr>
+          <a:lstStyle/>
+          <a:p>
+            <a:pPr algn="l">
+              <a:spcAft>
+                <a:spcPts val="400"/>
+              </a:spcAft>
+            </a:pPr>
+            <a:r>
+              <a:rPr sz="1300" b="0">
                 <a:solidFill>
                   <a:srgbClr val="101010"/>
                 </a:solidFill>
                 <a:latin typeface="Calibri"/>
               </a:rPr>
-              <a:t>P1  SYN</a:t>
+              <a:t>P1   SYN</a:t>
             </a:r>
           </a:p>
         </p:txBody>
@@ -6947,33 +7053,33 @@
         </p:nvSpPr>
         <p:spPr>
           <a:xfrm>
-            <a:off x="3200400" y="1965960"/>
-            <a:ext cx="2880360" cy="411480"/>
-          </a:xfrm>
-          <a:prstGeom prst="rect">
-            <a:avLst/>
-          </a:prstGeom>
-          <a:noFill/>
-        </p:spPr>
-        <p:txBody>
-          <a:bodyPr wrap="square" anchor="t" lIns="0" rIns="0" tIns="0" bIns="0">
-            <a:spAutoFit/>
-          </a:bodyPr>
-          <a:lstStyle/>
-          <a:p>
-            <a:pPr algn="l">
-              <a:spcAft>
-                <a:spcPts val="400"/>
-              </a:spcAft>
-            </a:pPr>
-            <a:r>
-              <a:rPr sz="1400" b="0">
+            <a:off x="3108960" y="2029968"/>
+            <a:ext cx="2834640" cy="384048"/>
+          </a:xfrm>
+          <a:prstGeom prst="rect">
+            <a:avLst/>
+          </a:prstGeom>
+          <a:noFill/>
+        </p:spPr>
+        <p:txBody>
+          <a:bodyPr wrap="square" anchor="t" lIns="0" rIns="0" tIns="0" bIns="0">
+            <a:spAutoFit/>
+          </a:bodyPr>
+          <a:lstStyle/>
+          <a:p>
+            <a:pPr algn="l">
+              <a:spcAft>
+                <a:spcPts val="400"/>
+              </a:spcAft>
+            </a:pPr>
+            <a:r>
+              <a:rPr sz="1300" b="0">
                 <a:solidFill>
                   <a:srgbClr val="101010"/>
                 </a:solidFill>
                 <a:latin typeface="Consolas"/>
               </a:rPr>
-              <a:t>SYN-ACK 181 ms</a:t>
+              <a:t>SYN-ACK in 181 ms</a:t>
             </a:r>
           </a:p>
         </p:txBody>
@@ -6986,33 +7092,33 @@
         </p:nvSpPr>
         <p:spPr>
           <a:xfrm>
-            <a:off x="6126480" y="1965960"/>
-            <a:ext cx="2971800" cy="411480"/>
-          </a:xfrm>
-          <a:prstGeom prst="rect">
-            <a:avLst/>
-          </a:prstGeom>
-          <a:noFill/>
-        </p:spPr>
-        <p:txBody>
-          <a:bodyPr wrap="square" anchor="t" lIns="0" rIns="0" tIns="0" bIns="0">
-            <a:spAutoFit/>
-          </a:bodyPr>
-          <a:lstStyle/>
-          <a:p>
-            <a:pPr algn="l">
-              <a:spcAft>
-                <a:spcPts val="400"/>
-              </a:spcAft>
-            </a:pPr>
-            <a:r>
-              <a:rPr sz="1400" b="0">
+            <a:off x="5943600" y="2029968"/>
+            <a:ext cx="3017520" cy="384048"/>
+          </a:xfrm>
+          <a:prstGeom prst="rect">
+            <a:avLst/>
+          </a:prstGeom>
+          <a:noFill/>
+        </p:spPr>
+        <p:txBody>
+          <a:bodyPr wrap="square" anchor="t" lIns="0" rIns="0" tIns="0" bIns="0">
+            <a:spAutoFit/>
+          </a:bodyPr>
+          <a:lstStyle/>
+          <a:p>
+            <a:pPr algn="l">
+              <a:spcAft>
+                <a:spcPts val="400"/>
+              </a:spcAft>
+            </a:pPr>
+            <a:r>
+              <a:rPr sz="1300" b="0">
                 <a:solidFill>
                   <a:srgbClr val="101010"/>
                 </a:solidFill>
                 <a:latin typeface="Consolas"/>
               </a:rPr>
-              <a:t>SYN-ACK 163 ms</a:t>
+              <a:t>SYN-ACK in 163 ms</a:t>
             </a:r>
           </a:p>
         </p:txBody>
@@ -7025,27 +7131,27 @@
         </p:nvSpPr>
         <p:spPr>
           <a:xfrm>
-            <a:off x="9144000" y="1965960"/>
-            <a:ext cx="2606040" cy="411480"/>
-          </a:xfrm>
-          <a:prstGeom prst="rect">
-            <a:avLst/>
-          </a:prstGeom>
-          <a:noFill/>
-        </p:spPr>
-        <p:txBody>
-          <a:bodyPr wrap="square" anchor="t" lIns="0" rIns="0" tIns="0" bIns="0">
-            <a:spAutoFit/>
-          </a:bodyPr>
-          <a:lstStyle/>
-          <a:p>
-            <a:pPr algn="l">
-              <a:spcAft>
-                <a:spcPts val="400"/>
-              </a:spcAft>
-            </a:pPr>
-            <a:r>
-              <a:rPr sz="1400" b="0">
+            <a:off x="8961120" y="2029968"/>
+            <a:ext cx="2606040" cy="384048"/>
+          </a:xfrm>
+          <a:prstGeom prst="rect">
+            <a:avLst/>
+          </a:prstGeom>
+          <a:noFill/>
+        </p:spPr>
+        <p:txBody>
+          <a:bodyPr wrap="square" anchor="t" lIns="0" rIns="0" tIns="0" bIns="0">
+            <a:spAutoFit/>
+          </a:bodyPr>
+          <a:lstStyle/>
+          <a:p>
+            <a:pPr algn="l">
+              <a:spcAft>
+                <a:spcPts val="400"/>
+              </a:spcAft>
+            </a:pPr>
+            <a:r>
+              <a:rPr sz="1300" b="0">
                 <a:solidFill>
                   <a:srgbClr val="101010"/>
                 </a:solidFill>
@@ -7064,33 +7170,33 @@
         </p:nvSpPr>
         <p:spPr>
           <a:xfrm>
-            <a:off x="548640" y="2350008"/>
-            <a:ext cx="2606040" cy="411480"/>
-          </a:xfrm>
-          <a:prstGeom prst="rect">
-            <a:avLst/>
-          </a:prstGeom>
-          <a:noFill/>
-        </p:spPr>
-        <p:txBody>
-          <a:bodyPr wrap="square" anchor="t" lIns="0" rIns="0" tIns="0" bIns="0">
-            <a:spAutoFit/>
-          </a:bodyPr>
-          <a:lstStyle/>
-          <a:p>
-            <a:pPr algn="l">
-              <a:spcAft>
-                <a:spcPts val="400"/>
-              </a:spcAft>
-            </a:pPr>
-            <a:r>
-              <a:rPr sz="1400" b="0">
+            <a:off x="502920" y="2395728"/>
+            <a:ext cx="2606040" cy="384048"/>
+          </a:xfrm>
+          <a:prstGeom prst="rect">
+            <a:avLst/>
+          </a:prstGeom>
+          <a:noFill/>
+        </p:spPr>
+        <p:txBody>
+          <a:bodyPr wrap="square" anchor="t" lIns="0" rIns="0" tIns="0" bIns="0">
+            <a:spAutoFit/>
+          </a:bodyPr>
+          <a:lstStyle/>
+          <a:p>
+            <a:pPr algn="l">
+              <a:spcAft>
+                <a:spcPts val="400"/>
+              </a:spcAft>
+            </a:pPr>
+            <a:r>
+              <a:rPr sz="1300" b="0">
                 <a:solidFill>
                   <a:srgbClr val="101010"/>
                 </a:solidFill>
                 <a:latin typeface="Calibri"/>
               </a:rPr>
-              <a:t>P2  SYN + payload</a:t>
+              <a:t>P2   SYN + 32 B payload</a:t>
             </a:r>
           </a:p>
         </p:txBody>
@@ -7103,33 +7209,33 @@
         </p:nvSpPr>
         <p:spPr>
           <a:xfrm>
-            <a:off x="3200400" y="2350008"/>
-            <a:ext cx="2880360" cy="411480"/>
-          </a:xfrm>
-          <a:prstGeom prst="rect">
-            <a:avLst/>
-          </a:prstGeom>
-          <a:noFill/>
-        </p:spPr>
-        <p:txBody>
-          <a:bodyPr wrap="square" anchor="t" lIns="0" rIns="0" tIns="0" bIns="0">
-            <a:spAutoFit/>
-          </a:bodyPr>
-          <a:lstStyle/>
-          <a:p>
-            <a:pPr algn="l">
-              <a:spcAft>
-                <a:spcPts val="400"/>
-              </a:spcAft>
-            </a:pPr>
-            <a:r>
-              <a:rPr sz="1400" b="0">
+            <a:off x="3108960" y="2395728"/>
+            <a:ext cx="2834640" cy="384048"/>
+          </a:xfrm>
+          <a:prstGeom prst="rect">
+            <a:avLst/>
+          </a:prstGeom>
+          <a:noFill/>
+        </p:spPr>
+        <p:txBody>
+          <a:bodyPr wrap="square" anchor="t" lIns="0" rIns="0" tIns="0" bIns="0">
+            <a:spAutoFit/>
+          </a:bodyPr>
+          <a:lstStyle/>
+          <a:p>
+            <a:pPr algn="l">
+              <a:spcAft>
+                <a:spcPts val="400"/>
+              </a:spcAft>
+            </a:pPr>
+            <a:r>
+              <a:rPr sz="1300" b="0">
                 <a:solidFill>
                   <a:srgbClr val="101010"/>
                 </a:solidFill>
                 <a:latin typeface="Consolas"/>
               </a:rPr>
-              <a:t>SYN-ACK + 2 B</a:t>
+              <a:t>SYN-ACK + 2 B echo</a:t>
             </a:r>
           </a:p>
         </p:txBody>
@@ -7142,27 +7248,27 @@
         </p:nvSpPr>
         <p:spPr>
           <a:xfrm>
-            <a:off x="6126480" y="2350008"/>
-            <a:ext cx="2971800" cy="411480"/>
-          </a:xfrm>
-          <a:prstGeom prst="rect">
-            <a:avLst/>
-          </a:prstGeom>
-          <a:noFill/>
-        </p:spPr>
-        <p:txBody>
-          <a:bodyPr wrap="square" anchor="t" lIns="0" rIns="0" tIns="0" bIns="0">
-            <a:spAutoFit/>
-          </a:bodyPr>
-          <a:lstStyle/>
-          <a:p>
-            <a:pPr algn="l">
-              <a:spcAft>
-                <a:spcPts val="400"/>
-              </a:spcAft>
-            </a:pPr>
-            <a:r>
-              <a:rPr sz="1400" b="0">
+            <a:off x="5943600" y="2395728"/>
+            <a:ext cx="3017520" cy="384048"/>
+          </a:xfrm>
+          <a:prstGeom prst="rect">
+            <a:avLst/>
+          </a:prstGeom>
+          <a:noFill/>
+        </p:spPr>
+        <p:txBody>
+          <a:bodyPr wrap="square" anchor="t" lIns="0" rIns="0" tIns="0" bIns="0">
+            <a:spAutoFit/>
+          </a:bodyPr>
+          <a:lstStyle/>
+          <a:p>
+            <a:pPr algn="l">
+              <a:spcAft>
+                <a:spcPts val="400"/>
+              </a:spcAft>
+            </a:pPr>
+            <a:r>
+              <a:rPr sz="1300" b="0">
                 <a:solidFill>
                   <a:srgbClr val="C9462C"/>
                 </a:solidFill>
@@ -7181,27 +7287,27 @@
         </p:nvSpPr>
         <p:spPr>
           <a:xfrm>
-            <a:off x="9144000" y="2350008"/>
-            <a:ext cx="2606040" cy="411480"/>
-          </a:xfrm>
-          <a:prstGeom prst="rect">
-            <a:avLst/>
-          </a:prstGeom>
-          <a:noFill/>
-        </p:spPr>
-        <p:txBody>
-          <a:bodyPr wrap="square" anchor="t" lIns="0" rIns="0" tIns="0" bIns="0">
-            <a:spAutoFit/>
-          </a:bodyPr>
-          <a:lstStyle/>
-          <a:p>
-            <a:pPr algn="l">
-              <a:spcAft>
-                <a:spcPts val="400"/>
-              </a:spcAft>
-            </a:pPr>
-            <a:r>
-              <a:rPr sz="1400" b="0">
+            <a:off x="8961120" y="2395728"/>
+            <a:ext cx="2606040" cy="384048"/>
+          </a:xfrm>
+          <a:prstGeom prst="rect">
+            <a:avLst/>
+          </a:prstGeom>
+          <a:noFill/>
+        </p:spPr>
+        <p:txBody>
+          <a:bodyPr wrap="square" anchor="t" lIns="0" rIns="0" tIns="0" bIns="0">
+            <a:spAutoFit/>
+          </a:bodyPr>
+          <a:lstStyle/>
+          <a:p>
+            <a:pPr algn="l">
+              <a:spcAft>
+                <a:spcPts val="400"/>
+              </a:spcAft>
+            </a:pPr>
+            <a:r>
+              <a:rPr sz="1300" b="0">
                 <a:solidFill>
                   <a:srgbClr val="101010"/>
                 </a:solidFill>
@@ -7220,33 +7326,33 @@
         </p:nvSpPr>
         <p:spPr>
           <a:xfrm>
-            <a:off x="548640" y="2734056"/>
-            <a:ext cx="2606040" cy="411480"/>
-          </a:xfrm>
-          <a:prstGeom prst="rect">
-            <a:avLst/>
-          </a:prstGeom>
-          <a:noFill/>
-        </p:spPr>
-        <p:txBody>
-          <a:bodyPr wrap="square" anchor="t" lIns="0" rIns="0" tIns="0" bIns="0">
-            <a:spAutoFit/>
-          </a:bodyPr>
-          <a:lstStyle/>
-          <a:p>
-            <a:pPr algn="l">
-              <a:spcAft>
-                <a:spcPts val="400"/>
-              </a:spcAft>
-            </a:pPr>
-            <a:r>
-              <a:rPr sz="1400" b="0">
+            <a:off x="502920" y="2761488"/>
+            <a:ext cx="2606040" cy="384048"/>
+          </a:xfrm>
+          <a:prstGeom prst="rect">
+            <a:avLst/>
+          </a:prstGeom>
+          <a:noFill/>
+        </p:spPr>
+        <p:txBody>
+          <a:bodyPr wrap="square" anchor="t" lIns="0" rIns="0" tIns="0" bIns="0">
+            <a:spAutoFit/>
+          </a:bodyPr>
+          <a:lstStyle/>
+          <a:p>
+            <a:pPr algn="l">
+              <a:spcAft>
+                <a:spcPts val="400"/>
+              </a:spcAft>
+            </a:pPr>
+            <a:r>
+              <a:rPr sz="1300" b="0">
                 <a:solidFill>
                   <a:srgbClr val="101010"/>
                 </a:solidFill>
                 <a:latin typeface="Calibri"/>
               </a:rPr>
-              <a:t>P3  bogus ACK</a:t>
+              <a:t>P3   bogus-seq ACK</a:t>
             </a:r>
           </a:p>
         </p:txBody>
@@ -7259,33 +7365,33 @@
         </p:nvSpPr>
         <p:spPr>
           <a:xfrm>
-            <a:off x="3200400" y="2734056"/>
-            <a:ext cx="2880360" cy="411480"/>
-          </a:xfrm>
-          <a:prstGeom prst="rect">
-            <a:avLst/>
-          </a:prstGeom>
-          <a:noFill/>
-        </p:spPr>
-        <p:txBody>
-          <a:bodyPr wrap="square" anchor="t" lIns="0" rIns="0" tIns="0" bIns="0">
-            <a:spAutoFit/>
-          </a:bodyPr>
-          <a:lstStyle/>
-          <a:p>
-            <a:pPr algn="l">
-              <a:spcAft>
-                <a:spcPts val="400"/>
-              </a:spcAft>
-            </a:pPr>
-            <a:r>
-              <a:rPr sz="1400" b="0">
+            <a:off x="3108960" y="2761488"/>
+            <a:ext cx="2834640" cy="384048"/>
+          </a:xfrm>
+          <a:prstGeom prst="rect">
+            <a:avLst/>
+          </a:prstGeom>
+          <a:noFill/>
+        </p:spPr>
+        <p:txBody>
+          <a:bodyPr wrap="square" anchor="t" lIns="0" rIns="0" tIns="0" bIns="0">
+            <a:spAutoFit/>
+          </a:bodyPr>
+          <a:lstStyle/>
+          <a:p>
+            <a:pPr algn="l">
+              <a:spcAft>
+                <a:spcPts val="400"/>
+              </a:spcAft>
+            </a:pPr>
+            <a:r>
+              <a:rPr sz="1300" b="0">
                 <a:solidFill>
                   <a:srgbClr val="101010"/>
                 </a:solidFill>
                 <a:latin typeface="Consolas"/>
               </a:rPr>
-              <a:t>RST 81 ms</a:t>
+              <a:t>RST in 81 ms</a:t>
             </a:r>
           </a:p>
         </p:txBody>
@@ -7298,33 +7404,33 @@
         </p:nvSpPr>
         <p:spPr>
           <a:xfrm>
-            <a:off x="6126480" y="2734056"/>
-            <a:ext cx="2971800" cy="411480"/>
-          </a:xfrm>
-          <a:prstGeom prst="rect">
-            <a:avLst/>
-          </a:prstGeom>
-          <a:noFill/>
-        </p:spPr>
-        <p:txBody>
-          <a:bodyPr wrap="square" anchor="t" lIns="0" rIns="0" tIns="0" bIns="0">
-            <a:spAutoFit/>
-          </a:bodyPr>
-          <a:lstStyle/>
-          <a:p>
-            <a:pPr algn="l">
-              <a:spcAft>
-                <a:spcPts val="400"/>
-              </a:spcAft>
-            </a:pPr>
-            <a:r>
-              <a:rPr sz="1400" b="0">
+            <a:off x="5943600" y="2761488"/>
+            <a:ext cx="3017520" cy="384048"/>
+          </a:xfrm>
+          <a:prstGeom prst="rect">
+            <a:avLst/>
+          </a:prstGeom>
+          <a:noFill/>
+        </p:spPr>
+        <p:txBody>
+          <a:bodyPr wrap="square" anchor="t" lIns="0" rIns="0" tIns="0" bIns="0">
+            <a:spAutoFit/>
+          </a:bodyPr>
+          <a:lstStyle/>
+          <a:p>
+            <a:pPr algn="l">
+              <a:spcAft>
+                <a:spcPts val="400"/>
+              </a:spcAft>
+            </a:pPr>
+            <a:r>
+              <a:rPr sz="1300" b="0">
                 <a:solidFill>
                   <a:srgbClr val="101010"/>
                 </a:solidFill>
                 <a:latin typeface="Consolas"/>
               </a:rPr>
-              <a:t>RST 91 ms</a:t>
+              <a:t>RST in 91 ms</a:t>
             </a:r>
           </a:p>
         </p:txBody>
@@ -7337,27 +7443,27 @@
         </p:nvSpPr>
         <p:spPr>
           <a:xfrm>
-            <a:off x="9144000" y="2734056"/>
-            <a:ext cx="2606040" cy="411480"/>
-          </a:xfrm>
-          <a:prstGeom prst="rect">
-            <a:avLst/>
-          </a:prstGeom>
-          <a:noFill/>
-        </p:spPr>
-        <p:txBody>
-          <a:bodyPr wrap="square" anchor="t" lIns="0" rIns="0" tIns="0" bIns="0">
-            <a:spAutoFit/>
-          </a:bodyPr>
-          <a:lstStyle/>
-          <a:p>
-            <a:pPr algn="l">
-              <a:spcAft>
-                <a:spcPts val="400"/>
-              </a:spcAft>
-            </a:pPr>
-            <a:r>
-              <a:rPr sz="1400" b="0">
+            <a:off x="8961120" y="2761488"/>
+            <a:ext cx="2606040" cy="384048"/>
+          </a:xfrm>
+          <a:prstGeom prst="rect">
+            <a:avLst/>
+          </a:prstGeom>
+          <a:noFill/>
+        </p:spPr>
+        <p:txBody>
+          <a:bodyPr wrap="square" anchor="t" lIns="0" rIns="0" tIns="0" bIns="0">
+            <a:spAutoFit/>
+          </a:bodyPr>
+          <a:lstStyle/>
+          <a:p>
+            <a:pPr algn="l">
+              <a:spcAft>
+                <a:spcPts val="400"/>
+              </a:spcAft>
+            </a:pPr>
+            <a:r>
+              <a:rPr sz="1300" b="0">
                 <a:solidFill>
                   <a:srgbClr val="101010"/>
                 </a:solidFill>
@@ -7376,33 +7482,33 @@
         </p:nvSpPr>
         <p:spPr>
           <a:xfrm>
-            <a:off x="548640" y="3118104"/>
-            <a:ext cx="2606040" cy="411480"/>
-          </a:xfrm>
-          <a:prstGeom prst="rect">
-            <a:avLst/>
-          </a:prstGeom>
-          <a:noFill/>
-        </p:spPr>
-        <p:txBody>
-          <a:bodyPr wrap="square" anchor="t" lIns="0" rIns="0" tIns="0" bIns="0">
-            <a:spAutoFit/>
-          </a:bodyPr>
-          <a:lstStyle/>
-          <a:p>
-            <a:pPr algn="l">
-              <a:spcAft>
-                <a:spcPts val="400"/>
-              </a:spcAft>
-            </a:pPr>
-            <a:r>
-              <a:rPr sz="1400" b="0">
+            <a:off x="502920" y="3127248"/>
+            <a:ext cx="2606040" cy="384048"/>
+          </a:xfrm>
+          <a:prstGeom prst="rect">
+            <a:avLst/>
+          </a:prstGeom>
+          <a:noFill/>
+        </p:spPr>
+        <p:txBody>
+          <a:bodyPr wrap="square" anchor="t" lIns="0" rIns="0" tIns="0" bIns="0">
+            <a:spAutoFit/>
+          </a:bodyPr>
+          <a:lstStyle/>
+          <a:p>
+            <a:pPr algn="l">
+              <a:spcAft>
+                <a:spcPts val="400"/>
+              </a:spcAft>
+            </a:pPr>
+            <a:r>
+              <a:rPr sz="1300" b="0">
                 <a:solidFill>
                   <a:srgbClr val="101010"/>
                 </a:solidFill>
                 <a:latin typeface="Calibri"/>
               </a:rPr>
-              <a:t>P4  WS=14 SYN</a:t>
+              <a:t>P4   SYN, WS = 14</a:t>
             </a:r>
           </a:p>
         </p:txBody>
@@ -7415,27 +7521,27 @@
         </p:nvSpPr>
         <p:spPr>
           <a:xfrm>
-            <a:off x="3200400" y="3118104"/>
-            <a:ext cx="2880360" cy="411480"/>
-          </a:xfrm>
-          <a:prstGeom prst="rect">
-            <a:avLst/>
-          </a:prstGeom>
-          <a:noFill/>
-        </p:spPr>
-        <p:txBody>
-          <a:bodyPr wrap="square" anchor="t" lIns="0" rIns="0" tIns="0" bIns="0">
-            <a:spAutoFit/>
-          </a:bodyPr>
-          <a:lstStyle/>
-          <a:p>
-            <a:pPr algn="l">
-              <a:spcAft>
-                <a:spcPts val="400"/>
-              </a:spcAft>
-            </a:pPr>
-            <a:r>
-              <a:rPr sz="1400" b="0">
+            <a:off x="3108960" y="3127248"/>
+            <a:ext cx="2834640" cy="384048"/>
+          </a:xfrm>
+          <a:prstGeom prst="rect">
+            <a:avLst/>
+          </a:prstGeom>
+          <a:noFill/>
+        </p:spPr>
+        <p:txBody>
+          <a:bodyPr wrap="square" anchor="t" lIns="0" rIns="0" tIns="0" bIns="0">
+            <a:spAutoFit/>
+          </a:bodyPr>
+          <a:lstStyle/>
+          <a:p>
+            <a:pPr algn="l">
+              <a:spcAft>
+                <a:spcPts val="400"/>
+              </a:spcAft>
+            </a:pPr>
+            <a:r>
+              <a:rPr sz="1300" b="0">
                 <a:solidFill>
                   <a:srgbClr val="101010"/>
                 </a:solidFill>
@@ -7454,27 +7560,27 @@
         </p:nvSpPr>
         <p:spPr>
           <a:xfrm>
-            <a:off x="6126480" y="3118104"/>
-            <a:ext cx="2971800" cy="411480"/>
-          </a:xfrm>
-          <a:prstGeom prst="rect">
-            <a:avLst/>
-          </a:prstGeom>
-          <a:noFill/>
-        </p:spPr>
-        <p:txBody>
-          <a:bodyPr wrap="square" anchor="t" lIns="0" rIns="0" tIns="0" bIns="0">
-            <a:spAutoFit/>
-          </a:bodyPr>
-          <a:lstStyle/>
-          <a:p>
-            <a:pPr algn="l">
-              <a:spcAft>
-                <a:spcPts val="400"/>
-              </a:spcAft>
-            </a:pPr>
-            <a:r>
-              <a:rPr sz="1400" b="0">
+            <a:off x="5943600" y="3127248"/>
+            <a:ext cx="3017520" cy="384048"/>
+          </a:xfrm>
+          <a:prstGeom prst="rect">
+            <a:avLst/>
+          </a:prstGeom>
+          <a:noFill/>
+        </p:spPr>
+        <p:txBody>
+          <a:bodyPr wrap="square" anchor="t" lIns="0" rIns="0" tIns="0" bIns="0">
+            <a:spAutoFit/>
+          </a:bodyPr>
+          <a:lstStyle/>
+          <a:p>
+            <a:pPr algn="l">
+              <a:spcAft>
+                <a:spcPts val="400"/>
+              </a:spcAft>
+            </a:pPr>
+            <a:r>
+              <a:rPr sz="1300" b="0">
                 <a:solidFill>
                   <a:srgbClr val="C9462C"/>
                 </a:solidFill>
@@ -7493,27 +7599,27 @@
         </p:nvSpPr>
         <p:spPr>
           <a:xfrm>
-            <a:off x="9144000" y="3118104"/>
-            <a:ext cx="2606040" cy="411480"/>
-          </a:xfrm>
-          <a:prstGeom prst="rect">
-            <a:avLst/>
-          </a:prstGeom>
-          <a:noFill/>
-        </p:spPr>
-        <p:txBody>
-          <a:bodyPr wrap="square" anchor="t" lIns="0" rIns="0" tIns="0" bIns="0">
-            <a:spAutoFit/>
-          </a:bodyPr>
-          <a:lstStyle/>
-          <a:p>
-            <a:pPr algn="l">
-              <a:spcAft>
-                <a:spcPts val="400"/>
-              </a:spcAft>
-            </a:pPr>
-            <a:r>
-              <a:rPr sz="1400" b="0">
+            <a:off x="8961120" y="3127248"/>
+            <a:ext cx="2606040" cy="384048"/>
+          </a:xfrm>
+          <a:prstGeom prst="rect">
+            <a:avLst/>
+          </a:prstGeom>
+          <a:noFill/>
+        </p:spPr>
+        <p:txBody>
+          <a:bodyPr wrap="square" anchor="t" lIns="0" rIns="0" tIns="0" bIns="0">
+            <a:spAutoFit/>
+          </a:bodyPr>
+          <a:lstStyle/>
+          <a:p>
+            <a:pPr algn="l">
+              <a:spcAft>
+                <a:spcPts val="400"/>
+              </a:spcAft>
+            </a:pPr>
+            <a:r>
+              <a:rPr sz="1300" b="0">
                 <a:solidFill>
                   <a:srgbClr val="101010"/>
                 </a:solidFill>
@@ -7532,33 +7638,33 @@
         </p:nvSpPr>
         <p:spPr>
           <a:xfrm>
-            <a:off x="548640" y="3502152"/>
-            <a:ext cx="2606040" cy="411480"/>
-          </a:xfrm>
-          <a:prstGeom prst="rect">
-            <a:avLst/>
-          </a:prstGeom>
-          <a:noFill/>
-        </p:spPr>
-        <p:txBody>
-          <a:bodyPr wrap="square" anchor="t" lIns="0" rIns="0" tIns="0" bIns="0">
-            <a:spAutoFit/>
-          </a:bodyPr>
-          <a:lstStyle/>
-          <a:p>
-            <a:pPr algn="l">
-              <a:spcAft>
-                <a:spcPts val="400"/>
-              </a:spcAft>
-            </a:pPr>
-            <a:r>
-              <a:rPr sz="1400" b="0">
+            <a:off x="502920" y="3493008"/>
+            <a:ext cx="2606040" cy="384048"/>
+          </a:xfrm>
+          <a:prstGeom prst="rect">
+            <a:avLst/>
+          </a:prstGeom>
+          <a:noFill/>
+        </p:spPr>
+        <p:txBody>
+          <a:bodyPr wrap="square" anchor="t" lIns="0" rIns="0" tIns="0" bIns="0">
+            <a:spAutoFit/>
+          </a:bodyPr>
+          <a:lstStyle/>
+          <a:p>
+            <a:pPr algn="l">
+              <a:spcAft>
+                <a:spcPts val="400"/>
+              </a:spcAft>
+            </a:pPr>
+            <a:r>
+              <a:rPr sz="1300" b="0">
                 <a:solidFill>
                   <a:srgbClr val="101010"/>
                 </a:solidFill>
                 <a:latin typeface="Calibri"/>
               </a:rPr>
-              <a:t>P5  FIN to unopened</a:t>
+              <a:t>P5   FIN to unopened</a:t>
             </a:r>
           </a:p>
         </p:txBody>
@@ -7571,27 +7677,27 @@
         </p:nvSpPr>
         <p:spPr>
           <a:xfrm>
-            <a:off x="3200400" y="3502152"/>
-            <a:ext cx="2880360" cy="411480"/>
-          </a:xfrm>
-          <a:prstGeom prst="rect">
-            <a:avLst/>
-          </a:prstGeom>
-          <a:noFill/>
-        </p:spPr>
-        <p:txBody>
-          <a:bodyPr wrap="square" anchor="t" lIns="0" rIns="0" tIns="0" bIns="0">
-            <a:spAutoFit/>
-          </a:bodyPr>
-          <a:lstStyle/>
-          <a:p>
-            <a:pPr algn="l">
-              <a:spcAft>
-                <a:spcPts val="400"/>
-              </a:spcAft>
-            </a:pPr>
-            <a:r>
-              <a:rPr sz="1400" b="0">
+            <a:off x="3108960" y="3493008"/>
+            <a:ext cx="2834640" cy="384048"/>
+          </a:xfrm>
+          <a:prstGeom prst="rect">
+            <a:avLst/>
+          </a:prstGeom>
+          <a:noFill/>
+        </p:spPr>
+        <p:txBody>
+          <a:bodyPr wrap="square" anchor="t" lIns="0" rIns="0" tIns="0" bIns="0">
+            <a:spAutoFit/>
+          </a:bodyPr>
+          <a:lstStyle/>
+          <a:p>
+            <a:pPr algn="l">
+              <a:spcAft>
+                <a:spcPts val="400"/>
+              </a:spcAft>
+            </a:pPr>
+            <a:r>
+              <a:rPr sz="1300" b="0">
                 <a:solidFill>
                   <a:srgbClr val="101010"/>
                 </a:solidFill>
@@ -7610,27 +7716,27 @@
         </p:nvSpPr>
         <p:spPr>
           <a:xfrm>
-            <a:off x="6126480" y="3502152"/>
-            <a:ext cx="2971800" cy="411480"/>
-          </a:xfrm>
-          <a:prstGeom prst="rect">
-            <a:avLst/>
-          </a:prstGeom>
-          <a:noFill/>
-        </p:spPr>
-        <p:txBody>
-          <a:bodyPr wrap="square" anchor="t" lIns="0" rIns="0" tIns="0" bIns="0">
-            <a:spAutoFit/>
-          </a:bodyPr>
-          <a:lstStyle/>
-          <a:p>
-            <a:pPr algn="l">
-              <a:spcAft>
-                <a:spcPts val="400"/>
-              </a:spcAft>
-            </a:pPr>
-            <a:r>
-              <a:rPr sz="1400" b="0">
+            <a:off x="5943600" y="3493008"/>
+            <a:ext cx="3017520" cy="384048"/>
+          </a:xfrm>
+          <a:prstGeom prst="rect">
+            <a:avLst/>
+          </a:prstGeom>
+          <a:noFill/>
+        </p:spPr>
+        <p:txBody>
+          <a:bodyPr wrap="square" anchor="t" lIns="0" rIns="0" tIns="0" bIns="0">
+            <a:spAutoFit/>
+          </a:bodyPr>
+          <a:lstStyle/>
+          <a:p>
+            <a:pPr algn="l">
+              <a:spcAft>
+                <a:spcPts val="400"/>
+              </a:spcAft>
+            </a:pPr>
+            <a:r>
+              <a:rPr sz="1300" b="0">
                 <a:solidFill>
                   <a:srgbClr val="C9462C"/>
                 </a:solidFill>
@@ -7649,27 +7755,27 @@
         </p:nvSpPr>
         <p:spPr>
           <a:xfrm>
-            <a:off x="9144000" y="3502152"/>
-            <a:ext cx="2606040" cy="411480"/>
-          </a:xfrm>
-          <a:prstGeom prst="rect">
-            <a:avLst/>
-          </a:prstGeom>
-          <a:noFill/>
-        </p:spPr>
-        <p:txBody>
-          <a:bodyPr wrap="square" anchor="t" lIns="0" rIns="0" tIns="0" bIns="0">
-            <a:spAutoFit/>
-          </a:bodyPr>
-          <a:lstStyle/>
-          <a:p>
-            <a:pPr algn="l">
-              <a:spcAft>
-                <a:spcPts val="400"/>
-              </a:spcAft>
-            </a:pPr>
-            <a:r>
-              <a:rPr sz="1400" b="0">
+            <a:off x="8961120" y="3493008"/>
+            <a:ext cx="2606040" cy="384048"/>
+          </a:xfrm>
+          <a:prstGeom prst="rect">
+            <a:avLst/>
+          </a:prstGeom>
+          <a:noFill/>
+        </p:spPr>
+        <p:txBody>
+          <a:bodyPr wrap="square" anchor="t" lIns="0" rIns="0" tIns="0" bIns="0">
+            <a:spAutoFit/>
+          </a:bodyPr>
+          <a:lstStyle/>
+          <a:p>
+            <a:pPr algn="l">
+              <a:spcAft>
+                <a:spcPts val="400"/>
+              </a:spcAft>
+            </a:pPr>
+            <a:r>
+              <a:rPr sz="1300" b="0">
                 <a:solidFill>
                   <a:srgbClr val="101010"/>
                 </a:solidFill>
@@ -7688,8 +7794,8 @@
         </p:nvSpPr>
         <p:spPr>
           <a:xfrm>
-            <a:off x="548640" y="4023360"/>
-            <a:ext cx="11064240" cy="31750"/>
+            <a:off x="502920" y="3995928"/>
+            <a:ext cx="11185855" cy="31750"/>
           </a:xfrm>
           <a:prstGeom prst="rect">
             <a:avLst/>
@@ -7731,27 +7837,27 @@
         </p:nvSpPr>
         <p:spPr>
           <a:xfrm>
-            <a:off x="548640" y="4160520"/>
-            <a:ext cx="2606040" cy="365760"/>
-          </a:xfrm>
-          <a:prstGeom prst="rect">
-            <a:avLst/>
-          </a:prstGeom>
-          <a:noFill/>
-        </p:spPr>
-        <p:txBody>
-          <a:bodyPr wrap="square" anchor="t" lIns="0" rIns="0" tIns="0" bIns="0">
-            <a:spAutoFit/>
-          </a:bodyPr>
-          <a:lstStyle/>
-          <a:p>
-            <a:pPr algn="l">
-              <a:spcAft>
-                <a:spcPts val="400"/>
-              </a:spcAft>
-            </a:pPr>
-            <a:r>
-              <a:rPr sz="1400" b="1">
+            <a:off x="502920" y="4160520"/>
+            <a:ext cx="2606040" cy="384048"/>
+          </a:xfrm>
+          <a:prstGeom prst="rect">
+            <a:avLst/>
+          </a:prstGeom>
+          <a:noFill/>
+        </p:spPr>
+        <p:txBody>
+          <a:bodyPr wrap="square" anchor="t" lIns="0" rIns="0" tIns="0" bIns="0">
+            <a:spAutoFit/>
+          </a:bodyPr>
+          <a:lstStyle/>
+          <a:p>
+            <a:pPr algn="l">
+              <a:spcAft>
+                <a:spcPts val="400"/>
+              </a:spcAft>
+            </a:pPr>
+            <a:r>
+              <a:rPr sz="1300" b="1">
                 <a:solidFill>
                   <a:srgbClr val="102A43"/>
                 </a:solidFill>
@@ -7770,27 +7876,27 @@
         </p:nvSpPr>
         <p:spPr>
           <a:xfrm>
-            <a:off x="3200400" y="4160520"/>
-            <a:ext cx="2880360" cy="365760"/>
-          </a:xfrm>
-          <a:prstGeom prst="rect">
-            <a:avLst/>
-          </a:prstGeom>
-          <a:noFill/>
-        </p:spPr>
-        <p:txBody>
-          <a:bodyPr wrap="square" anchor="t" lIns="0" rIns="0" tIns="0" bIns="0">
-            <a:spAutoFit/>
-          </a:bodyPr>
-          <a:lstStyle/>
-          <a:p>
-            <a:pPr algn="l">
-              <a:spcAft>
-                <a:spcPts val="400"/>
-              </a:spcAft>
-            </a:pPr>
-            <a:r>
-              <a:rPr sz="1400" b="1">
+            <a:off x="3108960" y="4160520"/>
+            <a:ext cx="2834640" cy="384048"/>
+          </a:xfrm>
+          <a:prstGeom prst="rect">
+            <a:avLst/>
+          </a:prstGeom>
+          <a:noFill/>
+        </p:spPr>
+        <p:txBody>
+          <a:bodyPr wrap="square" anchor="t" lIns="0" rIns="0" tIns="0" bIns="0">
+            <a:spAutoFit/>
+          </a:bodyPr>
+          <a:lstStyle/>
+          <a:p>
+            <a:pPr algn="l">
+              <a:spcAft>
+                <a:spcPts val="400"/>
+              </a:spcAft>
+            </a:pPr>
+            <a:r>
+              <a:rPr sz="1300" b="1">
                 <a:solidFill>
                   <a:srgbClr val="101010"/>
                 </a:solidFill>
@@ -7809,27 +7915,27 @@
         </p:nvSpPr>
         <p:spPr>
           <a:xfrm>
-            <a:off x="6126480" y="4160520"/>
-            <a:ext cx="2971800" cy="365760"/>
-          </a:xfrm>
-          <a:prstGeom prst="rect">
-            <a:avLst/>
-          </a:prstGeom>
-          <a:noFill/>
-        </p:spPr>
-        <p:txBody>
-          <a:bodyPr wrap="square" anchor="t" lIns="0" rIns="0" tIns="0" bIns="0">
-            <a:spAutoFit/>
-          </a:bodyPr>
-          <a:lstStyle/>
-          <a:p>
-            <a:pPr algn="l">
-              <a:spcAft>
-                <a:spcPts val="400"/>
-              </a:spcAft>
-            </a:pPr>
-            <a:r>
-              <a:rPr sz="1400" b="1">
+            <a:off x="5943600" y="4160520"/>
+            <a:ext cx="3017520" cy="384048"/>
+          </a:xfrm>
+          <a:prstGeom prst="rect">
+            <a:avLst/>
+          </a:prstGeom>
+          <a:noFill/>
+        </p:spPr>
+        <p:txBody>
+          <a:bodyPr wrap="square" anchor="t" lIns="0" rIns="0" tIns="0" bIns="0">
+            <a:spAutoFit/>
+          </a:bodyPr>
+          <a:lstStyle/>
+          <a:p>
+            <a:pPr algn="l">
+              <a:spcAft>
+                <a:spcPts val="400"/>
+              </a:spcAft>
+            </a:pPr>
+            <a:r>
+              <a:rPr sz="1300" b="1">
                 <a:solidFill>
                   <a:srgbClr val="101010"/>
                 </a:solidFill>
@@ -7848,27 +7954,27 @@
         </p:nvSpPr>
         <p:spPr>
           <a:xfrm>
-            <a:off x="9144000" y="4160520"/>
-            <a:ext cx="2606040" cy="365760"/>
-          </a:xfrm>
-          <a:prstGeom prst="rect">
-            <a:avLst/>
-          </a:prstGeom>
-          <a:noFill/>
-        </p:spPr>
-        <p:txBody>
-          <a:bodyPr wrap="square" anchor="t" lIns="0" rIns="0" tIns="0" bIns="0">
-            <a:spAutoFit/>
-          </a:bodyPr>
-          <a:lstStyle/>
-          <a:p>
-            <a:pPr algn="l">
-              <a:spcAft>
-                <a:spcPts val="400"/>
-              </a:spcAft>
-            </a:pPr>
-            <a:r>
-              <a:rPr sz="1400" b="1">
+            <a:off x="8961120" y="4160520"/>
+            <a:ext cx="2606040" cy="384048"/>
+          </a:xfrm>
+          <a:prstGeom prst="rect">
+            <a:avLst/>
+          </a:prstGeom>
+          <a:noFill/>
+        </p:spPr>
+        <p:txBody>
+          <a:bodyPr wrap="square" anchor="t" lIns="0" rIns="0" tIns="0" bIns="0">
+            <a:spAutoFit/>
+          </a:bodyPr>
+          <a:lstStyle/>
+          <a:p>
+            <a:pPr algn="l">
+              <a:spcAft>
+                <a:spcPts val="400"/>
+              </a:spcAft>
+            </a:pPr>
+            <a:r>
+              <a:rPr sz="1300" b="1">
                 <a:solidFill>
                   <a:srgbClr val="101010"/>
                 </a:solidFill>
@@ -7887,27 +7993,27 @@
         </p:nvSpPr>
         <p:spPr>
           <a:xfrm>
-            <a:off x="548640" y="4544568"/>
-            <a:ext cx="2606040" cy="365760"/>
-          </a:xfrm>
-          <a:prstGeom prst="rect">
-            <a:avLst/>
-          </a:prstGeom>
-          <a:noFill/>
-        </p:spPr>
-        <p:txBody>
-          <a:bodyPr wrap="square" anchor="t" lIns="0" rIns="0" tIns="0" bIns="0">
-            <a:spAutoFit/>
-          </a:bodyPr>
-          <a:lstStyle/>
-          <a:p>
-            <a:pPr algn="l">
-              <a:spcAft>
-                <a:spcPts val="400"/>
-              </a:spcAft>
-            </a:pPr>
-            <a:r>
-              <a:rPr sz="1400" b="1">
+            <a:off x="502920" y="4526280"/>
+            <a:ext cx="2606040" cy="384048"/>
+          </a:xfrm>
+          <a:prstGeom prst="rect">
+            <a:avLst/>
+          </a:prstGeom>
+          <a:noFill/>
+        </p:spPr>
+        <p:txBody>
+          <a:bodyPr wrap="square" anchor="t" lIns="0" rIns="0" tIns="0" bIns="0">
+            <a:spAutoFit/>
+          </a:bodyPr>
+          <a:lstStyle/>
+          <a:p>
+            <a:pPr algn="l">
+              <a:spcAft>
+                <a:spcPts val="400"/>
+              </a:spcAft>
+            </a:pPr>
+            <a:r>
+              <a:rPr sz="1300" b="1">
                 <a:solidFill>
                   <a:srgbClr val="102A43"/>
                 </a:solidFill>
@@ -7926,27 +8032,27 @@
         </p:nvSpPr>
         <p:spPr>
           <a:xfrm>
-            <a:off x="3200400" y="4544568"/>
-            <a:ext cx="2880360" cy="365760"/>
-          </a:xfrm>
-          <a:prstGeom prst="rect">
-            <a:avLst/>
-          </a:prstGeom>
-          <a:noFill/>
-        </p:spPr>
-        <p:txBody>
-          <a:bodyPr wrap="square" anchor="t" lIns="0" rIns="0" tIns="0" bIns="0">
-            <a:spAutoFit/>
-          </a:bodyPr>
-          <a:lstStyle/>
-          <a:p>
-            <a:pPr algn="l">
-              <a:spcAft>
-                <a:spcPts val="400"/>
-              </a:spcAft>
-            </a:pPr>
-            <a:r>
-              <a:rPr sz="1400" b="1">
+            <a:off x="3108960" y="4526280"/>
+            <a:ext cx="2834640" cy="384048"/>
+          </a:xfrm>
+          <a:prstGeom prst="rect">
+            <a:avLst/>
+          </a:prstGeom>
+          <a:noFill/>
+        </p:spPr>
+        <p:txBody>
+          <a:bodyPr wrap="square" anchor="t" lIns="0" rIns="0" tIns="0" bIns="0">
+            <a:spAutoFit/>
+          </a:bodyPr>
+          <a:lstStyle/>
+          <a:p>
+            <a:pPr algn="l">
+              <a:spcAft>
+                <a:spcPts val="400"/>
+              </a:spcAft>
+            </a:pPr>
+            <a:r>
+              <a:rPr sz="1300" b="1">
                 <a:solidFill>
                   <a:srgbClr val="101010"/>
                 </a:solidFill>
@@ -7965,27 +8071,27 @@
         </p:nvSpPr>
         <p:spPr>
           <a:xfrm>
-            <a:off x="6126480" y="4544568"/>
-            <a:ext cx="2971800" cy="365760"/>
-          </a:xfrm>
-          <a:prstGeom prst="rect">
-            <a:avLst/>
-          </a:prstGeom>
-          <a:noFill/>
-        </p:spPr>
-        <p:txBody>
-          <a:bodyPr wrap="square" anchor="t" lIns="0" rIns="0" tIns="0" bIns="0">
-            <a:spAutoFit/>
-          </a:bodyPr>
-          <a:lstStyle/>
-          <a:p>
-            <a:pPr algn="l">
-              <a:spcAft>
-                <a:spcPts val="400"/>
-              </a:spcAft>
-            </a:pPr>
-            <a:r>
-              <a:rPr sz="1400" b="1">
+            <a:off x="5943600" y="4526280"/>
+            <a:ext cx="3017520" cy="384048"/>
+          </a:xfrm>
+          <a:prstGeom prst="rect">
+            <a:avLst/>
+          </a:prstGeom>
+          <a:noFill/>
+        </p:spPr>
+        <p:txBody>
+          <a:bodyPr wrap="square" anchor="t" lIns="0" rIns="0" tIns="0" bIns="0">
+            <a:spAutoFit/>
+          </a:bodyPr>
+          <a:lstStyle/>
+          <a:p>
+            <a:pPr algn="l">
+              <a:spcAft>
+                <a:spcPts val="400"/>
+              </a:spcAft>
+            </a:pPr>
+            <a:r>
+              <a:rPr sz="1300" b="1">
                 <a:solidFill>
                   <a:srgbClr val="C9462C"/>
                 </a:solidFill>
@@ -8004,27 +8110,27 @@
         </p:nvSpPr>
         <p:spPr>
           <a:xfrm>
-            <a:off x="9144000" y="4544568"/>
-            <a:ext cx="2606040" cy="365760"/>
-          </a:xfrm>
-          <a:prstGeom prst="rect">
-            <a:avLst/>
-          </a:prstGeom>
-          <a:noFill/>
-        </p:spPr>
-        <p:txBody>
-          <a:bodyPr wrap="square" anchor="t" lIns="0" rIns="0" tIns="0" bIns="0">
-            <a:spAutoFit/>
-          </a:bodyPr>
-          <a:lstStyle/>
-          <a:p>
-            <a:pPr algn="l">
-              <a:spcAft>
-                <a:spcPts val="400"/>
-              </a:spcAft>
-            </a:pPr>
-            <a:r>
-              <a:rPr sz="1400" b="1">
+            <a:off x="8961120" y="4526280"/>
+            <a:ext cx="2606040" cy="384048"/>
+          </a:xfrm>
+          <a:prstGeom prst="rect">
+            <a:avLst/>
+          </a:prstGeom>
+          <a:noFill/>
+        </p:spPr>
+        <p:txBody>
+          <a:bodyPr wrap="square" anchor="t" lIns="0" rIns="0" tIns="0" bIns="0">
+            <a:spAutoFit/>
+          </a:bodyPr>
+          <a:lstStyle/>
+          <a:p>
+            <a:pPr algn="l">
+              <a:spcAft>
+                <a:spcPts val="400"/>
+              </a:spcAft>
+            </a:pPr>
+            <a:r>
+              <a:rPr sz="1300" b="1">
                 <a:solidFill>
                   <a:srgbClr val="101010"/>
                 </a:solidFill>
@@ -8043,27 +8149,27 @@
         </p:nvSpPr>
         <p:spPr>
           <a:xfrm>
-            <a:off x="548640" y="5989320"/>
-            <a:ext cx="11064240" cy="457200"/>
-          </a:xfrm>
-          <a:prstGeom prst="rect">
-            <a:avLst/>
-          </a:prstGeom>
-          <a:noFill/>
-        </p:spPr>
-        <p:txBody>
-          <a:bodyPr wrap="square" anchor="t" lIns="0" rIns="0" tIns="0" bIns="0">
-            <a:spAutoFit/>
-          </a:bodyPr>
-          <a:lstStyle/>
-          <a:p>
-            <a:pPr algn="l">
-              <a:spcAft>
-                <a:spcPts val="400"/>
-              </a:spcAft>
-            </a:pPr>
-            <a:r>
-              <a:rPr sz="1600" b="0">
+            <a:off x="502920" y="5669280"/>
+            <a:ext cx="11185855" cy="365760"/>
+          </a:xfrm>
+          <a:prstGeom prst="rect">
+            <a:avLst/>
+          </a:prstGeom>
+          <a:noFill/>
+        </p:spPr>
+        <p:txBody>
+          <a:bodyPr wrap="square" anchor="t" lIns="0" rIns="0" tIns="0" bIns="0">
+            <a:spAutoFit/>
+          </a:bodyPr>
+          <a:lstStyle/>
+          <a:p>
+            <a:pPr algn="l">
+              <a:spcAft>
+                <a:spcPts val="400"/>
+              </a:spcAft>
+            </a:pPr>
+            <a:r>
+              <a:rPr sz="1400" b="0">
                 <a:solidFill>
                   <a:srgbClr val="555555"/>
                 </a:solidFill>
@@ -8082,8 +8188,8 @@
         </p:nvSpPr>
         <p:spPr>
           <a:xfrm>
-            <a:off x="548640" y="6446520"/>
-            <a:ext cx="7315200" cy="274320"/>
+            <a:off x="502920" y="6263640"/>
+            <a:ext cx="8229600" cy="274320"/>
           </a:xfrm>
           <a:prstGeom prst="rect">
             <a:avLst/>
@@ -8108,7 +8214,7 @@
                 </a:solidFill>
                 <a:latin typeface="Calibri"/>
               </a:rPr>
-              <a:t>Schiavone &amp; Johannsen — CYB623 — Pace University</a:t>
+              <a:t>Schiavone &amp; Johannsen   ·   CYB623   ·   Pace University</a:t>
             </a:r>
           </a:p>
         </p:txBody>
@@ -8121,8 +8227,8 @@
         </p:nvSpPr>
         <p:spPr>
           <a:xfrm>
-            <a:off x="548640" y="6446520"/>
-            <a:ext cx="7315200" cy="274320"/>
+            <a:off x="502920" y="6263640"/>
+            <a:ext cx="8229600" cy="274320"/>
           </a:xfrm>
           <a:prstGeom prst="rect">
             <a:avLst/>
@@ -8147,7 +8253,7 @@
                 </a:solidFill>
                 <a:latin typeface="Calibri"/>
               </a:rPr>
-              <a:t>Schiavone &amp; Johannsen — CYB623 — Pace University</a:t>
+              <a:t>Schiavone &amp; Johannsen   ·   CYB623   ·   Pace University</a:t>
             </a:r>
           </a:p>
         </p:txBody>
@@ -8160,8 +8266,8 @@
         </p:nvSpPr>
         <p:spPr>
           <a:xfrm>
-            <a:off x="10515600" y="6446520"/>
-            <a:ext cx="1188720" cy="274320"/>
+            <a:off x="10362895" y="6263640"/>
+            <a:ext cx="1371600" cy="274320"/>
           </a:xfrm>
           <a:prstGeom prst="rect">
             <a:avLst/>
@@ -8217,33 +8323,33 @@
         </p:nvSpPr>
         <p:spPr>
           <a:xfrm>
-            <a:off x="548640" y="320040"/>
-            <a:ext cx="10515600" cy="640080"/>
-          </a:xfrm>
-          <a:prstGeom prst="rect">
-            <a:avLst/>
-          </a:prstGeom>
-          <a:noFill/>
-        </p:spPr>
-        <p:txBody>
-          <a:bodyPr wrap="square" anchor="t" lIns="0" rIns="0" tIns="0" bIns="0">
-            <a:spAutoFit/>
-          </a:bodyPr>
-          <a:lstStyle/>
-          <a:p>
-            <a:pPr algn="l">
-              <a:spcAft>
-                <a:spcPts val="400"/>
-              </a:spcAft>
-            </a:pPr>
-            <a:r>
-              <a:rPr sz="3200" b="1">
+            <a:off x="502920" y="274320"/>
+            <a:ext cx="11185855" cy="731520"/>
+          </a:xfrm>
+          <a:prstGeom prst="rect">
+            <a:avLst/>
+          </a:prstGeom>
+          <a:noFill/>
+        </p:spPr>
+        <p:txBody>
+          <a:bodyPr wrap="square" anchor="t" lIns="0" rIns="0" tIns="0" bIns="0">
+            <a:spAutoFit/>
+          </a:bodyPr>
+          <a:lstStyle/>
+          <a:p>
+            <a:pPr algn="l">
+              <a:spcAft>
+                <a:spcPts val="400"/>
+              </a:spcAft>
+            </a:pPr>
+            <a:r>
+              <a:rPr sz="2800" b="1">
                 <a:solidFill>
                   <a:srgbClr val="102A43"/>
                 </a:solidFill>
                 <a:latin typeface="Calibri"/>
               </a:rPr>
-              <a:t>C2 — Two features carry the entire signal</a:t>
+              <a:t>C2: two features carry the entire signal</a:t>
             </a:r>
           </a:p>
         </p:txBody>
@@ -8256,7 +8362,7 @@
         </p:nvSpPr>
         <p:spPr>
           <a:xfrm>
-            <a:off x="548640" y="960120"/>
+            <a:off x="502920" y="1005840"/>
             <a:ext cx="914400" cy="31750"/>
           </a:xfrm>
           <a:prstGeom prst="rect">
@@ -8299,33 +8405,33 @@
         </p:nvSpPr>
         <p:spPr>
           <a:xfrm>
-            <a:off x="548640" y="1051560"/>
-            <a:ext cx="10515600" cy="457200"/>
-          </a:xfrm>
-          <a:prstGeom prst="rect">
-            <a:avLst/>
-          </a:prstGeom>
-          <a:noFill/>
-        </p:spPr>
-        <p:txBody>
-          <a:bodyPr wrap="square" anchor="t" lIns="0" rIns="0" tIns="0" bIns="0">
-            <a:spAutoFit/>
-          </a:bodyPr>
-          <a:lstStyle/>
-          <a:p>
-            <a:pPr algn="l">
-              <a:spcAft>
-                <a:spcPts val="400"/>
-              </a:spcAft>
-            </a:pPr>
-            <a:r>
-              <a:rPr sz="1600" b="0">
+            <a:off x="502920" y="1078992"/>
+            <a:ext cx="11185855" cy="365760"/>
+          </a:xfrm>
+          <a:prstGeom prst="rect">
+            <a:avLst/>
+          </a:prstGeom>
+          <a:noFill/>
+        </p:spPr>
+        <p:txBody>
+          <a:bodyPr wrap="square" anchor="t" lIns="0" rIns="0" tIns="0" bIns="0">
+            <a:spAutoFit/>
+          </a:bodyPr>
+          <a:lstStyle/>
+          <a:p>
+            <a:pPr algn="l">
+              <a:spcAft>
+                <a:spcPts val="400"/>
+              </a:spcAft>
+            </a:pPr>
+            <a:r>
+              <a:rPr sz="1400" b="0">
                 <a:solidFill>
                   <a:srgbClr val="555555"/>
                 </a:solidFill>
                 <a:latin typeface="Calibri"/>
               </a:rPr>
-              <a:t>Class means across 24 WG flows and 1058 ISCXVPN2016 non-VPN flows</a:t>
+              <a:t>Class means across 24 WireGuard flows and 1058 ISCXVPN2016 non-VPN flows</a:t>
             </a:r>
           </a:p>
         </p:txBody>
@@ -8338,27 +8444,27 @@
         </p:nvSpPr>
         <p:spPr>
           <a:xfrm>
-            <a:off x="548640" y="1463040"/>
-            <a:ext cx="2194560" cy="365760"/>
-          </a:xfrm>
-          <a:prstGeom prst="rect">
-            <a:avLst/>
-          </a:prstGeom>
-          <a:noFill/>
-        </p:spPr>
-        <p:txBody>
-          <a:bodyPr wrap="square" anchor="t" lIns="0" rIns="0" tIns="0" bIns="0">
-            <a:spAutoFit/>
-          </a:bodyPr>
-          <a:lstStyle/>
-          <a:p>
-            <a:pPr algn="l">
-              <a:spcAft>
-                <a:spcPts val="400"/>
-              </a:spcAft>
-            </a:pPr>
-            <a:r>
-              <a:rPr sz="1400" b="1">
+            <a:off x="502920" y="1554480"/>
+            <a:ext cx="1920240" cy="292608"/>
+          </a:xfrm>
+          <a:prstGeom prst="rect">
+            <a:avLst/>
+          </a:prstGeom>
+          <a:noFill/>
+        </p:spPr>
+        <p:txBody>
+          <a:bodyPr wrap="square" anchor="t" lIns="0" rIns="0" tIns="0" bIns="0">
+            <a:spAutoFit/>
+          </a:bodyPr>
+          <a:lstStyle/>
+          <a:p>
+            <a:pPr algn="l">
+              <a:spcAft>
+                <a:spcPts val="400"/>
+              </a:spcAft>
+            </a:pPr>
+            <a:r>
+              <a:rPr sz="1200" b="1">
                 <a:solidFill>
                   <a:srgbClr val="102A43"/>
                 </a:solidFill>
@@ -8377,27 +8483,27 @@
         </p:nvSpPr>
         <p:spPr>
           <a:xfrm>
-            <a:off x="2743200" y="1463040"/>
-            <a:ext cx="2194560" cy="365760"/>
-          </a:xfrm>
-          <a:prstGeom prst="rect">
-            <a:avLst/>
-          </a:prstGeom>
-          <a:noFill/>
-        </p:spPr>
-        <p:txBody>
-          <a:bodyPr wrap="square" anchor="t" lIns="0" rIns="0" tIns="0" bIns="0">
-            <a:spAutoFit/>
-          </a:bodyPr>
-          <a:lstStyle/>
-          <a:p>
-            <a:pPr algn="l">
-              <a:spcAft>
-                <a:spcPts val="400"/>
-              </a:spcAft>
-            </a:pPr>
-            <a:r>
-              <a:rPr sz="1400" b="1">
+            <a:off x="2468880" y="1554480"/>
+            <a:ext cx="1783080" cy="292608"/>
+          </a:xfrm>
+          <a:prstGeom prst="rect">
+            <a:avLst/>
+          </a:prstGeom>
+          <a:noFill/>
+        </p:spPr>
+        <p:txBody>
+          <a:bodyPr wrap="square" anchor="t" lIns="0" rIns="0" tIns="0" bIns="0">
+            <a:spAutoFit/>
+          </a:bodyPr>
+          <a:lstStyle/>
+          <a:p>
+            <a:pPr algn="l">
+              <a:spcAft>
+                <a:spcPts val="400"/>
+              </a:spcAft>
+            </a:pPr>
+            <a:r>
+              <a:rPr sz="1200" b="1">
                 <a:solidFill>
                   <a:srgbClr val="102A43"/>
                 </a:solidFill>
@@ -8416,27 +8522,27 @@
         </p:nvSpPr>
         <p:spPr>
           <a:xfrm>
-            <a:off x="4937760" y="1463040"/>
-            <a:ext cx="1828800" cy="365760"/>
-          </a:xfrm>
-          <a:prstGeom prst="rect">
-            <a:avLst/>
-          </a:prstGeom>
-          <a:noFill/>
-        </p:spPr>
-        <p:txBody>
-          <a:bodyPr wrap="square" anchor="t" lIns="0" rIns="0" tIns="0" bIns="0">
-            <a:spAutoFit/>
-          </a:bodyPr>
-          <a:lstStyle/>
-          <a:p>
-            <a:pPr algn="l">
-              <a:spcAft>
-                <a:spcPts val="400"/>
-              </a:spcAft>
-            </a:pPr>
-            <a:r>
-              <a:rPr sz="1400" b="1">
+            <a:off x="4297680" y="1554480"/>
+            <a:ext cx="1508760" cy="292608"/>
+          </a:xfrm>
+          <a:prstGeom prst="rect">
+            <a:avLst/>
+          </a:prstGeom>
+          <a:noFill/>
+        </p:spPr>
+        <p:txBody>
+          <a:bodyPr wrap="square" anchor="t" lIns="0" rIns="0" tIns="0" bIns="0">
+            <a:spAutoFit/>
+          </a:bodyPr>
+          <a:lstStyle/>
+          <a:p>
+            <a:pPr algn="l">
+              <a:spcAft>
+                <a:spcPts val="400"/>
+              </a:spcAft>
+            </a:pPr>
+            <a:r>
+              <a:rPr sz="1200" b="1">
                 <a:solidFill>
                   <a:srgbClr val="102A43"/>
                 </a:solidFill>
@@ -8455,33 +8561,33 @@
         </p:nvSpPr>
         <p:spPr>
           <a:xfrm>
-            <a:off x="6675120" y="1463040"/>
-            <a:ext cx="731520" cy="365760"/>
-          </a:xfrm>
-          <a:prstGeom prst="rect">
-            <a:avLst/>
-          </a:prstGeom>
-          <a:noFill/>
-        </p:spPr>
-        <p:txBody>
-          <a:bodyPr wrap="square" anchor="t" lIns="0" rIns="0" tIns="0" bIns="0">
-            <a:spAutoFit/>
-          </a:bodyPr>
-          <a:lstStyle/>
-          <a:p>
-            <a:pPr algn="l">
-              <a:spcAft>
-                <a:spcPts val="400"/>
-              </a:spcAft>
-            </a:pPr>
-            <a:r>
-              <a:rPr sz="1400" b="1">
+            <a:off x="5852160" y="1554480"/>
+            <a:ext cx="777240" cy="292608"/>
+          </a:xfrm>
+          <a:prstGeom prst="rect">
+            <a:avLst/>
+          </a:prstGeom>
+          <a:noFill/>
+        </p:spPr>
+        <p:txBody>
+          <a:bodyPr wrap="square" anchor="t" lIns="0" rIns="0" tIns="0" bIns="0">
+            <a:spAutoFit/>
+          </a:bodyPr>
+          <a:lstStyle/>
+          <a:p>
+            <a:pPr algn="l">
+              <a:spcAft>
+                <a:spcPts val="400"/>
+              </a:spcAft>
+            </a:pPr>
+            <a:r>
+              <a:rPr sz="1200" b="1">
                 <a:solidFill>
                   <a:srgbClr val="102A43"/>
                 </a:solidFill>
                 <a:latin typeface="Calibri"/>
               </a:rPr>
-              <a:t>Ratio</a:t>
+              <a:t>Cohen's d</a:t>
             </a:r>
           </a:p>
         </p:txBody>
@@ -8494,8 +8600,8 @@
         </p:nvSpPr>
         <p:spPr>
           <a:xfrm>
-            <a:off x="548640" y="1828800"/>
-            <a:ext cx="6858000" cy="31750"/>
+            <a:off x="502920" y="1847088"/>
+            <a:ext cx="6263640" cy="31750"/>
           </a:xfrm>
           <a:prstGeom prst="rect">
             <a:avLst/>
@@ -8537,27 +8643,27 @@
         </p:nvSpPr>
         <p:spPr>
           <a:xfrm>
-            <a:off x="548640" y="1920240"/>
-            <a:ext cx="2194560" cy="347472"/>
-          </a:xfrm>
-          <a:prstGeom prst="rect">
-            <a:avLst/>
-          </a:prstGeom>
-          <a:noFill/>
-        </p:spPr>
-        <p:txBody>
-          <a:bodyPr wrap="square" anchor="t" lIns="0" rIns="0" tIns="0" bIns="0">
-            <a:spAutoFit/>
-          </a:bodyPr>
-          <a:lstStyle/>
-          <a:p>
-            <a:pPr algn="l">
-              <a:spcAft>
-                <a:spcPts val="400"/>
-              </a:spcAft>
-            </a:pPr>
-            <a:r>
-              <a:rPr sz="1400" b="0">
+            <a:off x="502920" y="1938528"/>
+            <a:ext cx="1920240" cy="274320"/>
+          </a:xfrm>
+          <a:prstGeom prst="rect">
+            <a:avLst/>
+          </a:prstGeom>
+          <a:noFill/>
+        </p:spPr>
+        <p:txBody>
+          <a:bodyPr wrap="square" anchor="t" lIns="0" rIns="0" tIns="0" bIns="0">
+            <a:spAutoFit/>
+          </a:bodyPr>
+          <a:lstStyle/>
+          <a:p>
+            <a:pPr algn="l">
+              <a:spcAft>
+                <a:spcPts val="400"/>
+              </a:spcAft>
+            </a:pPr>
+            <a:r>
+              <a:rPr sz="1200" b="0">
                 <a:solidFill>
                   <a:srgbClr val="101010"/>
                 </a:solidFill>
@@ -8576,27 +8682,27 @@
         </p:nvSpPr>
         <p:spPr>
           <a:xfrm>
-            <a:off x="2743200" y="1920240"/>
-            <a:ext cx="2194560" cy="347472"/>
-          </a:xfrm>
-          <a:prstGeom prst="rect">
-            <a:avLst/>
-          </a:prstGeom>
-          <a:noFill/>
-        </p:spPr>
-        <p:txBody>
-          <a:bodyPr wrap="square" anchor="t" lIns="0" rIns="0" tIns="0" bIns="0">
-            <a:spAutoFit/>
-          </a:bodyPr>
-          <a:lstStyle/>
-          <a:p>
-            <a:pPr algn="l">
-              <a:spcAft>
-                <a:spcPts val="400"/>
-              </a:spcAft>
-            </a:pPr>
-            <a:r>
-              <a:rPr sz="1400" b="0">
+            <a:off x="2468880" y="1938528"/>
+            <a:ext cx="1783080" cy="274320"/>
+          </a:xfrm>
+          <a:prstGeom prst="rect">
+            <a:avLst/>
+          </a:prstGeom>
+          <a:noFill/>
+        </p:spPr>
+        <p:txBody>
+          <a:bodyPr wrap="square" anchor="t" lIns="0" rIns="0" tIns="0" bIns="0">
+            <a:spAutoFit/>
+          </a:bodyPr>
+          <a:lstStyle/>
+          <a:p>
+            <a:pPr algn="l">
+              <a:spcAft>
+                <a:spcPts val="400"/>
+              </a:spcAft>
+            </a:pPr>
+            <a:r>
+              <a:rPr sz="1200" b="0">
                 <a:solidFill>
                   <a:srgbClr val="101010"/>
                 </a:solidFill>
@@ -8615,27 +8721,27 @@
         </p:nvSpPr>
         <p:spPr>
           <a:xfrm>
-            <a:off x="4937760" y="1920240"/>
-            <a:ext cx="1828800" cy="347472"/>
-          </a:xfrm>
-          <a:prstGeom prst="rect">
-            <a:avLst/>
-          </a:prstGeom>
-          <a:noFill/>
-        </p:spPr>
-        <p:txBody>
-          <a:bodyPr wrap="square" anchor="t" lIns="0" rIns="0" tIns="0" bIns="0">
-            <a:spAutoFit/>
-          </a:bodyPr>
-          <a:lstStyle/>
-          <a:p>
-            <a:pPr algn="l">
-              <a:spcAft>
-                <a:spcPts val="400"/>
-              </a:spcAft>
-            </a:pPr>
-            <a:r>
-              <a:rPr sz="1400" b="0">
+            <a:off x="4297680" y="1938528"/>
+            <a:ext cx="1508760" cy="274320"/>
+          </a:xfrm>
+          <a:prstGeom prst="rect">
+            <a:avLst/>
+          </a:prstGeom>
+          <a:noFill/>
+        </p:spPr>
+        <p:txBody>
+          <a:bodyPr wrap="square" anchor="t" lIns="0" rIns="0" tIns="0" bIns="0">
+            <a:spAutoFit/>
+          </a:bodyPr>
+          <a:lstStyle/>
+          <a:p>
+            <a:pPr algn="l">
+              <a:spcAft>
+                <a:spcPts val="400"/>
+              </a:spcAft>
+            </a:pPr>
+            <a:r>
+              <a:rPr sz="1200" b="0">
                 <a:solidFill>
                   <a:srgbClr val="101010"/>
                 </a:solidFill>
@@ -8654,33 +8760,33 @@
         </p:nvSpPr>
         <p:spPr>
           <a:xfrm>
-            <a:off x="6675120" y="1920240"/>
-            <a:ext cx="731520" cy="347472"/>
-          </a:xfrm>
-          <a:prstGeom prst="rect">
-            <a:avLst/>
-          </a:prstGeom>
-          <a:noFill/>
-        </p:spPr>
-        <p:txBody>
-          <a:bodyPr wrap="square" anchor="t" lIns="0" rIns="0" tIns="0" bIns="0">
-            <a:spAutoFit/>
-          </a:bodyPr>
-          <a:lstStyle/>
-          <a:p>
-            <a:pPr algn="l">
-              <a:spcAft>
-                <a:spcPts val="400"/>
-              </a:spcAft>
-            </a:pPr>
-            <a:r>
-              <a:rPr sz="1400" b="1">
+            <a:off x="5852160" y="1938528"/>
+            <a:ext cx="777240" cy="274320"/>
+          </a:xfrm>
+          <a:prstGeom prst="rect">
+            <a:avLst/>
+          </a:prstGeom>
+          <a:noFill/>
+        </p:spPr>
+        <p:txBody>
+          <a:bodyPr wrap="square" anchor="t" lIns="0" rIns="0" tIns="0" bIns="0">
+            <a:spAutoFit/>
+          </a:bodyPr>
+          <a:lstStyle/>
+          <a:p>
+            <a:pPr algn="l">
+              <a:spcAft>
+                <a:spcPts val="400"/>
+              </a:spcAft>
+            </a:pPr>
+            <a:r>
+              <a:rPr sz="1200" b="1">
                 <a:solidFill>
                   <a:srgbClr val="C9462C"/>
                 </a:solidFill>
                 <a:latin typeface="Consolas"/>
               </a:rPr>
-              <a:t>29×</a:t>
+              <a:t>3.83</a:t>
             </a:r>
           </a:p>
         </p:txBody>
@@ -8693,27 +8799,27 @@
         </p:nvSpPr>
         <p:spPr>
           <a:xfrm>
-            <a:off x="548640" y="2304288"/>
-            <a:ext cx="2194560" cy="347472"/>
-          </a:xfrm>
-          <a:prstGeom prst="rect">
-            <a:avLst/>
-          </a:prstGeom>
-          <a:noFill/>
-        </p:spPr>
-        <p:txBody>
-          <a:bodyPr wrap="square" anchor="t" lIns="0" rIns="0" tIns="0" bIns="0">
-            <a:spAutoFit/>
-          </a:bodyPr>
-          <a:lstStyle/>
-          <a:p>
-            <a:pPr algn="l">
-              <a:spcAft>
-                <a:spcPts val="400"/>
-              </a:spcAft>
-            </a:pPr>
-            <a:r>
-              <a:rPr sz="1400" b="0">
+            <a:off x="502920" y="2267712"/>
+            <a:ext cx="1920240" cy="274320"/>
+          </a:xfrm>
+          <a:prstGeom prst="rect">
+            <a:avLst/>
+          </a:prstGeom>
+          <a:noFill/>
+        </p:spPr>
+        <p:txBody>
+          <a:bodyPr wrap="square" anchor="t" lIns="0" rIns="0" tIns="0" bIns="0">
+            <a:spAutoFit/>
+          </a:bodyPr>
+          <a:lstStyle/>
+          <a:p>
+            <a:pPr algn="l">
+              <a:spcAft>
+                <a:spcPts val="400"/>
+              </a:spcAft>
+            </a:pPr>
+            <a:r>
+              <a:rPr sz="1200" b="0">
                 <a:solidFill>
                   <a:srgbClr val="101010"/>
                 </a:solidFill>
@@ -8732,27 +8838,27 @@
         </p:nvSpPr>
         <p:spPr>
           <a:xfrm>
-            <a:off x="2743200" y="2304288"/>
-            <a:ext cx="2194560" cy="347472"/>
-          </a:xfrm>
-          <a:prstGeom prst="rect">
-            <a:avLst/>
-          </a:prstGeom>
-          <a:noFill/>
-        </p:spPr>
-        <p:txBody>
-          <a:bodyPr wrap="square" anchor="t" lIns="0" rIns="0" tIns="0" bIns="0">
-            <a:spAutoFit/>
-          </a:bodyPr>
-          <a:lstStyle/>
-          <a:p>
-            <a:pPr algn="l">
-              <a:spcAft>
-                <a:spcPts val="400"/>
-              </a:spcAft>
-            </a:pPr>
-            <a:r>
-              <a:rPr sz="1400" b="0">
+            <a:off x="2468880" y="2267712"/>
+            <a:ext cx="1783080" cy="274320"/>
+          </a:xfrm>
+          <a:prstGeom prst="rect">
+            <a:avLst/>
+          </a:prstGeom>
+          <a:noFill/>
+        </p:spPr>
+        <p:txBody>
+          <a:bodyPr wrap="square" anchor="t" lIns="0" rIns="0" tIns="0" bIns="0">
+            <a:spAutoFit/>
+          </a:bodyPr>
+          <a:lstStyle/>
+          <a:p>
+            <a:pPr algn="l">
+              <a:spcAft>
+                <a:spcPts val="400"/>
+              </a:spcAft>
+            </a:pPr>
+            <a:r>
+              <a:rPr sz="1200" b="0">
                 <a:solidFill>
                   <a:srgbClr val="101010"/>
                 </a:solidFill>
@@ -8771,27 +8877,27 @@
         </p:nvSpPr>
         <p:spPr>
           <a:xfrm>
-            <a:off x="4937760" y="2304288"/>
-            <a:ext cx="1828800" cy="347472"/>
-          </a:xfrm>
-          <a:prstGeom prst="rect">
-            <a:avLst/>
-          </a:prstGeom>
-          <a:noFill/>
-        </p:spPr>
-        <p:txBody>
-          <a:bodyPr wrap="square" anchor="t" lIns="0" rIns="0" tIns="0" bIns="0">
-            <a:spAutoFit/>
-          </a:bodyPr>
-          <a:lstStyle/>
-          <a:p>
-            <a:pPr algn="l">
-              <a:spcAft>
-                <a:spcPts val="400"/>
-              </a:spcAft>
-            </a:pPr>
-            <a:r>
-              <a:rPr sz="1400" b="0">
+            <a:off x="4297680" y="2267712"/>
+            <a:ext cx="1508760" cy="274320"/>
+          </a:xfrm>
+          <a:prstGeom prst="rect">
+            <a:avLst/>
+          </a:prstGeom>
+          <a:noFill/>
+        </p:spPr>
+        <p:txBody>
+          <a:bodyPr wrap="square" anchor="t" lIns="0" rIns="0" tIns="0" bIns="0">
+            <a:spAutoFit/>
+          </a:bodyPr>
+          <a:lstStyle/>
+          <a:p>
+            <a:pPr algn="l">
+              <a:spcAft>
+                <a:spcPts val="400"/>
+              </a:spcAft>
+            </a:pPr>
+            <a:r>
+              <a:rPr sz="1200" b="0">
                 <a:solidFill>
                   <a:srgbClr val="101010"/>
                 </a:solidFill>
@@ -8810,33 +8916,33 @@
         </p:nvSpPr>
         <p:spPr>
           <a:xfrm>
-            <a:off x="6675120" y="2304288"/>
-            <a:ext cx="731520" cy="347472"/>
-          </a:xfrm>
-          <a:prstGeom prst="rect">
-            <a:avLst/>
-          </a:prstGeom>
-          <a:noFill/>
-        </p:spPr>
-        <p:txBody>
-          <a:bodyPr wrap="square" anchor="t" lIns="0" rIns="0" tIns="0" bIns="0">
-            <a:spAutoFit/>
-          </a:bodyPr>
-          <a:lstStyle/>
-          <a:p>
-            <a:pPr algn="l">
-              <a:spcAft>
-                <a:spcPts val="400"/>
-              </a:spcAft>
-            </a:pPr>
-            <a:r>
-              <a:rPr sz="1400" b="1">
+            <a:off x="5852160" y="2267712"/>
+            <a:ext cx="777240" cy="274320"/>
+          </a:xfrm>
+          <a:prstGeom prst="rect">
+            <a:avLst/>
+          </a:prstGeom>
+          <a:noFill/>
+        </p:spPr>
+        <p:txBody>
+          <a:bodyPr wrap="square" anchor="t" lIns="0" rIns="0" tIns="0" bIns="0">
+            <a:spAutoFit/>
+          </a:bodyPr>
+          <a:lstStyle/>
+          <a:p>
+            <a:pPr algn="l">
+              <a:spcAft>
+                <a:spcPts val="400"/>
+              </a:spcAft>
+            </a:pPr>
+            <a:r>
+              <a:rPr sz="1200" b="1">
                 <a:solidFill>
                   <a:srgbClr val="C9462C"/>
                 </a:solidFill>
                 <a:latin typeface="Consolas"/>
               </a:rPr>
-              <a:t>4.3×</a:t>
+              <a:t>1.27</a:t>
             </a:r>
           </a:p>
         </p:txBody>
@@ -8849,8 +8955,8 @@
         </p:nvSpPr>
         <p:spPr>
           <a:xfrm>
-            <a:off x="548640" y="2734056"/>
-            <a:ext cx="6858000" cy="31750"/>
+            <a:off x="502920" y="2633472"/>
+            <a:ext cx="6263640" cy="12700"/>
           </a:xfrm>
           <a:prstGeom prst="rect">
             <a:avLst/>
@@ -8892,27 +8998,27 @@
         </p:nvSpPr>
         <p:spPr>
           <a:xfrm>
-            <a:off x="548640" y="2852928"/>
-            <a:ext cx="2194560" cy="347472"/>
-          </a:xfrm>
-          <a:prstGeom prst="rect">
-            <a:avLst/>
-          </a:prstGeom>
-          <a:noFill/>
-        </p:spPr>
-        <p:txBody>
-          <a:bodyPr wrap="square" anchor="t" lIns="0" rIns="0" tIns="0" bIns="0">
-            <a:spAutoFit/>
-          </a:bodyPr>
-          <a:lstStyle/>
-          <a:p>
-            <a:pPr algn="l">
-              <a:spcAft>
-                <a:spcPts val="400"/>
-              </a:spcAft>
-            </a:pPr>
-            <a:r>
-              <a:rPr sz="1300" b="0">
+            <a:off x="502920" y="2743200"/>
+            <a:ext cx="1920240" cy="274320"/>
+          </a:xfrm>
+          <a:prstGeom prst="rect">
+            <a:avLst/>
+          </a:prstGeom>
+          <a:noFill/>
+        </p:spPr>
+        <p:txBody>
+          <a:bodyPr wrap="square" anchor="t" lIns="0" rIns="0" tIns="0" bIns="0">
+            <a:spAutoFit/>
+          </a:bodyPr>
+          <a:lstStyle/>
+          <a:p>
+            <a:pPr algn="l">
+              <a:spcAft>
+                <a:spcPts val="400"/>
+              </a:spcAft>
+            </a:pPr>
+            <a:r>
+              <a:rPr sz="1100" b="0">
                 <a:solidFill>
                   <a:srgbClr val="555555"/>
                 </a:solidFill>
@@ -8931,27 +9037,27 @@
         </p:nvSpPr>
         <p:spPr>
           <a:xfrm>
-            <a:off x="2743200" y="2852928"/>
-            <a:ext cx="2194560" cy="347472"/>
-          </a:xfrm>
-          <a:prstGeom prst="rect">
-            <a:avLst/>
-          </a:prstGeom>
-          <a:noFill/>
-        </p:spPr>
-        <p:txBody>
-          <a:bodyPr wrap="square" anchor="t" lIns="0" rIns="0" tIns="0" bIns="0">
-            <a:spAutoFit/>
-          </a:bodyPr>
-          <a:lstStyle/>
-          <a:p>
-            <a:pPr algn="l">
-              <a:spcAft>
-                <a:spcPts val="400"/>
-              </a:spcAft>
-            </a:pPr>
-            <a:r>
-              <a:rPr sz="1300" b="0">
+            <a:off x="2468880" y="2743200"/>
+            <a:ext cx="1783080" cy="274320"/>
+          </a:xfrm>
+          <a:prstGeom prst="rect">
+            <a:avLst/>
+          </a:prstGeom>
+          <a:noFill/>
+        </p:spPr>
+        <p:txBody>
+          <a:bodyPr wrap="square" anchor="t" lIns="0" rIns="0" tIns="0" bIns="0">
+            <a:spAutoFit/>
+          </a:bodyPr>
+          <a:lstStyle/>
+          <a:p>
+            <a:pPr algn="l">
+              <a:spcAft>
+                <a:spcPts val="400"/>
+              </a:spcAft>
+            </a:pPr>
+            <a:r>
+              <a:rPr sz="1100" b="0">
                 <a:solidFill>
                   <a:srgbClr val="555555"/>
                 </a:solidFill>
@@ -8970,27 +9076,27 @@
         </p:nvSpPr>
         <p:spPr>
           <a:xfrm>
-            <a:off x="4937760" y="2852928"/>
-            <a:ext cx="1828800" cy="347472"/>
-          </a:xfrm>
-          <a:prstGeom prst="rect">
-            <a:avLst/>
-          </a:prstGeom>
-          <a:noFill/>
-        </p:spPr>
-        <p:txBody>
-          <a:bodyPr wrap="square" anchor="t" lIns="0" rIns="0" tIns="0" bIns="0">
-            <a:spAutoFit/>
-          </a:bodyPr>
-          <a:lstStyle/>
-          <a:p>
-            <a:pPr algn="l">
-              <a:spcAft>
-                <a:spcPts val="400"/>
-              </a:spcAft>
-            </a:pPr>
-            <a:r>
-              <a:rPr sz="1300" b="0">
+            <a:off x="4297680" y="2743200"/>
+            <a:ext cx="1508760" cy="274320"/>
+          </a:xfrm>
+          <a:prstGeom prst="rect">
+            <a:avLst/>
+          </a:prstGeom>
+          <a:noFill/>
+        </p:spPr>
+        <p:txBody>
+          <a:bodyPr wrap="square" anchor="t" lIns="0" rIns="0" tIns="0" bIns="0">
+            <a:spAutoFit/>
+          </a:bodyPr>
+          <a:lstStyle/>
+          <a:p>
+            <a:pPr algn="l">
+              <a:spcAft>
+                <a:spcPts val="400"/>
+              </a:spcAft>
+            </a:pPr>
+            <a:r>
+              <a:rPr sz="1100" b="0">
                 <a:solidFill>
                   <a:srgbClr val="555555"/>
                 </a:solidFill>
@@ -9009,27 +9115,27 @@
         </p:nvSpPr>
         <p:spPr>
           <a:xfrm>
-            <a:off x="6675120" y="2852928"/>
-            <a:ext cx="731520" cy="347472"/>
-          </a:xfrm>
-          <a:prstGeom prst="rect">
-            <a:avLst/>
-          </a:prstGeom>
-          <a:noFill/>
-        </p:spPr>
-        <p:txBody>
-          <a:bodyPr wrap="square" anchor="t" lIns="0" rIns="0" tIns="0" bIns="0">
-            <a:spAutoFit/>
-          </a:bodyPr>
-          <a:lstStyle/>
-          <a:p>
-            <a:pPr algn="l">
-              <a:spcAft>
-                <a:spcPts val="400"/>
-              </a:spcAft>
-            </a:pPr>
-            <a:r>
-              <a:rPr sz="1300" b="0">
+            <a:off x="5852160" y="2743200"/>
+            <a:ext cx="777240" cy="274320"/>
+          </a:xfrm>
+          <a:prstGeom prst="rect">
+            <a:avLst/>
+          </a:prstGeom>
+          <a:noFill/>
+        </p:spPr>
+        <p:txBody>
+          <a:bodyPr wrap="square" anchor="t" lIns="0" rIns="0" tIns="0" bIns="0">
+            <a:spAutoFit/>
+          </a:bodyPr>
+          <a:lstStyle/>
+          <a:p>
+            <a:pPr algn="l">
+              <a:spcAft>
+                <a:spcPts val="400"/>
+              </a:spcAft>
+            </a:pPr>
+            <a:r>
+              <a:rPr sz="1100" b="0">
                 <a:solidFill>
                   <a:srgbClr val="555555"/>
                 </a:solidFill>
@@ -9048,27 +9154,27 @@
         </p:nvSpPr>
         <p:spPr>
           <a:xfrm>
-            <a:off x="548640" y="3182112"/>
-            <a:ext cx="2194560" cy="347472"/>
-          </a:xfrm>
-          <a:prstGeom prst="rect">
-            <a:avLst/>
-          </a:prstGeom>
-          <a:noFill/>
-        </p:spPr>
-        <p:txBody>
-          <a:bodyPr wrap="square" anchor="t" lIns="0" rIns="0" tIns="0" bIns="0">
-            <a:spAutoFit/>
-          </a:bodyPr>
-          <a:lstStyle/>
-          <a:p>
-            <a:pPr algn="l">
-              <a:spcAft>
-                <a:spcPts val="400"/>
-              </a:spcAft>
-            </a:pPr>
-            <a:r>
-              <a:rPr sz="1300" b="0">
+            <a:off x="502920" y="3035808"/>
+            <a:ext cx="1920240" cy="274320"/>
+          </a:xfrm>
+          <a:prstGeom prst="rect">
+            <a:avLst/>
+          </a:prstGeom>
+          <a:noFill/>
+        </p:spPr>
+        <p:txBody>
+          <a:bodyPr wrap="square" anchor="t" lIns="0" rIns="0" tIns="0" bIns="0">
+            <a:spAutoFit/>
+          </a:bodyPr>
+          <a:lstStyle/>
+          <a:p>
+            <a:pPr algn="l">
+              <a:spcAft>
+                <a:spcPts val="400"/>
+              </a:spcAft>
+            </a:pPr>
+            <a:r>
+              <a:rPr sz="1100" b="0">
                 <a:solidFill>
                   <a:srgbClr val="555555"/>
                 </a:solidFill>
@@ -9087,27 +9193,27 @@
         </p:nvSpPr>
         <p:spPr>
           <a:xfrm>
-            <a:off x="2743200" y="3182112"/>
-            <a:ext cx="2194560" cy="347472"/>
-          </a:xfrm>
-          <a:prstGeom prst="rect">
-            <a:avLst/>
-          </a:prstGeom>
-          <a:noFill/>
-        </p:spPr>
-        <p:txBody>
-          <a:bodyPr wrap="square" anchor="t" lIns="0" rIns="0" tIns="0" bIns="0">
-            <a:spAutoFit/>
-          </a:bodyPr>
-          <a:lstStyle/>
-          <a:p>
-            <a:pPr algn="l">
-              <a:spcAft>
-                <a:spcPts val="400"/>
-              </a:spcAft>
-            </a:pPr>
-            <a:r>
-              <a:rPr sz="1300" b="0">
+            <a:off x="2468880" y="3035808"/>
+            <a:ext cx="1783080" cy="274320"/>
+          </a:xfrm>
+          <a:prstGeom prst="rect">
+            <a:avLst/>
+          </a:prstGeom>
+          <a:noFill/>
+        </p:spPr>
+        <p:txBody>
+          <a:bodyPr wrap="square" anchor="t" lIns="0" rIns="0" tIns="0" bIns="0">
+            <a:spAutoFit/>
+          </a:bodyPr>
+          <a:lstStyle/>
+          <a:p>
+            <a:pPr algn="l">
+              <a:spcAft>
+                <a:spcPts val="400"/>
+              </a:spcAft>
+            </a:pPr>
+            <a:r>
+              <a:rPr sz="1100" b="0">
                 <a:solidFill>
                   <a:srgbClr val="555555"/>
                 </a:solidFill>
@@ -9126,27 +9232,27 @@
         </p:nvSpPr>
         <p:spPr>
           <a:xfrm>
-            <a:off x="4937760" y="3182112"/>
-            <a:ext cx="1828800" cy="347472"/>
-          </a:xfrm>
-          <a:prstGeom prst="rect">
-            <a:avLst/>
-          </a:prstGeom>
-          <a:noFill/>
-        </p:spPr>
-        <p:txBody>
-          <a:bodyPr wrap="square" anchor="t" lIns="0" rIns="0" tIns="0" bIns="0">
-            <a:spAutoFit/>
-          </a:bodyPr>
-          <a:lstStyle/>
-          <a:p>
-            <a:pPr algn="l">
-              <a:spcAft>
-                <a:spcPts val="400"/>
-              </a:spcAft>
-            </a:pPr>
-            <a:r>
-              <a:rPr sz="1300" b="0">
+            <a:off x="4297680" y="3035808"/>
+            <a:ext cx="1508760" cy="274320"/>
+          </a:xfrm>
+          <a:prstGeom prst="rect">
+            <a:avLst/>
+          </a:prstGeom>
+          <a:noFill/>
+        </p:spPr>
+        <p:txBody>
+          <a:bodyPr wrap="square" anchor="t" lIns="0" rIns="0" tIns="0" bIns="0">
+            <a:spAutoFit/>
+          </a:bodyPr>
+          <a:lstStyle/>
+          <a:p>
+            <a:pPr algn="l">
+              <a:spcAft>
+                <a:spcPts val="400"/>
+              </a:spcAft>
+            </a:pPr>
+            <a:r>
+              <a:rPr sz="1100" b="0">
                 <a:solidFill>
                   <a:srgbClr val="555555"/>
                 </a:solidFill>
@@ -9165,27 +9271,27 @@
         </p:nvSpPr>
         <p:spPr>
           <a:xfrm>
-            <a:off x="6675120" y="3182112"/>
-            <a:ext cx="731520" cy="347472"/>
-          </a:xfrm>
-          <a:prstGeom prst="rect">
-            <a:avLst/>
-          </a:prstGeom>
-          <a:noFill/>
-        </p:spPr>
-        <p:txBody>
-          <a:bodyPr wrap="square" anchor="t" lIns="0" rIns="0" tIns="0" bIns="0">
-            <a:spAutoFit/>
-          </a:bodyPr>
-          <a:lstStyle/>
-          <a:p>
-            <a:pPr algn="l">
-              <a:spcAft>
-                <a:spcPts val="400"/>
-              </a:spcAft>
-            </a:pPr>
-            <a:r>
-              <a:rPr sz="1300" b="0">
+            <a:off x="5852160" y="3035808"/>
+            <a:ext cx="777240" cy="274320"/>
+          </a:xfrm>
+          <a:prstGeom prst="rect">
+            <a:avLst/>
+          </a:prstGeom>
+          <a:noFill/>
+        </p:spPr>
+        <p:txBody>
+          <a:bodyPr wrap="square" anchor="t" lIns="0" rIns="0" tIns="0" bIns="0">
+            <a:spAutoFit/>
+          </a:bodyPr>
+          <a:lstStyle/>
+          <a:p>
+            <a:pPr algn="l">
+              <a:spcAft>
+                <a:spcPts val="400"/>
+              </a:spcAft>
+            </a:pPr>
+            <a:r>
+              <a:rPr sz="1100" b="0">
                 <a:solidFill>
                   <a:srgbClr val="555555"/>
                 </a:solidFill>
@@ -9204,27 +9310,27 @@
         </p:nvSpPr>
         <p:spPr>
           <a:xfrm>
-            <a:off x="548640" y="3511296"/>
-            <a:ext cx="2194560" cy="347472"/>
-          </a:xfrm>
-          <a:prstGeom prst="rect">
-            <a:avLst/>
-          </a:prstGeom>
-          <a:noFill/>
-        </p:spPr>
-        <p:txBody>
-          <a:bodyPr wrap="square" anchor="t" lIns="0" rIns="0" tIns="0" bIns="0">
-            <a:spAutoFit/>
-          </a:bodyPr>
-          <a:lstStyle/>
-          <a:p>
-            <a:pPr algn="l">
-              <a:spcAft>
-                <a:spcPts val="400"/>
-              </a:spcAft>
-            </a:pPr>
-            <a:r>
-              <a:rPr sz="1300" b="0">
+            <a:off x="502920" y="3328415"/>
+            <a:ext cx="1920240" cy="274320"/>
+          </a:xfrm>
+          <a:prstGeom prst="rect">
+            <a:avLst/>
+          </a:prstGeom>
+          <a:noFill/>
+        </p:spPr>
+        <p:txBody>
+          <a:bodyPr wrap="square" anchor="t" lIns="0" rIns="0" tIns="0" bIns="0">
+            <a:spAutoFit/>
+          </a:bodyPr>
+          <a:lstStyle/>
+          <a:p>
+            <a:pPr algn="l">
+              <a:spcAft>
+                <a:spcPts val="400"/>
+              </a:spcAft>
+            </a:pPr>
+            <a:r>
+              <a:rPr sz="1100" b="0">
                 <a:solidFill>
                   <a:srgbClr val="555555"/>
                 </a:solidFill>
@@ -9243,27 +9349,27 @@
         </p:nvSpPr>
         <p:spPr>
           <a:xfrm>
-            <a:off x="2743200" y="3511296"/>
-            <a:ext cx="2194560" cy="347472"/>
-          </a:xfrm>
-          <a:prstGeom prst="rect">
-            <a:avLst/>
-          </a:prstGeom>
-          <a:noFill/>
-        </p:spPr>
-        <p:txBody>
-          <a:bodyPr wrap="square" anchor="t" lIns="0" rIns="0" tIns="0" bIns="0">
-            <a:spAutoFit/>
-          </a:bodyPr>
-          <a:lstStyle/>
-          <a:p>
-            <a:pPr algn="l">
-              <a:spcAft>
-                <a:spcPts val="400"/>
-              </a:spcAft>
-            </a:pPr>
-            <a:r>
-              <a:rPr sz="1300" b="0">
+            <a:off x="2468880" y="3328415"/>
+            <a:ext cx="1783080" cy="274320"/>
+          </a:xfrm>
+          <a:prstGeom prst="rect">
+            <a:avLst/>
+          </a:prstGeom>
+          <a:noFill/>
+        </p:spPr>
+        <p:txBody>
+          <a:bodyPr wrap="square" anchor="t" lIns="0" rIns="0" tIns="0" bIns="0">
+            <a:spAutoFit/>
+          </a:bodyPr>
+          <a:lstStyle/>
+          <a:p>
+            <a:pPr algn="l">
+              <a:spcAft>
+                <a:spcPts val="400"/>
+              </a:spcAft>
+            </a:pPr>
+            <a:r>
+              <a:rPr sz="1100" b="0">
                 <a:solidFill>
                   <a:srgbClr val="555555"/>
                 </a:solidFill>
@@ -9282,27 +9388,27 @@
         </p:nvSpPr>
         <p:spPr>
           <a:xfrm>
-            <a:off x="4937760" y="3511296"/>
-            <a:ext cx="1828800" cy="347472"/>
-          </a:xfrm>
-          <a:prstGeom prst="rect">
-            <a:avLst/>
-          </a:prstGeom>
-          <a:noFill/>
-        </p:spPr>
-        <p:txBody>
-          <a:bodyPr wrap="square" anchor="t" lIns="0" rIns="0" tIns="0" bIns="0">
-            <a:spAutoFit/>
-          </a:bodyPr>
-          <a:lstStyle/>
-          <a:p>
-            <a:pPr algn="l">
-              <a:spcAft>
-                <a:spcPts val="400"/>
-              </a:spcAft>
-            </a:pPr>
-            <a:r>
-              <a:rPr sz="1300" b="0">
+            <a:off x="4297680" y="3328415"/>
+            <a:ext cx="1508760" cy="274320"/>
+          </a:xfrm>
+          <a:prstGeom prst="rect">
+            <a:avLst/>
+          </a:prstGeom>
+          <a:noFill/>
+        </p:spPr>
+        <p:txBody>
+          <a:bodyPr wrap="square" anchor="t" lIns="0" rIns="0" tIns="0" bIns="0">
+            <a:spAutoFit/>
+          </a:bodyPr>
+          <a:lstStyle/>
+          <a:p>
+            <a:pPr algn="l">
+              <a:spcAft>
+                <a:spcPts val="400"/>
+              </a:spcAft>
+            </a:pPr>
+            <a:r>
+              <a:rPr sz="1100" b="0">
                 <a:solidFill>
                   <a:srgbClr val="555555"/>
                 </a:solidFill>
@@ -9321,27 +9427,27 @@
         </p:nvSpPr>
         <p:spPr>
           <a:xfrm>
-            <a:off x="6675120" y="3511296"/>
-            <a:ext cx="731520" cy="347472"/>
-          </a:xfrm>
-          <a:prstGeom prst="rect">
-            <a:avLst/>
-          </a:prstGeom>
-          <a:noFill/>
-        </p:spPr>
-        <p:txBody>
-          <a:bodyPr wrap="square" anchor="t" lIns="0" rIns="0" tIns="0" bIns="0">
-            <a:spAutoFit/>
-          </a:bodyPr>
-          <a:lstStyle/>
-          <a:p>
-            <a:pPr algn="l">
-              <a:spcAft>
-                <a:spcPts val="400"/>
-              </a:spcAft>
-            </a:pPr>
-            <a:r>
-              <a:rPr sz="1300" b="0">
+            <a:off x="5852160" y="3328415"/>
+            <a:ext cx="777240" cy="274320"/>
+          </a:xfrm>
+          <a:prstGeom prst="rect">
+            <a:avLst/>
+          </a:prstGeom>
+          <a:noFill/>
+        </p:spPr>
+        <p:txBody>
+          <a:bodyPr wrap="square" anchor="t" lIns="0" rIns="0" tIns="0" bIns="0">
+            <a:spAutoFit/>
+          </a:bodyPr>
+          <a:lstStyle/>
+          <a:p>
+            <a:pPr algn="l">
+              <a:spcAft>
+                <a:spcPts val="400"/>
+              </a:spcAft>
+            </a:pPr>
+            <a:r>
+              <a:rPr sz="1100" b="0">
                 <a:solidFill>
                   <a:srgbClr val="555555"/>
                 </a:solidFill>
@@ -9360,27 +9466,27 @@
         </p:nvSpPr>
         <p:spPr>
           <a:xfrm>
-            <a:off x="548640" y="3840480"/>
-            <a:ext cx="2194560" cy="347472"/>
-          </a:xfrm>
-          <a:prstGeom prst="rect">
-            <a:avLst/>
-          </a:prstGeom>
-          <a:noFill/>
-        </p:spPr>
-        <p:txBody>
-          <a:bodyPr wrap="square" anchor="t" lIns="0" rIns="0" tIns="0" bIns="0">
-            <a:spAutoFit/>
-          </a:bodyPr>
-          <a:lstStyle/>
-          <a:p>
-            <a:pPr algn="l">
-              <a:spcAft>
-                <a:spcPts val="400"/>
-              </a:spcAft>
-            </a:pPr>
-            <a:r>
-              <a:rPr sz="1300" b="0">
+            <a:off x="502920" y="3621023"/>
+            <a:ext cx="1920240" cy="274320"/>
+          </a:xfrm>
+          <a:prstGeom prst="rect">
+            <a:avLst/>
+          </a:prstGeom>
+          <a:noFill/>
+        </p:spPr>
+        <p:txBody>
+          <a:bodyPr wrap="square" anchor="t" lIns="0" rIns="0" tIns="0" bIns="0">
+            <a:spAutoFit/>
+          </a:bodyPr>
+          <a:lstStyle/>
+          <a:p>
+            <a:pPr algn="l">
+              <a:spcAft>
+                <a:spcPts val="400"/>
+              </a:spcAft>
+            </a:pPr>
+            <a:r>
+              <a:rPr sz="1100" b="0">
                 <a:solidFill>
                   <a:srgbClr val="555555"/>
                 </a:solidFill>
@@ -9399,27 +9505,27 @@
         </p:nvSpPr>
         <p:spPr>
           <a:xfrm>
-            <a:off x="2743200" y="3840480"/>
-            <a:ext cx="2194560" cy="347472"/>
-          </a:xfrm>
-          <a:prstGeom prst="rect">
-            <a:avLst/>
-          </a:prstGeom>
-          <a:noFill/>
-        </p:spPr>
-        <p:txBody>
-          <a:bodyPr wrap="square" anchor="t" lIns="0" rIns="0" tIns="0" bIns="0">
-            <a:spAutoFit/>
-          </a:bodyPr>
-          <a:lstStyle/>
-          <a:p>
-            <a:pPr algn="l">
-              <a:spcAft>
-                <a:spcPts val="400"/>
-              </a:spcAft>
-            </a:pPr>
-            <a:r>
-              <a:rPr sz="1300" b="0">
+            <a:off x="2468880" y="3621023"/>
+            <a:ext cx="1783080" cy="274320"/>
+          </a:xfrm>
+          <a:prstGeom prst="rect">
+            <a:avLst/>
+          </a:prstGeom>
+          <a:noFill/>
+        </p:spPr>
+        <p:txBody>
+          <a:bodyPr wrap="square" anchor="t" lIns="0" rIns="0" tIns="0" bIns="0">
+            <a:spAutoFit/>
+          </a:bodyPr>
+          <a:lstStyle/>
+          <a:p>
+            <a:pPr algn="l">
+              <a:spcAft>
+                <a:spcPts val="400"/>
+              </a:spcAft>
+            </a:pPr>
+            <a:r>
+              <a:rPr sz="1100" b="0">
                 <a:solidFill>
                   <a:srgbClr val="555555"/>
                 </a:solidFill>
@@ -9438,27 +9544,27 @@
         </p:nvSpPr>
         <p:spPr>
           <a:xfrm>
-            <a:off x="4937760" y="3840480"/>
-            <a:ext cx="1828800" cy="347472"/>
-          </a:xfrm>
-          <a:prstGeom prst="rect">
-            <a:avLst/>
-          </a:prstGeom>
-          <a:noFill/>
-        </p:spPr>
-        <p:txBody>
-          <a:bodyPr wrap="square" anchor="t" lIns="0" rIns="0" tIns="0" bIns="0">
-            <a:spAutoFit/>
-          </a:bodyPr>
-          <a:lstStyle/>
-          <a:p>
-            <a:pPr algn="l">
-              <a:spcAft>
-                <a:spcPts val="400"/>
-              </a:spcAft>
-            </a:pPr>
-            <a:r>
-              <a:rPr sz="1300" b="0">
+            <a:off x="4297680" y="3621023"/>
+            <a:ext cx="1508760" cy="274320"/>
+          </a:xfrm>
+          <a:prstGeom prst="rect">
+            <a:avLst/>
+          </a:prstGeom>
+          <a:noFill/>
+        </p:spPr>
+        <p:txBody>
+          <a:bodyPr wrap="square" anchor="t" lIns="0" rIns="0" tIns="0" bIns="0">
+            <a:spAutoFit/>
+          </a:bodyPr>
+          <a:lstStyle/>
+          <a:p>
+            <a:pPr algn="l">
+              <a:spcAft>
+                <a:spcPts val="400"/>
+              </a:spcAft>
+            </a:pPr>
+            <a:r>
+              <a:rPr sz="1100" b="0">
                 <a:solidFill>
                   <a:srgbClr val="555555"/>
                 </a:solidFill>
@@ -9477,27 +9583,27 @@
         </p:nvSpPr>
         <p:spPr>
           <a:xfrm>
-            <a:off x="6675120" y="3840480"/>
-            <a:ext cx="731520" cy="347472"/>
-          </a:xfrm>
-          <a:prstGeom prst="rect">
-            <a:avLst/>
-          </a:prstGeom>
-          <a:noFill/>
-        </p:spPr>
-        <p:txBody>
-          <a:bodyPr wrap="square" anchor="t" lIns="0" rIns="0" tIns="0" bIns="0">
-            <a:spAutoFit/>
-          </a:bodyPr>
-          <a:lstStyle/>
-          <a:p>
-            <a:pPr algn="l">
-              <a:spcAft>
-                <a:spcPts val="400"/>
-              </a:spcAft>
-            </a:pPr>
-            <a:r>
-              <a:rPr sz="1300" b="0">
+            <a:off x="5852160" y="3621023"/>
+            <a:ext cx="777240" cy="274320"/>
+          </a:xfrm>
+          <a:prstGeom prst="rect">
+            <a:avLst/>
+          </a:prstGeom>
+          <a:noFill/>
+        </p:spPr>
+        <p:txBody>
+          <a:bodyPr wrap="square" anchor="t" lIns="0" rIns="0" tIns="0" bIns="0">
+            <a:spAutoFit/>
+          </a:bodyPr>
+          <a:lstStyle/>
+          <a:p>
+            <a:pPr algn="l">
+              <a:spcAft>
+                <a:spcPts val="400"/>
+              </a:spcAft>
+            </a:pPr>
+            <a:r>
+              <a:rPr sz="1100" b="0">
                 <a:solidFill>
                   <a:srgbClr val="555555"/>
                 </a:solidFill>
@@ -9510,7 +9616,7 @@
       </p:sp>
       <p:pic>
         <p:nvPicPr>
-          <p:cNvPr id="35" name="Picture 34" descr="20260509-132129_classifier_feature_importance.png"/>
+          <p:cNvPr id="35" name="Picture 34" descr="scatter.png"/>
           <p:cNvPicPr>
             <a:picLocks noChangeAspect="1"/>
           </p:cNvPicPr>
@@ -9524,8 +9630,8 @@
         </p:blipFill>
         <p:spPr>
           <a:xfrm>
-            <a:off x="7680960" y="1463040"/>
-            <a:ext cx="6694712" cy="3749039"/>
+            <a:off x="7071629" y="1508760"/>
+            <a:ext cx="4449236" cy="3840480"/>
           </a:xfrm>
           <a:prstGeom prst="rect">
             <a:avLst/>
@@ -9540,8 +9646,47 @@
         </p:nvSpPr>
         <p:spPr>
           <a:xfrm>
-            <a:off x="7680960" y="5349240"/>
-            <a:ext cx="4023360" cy="457200"/>
+            <a:off x="6903720" y="5394959"/>
+            <a:ext cx="4785055" cy="457200"/>
+          </a:xfrm>
+          <a:prstGeom prst="rect">
+            <a:avLst/>
+          </a:prstGeom>
+          <a:noFill/>
+        </p:spPr>
+        <p:txBody>
+          <a:bodyPr wrap="square" anchor="t" lIns="0" rIns="0" tIns="0" bIns="0">
+            <a:spAutoFit/>
+          </a:bodyPr>
+          <a:lstStyle/>
+          <a:p>
+            <a:pPr algn="l">
+              <a:spcAft>
+                <a:spcPts val="400"/>
+              </a:spcAft>
+            </a:pPr>
+            <a:r>
+              <a:rPr sz="1000" b="0">
+                <a:solidFill>
+                  <a:srgbClr val="555555"/>
+                </a:solidFill>
+                <a:latin typeface="Calibri"/>
+              </a:rPr>
+              <a:t>All 1082 flows in the two-feature space. 24/24 WG flows have bulk_fraction ≥ 0.32; only 4/1058 non-VPN flows fall in the (≥0.2, ≥0.15) corner.</a:t>
+            </a:r>
+          </a:p>
+        </p:txBody>
+      </p:sp>
+      <p:sp>
+        <p:nvSpPr>
+          <p:cNvPr id="37" name="TextBox 36"/>
+          <p:cNvSpPr txBox="1"/>
+          <p:nvPr/>
+        </p:nvSpPr>
+        <p:spPr>
+          <a:xfrm>
+            <a:off x="502920" y="5532120"/>
+            <a:ext cx="6263640" cy="457200"/>
           </a:xfrm>
           <a:prstGeom prst="rect">
             <a:avLst/>
@@ -9562,64 +9707,64 @@
             <a:r>
               <a:rPr sz="1100" b="0">
                 <a:solidFill>
+                  <a:srgbClr val="C9462C"/>
+                </a:solidFill>
+                <a:latin typeface="Calibri"/>
+              </a:rPr>
+              <a:t>Naive intuition picked dominant_size_fraction. Real-world background INVERTS that signal (many idle flows are degenerately concentrated).</a:t>
+            </a:r>
+          </a:p>
+        </p:txBody>
+      </p:sp>
+      <p:sp>
+        <p:nvSpPr>
+          <p:cNvPr id="38" name="TextBox 37"/>
+          <p:cNvSpPr txBox="1"/>
+          <p:nvPr/>
+        </p:nvSpPr>
+        <p:spPr>
+          <a:xfrm>
+            <a:off x="502920" y="6263640"/>
+            <a:ext cx="8229600" cy="274320"/>
+          </a:xfrm>
+          <a:prstGeom prst="rect">
+            <a:avLst/>
+          </a:prstGeom>
+          <a:noFill/>
+        </p:spPr>
+        <p:txBody>
+          <a:bodyPr wrap="square" anchor="t" lIns="0" rIns="0" tIns="0" bIns="0">
+            <a:spAutoFit/>
+          </a:bodyPr>
+          <a:lstStyle/>
+          <a:p>
+            <a:pPr algn="l">
+              <a:spcAft>
+                <a:spcPts val="400"/>
+              </a:spcAft>
+            </a:pPr>
+            <a:r>
+              <a:rPr sz="1000" b="0">
+                <a:solidFill>
                   <a:srgbClr val="555555"/>
                 </a:solidFill>
                 <a:latin typeface="Calibri"/>
               </a:rPr>
-              <a:t>Permutation importance (RF, 8-feature variant) confirms bulk_fraction is the dominant signal.</a:t>
-            </a:r>
-          </a:p>
-        </p:txBody>
-      </p:sp>
-      <p:sp>
-        <p:nvSpPr>
-          <p:cNvPr id="37" name="TextBox 36"/>
-          <p:cNvSpPr txBox="1"/>
-          <p:nvPr/>
-        </p:nvSpPr>
-        <p:spPr>
-          <a:xfrm>
-            <a:off x="548640" y="5943600"/>
-            <a:ext cx="7040880" cy="640080"/>
-          </a:xfrm>
-          <a:prstGeom prst="rect">
-            <a:avLst/>
-          </a:prstGeom>
-          <a:noFill/>
-        </p:spPr>
-        <p:txBody>
-          <a:bodyPr wrap="square" anchor="t" lIns="0" rIns="0" tIns="0" bIns="0">
-            <a:spAutoFit/>
-          </a:bodyPr>
-          <a:lstStyle/>
-          <a:p>
-            <a:pPr algn="l">
-              <a:spcAft>
-                <a:spcPts val="400"/>
-              </a:spcAft>
-            </a:pPr>
-            <a:r>
-              <a:rPr sz="1300" b="0">
-                <a:solidFill>
-                  <a:srgbClr val="C9462C"/>
-                </a:solidFill>
-                <a:latin typeface="Calibri"/>
-              </a:rPr>
-              <a:t>Naive intuition would have picked dominant_size_fraction. Real-world background INVERTS that signal, because non-VPN traffic contains many degenerate idle flows.</a:t>
-            </a:r>
-          </a:p>
-        </p:txBody>
-      </p:sp>
-      <p:sp>
-        <p:nvSpPr>
-          <p:cNvPr id="38" name="TextBox 37"/>
-          <p:cNvSpPr txBox="1"/>
-          <p:nvPr/>
-        </p:nvSpPr>
-        <p:spPr>
-          <a:xfrm>
-            <a:off x="548640" y="6446520"/>
-            <a:ext cx="7315200" cy="274320"/>
+              <a:t>Schiavone &amp; Johannsen   ·   CYB623   ·   Pace University</a:t>
+            </a:r>
+          </a:p>
+        </p:txBody>
+      </p:sp>
+      <p:sp>
+        <p:nvSpPr>
+          <p:cNvPr id="39" name="TextBox 38"/>
+          <p:cNvSpPr txBox="1"/>
+          <p:nvPr/>
+        </p:nvSpPr>
+        <p:spPr>
+          <a:xfrm>
+            <a:off x="502920" y="6263640"/>
+            <a:ext cx="8229600" cy="274320"/>
           </a:xfrm>
           <a:prstGeom prst="rect">
             <a:avLst/>
@@ -9644,46 +9789,7 @@
                 </a:solidFill>
                 <a:latin typeface="Calibri"/>
               </a:rPr>
-              <a:t>Schiavone &amp; Johannsen — CYB623 — Pace University</a:t>
-            </a:r>
-          </a:p>
-        </p:txBody>
-      </p:sp>
-      <p:sp>
-        <p:nvSpPr>
-          <p:cNvPr id="39" name="TextBox 38"/>
-          <p:cNvSpPr txBox="1"/>
-          <p:nvPr/>
-        </p:nvSpPr>
-        <p:spPr>
-          <a:xfrm>
-            <a:off x="548640" y="6446520"/>
-            <a:ext cx="7315200" cy="274320"/>
-          </a:xfrm>
-          <a:prstGeom prst="rect">
-            <a:avLst/>
-          </a:prstGeom>
-          <a:noFill/>
-        </p:spPr>
-        <p:txBody>
-          <a:bodyPr wrap="square" anchor="t" lIns="0" rIns="0" tIns="0" bIns="0">
-            <a:spAutoFit/>
-          </a:bodyPr>
-          <a:lstStyle/>
-          <a:p>
-            <a:pPr algn="l">
-              <a:spcAft>
-                <a:spcPts val="400"/>
-              </a:spcAft>
-            </a:pPr>
-            <a:r>
-              <a:rPr sz="1000" b="0">
-                <a:solidFill>
-                  <a:srgbClr val="555555"/>
-                </a:solidFill>
-                <a:latin typeface="Calibri"/>
-              </a:rPr>
-              <a:t>Schiavone &amp; Johannsen — CYB623 — Pace University</a:t>
+              <a:t>Schiavone &amp; Johannsen   ·   CYB623   ·   Pace University</a:t>
             </a:r>
           </a:p>
         </p:txBody>
@@ -9696,8 +9802,8 @@
         </p:nvSpPr>
         <p:spPr>
           <a:xfrm>
-            <a:off x="10515600" y="6446520"/>
-            <a:ext cx="1188720" cy="274320"/>
+            <a:off x="10362895" y="6263640"/>
+            <a:ext cx="1371600" cy="274320"/>
           </a:xfrm>
           <a:prstGeom prst="rect">
             <a:avLst/>
@@ -9753,33 +9859,33 @@
         </p:nvSpPr>
         <p:spPr>
           <a:xfrm>
-            <a:off x="548640" y="320040"/>
-            <a:ext cx="10515600" cy="640080"/>
-          </a:xfrm>
-          <a:prstGeom prst="rect">
-            <a:avLst/>
-          </a:prstGeom>
-          <a:noFill/>
-        </p:spPr>
-        <p:txBody>
-          <a:bodyPr wrap="square" anchor="t" lIns="0" rIns="0" tIns="0" bIns="0">
-            <a:spAutoFit/>
-          </a:bodyPr>
-          <a:lstStyle/>
-          <a:p>
-            <a:pPr algn="l">
-              <a:spcAft>
-                <a:spcPts val="400"/>
-              </a:spcAft>
-            </a:pPr>
-            <a:r>
-              <a:rPr sz="3200" b="1">
+            <a:off x="502920" y="274320"/>
+            <a:ext cx="11185855" cy="731520"/>
+          </a:xfrm>
+          <a:prstGeom prst="rect">
+            <a:avLst/>
+          </a:prstGeom>
+          <a:noFill/>
+        </p:spPr>
+        <p:txBody>
+          <a:bodyPr wrap="square" anchor="t" lIns="0" rIns="0" tIns="0" bIns="0">
+            <a:spAutoFit/>
+          </a:bodyPr>
+          <a:lstStyle/>
+          <a:p>
+            <a:pPr algn="l">
+              <a:spcAft>
+                <a:spcPts val="400"/>
+              </a:spcAft>
+            </a:pPr>
+            <a:r>
+              <a:rPr sz="2800" b="1">
                 <a:solidFill>
                   <a:srgbClr val="102A43"/>
                 </a:solidFill>
                 <a:latin typeface="Calibri"/>
               </a:rPr>
-              <a:t>C2 — Random Forest hits 99.9 % with two features</a:t>
+              <a:t>C2: two-feature Random Forest hits 99.9 %</a:t>
             </a:r>
           </a:p>
         </p:txBody>
@@ -9792,7 +9898,7 @@
         </p:nvSpPr>
         <p:spPr>
           <a:xfrm>
-            <a:off x="548640" y="960120"/>
+            <a:off x="502920" y="1005840"/>
             <a:ext cx="914400" cy="31750"/>
           </a:xfrm>
           <a:prstGeom prst="rect">
@@ -9835,33 +9941,33 @@
         </p:nvSpPr>
         <p:spPr>
           <a:xfrm>
-            <a:off x="548640" y="1051560"/>
-            <a:ext cx="10515600" cy="457200"/>
-          </a:xfrm>
-          <a:prstGeom prst="rect">
-            <a:avLst/>
-          </a:prstGeom>
-          <a:noFill/>
-        </p:spPr>
-        <p:txBody>
-          <a:bodyPr wrap="square" anchor="t" lIns="0" rIns="0" tIns="0" bIns="0">
-            <a:spAutoFit/>
-          </a:bodyPr>
-          <a:lstStyle/>
-          <a:p>
-            <a:pPr algn="l">
-              <a:spcAft>
-                <a:spcPts val="400"/>
-              </a:spcAft>
-            </a:pPr>
-            <a:r>
-              <a:rPr sz="1600" b="0">
+            <a:off x="502920" y="1078992"/>
+            <a:ext cx="11185855" cy="365760"/>
+          </a:xfrm>
+          <a:prstGeom prst="rect">
+            <a:avLst/>
+          </a:prstGeom>
+          <a:noFill/>
+        </p:spPr>
+        <p:txBody>
+          <a:bodyPr wrap="square" anchor="t" lIns="0" rIns="0" tIns="0" bIns="0">
+            <a:spAutoFit/>
+          </a:bodyPr>
+          <a:lstStyle/>
+          <a:p>
+            <a:pPr algn="l">
+              <a:spcAft>
+                <a:spcPts val="400"/>
+              </a:spcAft>
+            </a:pPr>
+            <a:r>
+              <a:rPr sz="1400" b="0">
                 <a:solidFill>
                   <a:srgbClr val="555555"/>
                 </a:solidFill>
                 <a:latin typeface="Calibri"/>
               </a:rPr>
-              <a:t>5-fold stratified cross-validation; class-balanced.</a:t>
+              <a:t>5-fold stratified cross-validation; class-balanced; n = 1082</a:t>
             </a:r>
           </a:p>
         </p:txBody>
@@ -9874,7 +9980,7 @@
         </p:nvSpPr>
         <p:spPr>
           <a:xfrm>
-            <a:off x="548640" y="1554480"/>
+            <a:off x="502920" y="1645920"/>
             <a:ext cx="5029200" cy="365760"/>
           </a:xfrm>
           <a:prstGeom prst="rect">
@@ -9913,27 +10019,27 @@
         </p:nvSpPr>
         <p:spPr>
           <a:xfrm>
-            <a:off x="548640" y="2057400"/>
-            <a:ext cx="2194560" cy="548640"/>
-          </a:xfrm>
-          <a:prstGeom prst="rect">
-            <a:avLst/>
-          </a:prstGeom>
-          <a:noFill/>
-        </p:spPr>
-        <p:txBody>
-          <a:bodyPr wrap="square" anchor="t" lIns="0" rIns="0" tIns="0" bIns="0">
-            <a:spAutoFit/>
-          </a:bodyPr>
-          <a:lstStyle/>
-          <a:p>
-            <a:pPr algn="l">
-              <a:spcAft>
-                <a:spcPts val="400"/>
-              </a:spcAft>
-            </a:pPr>
-            <a:r>
-              <a:rPr sz="3000" b="1">
+            <a:off x="502920" y="2148840"/>
+            <a:ext cx="2103120" cy="502920"/>
+          </a:xfrm>
+          <a:prstGeom prst="rect">
+            <a:avLst/>
+          </a:prstGeom>
+          <a:noFill/>
+        </p:spPr>
+        <p:txBody>
+          <a:bodyPr wrap="square" anchor="t" lIns="0" rIns="0" tIns="0" bIns="0">
+            <a:spAutoFit/>
+          </a:bodyPr>
+          <a:lstStyle/>
+          <a:p>
+            <a:pPr algn="l">
+              <a:spcAft>
+                <a:spcPts val="400"/>
+              </a:spcAft>
+            </a:pPr>
+            <a:r>
+              <a:rPr sz="2800" b="1">
                 <a:solidFill>
                   <a:srgbClr val="C9462C"/>
                 </a:solidFill>
@@ -9952,27 +10058,27 @@
         </p:nvSpPr>
         <p:spPr>
           <a:xfrm>
-            <a:off x="2743200" y="2194560"/>
-            <a:ext cx="2926080" cy="411480"/>
-          </a:xfrm>
-          <a:prstGeom prst="rect">
-            <a:avLst/>
-          </a:prstGeom>
-          <a:noFill/>
-        </p:spPr>
-        <p:txBody>
-          <a:bodyPr wrap="square" anchor="t" lIns="0" rIns="0" tIns="0" bIns="0">
-            <a:spAutoFit/>
-          </a:bodyPr>
-          <a:lstStyle/>
-          <a:p>
-            <a:pPr algn="l">
-              <a:spcAft>
-                <a:spcPts val="400"/>
-              </a:spcAft>
-            </a:pPr>
-            <a:r>
-              <a:rPr sz="1400" b="0">
+            <a:off x="2743200" y="2258568"/>
+            <a:ext cx="3291840" cy="411480"/>
+          </a:xfrm>
+          <a:prstGeom prst="rect">
+            <a:avLst/>
+          </a:prstGeom>
+          <a:noFill/>
+        </p:spPr>
+        <p:txBody>
+          <a:bodyPr wrap="square" anchor="t" lIns="0" rIns="0" tIns="0" bIns="0">
+            <a:spAutoFit/>
+          </a:bodyPr>
+          <a:lstStyle/>
+          <a:p>
+            <a:pPr algn="l">
+              <a:spcAft>
+                <a:spcPts val="400"/>
+              </a:spcAft>
+            </a:pPr>
+            <a:r>
+              <a:rPr sz="1300" b="0">
                 <a:solidFill>
                   <a:srgbClr val="101010"/>
                 </a:solidFill>
@@ -9991,27 +10097,27 @@
         </p:nvSpPr>
         <p:spPr>
           <a:xfrm>
-            <a:off x="548640" y="2697480"/>
-            <a:ext cx="2194560" cy="548640"/>
-          </a:xfrm>
-          <a:prstGeom prst="rect">
-            <a:avLst/>
-          </a:prstGeom>
-          <a:noFill/>
-        </p:spPr>
-        <p:txBody>
-          <a:bodyPr wrap="square" anchor="t" lIns="0" rIns="0" tIns="0" bIns="0">
-            <a:spAutoFit/>
-          </a:bodyPr>
-          <a:lstStyle/>
-          <a:p>
-            <a:pPr algn="l">
-              <a:spcAft>
-                <a:spcPts val="400"/>
-              </a:spcAft>
-            </a:pPr>
-            <a:r>
-              <a:rPr sz="3000" b="1">
+            <a:off x="502920" y="2715768"/>
+            <a:ext cx="2103120" cy="502920"/>
+          </a:xfrm>
+          <a:prstGeom prst="rect">
+            <a:avLst/>
+          </a:prstGeom>
+          <a:noFill/>
+        </p:spPr>
+        <p:txBody>
+          <a:bodyPr wrap="square" anchor="t" lIns="0" rIns="0" tIns="0" bIns="0">
+            <a:spAutoFit/>
+          </a:bodyPr>
+          <a:lstStyle/>
+          <a:p>
+            <a:pPr algn="l">
+              <a:spcAft>
+                <a:spcPts val="400"/>
+              </a:spcAft>
+            </a:pPr>
+            <a:r>
+              <a:rPr sz="2800" b="1">
                 <a:solidFill>
                   <a:srgbClr val="C9462C"/>
                 </a:solidFill>
@@ -10030,27 +10136,27 @@
         </p:nvSpPr>
         <p:spPr>
           <a:xfrm>
-            <a:off x="2743200" y="2834640"/>
-            <a:ext cx="2926080" cy="411480"/>
-          </a:xfrm>
-          <a:prstGeom prst="rect">
-            <a:avLst/>
-          </a:prstGeom>
-          <a:noFill/>
-        </p:spPr>
-        <p:txBody>
-          <a:bodyPr wrap="square" anchor="t" lIns="0" rIns="0" tIns="0" bIns="0">
-            <a:spAutoFit/>
-          </a:bodyPr>
-          <a:lstStyle/>
-          <a:p>
-            <a:pPr algn="l">
-              <a:spcAft>
-                <a:spcPts val="400"/>
-              </a:spcAft>
-            </a:pPr>
-            <a:r>
-              <a:rPr sz="1400" b="0">
+            <a:off x="2743200" y="2825496"/>
+            <a:ext cx="3291840" cy="411480"/>
+          </a:xfrm>
+          <a:prstGeom prst="rect">
+            <a:avLst/>
+          </a:prstGeom>
+          <a:noFill/>
+        </p:spPr>
+        <p:txBody>
+          <a:bodyPr wrap="square" anchor="t" lIns="0" rIns="0" tIns="0" bIns="0">
+            <a:spAutoFit/>
+          </a:bodyPr>
+          <a:lstStyle/>
+          <a:p>
+            <a:pPr algn="l">
+              <a:spcAft>
+                <a:spcPts val="400"/>
+              </a:spcAft>
+            </a:pPr>
+            <a:r>
+              <a:rPr sz="1300" b="0">
                 <a:solidFill>
                   <a:srgbClr val="101010"/>
                 </a:solidFill>
@@ -10069,27 +10175,27 @@
         </p:nvSpPr>
         <p:spPr>
           <a:xfrm>
-            <a:off x="548640" y="3337560"/>
-            <a:ext cx="2194560" cy="548640"/>
-          </a:xfrm>
-          <a:prstGeom prst="rect">
-            <a:avLst/>
-          </a:prstGeom>
-          <a:noFill/>
-        </p:spPr>
-        <p:txBody>
-          <a:bodyPr wrap="square" anchor="t" lIns="0" rIns="0" tIns="0" bIns="0">
-            <a:spAutoFit/>
-          </a:bodyPr>
-          <a:lstStyle/>
-          <a:p>
-            <a:pPr algn="l">
-              <a:spcAft>
-                <a:spcPts val="400"/>
-              </a:spcAft>
-            </a:pPr>
-            <a:r>
-              <a:rPr sz="3000" b="1">
+            <a:off x="502920" y="3282696"/>
+            <a:ext cx="2103120" cy="502920"/>
+          </a:xfrm>
+          <a:prstGeom prst="rect">
+            <a:avLst/>
+          </a:prstGeom>
+          <a:noFill/>
+        </p:spPr>
+        <p:txBody>
+          <a:bodyPr wrap="square" anchor="t" lIns="0" rIns="0" tIns="0" bIns="0">
+            <a:spAutoFit/>
+          </a:bodyPr>
+          <a:lstStyle/>
+          <a:p>
+            <a:pPr algn="l">
+              <a:spcAft>
+                <a:spcPts val="400"/>
+              </a:spcAft>
+            </a:pPr>
+            <a:r>
+              <a:rPr sz="2800" b="1">
                 <a:solidFill>
                   <a:srgbClr val="C9462C"/>
                 </a:solidFill>
@@ -10108,27 +10214,27 @@
         </p:nvSpPr>
         <p:spPr>
           <a:xfrm>
-            <a:off x="2743200" y="3474720"/>
-            <a:ext cx="2926080" cy="411480"/>
-          </a:xfrm>
-          <a:prstGeom prst="rect">
-            <a:avLst/>
-          </a:prstGeom>
-          <a:noFill/>
-        </p:spPr>
-        <p:txBody>
-          <a:bodyPr wrap="square" anchor="t" lIns="0" rIns="0" tIns="0" bIns="0">
-            <a:spAutoFit/>
-          </a:bodyPr>
-          <a:lstStyle/>
-          <a:p>
-            <a:pPr algn="l">
-              <a:spcAft>
-                <a:spcPts val="400"/>
-              </a:spcAft>
-            </a:pPr>
-            <a:r>
-              <a:rPr sz="1400" b="0">
+            <a:off x="2743200" y="3392424"/>
+            <a:ext cx="3291840" cy="411480"/>
+          </a:xfrm>
+          <a:prstGeom prst="rect">
+            <a:avLst/>
+          </a:prstGeom>
+          <a:noFill/>
+        </p:spPr>
+        <p:txBody>
+          <a:bodyPr wrap="square" anchor="t" lIns="0" rIns="0" tIns="0" bIns="0">
+            <a:spAutoFit/>
+          </a:bodyPr>
+          <a:lstStyle/>
+          <a:p>
+            <a:pPr algn="l">
+              <a:spcAft>
+                <a:spcPts val="400"/>
+              </a:spcAft>
+            </a:pPr>
+            <a:r>
+              <a:rPr sz="1300" b="0">
                 <a:solidFill>
                   <a:srgbClr val="101010"/>
                 </a:solidFill>
@@ -10147,27 +10253,27 @@
         </p:nvSpPr>
         <p:spPr>
           <a:xfrm>
-            <a:off x="548640" y="3977640"/>
-            <a:ext cx="2194560" cy="548640"/>
-          </a:xfrm>
-          <a:prstGeom prst="rect">
-            <a:avLst/>
-          </a:prstGeom>
-          <a:noFill/>
-        </p:spPr>
-        <p:txBody>
-          <a:bodyPr wrap="square" anchor="t" lIns="0" rIns="0" tIns="0" bIns="0">
-            <a:spAutoFit/>
-          </a:bodyPr>
-          <a:lstStyle/>
-          <a:p>
-            <a:pPr algn="l">
-              <a:spcAft>
-                <a:spcPts val="400"/>
-              </a:spcAft>
-            </a:pPr>
-            <a:r>
-              <a:rPr sz="3000" b="1">
+            <a:off x="502920" y="3849624"/>
+            <a:ext cx="2103120" cy="502920"/>
+          </a:xfrm>
+          <a:prstGeom prst="rect">
+            <a:avLst/>
+          </a:prstGeom>
+          <a:noFill/>
+        </p:spPr>
+        <p:txBody>
+          <a:bodyPr wrap="square" anchor="t" lIns="0" rIns="0" tIns="0" bIns="0">
+            <a:spAutoFit/>
+          </a:bodyPr>
+          <a:lstStyle/>
+          <a:p>
+            <a:pPr algn="l">
+              <a:spcAft>
+                <a:spcPts val="400"/>
+              </a:spcAft>
+            </a:pPr>
+            <a:r>
+              <a:rPr sz="2800" b="1">
                 <a:solidFill>
                   <a:srgbClr val="C9462C"/>
                 </a:solidFill>
@@ -10186,27 +10292,27 @@
         </p:nvSpPr>
         <p:spPr>
           <a:xfrm>
-            <a:off x="2743200" y="4114800"/>
-            <a:ext cx="2926080" cy="411480"/>
-          </a:xfrm>
-          <a:prstGeom prst="rect">
-            <a:avLst/>
-          </a:prstGeom>
-          <a:noFill/>
-        </p:spPr>
-        <p:txBody>
-          <a:bodyPr wrap="square" anchor="t" lIns="0" rIns="0" tIns="0" bIns="0">
-            <a:spAutoFit/>
-          </a:bodyPr>
-          <a:lstStyle/>
-          <a:p>
-            <a:pPr algn="l">
-              <a:spcAft>
-                <a:spcPts val="400"/>
-              </a:spcAft>
-            </a:pPr>
-            <a:r>
-              <a:rPr sz="1400" b="0">
+            <a:off x="2743200" y="3959352"/>
+            <a:ext cx="3291840" cy="411480"/>
+          </a:xfrm>
+          <a:prstGeom prst="rect">
+            <a:avLst/>
+          </a:prstGeom>
+          <a:noFill/>
+        </p:spPr>
+        <p:txBody>
+          <a:bodyPr wrap="square" anchor="t" lIns="0" rIns="0" tIns="0" bIns="0">
+            <a:spAutoFit/>
+          </a:bodyPr>
+          <a:lstStyle/>
+          <a:p>
+            <a:pPr algn="l">
+              <a:spcAft>
+                <a:spcPts val="400"/>
+              </a:spcAft>
+            </a:pPr>
+            <a:r>
+              <a:rPr sz="1300" b="0">
                 <a:solidFill>
                   <a:srgbClr val="101010"/>
                 </a:solidFill>
@@ -10225,7 +10331,7 @@
         </p:nvSpPr>
         <p:spPr>
           <a:xfrm>
-            <a:off x="548640" y="5029200"/>
+            <a:off x="502920" y="4599432"/>
             <a:ext cx="5486400" cy="31750"/>
           </a:xfrm>
           <a:prstGeom prst="rect">
@@ -10268,33 +10374,33 @@
         </p:nvSpPr>
         <p:spPr>
           <a:xfrm>
-            <a:off x="548640" y="5120640"/>
-            <a:ext cx="5486400" cy="365760"/>
-          </a:xfrm>
-          <a:prstGeom prst="rect">
-            <a:avLst/>
-          </a:prstGeom>
-          <a:noFill/>
-        </p:spPr>
-        <p:txBody>
-          <a:bodyPr wrap="square" anchor="t" lIns="0" rIns="0" tIns="0" bIns="0">
-            <a:spAutoFit/>
-          </a:bodyPr>
-          <a:lstStyle/>
-          <a:p>
-            <a:pPr algn="l">
-              <a:spcAft>
-                <a:spcPts val="400"/>
-              </a:spcAft>
-            </a:pPr>
-            <a:r>
-              <a:rPr sz="1400" b="1">
+            <a:off x="502920" y="4690872"/>
+            <a:ext cx="5486400" cy="292608"/>
+          </a:xfrm>
+          <a:prstGeom prst="rect">
+            <a:avLst/>
+          </a:prstGeom>
+          <a:noFill/>
+        </p:spPr>
+        <p:txBody>
+          <a:bodyPr wrap="square" anchor="t" lIns="0" rIns="0" tIns="0" bIns="0">
+            <a:spAutoFit/>
+          </a:bodyPr>
+          <a:lstStyle/>
+          <a:p>
+            <a:pPr algn="l">
+              <a:spcAft>
+                <a:spcPts val="400"/>
+              </a:spcAft>
+            </a:pPr>
+            <a:r>
+              <a:rPr sz="1300" b="1">
                 <a:solidFill>
                   <a:srgbClr val="102A43"/>
                 </a:solidFill>
                 <a:latin typeface="Calibri"/>
               </a:rPr>
-              <a:t>Adding more features hurts.</a:t>
+              <a:t>Adding more features does not help.</a:t>
             </a:r>
           </a:p>
         </p:txBody>
@@ -10307,27 +10413,27 @@
         </p:nvSpPr>
         <p:spPr>
           <a:xfrm>
-            <a:off x="548640" y="5532120"/>
-            <a:ext cx="2377440" cy="274320"/>
-          </a:xfrm>
-          <a:prstGeom prst="rect">
-            <a:avLst/>
-          </a:prstGeom>
-          <a:noFill/>
-        </p:spPr>
-        <p:txBody>
-          <a:bodyPr wrap="square" anchor="t" lIns="0" rIns="0" tIns="0" bIns="0">
-            <a:spAutoFit/>
-          </a:bodyPr>
-          <a:lstStyle/>
-          <a:p>
-            <a:pPr algn="l">
-              <a:spcAft>
-                <a:spcPts val="400"/>
-              </a:spcAft>
-            </a:pPr>
-            <a:r>
-              <a:rPr sz="1100" b="1">
+            <a:off x="502920" y="5056632"/>
+            <a:ext cx="2286000" cy="274320"/>
+          </a:xfrm>
+          <a:prstGeom prst="rect">
+            <a:avLst/>
+          </a:prstGeom>
+          <a:noFill/>
+        </p:spPr>
+        <p:txBody>
+          <a:bodyPr wrap="square" anchor="t" lIns="0" rIns="0" tIns="0" bIns="0">
+            <a:spAutoFit/>
+          </a:bodyPr>
+          <a:lstStyle/>
+          <a:p>
+            <a:pPr algn="l">
+              <a:spcAft>
+                <a:spcPts val="400"/>
+              </a:spcAft>
+            </a:pPr>
+            <a:r>
+              <a:rPr sz="1000" b="1">
                 <a:solidFill>
                   <a:srgbClr val="555555"/>
                 </a:solidFill>
@@ -10346,7 +10452,7 @@
         </p:nvSpPr>
         <p:spPr>
           <a:xfrm>
-            <a:off x="2926080" y="5532120"/>
+            <a:off x="2834640" y="5056632"/>
             <a:ext cx="914400" cy="274320"/>
           </a:xfrm>
           <a:prstGeom prst="rect">
@@ -10366,7 +10472,7 @@
               </a:spcAft>
             </a:pPr>
             <a:r>
-              <a:rPr sz="1100" b="1">
+              <a:rPr sz="1000" b="1">
                 <a:solidFill>
                   <a:srgbClr val="555555"/>
                 </a:solidFill>
@@ -10385,7 +10491,7 @@
         </p:nvSpPr>
         <p:spPr>
           <a:xfrm>
-            <a:off x="3840480" y="5532120"/>
+            <a:off x="3749039" y="5056632"/>
             <a:ext cx="914400" cy="274320"/>
           </a:xfrm>
           <a:prstGeom prst="rect">
@@ -10405,7 +10511,7 @@
               </a:spcAft>
             </a:pPr>
             <a:r>
-              <a:rPr sz="1100" b="1">
+              <a:rPr sz="1000" b="1">
                 <a:solidFill>
                   <a:srgbClr val="555555"/>
                 </a:solidFill>
@@ -10424,7 +10530,7 @@
         </p:nvSpPr>
         <p:spPr>
           <a:xfrm>
-            <a:off x="4754880" y="5532120"/>
+            <a:off x="4663440" y="5056632"/>
             <a:ext cx="914400" cy="274320"/>
           </a:xfrm>
           <a:prstGeom prst="rect">
@@ -10444,7 +10550,7 @@
               </a:spcAft>
             </a:pPr>
             <a:r>
-              <a:rPr sz="1100" b="1">
+              <a:rPr sz="1000" b="1">
                 <a:solidFill>
                   <a:srgbClr val="555555"/>
                 </a:solidFill>
@@ -10463,27 +10569,27 @@
         </p:nvSpPr>
         <p:spPr>
           <a:xfrm>
-            <a:off x="548640" y="5806440"/>
-            <a:ext cx="2377440" cy="274320"/>
-          </a:xfrm>
-          <a:prstGeom prst="rect">
-            <a:avLst/>
-          </a:prstGeom>
-          <a:noFill/>
-        </p:spPr>
-        <p:txBody>
-          <a:bodyPr wrap="square" anchor="t" lIns="0" rIns="0" tIns="0" bIns="0">
-            <a:spAutoFit/>
-          </a:bodyPr>
-          <a:lstStyle/>
-          <a:p>
-            <a:pPr algn="l">
-              <a:spcAft>
-                <a:spcPts val="400"/>
-              </a:spcAft>
-            </a:pPr>
-            <a:r>
-              <a:rPr sz="1200" b="0">
+            <a:off x="502920" y="5330952"/>
+            <a:ext cx="2286000" cy="274320"/>
+          </a:xfrm>
+          <a:prstGeom prst="rect">
+            <a:avLst/>
+          </a:prstGeom>
+          <a:noFill/>
+        </p:spPr>
+        <p:txBody>
+          <a:bodyPr wrap="square" anchor="t" lIns="0" rIns="0" tIns="0" bIns="0">
+            <a:spAutoFit/>
+          </a:bodyPr>
+          <a:lstStyle/>
+          <a:p>
+            <a:pPr algn="l">
+              <a:spcAft>
+                <a:spcPts val="400"/>
+              </a:spcAft>
+            </a:pPr>
+            <a:r>
+              <a:rPr sz="1100" b="0">
                 <a:solidFill>
                   <a:srgbClr val="101010"/>
                 </a:solidFill>
@@ -10502,7 +10608,7 @@
         </p:nvSpPr>
         <p:spPr>
           <a:xfrm>
-            <a:off x="2926080" y="5806440"/>
+            <a:off x="2834640" y="5330952"/>
             <a:ext cx="914400" cy="274320"/>
           </a:xfrm>
           <a:prstGeom prst="rect">
@@ -10522,7 +10628,7 @@
               </a:spcAft>
             </a:pPr>
             <a:r>
-              <a:rPr sz="1200" b="0">
+              <a:rPr sz="1100" b="0">
                 <a:solidFill>
                   <a:srgbClr val="101010"/>
                 </a:solidFill>
@@ -10541,7 +10647,7 @@
         </p:nvSpPr>
         <p:spPr>
           <a:xfrm>
-            <a:off x="3840480" y="5806440"/>
+            <a:off x="3749039" y="5330952"/>
             <a:ext cx="914400" cy="274320"/>
           </a:xfrm>
           <a:prstGeom prst="rect">
@@ -10561,7 +10667,7 @@
               </a:spcAft>
             </a:pPr>
             <a:r>
-              <a:rPr sz="1200" b="0">
+              <a:rPr sz="1100" b="0">
                 <a:solidFill>
                   <a:srgbClr val="101010"/>
                 </a:solidFill>
@@ -10580,7 +10686,7 @@
         </p:nvSpPr>
         <p:spPr>
           <a:xfrm>
-            <a:off x="4754880" y="5806440"/>
+            <a:off x="4663440" y="5330952"/>
             <a:ext cx="914400" cy="274320"/>
           </a:xfrm>
           <a:prstGeom prst="rect">
@@ -10600,7 +10706,7 @@
               </a:spcAft>
             </a:pPr>
             <a:r>
-              <a:rPr sz="1200" b="0">
+              <a:rPr sz="1100" b="0">
                 <a:solidFill>
                   <a:srgbClr val="101010"/>
                 </a:solidFill>
@@ -10619,27 +10725,27 @@
         </p:nvSpPr>
         <p:spPr>
           <a:xfrm>
-            <a:off x="548640" y="6099048"/>
-            <a:ext cx="2377440" cy="274320"/>
-          </a:xfrm>
-          <a:prstGeom prst="rect">
-            <a:avLst/>
-          </a:prstGeom>
-          <a:noFill/>
-        </p:spPr>
-        <p:txBody>
-          <a:bodyPr wrap="square" anchor="t" lIns="0" rIns="0" tIns="0" bIns="0">
-            <a:spAutoFit/>
-          </a:bodyPr>
-          <a:lstStyle/>
-          <a:p>
-            <a:pPr algn="l">
-              <a:spcAft>
-                <a:spcPts val="400"/>
-              </a:spcAft>
-            </a:pPr>
-            <a:r>
-              <a:rPr sz="1200" b="0">
+            <a:off x="502920" y="5605272"/>
+            <a:ext cx="2286000" cy="274320"/>
+          </a:xfrm>
+          <a:prstGeom prst="rect">
+            <a:avLst/>
+          </a:prstGeom>
+          <a:noFill/>
+        </p:spPr>
+        <p:txBody>
+          <a:bodyPr wrap="square" anchor="t" lIns="0" rIns="0" tIns="0" bIns="0">
+            <a:spAutoFit/>
+          </a:bodyPr>
+          <a:lstStyle/>
+          <a:p>
+            <a:pPr algn="l">
+              <a:spcAft>
+                <a:spcPts val="400"/>
+              </a:spcAft>
+            </a:pPr>
+            <a:r>
+              <a:rPr sz="1100" b="0">
                 <a:solidFill>
                   <a:srgbClr val="101010"/>
                 </a:solidFill>
@@ -10658,7 +10764,7 @@
         </p:nvSpPr>
         <p:spPr>
           <a:xfrm>
-            <a:off x="2926080" y="6099048"/>
+            <a:off x="2834640" y="5605272"/>
             <a:ext cx="914400" cy="274320"/>
           </a:xfrm>
           <a:prstGeom prst="rect">
@@ -10678,7 +10784,7 @@
               </a:spcAft>
             </a:pPr>
             <a:r>
-              <a:rPr sz="1200" b="0">
+              <a:rPr sz="1100" b="0">
                 <a:solidFill>
                   <a:srgbClr val="101010"/>
                 </a:solidFill>
@@ -10697,7 +10803,7 @@
         </p:nvSpPr>
         <p:spPr>
           <a:xfrm>
-            <a:off x="3840480" y="6099048"/>
+            <a:off x="3749039" y="5605272"/>
             <a:ext cx="914400" cy="274320"/>
           </a:xfrm>
           <a:prstGeom prst="rect">
@@ -10717,7 +10823,7 @@
               </a:spcAft>
             </a:pPr>
             <a:r>
-              <a:rPr sz="1200" b="0">
+              <a:rPr sz="1100" b="0">
                 <a:solidFill>
                   <a:srgbClr val="101010"/>
                 </a:solidFill>
@@ -10736,7 +10842,7 @@
         </p:nvSpPr>
         <p:spPr>
           <a:xfrm>
-            <a:off x="4754880" y="6099048"/>
+            <a:off x="4663440" y="5605272"/>
             <a:ext cx="914400" cy="274320"/>
           </a:xfrm>
           <a:prstGeom prst="rect">
@@ -10756,7 +10862,7 @@
               </a:spcAft>
             </a:pPr>
             <a:r>
-              <a:rPr sz="1200" b="0">
+              <a:rPr sz="1100" b="0">
                 <a:solidFill>
                   <a:srgbClr val="101010"/>
                 </a:solidFill>
@@ -10775,27 +10881,27 @@
         </p:nvSpPr>
         <p:spPr>
           <a:xfrm>
-            <a:off x="548640" y="6391656"/>
-            <a:ext cx="2377440" cy="274320"/>
-          </a:xfrm>
-          <a:prstGeom prst="rect">
-            <a:avLst/>
-          </a:prstGeom>
-          <a:noFill/>
-        </p:spPr>
-        <p:txBody>
-          <a:bodyPr wrap="square" anchor="t" lIns="0" rIns="0" tIns="0" bIns="0">
-            <a:spAutoFit/>
-          </a:bodyPr>
-          <a:lstStyle/>
-          <a:p>
-            <a:pPr algn="l">
-              <a:spcAft>
-                <a:spcPts val="400"/>
-              </a:spcAft>
-            </a:pPr>
-            <a:r>
-              <a:rPr sz="1200" b="0">
+            <a:off x="502920" y="5879592"/>
+            <a:ext cx="2286000" cy="274320"/>
+          </a:xfrm>
+          <a:prstGeom prst="rect">
+            <a:avLst/>
+          </a:prstGeom>
+          <a:noFill/>
+        </p:spPr>
+        <p:txBody>
+          <a:bodyPr wrap="square" anchor="t" lIns="0" rIns="0" tIns="0" bIns="0">
+            <a:spAutoFit/>
+          </a:bodyPr>
+          <a:lstStyle/>
+          <a:p>
+            <a:pPr algn="l">
+              <a:spcAft>
+                <a:spcPts val="400"/>
+              </a:spcAft>
+            </a:pPr>
+            <a:r>
+              <a:rPr sz="1100" b="0">
                 <a:solidFill>
                   <a:srgbClr val="101010"/>
                 </a:solidFill>
@@ -10814,7 +10920,7 @@
         </p:nvSpPr>
         <p:spPr>
           <a:xfrm>
-            <a:off x="2926080" y="6391656"/>
+            <a:off x="2834640" y="5879592"/>
             <a:ext cx="914400" cy="274320"/>
           </a:xfrm>
           <a:prstGeom prst="rect">
@@ -10834,7 +10940,7 @@
               </a:spcAft>
             </a:pPr>
             <a:r>
-              <a:rPr sz="1200" b="0">
+              <a:rPr sz="1100" b="0">
                 <a:solidFill>
                   <a:srgbClr val="101010"/>
                 </a:solidFill>
@@ -10853,7 +10959,7 @@
         </p:nvSpPr>
         <p:spPr>
           <a:xfrm>
-            <a:off x="3840480" y="6391656"/>
+            <a:off x="3749039" y="5879592"/>
             <a:ext cx="914400" cy="274320"/>
           </a:xfrm>
           <a:prstGeom prst="rect">
@@ -10873,7 +10979,7 @@
               </a:spcAft>
             </a:pPr>
             <a:r>
-              <a:rPr sz="1200" b="0">
+              <a:rPr sz="1100" b="0">
                 <a:solidFill>
                   <a:srgbClr val="101010"/>
                 </a:solidFill>
@@ -10892,7 +10998,7 @@
         </p:nvSpPr>
         <p:spPr>
           <a:xfrm>
-            <a:off x="4754880" y="6391656"/>
+            <a:off x="4663440" y="5879592"/>
             <a:ext cx="914400" cy="274320"/>
           </a:xfrm>
           <a:prstGeom prst="rect">
@@ -10912,7 +11018,7 @@
               </a:spcAft>
             </a:pPr>
             <a:r>
-              <a:rPr sz="1200" b="0">
+              <a:rPr sz="1100" b="0">
                 <a:solidFill>
                   <a:srgbClr val="101010"/>
                 </a:solidFill>
@@ -10939,8 +11045,8 @@
         </p:blipFill>
         <p:spPr>
           <a:xfrm>
-            <a:off x="6949440" y="1417320"/>
-            <a:ext cx="2717074" cy="2377440"/>
+            <a:off x="8081401" y="1554480"/>
+            <a:ext cx="2429691" cy="2125979"/>
           </a:xfrm>
           <a:prstGeom prst="rect">
             <a:avLst/>
@@ -10963,8 +11069,8 @@
         </p:blipFill>
         <p:spPr>
           <a:xfrm>
-            <a:off x="6949440" y="3931920"/>
-            <a:ext cx="3056709" cy="2377440"/>
+            <a:off x="7929546" y="3863339"/>
+            <a:ext cx="2733402" cy="2125979"/>
           </a:xfrm>
           <a:prstGeom prst="rect">
             <a:avLst/>
@@ -10979,8 +11085,8 @@
         </p:nvSpPr>
         <p:spPr>
           <a:xfrm>
-            <a:off x="548640" y="6446520"/>
-            <a:ext cx="7315200" cy="274320"/>
+            <a:off x="502920" y="6263640"/>
+            <a:ext cx="8229600" cy="274320"/>
           </a:xfrm>
           <a:prstGeom prst="rect">
             <a:avLst/>
@@ -11005,7 +11111,7 @@
                 </a:solidFill>
                 <a:latin typeface="Calibri"/>
               </a:rPr>
-              <a:t>Schiavone &amp; Johannsen — CYB623 — Pace University</a:t>
+              <a:t>Schiavone &amp; Johannsen   ·   CYB623   ·   Pace University</a:t>
             </a:r>
           </a:p>
         </p:txBody>
@@ -11018,8 +11124,8 @@
         </p:nvSpPr>
         <p:spPr>
           <a:xfrm>
-            <a:off x="548640" y="6446520"/>
-            <a:ext cx="7315200" cy="274320"/>
+            <a:off x="502920" y="6263640"/>
+            <a:ext cx="8229600" cy="274320"/>
           </a:xfrm>
           <a:prstGeom prst="rect">
             <a:avLst/>
@@ -11044,7 +11150,7 @@
                 </a:solidFill>
                 <a:latin typeface="Calibri"/>
               </a:rPr>
-              <a:t>Schiavone &amp; Johannsen — CYB623 — Pace University</a:t>
+              <a:t>Schiavone &amp; Johannsen   ·   CYB623   ·   Pace University</a:t>
             </a:r>
           </a:p>
         </p:txBody>
@@ -11057,8 +11163,8 @@
         </p:nvSpPr>
         <p:spPr>
           <a:xfrm>
-            <a:off x="10515600" y="6446520"/>
-            <a:ext cx="1188720" cy="274320"/>
+            <a:off x="10362895" y="6263640"/>
+            <a:ext cx="1371600" cy="274320"/>
           </a:xfrm>
           <a:prstGeom prst="rect">
             <a:avLst/>
@@ -11114,27 +11220,27 @@
         </p:nvSpPr>
         <p:spPr>
           <a:xfrm>
-            <a:off x="548640" y="320040"/>
-            <a:ext cx="10515600" cy="640080"/>
-          </a:xfrm>
-          <a:prstGeom prst="rect">
-            <a:avLst/>
-          </a:prstGeom>
-          <a:noFill/>
-        </p:spPr>
-        <p:txBody>
-          <a:bodyPr wrap="square" anchor="t" lIns="0" rIns="0" tIns="0" bIns="0">
-            <a:spAutoFit/>
-          </a:bodyPr>
-          <a:lstStyle/>
-          <a:p>
-            <a:pPr algn="l">
-              <a:spcAft>
-                <a:spcPts val="400"/>
-              </a:spcAft>
-            </a:pPr>
-            <a:r>
-              <a:rPr sz="3200" b="1">
+            <a:off x="502920" y="274320"/>
+            <a:ext cx="11185855" cy="731520"/>
+          </a:xfrm>
+          <a:prstGeom prst="rect">
+            <a:avLst/>
+          </a:prstGeom>
+          <a:noFill/>
+        </p:spPr>
+        <p:txBody>
+          <a:bodyPr wrap="square" anchor="t" lIns="0" rIns="0" tIns="0" bIns="0">
+            <a:spAutoFit/>
+          </a:bodyPr>
+          <a:lstStyle/>
+          <a:p>
+            <a:pPr algn="l">
+              <a:spcAft>
+                <a:spcPts val="400"/>
+              </a:spcAft>
+            </a:pPr>
+            <a:r>
+              <a:rPr sz="2800" b="1">
                 <a:solidFill>
                   <a:srgbClr val="102A43"/>
                 </a:solidFill>
@@ -11153,7 +11259,7 @@
         </p:nvSpPr>
         <p:spPr>
           <a:xfrm>
-            <a:off x="548640" y="960120"/>
+            <a:off x="502920" y="1005840"/>
             <a:ext cx="914400" cy="31750"/>
           </a:xfrm>
           <a:prstGeom prst="rect">
@@ -11196,33 +11302,33 @@
         </p:nvSpPr>
         <p:spPr>
           <a:xfrm>
-            <a:off x="548640" y="1051560"/>
-            <a:ext cx="10515600" cy="457200"/>
-          </a:xfrm>
-          <a:prstGeom prst="rect">
-            <a:avLst/>
-          </a:prstGeom>
-          <a:noFill/>
-        </p:spPr>
-        <p:txBody>
-          <a:bodyPr wrap="square" anchor="t" lIns="0" rIns="0" tIns="0" bIns="0">
-            <a:spAutoFit/>
-          </a:bodyPr>
-          <a:lstStyle/>
-          <a:p>
-            <a:pPr algn="l">
-              <a:spcAft>
-                <a:spcPts val="400"/>
-              </a:spcAft>
-            </a:pPr>
-            <a:r>
-              <a:rPr sz="1600" b="0">
+            <a:off x="502920" y="1078992"/>
+            <a:ext cx="11185855" cy="365760"/>
+          </a:xfrm>
+          <a:prstGeom prst="rect">
+            <a:avLst/>
+          </a:prstGeom>
+          <a:noFill/>
+        </p:spPr>
+        <p:txBody>
+          <a:bodyPr wrap="square" anchor="t" lIns="0" rIns="0" tIns="0" bIns="0">
+            <a:spAutoFit/>
+          </a:bodyPr>
+          <a:lstStyle/>
+          <a:p>
+            <a:pPr algn="l">
+              <a:spcAft>
+                <a:spcPts val="400"/>
+              </a:spcAft>
+            </a:pPr>
+            <a:r>
+              <a:rPr sz="1400" b="0">
                 <a:solidFill>
                   <a:srgbClr val="555555"/>
                 </a:solidFill>
                 <a:latin typeface="Calibri"/>
               </a:rPr>
-              <a:t>Narrow contribution alongside two recent Xue et al. papers</a:t>
+              <a:t>Narrow contribution alongside the recent Xue et al. line of work</a:t>
             </a:r>
           </a:p>
         </p:txBody>
@@ -11235,27 +11341,27 @@
         </p:nvSpPr>
         <p:spPr>
           <a:xfrm>
-            <a:off x="548640" y="1463040"/>
-            <a:ext cx="5486400" cy="365760"/>
-          </a:xfrm>
-          <a:prstGeom prst="rect">
-            <a:avLst/>
-          </a:prstGeom>
-          <a:noFill/>
-        </p:spPr>
-        <p:txBody>
-          <a:bodyPr wrap="square" anchor="t" lIns="0" rIns="0" tIns="0" bIns="0">
-            <a:spAutoFit/>
-          </a:bodyPr>
-          <a:lstStyle/>
-          <a:p>
-            <a:pPr algn="l">
-              <a:spcAft>
-                <a:spcPts val="400"/>
-              </a:spcAft>
-            </a:pPr>
-            <a:r>
-              <a:rPr sz="1800" b="1">
+            <a:off x="502920" y="1554480"/>
+            <a:ext cx="5364327" cy="347472"/>
+          </a:xfrm>
+          <a:prstGeom prst="rect">
+            <a:avLst/>
+          </a:prstGeom>
+          <a:noFill/>
+        </p:spPr>
+        <p:txBody>
+          <a:bodyPr wrap="square" anchor="t" lIns="0" rIns="0" tIns="0" bIns="0">
+            <a:spAutoFit/>
+          </a:bodyPr>
+          <a:lstStyle/>
+          <a:p>
+            <a:pPr algn="l">
+              <a:spcAft>
+                <a:spcPts val="400"/>
+              </a:spcAft>
+            </a:pPr>
+            <a:r>
+              <a:rPr sz="1700" b="1">
                 <a:solidFill>
                   <a:srgbClr val="102A43"/>
                 </a:solidFill>
@@ -11274,8 +11380,8 @@
         </p:nvSpPr>
         <p:spPr>
           <a:xfrm>
-            <a:off x="548640" y="1920240"/>
-            <a:ext cx="5486400" cy="4114800"/>
+            <a:off x="502920" y="1965960"/>
+            <a:ext cx="5364327" cy="3840480"/>
           </a:xfrm>
           <a:prstGeom prst="rect">
             <a:avLst/>
@@ -11290,115 +11396,115 @@
           <a:p>
             <a:pPr algn="l">
               <a:lnSpc>
-                <a:spcPct val="115000"/>
+                <a:spcPct val="116000"/>
               </a:lnSpc>
               <a:spcAft>
-                <a:spcPts val="400"/>
-              </a:spcAft>
-            </a:pPr>
-            <a:r>
-              <a:rPr sz="1500" b="0">
+                <a:spcPts val="600"/>
+              </a:spcAft>
+            </a:pPr>
+            <a:r>
+              <a:rPr sz="1300" b="0">
                 <a:solidFill>
                   <a:srgbClr val="101010"/>
                 </a:solidFill>
                 <a:latin typeface="Calibri"/>
               </a:rPr>
-              <a:t>• Xue et al., USENIX Security ’22 — passive + active for OpenVPN. Method template.</a:t>
+              <a:t>•   Xue et al., USENIX Sec ’22.  Passive + active for OpenVPN. Methodological template.</a:t>
             </a:r>
           </a:p>
           <a:p>
             <a:pPr algn="l">
               <a:lnSpc>
-                <a:spcPct val="115000"/>
+                <a:spcPct val="116000"/>
               </a:lnSpc>
               <a:spcAft>
-                <a:spcPts val="400"/>
-              </a:spcAft>
-            </a:pPr>
-            <a:r>
-              <a:rPr sz="1500" b="0">
+                <a:spcPts val="600"/>
+              </a:spcAft>
+            </a:pPr>
+            <a:r>
+              <a:rPr sz="1300" b="0">
                 <a:solidFill>
                   <a:srgbClr val="101010"/>
                 </a:solidFill>
                 <a:latin typeface="Calibri"/>
               </a:rPr>
-              <a:t>• Xue et al., USENIX Security ’24 — encapsulated-TLS-handshake fingerprint. Doesn’t fire on WG (no nested TLS).</a:t>
+              <a:t>•   Xue et al., USENIX Sec ’24.  Encapsulated TLS handshakes. Doesn’t fire on WireGuard (no nested TLS).</a:t>
             </a:r>
           </a:p>
           <a:p>
             <a:pPr algn="l">
               <a:lnSpc>
-                <a:spcPct val="115000"/>
+                <a:spcPct val="116000"/>
               </a:lnSpc>
               <a:spcAft>
-                <a:spcPts val="400"/>
-              </a:spcAft>
-            </a:pPr>
-            <a:r>
-              <a:rPr sz="1500" b="0">
+                <a:spcPts val="600"/>
+              </a:spcAft>
+            </a:pPr>
+            <a:r>
+              <a:rPr sz="1300" b="0">
                 <a:solidFill>
                   <a:srgbClr val="101010"/>
                 </a:solidFill>
                 <a:latin typeface="Calibri"/>
               </a:rPr>
-              <a:t>• Xue et al., NDSS ’25 — cross-layer RTT. Attenuated on UDP-only short flows.</a:t>
+              <a:t>•   Xue et al., NDSS ’25.  Cross-layer RTT. Attenuated on UDP-only short flows.</a:t>
             </a:r>
           </a:p>
           <a:p>
             <a:pPr algn="l">
               <a:lnSpc>
-                <a:spcPct val="115000"/>
+                <a:spcPct val="116000"/>
               </a:lnSpc>
               <a:spcAft>
-                <a:spcPts val="400"/>
-              </a:spcAft>
-            </a:pPr>
-            <a:r>
-              <a:rPr sz="1500" b="0">
+                <a:spcPts val="600"/>
+              </a:spcAft>
+            </a:pPr>
+            <a:r>
+              <a:rPr sz="1300" b="0">
                 <a:solidFill>
                   <a:srgbClr val="101010"/>
                 </a:solidFill>
                 <a:latin typeface="Calibri"/>
               </a:rPr>
-              <a:t>• Wu et al., USENIX Security ’23 — GFW entropy detector. Adjacent.</a:t>
+              <a:t>•   Wu et al., USENIX Sec ’23.  GFW entropy detector for fully-encrypted protocols.</a:t>
             </a:r>
           </a:p>
           <a:p>
             <a:pPr algn="l">
               <a:lnSpc>
-                <a:spcPct val="115000"/>
+                <a:spcPct val="116000"/>
               </a:lnSpc>
               <a:spcAft>
-                <a:spcPts val="400"/>
-              </a:spcAft>
-            </a:pPr>
-            <a:r>
-              <a:rPr sz="1500" b="0">
+                <a:spcPts val="600"/>
+              </a:spcAft>
+            </a:pPr>
+            <a:r>
+              <a:rPr sz="1300" b="0">
                 <a:solidFill>
                   <a:srgbClr val="101010"/>
                 </a:solidFill>
                 <a:latin typeface="Calibri"/>
               </a:rPr>
-              <a:t>• Alice et al., IMC ’20 — Shadowsocks active probes. Probe taxonomy.</a:t>
+              <a:t>•   Alice et al., IMC ’20.  Shadowsocks active probes. Probe taxonomy.</a:t>
             </a:r>
           </a:p>
           <a:p>
             <a:pPr algn="l">
               <a:lnSpc>
-                <a:spcPct val="115000"/>
+                <a:spcPct val="116000"/>
               </a:lnSpc>
               <a:spcAft>
-                <a:spcPts val="400"/>
-              </a:spcAft>
-            </a:pPr>
-            <a:r>
-              <a:rPr sz="1500" b="0">
+                <a:spcPts val="600"/>
+              </a:spcAft>
+            </a:pPr>
+            <a:r>
+              <a:rPr sz="1300" b="0">
                 <a:solidFill>
                   <a:srgbClr val="101010"/>
                 </a:solidFill>
                 <a:latin typeface="Calibri"/>
               </a:rPr>
-              <a:t>• Frolov &amp; Wustrow, NDSS ’20 — probe-resistant proxies.</a:t>
+              <a:t>•   Frolov &amp; Wustrow, NDSS ’20.  Probe-resistant proxy detection.</a:t>
             </a:r>
           </a:p>
         </p:txBody>
@@ -11411,33 +11517,33 @@
         </p:nvSpPr>
         <p:spPr>
           <a:xfrm>
-            <a:off x="6400800" y="1463040"/>
-            <a:ext cx="5303520" cy="365760"/>
-          </a:xfrm>
-          <a:prstGeom prst="rect">
-            <a:avLst/>
-          </a:prstGeom>
-          <a:noFill/>
-        </p:spPr>
-        <p:txBody>
-          <a:bodyPr wrap="square" anchor="t" lIns="0" rIns="0" tIns="0" bIns="0">
-            <a:spAutoFit/>
-          </a:bodyPr>
-          <a:lstStyle/>
-          <a:p>
-            <a:pPr algn="l">
-              <a:spcAft>
-                <a:spcPts val="400"/>
-              </a:spcAft>
-            </a:pPr>
-            <a:r>
-              <a:rPr sz="1800" b="1">
+            <a:off x="6324447" y="1554480"/>
+            <a:ext cx="5364327" cy="347472"/>
+          </a:xfrm>
+          <a:prstGeom prst="rect">
+            <a:avLst/>
+          </a:prstGeom>
+          <a:noFill/>
+        </p:spPr>
+        <p:txBody>
+          <a:bodyPr wrap="square" anchor="t" lIns="0" rIns="0" tIns="0" bIns="0">
+            <a:spAutoFit/>
+          </a:bodyPr>
+          <a:lstStyle/>
+          <a:p>
+            <a:pPr algn="l">
+              <a:spcAft>
+                <a:spcPts val="400"/>
+              </a:spcAft>
+            </a:pPr>
+            <a:r>
+              <a:rPr sz="1700" b="1">
                 <a:solidFill>
                   <a:srgbClr val="C9462C"/>
                 </a:solidFill>
                 <a:latin typeface="Calibri"/>
               </a:rPr>
-              <a:t>Honest limitations</a:t>
+              <a:t>What this paper does NOT claim</a:t>
             </a:r>
           </a:p>
         </p:txBody>
@@ -11450,8 +11556,8 @@
         </p:nvSpPr>
         <p:spPr>
           <a:xfrm>
-            <a:off x="6400800" y="1920240"/>
-            <a:ext cx="5303520" cy="4114800"/>
+            <a:off x="6324447" y="1965960"/>
+            <a:ext cx="5364327" cy="3840480"/>
           </a:xfrm>
           <a:prstGeom prst="rect">
             <a:avLst/>
@@ -11466,96 +11572,96 @@
           <a:p>
             <a:pPr algn="l">
               <a:lnSpc>
-                <a:spcPct val="115000"/>
+                <a:spcPct val="116000"/>
               </a:lnSpc>
               <a:spcAft>
-                <a:spcPts val="400"/>
-              </a:spcAft>
-            </a:pPr>
-            <a:r>
-              <a:rPr sz="1500" b="0">
+                <a:spcPts val="600"/>
+              </a:spcAft>
+            </a:pPr>
+            <a:r>
+              <a:rPr sz="1300" b="0">
                 <a:solidFill>
                   <a:srgbClr val="101010"/>
                 </a:solidFill>
                 <a:latin typeface="Calibri"/>
               </a:rPr>
-              <a:t>• Single client/server pair — no ISP-scale measurement.</a:t>
+              <a:t>•   Single client/server pair. No ISP-scale deployment trace.</a:t>
             </a:r>
           </a:p>
           <a:p>
             <a:pPr algn="l">
               <a:lnSpc>
-                <a:spcPct val="115000"/>
+                <a:spcPct val="116000"/>
               </a:lnSpc>
               <a:spcAft>
-                <a:spcPts val="400"/>
-              </a:spcAft>
-            </a:pPr>
-            <a:r>
-              <a:rPr sz="1500" b="0">
+                <a:spcPts val="600"/>
+              </a:spcAft>
+            </a:pPr>
+            <a:r>
+              <a:rPr sz="1300" b="0">
                 <a:solidFill>
                   <a:srgbClr val="101010"/>
                 </a:solidFill>
                 <a:latin typeface="Calibri"/>
               </a:rPr>
-              <a:t>• udp2raw v20230206.0 only; later forks may behave differently.</a:t>
+              <a:t>•   udp2raw v20230206.0 only. Later forks may behave differently.</a:t>
             </a:r>
           </a:p>
           <a:p>
             <a:pPr algn="l">
               <a:lnSpc>
-                <a:spcPct val="115000"/>
+                <a:spcPct val="116000"/>
               </a:lnSpc>
               <a:spcAft>
-                <a:spcPts val="400"/>
-              </a:spcAft>
-            </a:pPr>
-            <a:r>
-              <a:rPr sz="1500" b="0">
+                <a:spcPts val="600"/>
+              </a:spcAft>
+            </a:pPr>
+            <a:r>
+              <a:rPr sz="1300" b="0">
                 <a:solidFill>
                   <a:srgbClr val="101010"/>
                 </a:solidFill>
                 <a:latin typeface="Calibri"/>
               </a:rPr>
-              <a:t>• Static defenses: a delayed-ACK patch + WG MTU below the bulk threshold would weaken C2.</a:t>
+              <a:t>•   Static defenses: a delayed-ACK patch + WG MTU below the bulk threshold weakens C2.</a:t>
             </a:r>
           </a:p>
           <a:p>
             <a:pPr algn="l">
               <a:lnSpc>
-                <a:spcPct val="115000"/>
+                <a:spcPct val="116000"/>
               </a:lnSpc>
               <a:spcAft>
-                <a:spcPts val="400"/>
-              </a:spcAft>
-            </a:pPr>
-            <a:r>
-              <a:rPr sz="1500" b="0">
+                <a:spcPts val="600"/>
+              </a:spcAft>
+            </a:pPr>
+            <a:r>
+              <a:rPr sz="1300" b="0">
                 <a:solidFill>
                   <a:srgbClr val="101010"/>
                 </a:solidFill>
                 <a:latin typeface="Calibri"/>
               </a:rPr>
-              <a:t>• C1’s P3 (bogus ACK) is mildly hostile — adversary should fire it only on already-suspected hosts.</a:t>
+              <a:t>•   C1’s P3 (bogus ACK) is mildly hostile. Adversary should fire only at already-suspected hosts.</a:t>
             </a:r>
           </a:p>
           <a:p>
             <a:pPr algn="l">
               <a:lnSpc>
-                <a:spcPct val="115000"/>
+                <a:spcPct val="116000"/>
               </a:lnSpc>
               <a:spcAft>
-                <a:spcPts val="400"/>
-              </a:spcAft>
-            </a:pPr>
-            <a:r>
-              <a:rPr sz="1500" b="0">
+                <a:spcPts val="600"/>
+              </a:spcAft>
+            </a:pPr>
+            <a:r>
+              <a:rPr sz="1300" b="0">
                 <a:solidFill>
                   <a:srgbClr val="101010"/>
                 </a:solidFill>
                 <a:latin typeface="Calibri"/>
               </a:rPr>
-              <a:t>• Not benchmarked against AmneziaWG / swgp-go / wstunnel — future work.</a:t>
+              <a:t>•   Not benchmarked against AmneziaWG, swgp-go, wstunnel. Future work.</a:t>
             </a:r>
           </a:p>
         </p:txBody>
@@ -11568,8 +11674,8 @@
         </p:nvSpPr>
         <p:spPr>
           <a:xfrm>
-            <a:off x="548640" y="6446520"/>
-            <a:ext cx="7315200" cy="274320"/>
+            <a:off x="502920" y="6263640"/>
+            <a:ext cx="8229600" cy="274320"/>
           </a:xfrm>
           <a:prstGeom prst="rect">
             <a:avLst/>
@@ -11594,7 +11700,7 @@
                 </a:solidFill>
                 <a:latin typeface="Calibri"/>
               </a:rPr>
-              <a:t>Schiavone &amp; Johannsen — CYB623 — Pace University</a:t>
+              <a:t>Schiavone &amp; Johannsen   ·   CYB623   ·   Pace University</a:t>
             </a:r>
           </a:p>
         </p:txBody>
@@ -11607,8 +11713,8 @@
         </p:nvSpPr>
         <p:spPr>
           <a:xfrm>
-            <a:off x="548640" y="6446520"/>
-            <a:ext cx="7315200" cy="274320"/>
+            <a:off x="502920" y="6263640"/>
+            <a:ext cx="8229600" cy="274320"/>
           </a:xfrm>
           <a:prstGeom prst="rect">
             <a:avLst/>
@@ -11633,7 +11739,7 @@
                 </a:solidFill>
                 <a:latin typeface="Calibri"/>
               </a:rPr>
-              <a:t>Schiavone &amp; Johannsen — CYB623 — Pace University</a:t>
+              <a:t>Schiavone &amp; Johannsen   ·   CYB623   ·   Pace University</a:t>
             </a:r>
           </a:p>
         </p:txBody>
@@ -11646,8 +11752,8 @@
         </p:nvSpPr>
         <p:spPr>
           <a:xfrm>
-            <a:off x="10515600" y="6446520"/>
-            <a:ext cx="1188720" cy="274320"/>
+            <a:off x="10362895" y="6263640"/>
+            <a:ext cx="1371600" cy="274320"/>
           </a:xfrm>
           <a:prstGeom prst="rect">
             <a:avLst/>
@@ -11703,27 +11809,27 @@
         </p:nvSpPr>
         <p:spPr>
           <a:xfrm>
-            <a:off x="548640" y="320040"/>
-            <a:ext cx="10515600" cy="640080"/>
-          </a:xfrm>
-          <a:prstGeom prst="rect">
-            <a:avLst/>
-          </a:prstGeom>
-          <a:noFill/>
-        </p:spPr>
-        <p:txBody>
-          <a:bodyPr wrap="square" anchor="t" lIns="0" rIns="0" tIns="0" bIns="0">
-            <a:spAutoFit/>
-          </a:bodyPr>
-          <a:lstStyle/>
-          <a:p>
-            <a:pPr algn="l">
-              <a:spcAft>
-                <a:spcPts val="400"/>
-              </a:spcAft>
-            </a:pPr>
-            <a:r>
-              <a:rPr sz="3200" b="1">
+            <a:off x="502920" y="274320"/>
+            <a:ext cx="11185855" cy="731520"/>
+          </a:xfrm>
+          <a:prstGeom prst="rect">
+            <a:avLst/>
+          </a:prstGeom>
+          <a:noFill/>
+        </p:spPr>
+        <p:txBody>
+          <a:bodyPr wrap="square" anchor="t" lIns="0" rIns="0" tIns="0" bIns="0">
+            <a:spAutoFit/>
+          </a:bodyPr>
+          <a:lstStyle/>
+          <a:p>
+            <a:pPr algn="l">
+              <a:spcAft>
+                <a:spcPts val="400"/>
+              </a:spcAft>
+            </a:pPr>
+            <a:r>
+              <a:rPr sz="2800" b="1">
                 <a:solidFill>
                   <a:srgbClr val="102A43"/>
                 </a:solidFill>
@@ -11742,7 +11848,7 @@
         </p:nvSpPr>
         <p:spPr>
           <a:xfrm>
-            <a:off x="548640" y="960120"/>
+            <a:off x="502920" y="1005840"/>
             <a:ext cx="914400" cy="31750"/>
           </a:xfrm>
           <a:prstGeom prst="rect">
@@ -11785,27 +11891,27 @@
         </p:nvSpPr>
         <p:spPr>
           <a:xfrm>
-            <a:off x="548640" y="1554480"/>
-            <a:ext cx="11064240" cy="411480"/>
-          </a:xfrm>
-          <a:prstGeom prst="rect">
-            <a:avLst/>
-          </a:prstGeom>
-          <a:noFill/>
-        </p:spPr>
-        <p:txBody>
-          <a:bodyPr wrap="square" anchor="t" lIns="0" rIns="0" tIns="0" bIns="0">
-            <a:spAutoFit/>
-          </a:bodyPr>
-          <a:lstStyle/>
-          <a:p>
-            <a:pPr algn="l">
-              <a:spcAft>
-                <a:spcPts val="400"/>
-              </a:spcAft>
-            </a:pPr>
-            <a:r>
-              <a:rPr sz="2200" b="1">
+            <a:off x="502920" y="1554480"/>
+            <a:ext cx="11185855" cy="365760"/>
+          </a:xfrm>
+          <a:prstGeom prst="rect">
+            <a:avLst/>
+          </a:prstGeom>
+          <a:noFill/>
+        </p:spPr>
+        <p:txBody>
+          <a:bodyPr wrap="square" anchor="t" lIns="0" rIns="0" tIns="0" bIns="0">
+            <a:spAutoFit/>
+          </a:bodyPr>
+          <a:lstStyle/>
+          <a:p>
+            <a:pPr algn="l">
+              <a:spcAft>
+                <a:spcPts val="400"/>
+              </a:spcAft>
+            </a:pPr>
+            <a:r>
+              <a:rPr sz="2000" b="1">
                 <a:solidFill>
                   <a:srgbClr val="102A43"/>
                 </a:solidFill>
@@ -11824,33 +11930,33 @@
         </p:nvSpPr>
         <p:spPr>
           <a:xfrm>
-            <a:off x="548640" y="2011680"/>
-            <a:ext cx="11064240" cy="502920"/>
-          </a:xfrm>
-          <a:prstGeom prst="rect">
-            <a:avLst/>
-          </a:prstGeom>
-          <a:noFill/>
-        </p:spPr>
-        <p:txBody>
-          <a:bodyPr wrap="square" anchor="t" lIns="0" rIns="0" tIns="0" bIns="0">
-            <a:spAutoFit/>
-          </a:bodyPr>
-          <a:lstStyle/>
-          <a:p>
-            <a:pPr algn="l">
-              <a:spcAft>
-                <a:spcPts val="400"/>
-              </a:spcAft>
-            </a:pPr>
-            <a:r>
-              <a:rPr sz="1400" b="0">
+            <a:off x="502920" y="1965960"/>
+            <a:ext cx="11185855" cy="457200"/>
+          </a:xfrm>
+          <a:prstGeom prst="rect">
+            <a:avLst/>
+          </a:prstGeom>
+          <a:noFill/>
+        </p:spPr>
+        <p:txBody>
+          <a:bodyPr wrap="square" anchor="t" lIns="0" rIns="0" tIns="0" bIns="0">
+            <a:spAutoFit/>
+          </a:bodyPr>
+          <a:lstStyle/>
+          <a:p>
+            <a:pPr algn="l">
+              <a:spcAft>
+                <a:spcPts val="400"/>
+              </a:spcAft>
+            </a:pPr>
+            <a:r>
+              <a:rPr sz="1300" b="0">
                 <a:solidFill>
                   <a:srgbClr val="101010"/>
                 </a:solidFill>
                 <a:latin typeface="Calibri"/>
               </a:rPr>
-              <a:t>A 25-line classifier handles bare WG.  This is the existing problem the udp2raw shim is supposed to fix.</a:t>
+              <a:t>A 25-line classifier handles bare WG. udp2raw is the deployed fix.</a:t>
             </a:r>
           </a:p>
         </p:txBody>
@@ -11863,33 +11969,33 @@
         </p:nvSpPr>
         <p:spPr>
           <a:xfrm>
-            <a:off x="548640" y="2651760"/>
-            <a:ext cx="11064240" cy="411480"/>
-          </a:xfrm>
-          <a:prstGeom prst="rect">
-            <a:avLst/>
-          </a:prstGeom>
-          <a:noFill/>
-        </p:spPr>
-        <p:txBody>
-          <a:bodyPr wrap="square" anchor="t" lIns="0" rIns="0" tIns="0" bIns="0">
-            <a:spAutoFit/>
-          </a:bodyPr>
-          <a:lstStyle/>
-          <a:p>
-            <a:pPr algn="l">
-              <a:spcAft>
-                <a:spcPts val="400"/>
-              </a:spcAft>
-            </a:pPr>
-            <a:r>
-              <a:rPr sz="2200" b="1">
+            <a:off x="502920" y="2560320"/>
+            <a:ext cx="11185855" cy="365760"/>
+          </a:xfrm>
+          <a:prstGeom prst="rect">
+            <a:avLst/>
+          </a:prstGeom>
+          <a:noFill/>
+        </p:spPr>
+        <p:txBody>
+          <a:bodyPr wrap="square" anchor="t" lIns="0" rIns="0" tIns="0" bIns="0">
+            <a:spAutoFit/>
+          </a:bodyPr>
+          <a:lstStyle/>
+          <a:p>
+            <a:pPr algn="l">
+              <a:spcAft>
+                <a:spcPts val="400"/>
+              </a:spcAft>
+            </a:pPr>
+            <a:r>
+              <a:rPr sz="2000" b="1">
                 <a:solidFill>
                   <a:srgbClr val="C9462C"/>
                 </a:solidFill>
                 <a:latin typeface="Calibri"/>
               </a:rPr>
-              <a:t>udp2raw doesn't fix it.</a:t>
+              <a:t>udp2raw doesn't actually fix it.</a:t>
             </a:r>
           </a:p>
         </p:txBody>
@@ -11902,27 +12008,27 @@
         </p:nvSpPr>
         <p:spPr>
           <a:xfrm>
-            <a:off x="548640" y="3108960"/>
-            <a:ext cx="11064240" cy="502920"/>
-          </a:xfrm>
-          <a:prstGeom prst="rect">
-            <a:avLst/>
-          </a:prstGeom>
-          <a:noFill/>
-        </p:spPr>
-        <p:txBody>
-          <a:bodyPr wrap="square" anchor="t" lIns="0" rIns="0" tIns="0" bIns="0">
-            <a:spAutoFit/>
-          </a:bodyPr>
-          <a:lstStyle/>
-          <a:p>
-            <a:pPr algn="l">
-              <a:spcAft>
-                <a:spcPts val="400"/>
-              </a:spcAft>
-            </a:pPr>
-            <a:r>
-              <a:rPr sz="1400" b="0">
+            <a:off x="502920" y="2971800"/>
+            <a:ext cx="11185855" cy="457200"/>
+          </a:xfrm>
+          <a:prstGeom prst="rect">
+            <a:avLst/>
+          </a:prstGeom>
+          <a:noFill/>
+        </p:spPr>
+        <p:txBody>
+          <a:bodyPr wrap="square" anchor="t" lIns="0" rIns="0" tIns="0" bIns="0">
+            <a:spAutoFit/>
+          </a:bodyPr>
+          <a:lstStyle/>
+          <a:p>
+            <a:pPr algn="l">
+              <a:spcAft>
+                <a:spcPts val="400"/>
+              </a:spcAft>
+            </a:pPr>
+            <a:r>
+              <a:rPr sz="1300" b="0">
                 <a:solidFill>
                   <a:srgbClr val="101010"/>
                 </a:solidFill>
@@ -11941,27 +12047,27 @@
         </p:nvSpPr>
         <p:spPr>
           <a:xfrm>
-            <a:off x="548640" y="3749040"/>
-            <a:ext cx="11064240" cy="411480"/>
-          </a:xfrm>
-          <a:prstGeom prst="rect">
-            <a:avLst/>
-          </a:prstGeom>
-          <a:noFill/>
-        </p:spPr>
-        <p:txBody>
-          <a:bodyPr wrap="square" anchor="t" lIns="0" rIns="0" tIns="0" bIns="0">
-            <a:spAutoFit/>
-          </a:bodyPr>
-          <a:lstStyle/>
-          <a:p>
-            <a:pPr algn="l">
-              <a:spcAft>
-                <a:spcPts val="400"/>
-              </a:spcAft>
-            </a:pPr>
-            <a:r>
-              <a:rPr sz="2200" b="1">
+            <a:off x="502920" y="3566160"/>
+            <a:ext cx="11185855" cy="365760"/>
+          </a:xfrm>
+          <a:prstGeom prst="rect">
+            <a:avLst/>
+          </a:prstGeom>
+          <a:noFill/>
+        </p:spPr>
+        <p:txBody>
+          <a:bodyPr wrap="square" anchor="t" lIns="0" rIns="0" tIns="0" bIns="0">
+            <a:spAutoFit/>
+          </a:bodyPr>
+          <a:lstStyle/>
+          <a:p>
+            <a:pPr algn="l">
+              <a:spcAft>
+                <a:spcPts val="400"/>
+              </a:spcAft>
+            </a:pPr>
+            <a:r>
+              <a:rPr sz="2000" b="1">
                 <a:solidFill>
                   <a:srgbClr val="102A43"/>
                 </a:solidFill>
@@ -11980,33 +12086,33 @@
         </p:nvSpPr>
         <p:spPr>
           <a:xfrm>
-            <a:off x="548640" y="4206240"/>
-            <a:ext cx="11064240" cy="502920"/>
-          </a:xfrm>
-          <a:prstGeom prst="rect">
-            <a:avLst/>
-          </a:prstGeom>
-          <a:noFill/>
-        </p:spPr>
-        <p:txBody>
-          <a:bodyPr wrap="square" anchor="t" lIns="0" rIns="0" tIns="0" bIns="0">
-            <a:spAutoFit/>
-          </a:bodyPr>
-          <a:lstStyle/>
-          <a:p>
-            <a:pPr algn="l">
-              <a:spcAft>
-                <a:spcPts val="400"/>
-              </a:spcAft>
-            </a:pPr>
-            <a:r>
-              <a:rPr sz="1400" b="0">
+            <a:off x="502920" y="3977639"/>
+            <a:ext cx="11185855" cy="457200"/>
+          </a:xfrm>
+          <a:prstGeom prst="rect">
+            <a:avLst/>
+          </a:prstGeom>
+          <a:noFill/>
+        </p:spPr>
+        <p:txBody>
+          <a:bodyPr wrap="square" anchor="t" lIns="0" rIns="0" tIns="0" bIns="0">
+            <a:spAutoFit/>
+          </a:bodyPr>
+          <a:lstStyle/>
+          <a:p>
+            <a:pPr algn="l">
+              <a:spcAft>
+                <a:spcPts val="400"/>
+              </a:spcAft>
+            </a:pPr>
+            <a:r>
+              <a:rPr sz="1300" b="0">
                 <a:solidFill>
                   <a:srgbClr val="101010"/>
                 </a:solidFill>
                 <a:latin typeface="Calibri"/>
               </a:rPr>
-              <a:t>udp2raw silently drops unfamiliar TCP shapes; WireGuard pads to MTU; udp2raw acks 1:1.  None of these are statistical luck.</a:t>
+              <a:t>udp2raw drops unfamiliar TCP shapes; WG pads to MTU; udp2raw acks 1:1. None are statistical luck.</a:t>
             </a:r>
           </a:p>
         </p:txBody>
@@ -12019,33 +12125,33 @@
         </p:nvSpPr>
         <p:spPr>
           <a:xfrm>
-            <a:off x="548640" y="4846320"/>
-            <a:ext cx="11064240" cy="411480"/>
-          </a:xfrm>
-          <a:prstGeom prst="rect">
-            <a:avLst/>
-          </a:prstGeom>
-          <a:noFill/>
-        </p:spPr>
-        <p:txBody>
-          <a:bodyPr wrap="square" anchor="t" lIns="0" rIns="0" tIns="0" bIns="0">
-            <a:spAutoFit/>
-          </a:bodyPr>
-          <a:lstStyle/>
-          <a:p>
-            <a:pPr algn="l">
-              <a:spcAft>
-                <a:spcPts val="400"/>
-              </a:spcAft>
-            </a:pPr>
-            <a:r>
-              <a:rPr sz="2200" b="1">
+            <a:off x="502920" y="4572000"/>
+            <a:ext cx="11185855" cy="365760"/>
+          </a:xfrm>
+          <a:prstGeom prst="rect">
+            <a:avLst/>
+          </a:prstGeom>
+          <a:noFill/>
+        </p:spPr>
+        <p:txBody>
+          <a:bodyPr wrap="square" anchor="t" lIns="0" rIns="0" tIns="0" bIns="0">
+            <a:spAutoFit/>
+          </a:bodyPr>
+          <a:lstStyle/>
+          <a:p>
+            <a:pPr algn="l">
+              <a:spcAft>
+                <a:spcPts val="400"/>
+              </a:spcAft>
+            </a:pPr>
+            <a:r>
+              <a:rPr sz="2000" b="1">
                 <a:solidFill>
                   <a:srgbClr val="C9462C"/>
                 </a:solidFill>
                 <a:latin typeface="Calibri"/>
               </a:rPr>
-              <a:t>Defenses are obvious but un-implemented in upstream.</a:t>
+              <a:t>Defenses are obvious; the upstream tool does not implement them.</a:t>
             </a:r>
           </a:p>
         </p:txBody>
@@ -12058,33 +12164,33 @@
         </p:nvSpPr>
         <p:spPr>
           <a:xfrm>
-            <a:off x="548640" y="5303520"/>
-            <a:ext cx="11064240" cy="502920"/>
-          </a:xfrm>
-          <a:prstGeom prst="rect">
-            <a:avLst/>
-          </a:prstGeom>
-          <a:noFill/>
-        </p:spPr>
-        <p:txBody>
-          <a:bodyPr wrap="square" anchor="t" lIns="0" rIns="0" tIns="0" bIns="0">
-            <a:spAutoFit/>
-          </a:bodyPr>
-          <a:lstStyle/>
-          <a:p>
-            <a:pPr algn="l">
-              <a:spcAft>
-                <a:spcPts val="400"/>
-              </a:spcAft>
-            </a:pPr>
-            <a:r>
-              <a:rPr sz="1400" b="0">
+            <a:off x="502920" y="4983480"/>
+            <a:ext cx="11185855" cy="457200"/>
+          </a:xfrm>
+          <a:prstGeom prst="rect">
+            <a:avLst/>
+          </a:prstGeom>
+          <a:noFill/>
+        </p:spPr>
+        <p:txBody>
+          <a:bodyPr wrap="square" anchor="t" lIns="0" rIns="0" tIns="0" bIns="0">
+            <a:spAutoFit/>
+          </a:bodyPr>
+          <a:lstStyle/>
+          <a:p>
+            <a:pPr algn="l">
+              <a:spcAft>
+                <a:spcPts val="400"/>
+              </a:spcAft>
+            </a:pPr>
+            <a:r>
+              <a:rPr sz="1300" b="0">
                 <a:solidFill>
                   <a:srgbClr val="101010"/>
                 </a:solidFill>
                 <a:latin typeface="Calibri"/>
               </a:rPr>
-              <a:t>Delayed-ACK and a sub-bulk MTU close C2.  More-conformant TCP emulation closes C1.  Both are upstream patches we did not write.</a:t>
+              <a:t>Delayed-ACK plus a sub-bulk WG MTU closes C2. More-conformant TCP emulation closes C1.</a:t>
             </a:r>
           </a:p>
         </p:txBody>
@@ -12097,33 +12203,33 @@
         </p:nvSpPr>
         <p:spPr>
           <a:xfrm>
-            <a:off x="548640" y="5989320"/>
-            <a:ext cx="11064240" cy="457200"/>
-          </a:xfrm>
-          <a:prstGeom prst="rect">
-            <a:avLst/>
-          </a:prstGeom>
-          <a:noFill/>
-        </p:spPr>
-        <p:txBody>
-          <a:bodyPr wrap="square" anchor="t" lIns="0" rIns="0" tIns="0" bIns="0">
-            <a:spAutoFit/>
-          </a:bodyPr>
-          <a:lstStyle/>
-          <a:p>
-            <a:pPr algn="l">
-              <a:spcAft>
-                <a:spcPts val="400"/>
-              </a:spcAft>
-            </a:pPr>
-            <a:r>
-              <a:rPr sz="1400" b="0">
+            <a:off x="502920" y="5760720"/>
+            <a:ext cx="11185855" cy="274320"/>
+          </a:xfrm>
+          <a:prstGeom prst="rect">
+            <a:avLst/>
+          </a:prstGeom>
+          <a:noFill/>
+        </p:spPr>
+        <p:txBody>
+          <a:bodyPr wrap="square" anchor="t" lIns="0" rIns="0" tIns="0" bIns="0">
+            <a:spAutoFit/>
+          </a:bodyPr>
+          <a:lstStyle/>
+          <a:p>
+            <a:pPr algn="l">
+              <a:spcAft>
+                <a:spcPts val="400"/>
+              </a:spcAft>
+            </a:pPr>
+            <a:r>
+              <a:rPr sz="1200" b="0">
                 <a:solidFill>
                   <a:srgbClr val="555555"/>
                 </a:solidFill>
                 <a:latin typeface="Calibri"/>
               </a:rPr>
-              <a:t>Code, configs, evidence, and the report are in master_set/ and the repo.</a:t>
+              <a:t>Code, configs, evidence, paper, and slides are in the project repository.</a:t>
             </a:r>
           </a:p>
         </p:txBody>
@@ -12136,8 +12242,8 @@
         </p:nvSpPr>
         <p:spPr>
           <a:xfrm>
-            <a:off x="548640" y="6446520"/>
-            <a:ext cx="7315200" cy="274320"/>
+            <a:off x="502920" y="6263640"/>
+            <a:ext cx="8229600" cy="274320"/>
           </a:xfrm>
           <a:prstGeom prst="rect">
             <a:avLst/>
@@ -12162,7 +12268,7 @@
                 </a:solidFill>
                 <a:latin typeface="Calibri"/>
               </a:rPr>
-              <a:t>Schiavone &amp; Johannsen — CYB623 — Pace University</a:t>
+              <a:t>Schiavone &amp; Johannsen   ·   CYB623   ·   Pace University</a:t>
             </a:r>
           </a:p>
         </p:txBody>
@@ -12175,8 +12281,8 @@
         </p:nvSpPr>
         <p:spPr>
           <a:xfrm>
-            <a:off x="548640" y="6446520"/>
-            <a:ext cx="7315200" cy="274320"/>
+            <a:off x="502920" y="6263640"/>
+            <a:ext cx="8229600" cy="274320"/>
           </a:xfrm>
           <a:prstGeom prst="rect">
             <a:avLst/>
@@ -12201,7 +12307,7 @@
                 </a:solidFill>
                 <a:latin typeface="Calibri"/>
               </a:rPr>
-              <a:t>Schiavone &amp; Johannsen — CYB623 — Pace University</a:t>
+              <a:t>Schiavone &amp; Johannsen   ·   CYB623   ·   Pace University</a:t>
             </a:r>
           </a:p>
         </p:txBody>
@@ -12214,8 +12320,8 @@
         </p:nvSpPr>
         <p:spPr>
           <a:xfrm>
-            <a:off x="10515600" y="6446520"/>
-            <a:ext cx="1188720" cy="274320"/>
+            <a:off x="10362895" y="6263640"/>
+            <a:ext cx="1371600" cy="274320"/>
           </a:xfrm>
           <a:prstGeom prst="rect">
             <a:avLst/>

--- a/slides/WireGuard-udp2raw-detection.pptx
+++ b/slides/WireGuard-udp2raw-detection.pptx
@@ -510,59 +510,149 @@
           <a:lstStyle/>
           <a:p>
             <a:r>
-              <a:t>Hello. I'm Steven, this is Nicholas. We spent the semester building</a:t>
-            </a:r>
-          </a:p>
-          <a:p>
-            <a:r>
-              <a:t>and breaking a small WireGuard deployment.</a:t>
+              <a:t>Hello, I'm Steven, this is Nicholas. We spent the semester building</a:t>
+            </a:r>
+          </a:p>
+          <a:p>
+            <a:r>
+              <a:t>a small WireGuard setup and then trying to break it.</a:t>
             </a:r>
           </a:p>
           <a:p/>
           <a:p>
             <a:r>
-              <a:t>The headline is in two parts. WireGuard's wire format is regular enough</a:t>
-            </a:r>
-          </a:p>
-          <a:p>
-            <a:r>
-              <a:t>to fingerprint with a 25-line script. The community fix for that is a</a:t>
-            </a:r>
-          </a:p>
-          <a:p>
-            <a:r>
-              <a:t>tool called udp2raw, which has roughly two hundred and sixty thousand</a:t>
-            </a:r>
-          </a:p>
-          <a:p>
-            <a:r>
-              <a:t>binary downloads, is reportedly blocked by state-level DPI in multiple</a:t>
-            </a:r>
-          </a:p>
-          <a:p>
-            <a:r>
-              <a:t>regions, and has zero peer-reviewed analysis.</a:t>
+              <a:t>Quick orientation before we dive in. WireGuard is a modern VPN — when</a:t>
+            </a:r>
+          </a:p>
+          <a:p>
+            <a:r>
+              <a:t>you turn it on, your traffic goes through an encrypted tunnel to a server</a:t>
+            </a:r>
+          </a:p>
+          <a:p>
+            <a:r>
+              <a:t>somewhere, and a network observer can't read what's inside. That's the</a:t>
+            </a:r>
+          </a:p>
+          <a:p>
+            <a:r>
+              <a:t>"confidentiality" part, and WireGuard does it well.</a:t>
             </a:r>
           </a:p>
           <a:p/>
           <a:p>
             <a:r>
-              <a:t>We did the analysis. The result is two attacks: an active prober that</a:t>
-            </a:r>
-          </a:p>
-          <a:p>
-            <a:r>
-              <a:t>identifies a udp2raw listener in eight and a half seconds, and a passive</a:t>
-            </a:r>
-          </a:p>
-          <a:p>
-            <a:r>
-              <a:t>two-feature classifier that hits ninety-nine point nine percent accuracy</a:t>
-            </a:r>
-          </a:p>
-          <a:p>
-            <a:r>
-              <a:t>on real-world background traffic.</a:t>
+              <a:t>The problem we're going to talk about is different. It's not about</a:t>
+            </a:r>
+          </a:p>
+          <a:p>
+            <a:r>
+              <a:t>reading the contents. It's about whether a network observer can simply</a:t>
+            </a:r>
+          </a:p>
+          <a:p>
+            <a:r>
+              <a:t>tell that you are USING a VPN at all, even without decrypting anything.</a:t>
+            </a:r>
+          </a:p>
+          <a:p>
+            <a:r>
+              <a:t>In countries that block VPNs, that distinction is the whole game.</a:t>
+            </a:r>
+          </a:p>
+          <a:p/>
+          <a:p>
+            <a:r>
+              <a:t>The story has two parts.</a:t>
+            </a:r>
+          </a:p>
+          <a:p/>
+          <a:p>
+            <a:r>
+              <a:t>Part one: WireGuard is easy to spot on the wire. Every WireGuard packet</a:t>
+            </a:r>
+          </a:p>
+          <a:p>
+            <a:r>
+              <a:t>has such a recognizable shape that you can write a detector in about</a:t>
+            </a:r>
+          </a:p>
+          <a:p>
+            <a:r>
+              <a:t>twenty-five lines of Python. The Great Firewall of China actually does</a:t>
+            </a:r>
+          </a:p>
+          <a:p>
+            <a:r>
+              <a:t>this in production.</a:t>
+            </a:r>
+          </a:p>
+          <a:p/>
+          <a:p>
+            <a:r>
+              <a:t>Part two: there's a popular open-source tool called udp2raw that's</a:t>
+            </a:r>
+          </a:p>
+          <a:p>
+            <a:r>
+              <a:t>supposed to disguise WireGuard. It has been downloaded roughly two</a:t>
+            </a:r>
+          </a:p>
+          <a:p>
+            <a:r>
+              <a:t>hundred and sixty thousand times. People in Iran and China rely on it.</a:t>
+            </a:r>
+          </a:p>
+          <a:p>
+            <a:r>
+              <a:t>And here's the thing — nobody has ever published a peer-reviewed security</a:t>
+            </a:r>
+          </a:p>
+          <a:p>
+            <a:r>
+              <a:t>analysis of it. Zero papers.</a:t>
+            </a:r>
+          </a:p>
+          <a:p/>
+          <a:p>
+            <a:r>
+              <a:t>So we did the analysis. We came up with two ways to detect WireGuard</a:t>
+            </a:r>
+          </a:p>
+          <a:p>
+            <a:r>
+              <a:t>even when it's hiding inside udp2raw. One is "active" — we send a few</a:t>
+            </a:r>
+          </a:p>
+          <a:p>
+            <a:r>
+              <a:t>test packets at the server and watch how it replies, and we can identify</a:t>
+            </a:r>
+          </a:p>
+          <a:p>
+            <a:r>
+              <a:t>it in about eight and a half seconds. The other is "passive" — we just</a:t>
+            </a:r>
+          </a:p>
+          <a:p>
+            <a:r>
+              <a:t>watch normal traffic going by, measure two simple properties of it, and</a:t>
+            </a:r>
+          </a:p>
+          <a:p>
+            <a:r>
+              <a:t>a small machine-learning model tells WireGuard apart from regular web</a:t>
+            </a:r>
+          </a:p>
+          <a:p>
+            <a:r>
+              <a:t>traffic with ninety-nine point nine percent accuracy.</a:t>
+            </a:r>
+          </a:p>
+          <a:p/>
+          <a:p>
+            <a:r>
+              <a:t>That's the talk. Let's get into it.</a:t>
             </a:r>
           </a:p>
         </p:txBody>
@@ -632,65 +722,162 @@
           <a:lstStyle/>
           <a:p>
             <a:r>
-              <a:t>Two things on this slide.</a:t>
+              <a:t>Two things on this slide. First the technical observation, then a</a:t>
+            </a:r>
+          </a:p>
+          <a:p>
+            <a:r>
+              <a:t>philosophical one that's important so we don't sound like we're attacking</a:t>
+            </a:r>
+          </a:p>
+          <a:p>
+            <a:r>
+              <a:t>the WireGuard project.</a:t>
             </a:r>
           </a:p>
           <a:p/>
           <a:p>
             <a:r>
-              <a:t>First, the wire format is genuinely trivial. One type byte, three zero</a:t>
-            </a:r>
-          </a:p>
-          <a:p>
-            <a:r>
-              <a:t>bytes, fixed lengths for the handshake. Anyone watching UDP can fingerprint</a:t>
-            </a:r>
-          </a:p>
-          <a:p>
-            <a:r>
-              <a:t>it without decrypting anything. The Wu et al. paper from USENIX Security</a:t>
-            </a:r>
-          </a:p>
-          <a:p>
-            <a:r>
-              <a:t>2023 confirms this is exactly what the Great Firewall does in production.</a:t>
+              <a:t>The technical observation. Every WireGuard packet starts with the exact</a:t>
+            </a:r>
+          </a:p>
+          <a:p>
+            <a:r>
+              <a:t>same four bytes. The first byte is a "message type" and it can only be</a:t>
+            </a:r>
+          </a:p>
+          <a:p>
+            <a:r>
+              <a:t>one of four values: one, two, three, or four. The next three bytes are</a:t>
+            </a:r>
+          </a:p>
+          <a:p>
+            <a:r>
+              <a:t>literally always zero. So if you're watching the network and you see a</a:t>
+            </a:r>
+          </a:p>
+          <a:p>
+            <a:r>
+              <a:t>packet whose first byte is one of those four values and the next three</a:t>
+            </a:r>
+          </a:p>
+          <a:p>
+            <a:r>
+              <a:t>are zero, that's already a really strong hint it's WireGuard.</a:t>
             </a:r>
           </a:p>
           <a:p/>
           <a:p>
             <a:r>
-              <a:t>Second, and importantly, this is not a vulnerability. The WireGuard</a:t>
-            </a:r>
-          </a:p>
-          <a:p>
-            <a:r>
-              <a:t>whitepaper by Jason Donenfeld at NDSS 2017 explicitly says obfuscation</a:t>
-            </a:r>
-          </a:p>
-          <a:p>
-            <a:r>
-              <a:t>is out of scope. Donenfeld's position is that hiding a VPN's existence</a:t>
-            </a:r>
-          </a:p>
-          <a:p>
-            <a:r>
-              <a:t>should be handled by a layer above WireGuard, not by WireGuard itself.</a:t>
+              <a:t>And then it gets easier. WireGuard's "handshake" — that's the initial</a:t>
+            </a:r>
+          </a:p>
+          <a:p>
+            <a:r>
+              <a:t>back-and-forth when two computers set up the encrypted connection — uses</a:t>
+            </a:r>
+          </a:p>
+          <a:p>
+            <a:r>
+              <a:t>packets of exactly fixed sizes: a hundred and forty-eight bytes, then</a:t>
+            </a:r>
+          </a:p>
+          <a:p>
+            <a:r>
+              <a:t>ninety-two, then sixty-four. So you don't even need to decrypt anything.</a:t>
+            </a:r>
+          </a:p>
+          <a:p>
+            <a:r>
+              <a:t>You just look at the first four bytes and the size of the packet, and</a:t>
+            </a:r>
+          </a:p>
+          <a:p>
+            <a:r>
+              <a:t>you know.</a:t>
             </a:r>
           </a:p>
           <a:p/>
           <a:p>
             <a:r>
-              <a:t>So the question this paper asks isn't 'can you detect WireGuard?' That's</a:t>
-            </a:r>
-          </a:p>
-          <a:p>
-            <a:r>
-              <a:t>been answered. It's 'can you detect WireGuard once it's hidden inside</a:t>
-            </a:r>
-          </a:p>
-          <a:p>
-            <a:r>
-              <a:t>udp2raw?' Two slides from now we get to the answer.</a:t>
+              <a:t>You can write this whole detector in twenty-five lines of Python. We</a:t>
+            </a:r>
+          </a:p>
+          <a:p>
+            <a:r>
+              <a:t>re-implemented it ourselves as a baseline so we'd have an honest</a:t>
+            </a:r>
+          </a:p>
+          <a:p>
+            <a:r>
+              <a:t>comparison point for the rest of the paper. And this isn't theoretical —</a:t>
+            </a:r>
+          </a:p>
+          <a:p>
+            <a:r>
+              <a:t>a paper from USENIX Security 2023, by Wu and colleagues, confirms the</a:t>
+            </a:r>
+          </a:p>
+          <a:p>
+            <a:r>
+              <a:t>Great Firewall of China does exactly this in production.</a:t>
+            </a:r>
+          </a:p>
+          <a:p/>
+          <a:p>
+            <a:r>
+              <a:t>Now the philosophical point, and this matters. We are NOT saying</a:t>
+            </a:r>
+          </a:p>
+          <a:p>
+            <a:r>
+              <a:t>WireGuard has a vulnerability. The author of WireGuard, Jason Donenfeld,</a:t>
+            </a:r>
+          </a:p>
+          <a:p>
+            <a:r>
+              <a:t>wrote in his original paper back in 2017 that hiding the existence of a</a:t>
+            </a:r>
+          </a:p>
+          <a:p>
+            <a:r>
+              <a:t>VPN is explicitly not WireGuard's job. His position is that if you need</a:t>
+            </a:r>
+          </a:p>
+          <a:p>
+            <a:r>
+              <a:t>to hide that you're running a VPN, you should put another tool on top of</a:t>
+            </a:r>
+          </a:p>
+          <a:p>
+            <a:r>
+              <a:t>WireGuard to handle that.</a:t>
+            </a:r>
+          </a:p>
+          <a:p/>
+          <a:p>
+            <a:r>
+              <a:t>So the question we're actually asking is not "can you detect</a:t>
+            </a:r>
+          </a:p>
+          <a:p>
+            <a:r>
+              <a:t>WireGuard?" — that's a solved problem. The question is, "can you</a:t>
+            </a:r>
+          </a:p>
+          <a:p>
+            <a:r>
+              <a:t>detect WireGuard once someone has wrapped it inside the most popular</a:t>
+            </a:r>
+          </a:p>
+          <a:p>
+            <a:r>
+              <a:t>hiding tool people actually use?" That tool is udp2raw, and that's the</a:t>
+            </a:r>
+          </a:p>
+          <a:p>
+            <a:r>
+              <a:t>next slide.</a:t>
             </a:r>
           </a:p>
         </p:txBody>
@@ -760,69 +947,194 @@
           <a:lstStyle/>
           <a:p>
             <a:r>
-              <a:t>Top of the slide: two paths through our lab. Same WireGuard keys, same</a:t>
-            </a:r>
-          </a:p>
-          <a:p>
-            <a:r>
-              <a:t>inner addressing both ways; only the transport between client and server</a:t>
-            </a:r>
-          </a:p>
-          <a:p>
-            <a:r>
-              <a:t>changes. The direct path is what the GFW already blocks. The obfuscated</a:t>
-            </a:r>
-          </a:p>
-          <a:p>
-            <a:r>
-              <a:t>path wraps each WireGuard packet inside what looks like a long-running</a:t>
-            </a:r>
-          </a:p>
-          <a:p>
-            <a:r>
-              <a:t>TCP connection on port four thousand ninety-six.</a:t>
+              <a:t>Two boxes at the top of the slide. They're showing the two different</a:t>
+            </a:r>
+          </a:p>
+          <a:p>
+            <a:r>
+              <a:t>ways a WireGuard client can talk to a WireGuard server in our lab. The</a:t>
+            </a:r>
+          </a:p>
+          <a:p>
+            <a:r>
+              <a:t>encryption keys are identical in both setups; the only thing that</a:t>
+            </a:r>
+          </a:p>
+          <a:p>
+            <a:r>
+              <a:t>changes is what the traffic LOOKS like to anyone watching the network.</a:t>
             </a:r>
           </a:p>
           <a:p/>
           <a:p>
             <a:r>
-              <a:t>The bullets at the bottom: udp2raw matters because it's the dominant</a:t>
-            </a:r>
-          </a:p>
-          <a:p>
-            <a:r>
-              <a:t>generic UDP-to-faketcp shim. Two hundred and fifty-nine thousand binary</a:t>
-            </a:r>
-          </a:p>
-          <a:p>
-            <a:r>
-              <a:t>downloads is a real deployment number, not a star count. It's reportedly</a:t>
-            </a:r>
-          </a:p>
-          <a:p>
-            <a:r>
-              <a:t>blocked by state-level DPI. And no academic paper has analyzed it.</a:t>
+              <a:t>Left box: the "direct" path. WireGuard packets just go over UDP, which</a:t>
+            </a:r>
+          </a:p>
+          <a:p>
+            <a:r>
+              <a:t>is one of the two basic ways data travels on the internet. UDP is what</a:t>
+            </a:r>
+          </a:p>
+          <a:p>
+            <a:r>
+              <a:t>WireGuard normally uses. The problem is that this is what the Great</a:t>
+            </a:r>
+          </a:p>
+          <a:p>
+            <a:r>
+              <a:t>Firewall already detects and blocks, because of the obvious fingerprint</a:t>
+            </a:r>
+          </a:p>
+          <a:p>
+            <a:r>
+              <a:t>we just talked about.</a:t>
             </a:r>
           </a:p>
           <a:p/>
           <a:p>
             <a:r>
-              <a:t>Other tools, AmneziaWG and swgp-go, modify WireGuard itself rather than</a:t>
-            </a:r>
-          </a:p>
-          <a:p>
-            <a:r>
-              <a:t>wrap it generically; they're not the same comparison set. We focus on</a:t>
-            </a:r>
-          </a:p>
-          <a:p>
-            <a:r>
-              <a:t>udp2raw because it's the only fully unstudied tool in the generic-shim</a:t>
-            </a:r>
-          </a:p>
-          <a:p>
-            <a:r>
-              <a:t>category.</a:t>
+              <a:t>Right box: the "obfuscated" path. This is where udp2raw comes in.</a:t>
+            </a:r>
+          </a:p>
+          <a:p>
+            <a:r>
+              <a:t>udp2raw takes each WireGuard packet and re-wraps it to look like TCP</a:t>
+            </a:r>
+          </a:p>
+          <a:p>
+            <a:r>
+              <a:t>instead. TCP is the other main way data travels on the internet — it's</a:t>
+            </a:r>
+          </a:p>
+          <a:p>
+            <a:r>
+              <a:t>what your web browser uses for almost everything. The idea is that TCP</a:t>
+            </a:r>
+          </a:p>
+          <a:p>
+            <a:r>
+              <a:t>traffic is so common and so normal-looking that nobody will notice your</a:t>
+            </a:r>
+          </a:p>
+          <a:p>
+            <a:r>
+              <a:t>VPN hiding inside it. udp2raw calls this "faketcp" because it's not a</a:t>
+            </a:r>
+          </a:p>
+          <a:p>
+            <a:r>
+              <a:t>real TCP connection underneath; it's just shaped like one.</a:t>
+            </a:r>
+          </a:p>
+          <a:p/>
+          <a:p>
+            <a:r>
+              <a:t>Now, why udp2raw specifically? A few reasons.</a:t>
+            </a:r>
+          </a:p>
+          <a:p/>
+          <a:p>
+            <a:r>
+              <a:t>One — it's the dominant tool of its kind. Two hundred and fifty-nine</a:t>
+            </a:r>
+          </a:p>
+          <a:p>
+            <a:r>
+              <a:t>thousand downloads of the actual binary. That's not GitHub stars or</a:t>
+            </a:r>
+          </a:p>
+          <a:p>
+            <a:r>
+              <a:t>people bookmarking it, that's people downloading it to run. There's also</a:t>
+            </a:r>
+          </a:p>
+          <a:p>
+            <a:r>
+              <a:t>a fork for other platforms with another forty-one thousand downloads.</a:t>
+            </a:r>
+          </a:p>
+          <a:p/>
+          <a:p>
+            <a:r>
+              <a:t>Two — there's real-world evidence that governments are blocking it. An</a:t>
+            </a:r>
+          </a:p>
+          <a:p>
+            <a:r>
+              <a:t>issue on the udp2raw GitHub from 2024 documents an Iranian ISP blocking</a:t>
+            </a:r>
+          </a:p>
+          <a:p>
+            <a:r>
+              <a:t>all of its modes within seconds. There's a long-running discussion</a:t>
+            </a:r>
+          </a:p>
+          <a:p>
+            <a:r>
+              <a:t>thread about Iran's deep packet inspection — that's the term for when a</a:t>
+            </a:r>
+          </a:p>
+          <a:p>
+            <a:r>
+              <a:t>network operator looks at the contents of packets, not just where</a:t>
+            </a:r>
+          </a:p>
+          <a:p>
+            <a:r>
+              <a:t>they're going — and udp2raw is one of the tools that gets blocked.</a:t>
+            </a:r>
+          </a:p>
+          <a:p/>
+          <a:p>
+            <a:r>
+              <a:t>Three, and this is the gap we're filling — nobody has academically</a:t>
+            </a:r>
+          </a:p>
+          <a:p>
+            <a:r>
+              <a:t>analyzed it. We searched the major security conferences. USENIX, NDSS,</a:t>
+            </a:r>
+          </a:p>
+          <a:p>
+            <a:r>
+              <a:t>IMC, FOCI, PETS, CCS. These are the venues where this kind of work</a:t>
+            </a:r>
+          </a:p>
+          <a:p>
+            <a:r>
+              <a:t>gets published. Nothing on udp2raw. So this is genuinely an unstudied</a:t>
+            </a:r>
+          </a:p>
+          <a:p>
+            <a:r>
+              <a:t>target.</a:t>
+            </a:r>
+          </a:p>
+          <a:p/>
+          <a:p>
+            <a:r>
+              <a:t>One last thing — you might wonder why we don't also test other tools</a:t>
+            </a:r>
+          </a:p>
+          <a:p>
+            <a:r>
+              <a:t>like AmneziaWG or swgp-go. The answer is that those tools modify</a:t>
+            </a:r>
+          </a:p>
+          <a:p>
+            <a:r>
+              <a:t>WireGuard itself; they're a different category of fix. udp2raw is the</a:t>
+            </a:r>
+          </a:p>
+          <a:p>
+            <a:r>
+              <a:t>only big, popular, unstudied tool in the "wrap it generically" category,</a:t>
+            </a:r>
+          </a:p>
+          <a:p>
+            <a:r>
+              <a:t>so we focused there.</a:t>
             </a:r>
           </a:p>
         </p:txBody>
@@ -892,70 +1204,203 @@
           <a:lstStyle/>
           <a:p>
             <a:r>
-              <a:t>The methodology is borrowed from the Xue et al. paper that won</a:t>
-            </a:r>
-          </a:p>
-          <a:p>
-            <a:r>
-              <a:t>distinguished paper at USENIX Security 2022. They built passive-then-active</a:t>
-            </a:r>
-          </a:p>
-          <a:p>
-            <a:r>
-              <a:t>detectors for OpenVPN. We do the same pattern for WireGuard-in-udp2raw,</a:t>
-            </a:r>
-          </a:p>
-          <a:p>
-            <a:r>
-              <a:t>which they didn't cover.</a:t>
+              <a:t>Quick framing on this slide. There are two general ways to detect a</a:t>
+            </a:r>
+          </a:p>
+          <a:p>
+            <a:r>
+              <a:t>hidden service on a network. "Active" means you send something at the</a:t>
+            </a:r>
+          </a:p>
+          <a:p>
+            <a:r>
+              <a:t>server and watch how it responds. "Passive" means you don't send</a:t>
+            </a:r>
+          </a:p>
+          <a:p>
+            <a:r>
+              <a:t>anything — you just watch traffic going by and look for patterns. We do</a:t>
+            </a:r>
+          </a:p>
+          <a:p>
+            <a:r>
+              <a:t>both.</a:t>
             </a:r>
           </a:p>
           <a:p/>
           <a:p>
             <a:r>
-              <a:t>Left: contribution one is an active prober. Five stateless TCP packets,</a:t>
-            </a:r>
-          </a:p>
-          <a:p>
-            <a:r>
-              <a:t>nine seconds, deterministic. I'll show the actual probe outputs on the</a:t>
-            </a:r>
-          </a:p>
-          <a:p>
-            <a:r>
-              <a:t>next slide.</a:t>
+              <a:t>We didn't invent this two-pronged approach. A team at the University of</a:t>
+            </a:r>
+          </a:p>
+          <a:p>
+            <a:r>
+              <a:t>Michigan led by Diwen Xue published a paper at USENIX Security 2022 that</a:t>
+            </a:r>
+          </a:p>
+          <a:p>
+            <a:r>
+              <a:t>won "Distinguished Paper" — that's the conference's top award — where</a:t>
+            </a:r>
+          </a:p>
+          <a:p>
+            <a:r>
+              <a:t>they did exactly this for a different VPN called OpenVPN. We're applying</a:t>
+            </a:r>
+          </a:p>
+          <a:p>
+            <a:r>
+              <a:t>their same playbook to WireGuard-plus-udp2raw, which their paper didn't</a:t>
+            </a:r>
+          </a:p>
+          <a:p>
+            <a:r>
+              <a:t>cover.</a:t>
             </a:r>
           </a:p>
           <a:p/>
           <a:p>
             <a:r>
-              <a:t>Right: contribution two is a passive flow classifier. Two features, both</a:t>
-            </a:r>
-          </a:p>
-          <a:p>
-            <a:r>
-              <a:t>grounded in how WireGuard and udp2raw work. WireGuard pads every packet</a:t>
-            </a:r>
-          </a:p>
-          <a:p>
-            <a:r>
-              <a:t>to MTU; udp2raw acks every datagram one-to-one. Those two facts give us</a:t>
-            </a:r>
-          </a:p>
-          <a:p>
-            <a:r>
-              <a:t>99.9 percent accuracy on real-world traffic.</a:t>
+              <a:t>Left box, contribution one: the active prober. We send five carefully</a:t>
+            </a:r>
+          </a:p>
+          <a:p>
+            <a:r>
+              <a:t>chosen TCP packets at the target server. Five packets total. The whole</a:t>
+            </a:r>
+          </a:p>
+          <a:p>
+            <a:r>
+              <a:t>test takes under nine seconds, and we always get the same answer when</a:t>
+            </a:r>
+          </a:p>
+          <a:p>
+            <a:r>
+              <a:t>we re-run it. I'll walk through the actual packets on the next slide.</a:t>
             </a:r>
           </a:p>
           <a:p/>
           <a:p>
             <a:r>
-              <a:t>Trained on 24 WireGuard flows we captured ourselves, against 1058 non-VPN</a:t>
-            </a:r>
-          </a:p>
-          <a:p>
-            <a:r>
-              <a:t>flows from ISCXVPN2016, the canonical dataset for this task.</a:t>
+              <a:t>Right box, contribution two: the passive classifier. We just watch</a:t>
+            </a:r>
+          </a:p>
+          <a:p>
+            <a:r>
+              <a:t>traffic and measure two things about each "flow." A flow is a</a:t>
+            </a:r>
+          </a:p>
+          <a:p>
+            <a:r>
+              <a:t>conversation between two computers — one IP address talking to another</a:t>
+            </a:r>
+          </a:p>
+          <a:p>
+            <a:r>
+              <a:t>on specific ports. So for every flow we see, we compute these two</a:t>
+            </a:r>
+          </a:p>
+          <a:p>
+            <a:r>
+              <a:t>numbers, and a small machine learning model uses them to decide:</a:t>
+            </a:r>
+          </a:p>
+          <a:p>
+            <a:r>
+              <a:t>WireGuard, or not?</a:t>
+            </a:r>
+          </a:p>
+          <a:p/>
+          <a:p>
+            <a:r>
+              <a:t>The two numbers are called "bulk_fraction" and "ack60_fraction." Don't</a:t>
+            </a:r>
+          </a:p>
+          <a:p>
+            <a:r>
+              <a:t>worry about what they mean yet — slide six is dedicated to explaining</a:t>
+            </a:r>
+          </a:p>
+          <a:p>
+            <a:r>
+              <a:t>them. The key thing is they're not random statistical patterns we got</a:t>
+            </a:r>
+          </a:p>
+          <a:p>
+            <a:r>
+              <a:t>lucky with. They come directly from how WireGuard and udp2raw are</a:t>
+            </a:r>
+          </a:p>
+          <a:p>
+            <a:r>
+              <a:t>written. WireGuard always pads its packets to the maximum size, and</a:t>
+            </a:r>
+          </a:p>
+          <a:p>
+            <a:r>
+              <a:t>udp2raw sends back one acknowledgment packet for every data packet it</a:t>
+            </a:r>
+          </a:p>
+          <a:p>
+            <a:r>
+              <a:t>receives. Those two implementation choices are essentially impossible to</a:t>
+            </a:r>
+          </a:p>
+          <a:p>
+            <a:r>
+              <a:t>hide.</a:t>
+            </a:r>
+          </a:p>
+          <a:p/>
+          <a:p>
+            <a:r>
+              <a:t>The model we use is called a Random Forest. Think of it as a system</a:t>
+            </a:r>
+          </a:p>
+          <a:p>
+            <a:r>
+              <a:t>that learns rules from examples — you give it a bunch of WireGuard</a:t>
+            </a:r>
+          </a:p>
+          <a:p>
+            <a:r>
+              <a:t>flows and a bunch of normal flows, and it figures out the boundary</a:t>
+            </a:r>
+          </a:p>
+          <a:p>
+            <a:r>
+              <a:t>between them. On our data, it's correct ninety-nine point nine percent</a:t>
+            </a:r>
+          </a:p>
+          <a:p>
+            <a:r>
+              <a:t>of the time.</a:t>
+            </a:r>
+          </a:p>
+          <a:p/>
+          <a:p>
+            <a:r>
+              <a:t>For training data, we captured twenty-four WireGuard flows ourselves in</a:t>
+            </a:r>
+          </a:p>
+          <a:p>
+            <a:r>
+              <a:t>the lab. For the "normal traffic" comparison, we used a public research</a:t>
+            </a:r>
+          </a:p>
+          <a:p>
+            <a:r>
+              <a:t>dataset called ISCXVPN2016, which has over a thousand recordings of</a:t>
+            </a:r>
+          </a:p>
+          <a:p>
+            <a:r>
+              <a:t>ordinary web browsing, video, email, chat, and so on. It's the standard</a:t>
+            </a:r>
+          </a:p>
+          <a:p>
+            <a:r>
+              <a:t>dataset everyone uses for this kind of work.</a:t>
             </a:r>
           </a:p>
         </p:txBody>
@@ -1025,65 +1470,240 @@
           <a:lstStyle/>
           <a:p>
             <a:r>
-              <a:t>Three columns: real SSH on port 22, udp2raw on port 4096, and a closed</a:t>
-            </a:r>
-          </a:p>
-          <a:p>
-            <a:r>
-              <a:t>port 9999.</a:t>
+              <a:t>This is the active prober's results. Three columns — same server, three</a:t>
+            </a:r>
+          </a:p>
+          <a:p>
+            <a:r>
+              <a:t>different ports. A "port" is just a number that identifies which</a:t>
+            </a:r>
+          </a:p>
+          <a:p>
+            <a:r>
+              <a:t>service on a server you're talking to. Port twenty-two is real SSH,</a:t>
+            </a:r>
+          </a:p>
+          <a:p>
+            <a:r>
+              <a:t>which is normal remote-login software running on the kernel — that's</a:t>
+            </a:r>
+          </a:p>
+          <a:p>
+            <a:r>
+              <a:t>our "real TCP" control. Port four thousand ninety-six is where udp2raw</a:t>
+            </a:r>
+          </a:p>
+          <a:p>
+            <a:r>
+              <a:t>is listening. Port nine thousand nine hundred ninety-nine is closed,</a:t>
+            </a:r>
+          </a:p>
+          <a:p>
+            <a:r>
+              <a:t>nothing running there — that's our negative control.</a:t>
             </a:r>
           </a:p>
           <a:p/>
           <a:p>
             <a:r>
-              <a:t>Look at the orange entries. udp2raw answers the SYN because it has to</a:t>
-            </a:r>
-          </a:p>
-          <a:p>
-            <a:r>
-              <a:t>that's the disguise. It also answers the bogus ACK because the host</a:t>
-            </a:r>
-          </a:p>
-          <a:p>
-            <a:r>
-              <a:t>kernel generates the RST when udp2raw doesn't claim the packet. Those</a:t>
-            </a:r>
-          </a:p>
-          <a:p>
-            <a:r>
-              <a:t>two probes don't discriminate.</a:t>
+              <a:t>Quick TCP refresher so the table reads cleanly. When two computers want</a:t>
+            </a:r>
+          </a:p>
+          <a:p>
+            <a:r>
+              <a:t>to start a TCP connection, the client sends a "SYN" packet — that's</a:t>
+            </a:r>
+          </a:p>
+          <a:p>
+            <a:r>
+              <a:t>short for synchronize, it's basically "hello, want to talk?" The server</a:t>
+            </a:r>
+          </a:p>
+          <a:p>
+            <a:r>
+              <a:t>replies with a "SYN-ACK" — "hello back, sure." That's the start of every</a:t>
+            </a:r>
+          </a:p>
+          <a:p>
+            <a:r>
+              <a:t>TCP connection. There's also "RST" — short for reset — which is what a</a:t>
+            </a:r>
+          </a:p>
+          <a:p>
+            <a:r>
+              <a:t>server sends to say "no, go away." And "FIN" — for finish — which means</a:t>
+            </a:r>
+          </a:p>
+          <a:p>
+            <a:r>
+              <a:t>"I'm done talking." Those four — SYN, SYN-ACK, RST, FIN — are most of</a:t>
+            </a:r>
+          </a:p>
+          <a:p>
+            <a:r>
+              <a:t>what you need to read this table.</a:t>
             </a:r>
           </a:p>
           <a:p/>
           <a:p>
             <a:r>
-              <a:t>The other three, SYN with payload, an unusual window-scale option, FIN</a:t>
-            </a:r>
-          </a:p>
-          <a:p>
-            <a:r>
-              <a:t>to a port with no connection, udp2raw drops every one. A real Linux</a:t>
-            </a:r>
-          </a:p>
-          <a:p>
-            <a:r>
-              <a:t>kernel always answers them. That is the signal.</a:t>
+              <a:t>Five rows in the table, one per probe. Look at the orange "silent"</a:t>
+            </a:r>
+          </a:p>
+          <a:p>
+            <a:r>
+              <a:t>entries in the middle column.</a:t>
             </a:r>
           </a:p>
           <a:p/>
           <a:p>
             <a:r>
-              <a:t>Total wall-clock times: real TCP, half a second. udp2raw, eight and a</a:t>
-            </a:r>
-          </a:p>
-          <a:p>
-            <a:r>
-              <a:t>half seconds. Closed port, fifteen and a half. Five trials against</a:t>
-            </a:r>
-          </a:p>
-          <a:p>
-            <a:r>
-              <a:t>udp2raw produced the same verdict five out of five times.</a:t>
+              <a:t>The first probe is just a normal SYN. udp2raw answers it. Of course it</a:t>
+            </a:r>
+          </a:p>
+          <a:p>
+            <a:r>
+              <a:t>does — that's the whole point of the disguise. If it didn't answer SYNs</a:t>
+            </a:r>
+          </a:p>
+          <a:p>
+            <a:r>
+              <a:t>it wouldn't look like a TCP server at all.</a:t>
+            </a:r>
+          </a:p>
+          <a:p/>
+          <a:p>
+            <a:r>
+              <a:t>The third probe is a bogus ACK — we pretend to acknowledge a connection</a:t>
+            </a:r>
+          </a:p>
+          <a:p>
+            <a:r>
+              <a:t>that doesn't exist. udp2raw also answers this one, but here's the</a:t>
+            </a:r>
+          </a:p>
+          <a:p>
+            <a:r>
+              <a:t>subtle reason: udp2raw itself doesn't generate the response, the</a:t>
+            </a:r>
+          </a:p>
+          <a:p>
+            <a:r>
+              <a:t>underlying Linux kernel does, because udp2raw didn't recognize the</a:t>
+            </a:r>
+          </a:p>
+          <a:p>
+            <a:r>
+              <a:t>packet and the kernel emits its own reset by default. So probe one and</a:t>
+            </a:r>
+          </a:p>
+          <a:p>
+            <a:r>
+              <a:t>probe three don't help us discriminate.</a:t>
+            </a:r>
+          </a:p>
+          <a:p/>
+          <a:p>
+            <a:r>
+              <a:t>The interesting ones are probes two, four, and five. Probe two is a SYN</a:t>
+            </a:r>
+          </a:p>
+          <a:p>
+            <a:r>
+              <a:t>packet with thirty-two bytes of data attached. That's unusual but legal,</a:t>
+            </a:r>
+          </a:p>
+          <a:p>
+            <a:r>
+              <a:t>and a real Linux kernel always replies. Probe four uses an unusual TCP</a:t>
+            </a:r>
+          </a:p>
+          <a:p>
+            <a:r>
+              <a:t>option — specifically a "window scale" of fourteen, which is at the edge</a:t>
+            </a:r>
+          </a:p>
+          <a:p>
+            <a:r>
+              <a:t>of what's allowed. A real kernel still replies. Probe five is a FIN</a:t>
+            </a:r>
+          </a:p>
+          <a:p>
+            <a:r>
+              <a:t>packet — a "goodbye" packet — sent to a port where no conversation was</a:t>
+            </a:r>
+          </a:p>
+          <a:p>
+            <a:r>
+              <a:t>ever started. Real kernels reply to this too.</a:t>
+            </a:r>
+          </a:p>
+          <a:p/>
+          <a:p>
+            <a:r>
+              <a:t>udp2raw replies to none of them. Silent, silent, silent. That's the</a:t>
+            </a:r>
+          </a:p>
+          <a:p>
+            <a:r>
+              <a:t>giveaway. udp2raw was written to handle one specific TCP pattern, and</a:t>
+            </a:r>
+          </a:p>
+          <a:p>
+            <a:r>
+              <a:t>anything outside that pattern, it just drops on the floor. A real Linux</a:t>
+            </a:r>
+          </a:p>
+          <a:p>
+            <a:r>
+              <a:t>kernel never drops these — it always reacts.</a:t>
+            </a:r>
+          </a:p>
+          <a:p/>
+          <a:p>
+            <a:r>
+              <a:t>So our rule is simple: count how many of probes two, four, and five</a:t>
+            </a:r>
+          </a:p>
+          <a:p>
+            <a:r>
+              <a:t>were silent. If it's three out of three, it's udp2raw. Real TCP scores</a:t>
+            </a:r>
+          </a:p>
+          <a:p>
+            <a:r>
+              <a:t>zero out of three. Done.</a:t>
+            </a:r>
+          </a:p>
+          <a:p/>
+          <a:p>
+            <a:r>
+              <a:t>The bottom of the table is the timing. Half a second for real TCP. Eight</a:t>
+            </a:r>
+          </a:p>
+          <a:p>
+            <a:r>
+              <a:t>and a half seconds for udp2raw. The reason udp2raw takes longer is we</a:t>
+            </a:r>
+          </a:p>
+          <a:p>
+            <a:r>
+              <a:t>wait the full timeout on each of the silent probes. The closed port</a:t>
+            </a:r>
+          </a:p>
+          <a:p>
+            <a:r>
+              <a:t>takes fifteen and a half because there's nothing replying to anything.</a:t>
+            </a:r>
+          </a:p>
+          <a:p>
+            <a:r>
+              <a:t>And we ran this against udp2raw five separate times — same verdict every</a:t>
+            </a:r>
+          </a:p>
+          <a:p>
+            <a:r>
+              <a:t>time. Five out of five.</a:t>
             </a:r>
           </a:p>
         </p:txBody>
@@ -1153,96 +1773,260 @@
           <a:lstStyle/>
           <a:p>
             <a:r>
-              <a:t>Two features carry the whole story.</a:t>
+              <a:t>OK this is the heart of the passive classifier. Two numbers we measure</a:t>
+            </a:r>
+          </a:p>
+          <a:p>
+            <a:r>
+              <a:t>about every flow.</a:t>
             </a:r>
           </a:p>
           <a:p/>
           <a:p>
             <a:r>
-              <a:t>bulk_fraction is the share of packets at MTU. WireGuard 55 percent.</a:t>
-            </a:r>
-          </a:p>
-          <a:p>
-            <a:r>
-              <a:t>Non-VPN background, 2 percent. Cohen's d of 3.8, which is an enormous</a:t>
-            </a:r>
-          </a:p>
-          <a:p>
-            <a:r>
-              <a:t>effect size. WireGuard pads every packet to MTU. Web browsers don't.</a:t>
+              <a:t>First feature, called "bulk_fraction." This is just the fraction of</a:t>
+            </a:r>
+          </a:p>
+          <a:p>
+            <a:r>
+              <a:t>packets in the flow that are "big." We defined "big" as twelve hundred</a:t>
+            </a:r>
+          </a:p>
+          <a:p>
+            <a:r>
+              <a:t>bytes or more. The reason is something called MTU — short for Maximum</a:t>
+            </a:r>
+          </a:p>
+          <a:p>
+            <a:r>
+              <a:t>Transmission Unit, which is the largest packet size a network link will</a:t>
+            </a:r>
+          </a:p>
+          <a:p>
+            <a:r>
+              <a:t>carry, usually around fifteen hundred bytes. WireGuard pads every single</a:t>
+            </a:r>
+          </a:p>
+          <a:p>
+            <a:r>
+              <a:t>one of its packets up to right near that maximum. Web browsers don't do</a:t>
+            </a:r>
+          </a:p>
+          <a:p>
+            <a:r>
+              <a:t>this. A typical web flow has a mix of big packets when you're</a:t>
+            </a:r>
+          </a:p>
+          <a:p>
+            <a:r>
+              <a:t>downloading something and tiny packets the rest of the time. So:</a:t>
             </a:r>
           </a:p>
           <a:p/>
           <a:p>
             <a:r>
-              <a:t>ack60_fraction is the share of sixty-byte TCP ACK packets. For</a:t>
-            </a:r>
-          </a:p>
-          <a:p>
-            <a:r>
-              <a:t>WireGuard-in-udp2raw it's 30 percent. Why? udp2raw frames every WireGuard</a:t>
-            </a:r>
-          </a:p>
-          <a:p>
-            <a:r>
-              <a:t>datagram as one TCP segment, and the receiver's kernel acknowledges each</a:t>
-            </a:r>
-          </a:p>
-          <a:p>
-            <a:r>
-              <a:t>one with a sixty-byte ACK. Real bulk TCP uses delayed ACK and runs</a:t>
-            </a:r>
-          </a:p>
-          <a:p>
-            <a:r>
-              <a:t>closer to one-to-two. Cohen's d of 1.27, a large effect.</a:t>
+              <a:t>WireGuard flows: about fifty-five percent of their packets are big.</a:t>
+            </a:r>
+          </a:p>
+          <a:p>
+            <a:r>
+              <a:t>Normal background traffic: about two percent. That's a huge gap.</a:t>
             </a:r>
           </a:p>
           <a:p/>
           <a:p>
             <a:r>
-              <a:t>The scatter on the right shows all 1082 flows. Orange dots are WireGuard.</a:t>
-            </a:r>
-          </a:p>
-          <a:p>
-            <a:r>
-              <a:t>Grey dots are non-VPN. They essentially do not overlap. Twenty-four out</a:t>
-            </a:r>
-          </a:p>
-          <a:p>
-            <a:r>
-              <a:t>of twenty-four WG flows have bulk fraction at least 0.32. Only four out</a:t>
-            </a:r>
-          </a:p>
-          <a:p>
-            <a:r>
-              <a:t>of 1058 non-VPN flows fall anywhere near the WG cluster.</a:t>
+              <a:t>The table also lists something called "Cohen's d." This is a statistics</a:t>
+            </a:r>
+          </a:p>
+          <a:p>
+            <a:r>
+              <a:t>term that measures how cleanly separated two groups of numbers are. It's</a:t>
+            </a:r>
+          </a:p>
+          <a:p>
+            <a:r>
+              <a:t>on a scale where zero point eight is already considered a "large"</a:t>
+            </a:r>
+          </a:p>
+          <a:p>
+            <a:r>
+              <a:t>difference. For bulk_fraction we get three point eight three — almost</a:t>
+            </a:r>
+          </a:p>
+          <a:p>
+            <a:r>
+              <a:t>five times the threshold for "large." This is a giant, obvious</a:t>
+            </a:r>
+          </a:p>
+          <a:p>
+            <a:r>
+              <a:t>difference, not a subtle one we squeezed out with statistics.</a:t>
             </a:r>
           </a:p>
           <a:p/>
           <a:p>
             <a:r>
-              <a:t>Bottom-left orange note: I expected dominant_size_fraction to be the</a:t>
-            </a:r>
-          </a:p>
-          <a:p>
-            <a:r>
-              <a:t>killer feature. The data actually inverted that, because ISCXVPN2016</a:t>
-            </a:r>
-          </a:p>
-          <a:p>
-            <a:r>
-              <a:t>contains many idle TCP keepalives where every packet is exactly the</a:t>
-            </a:r>
-          </a:p>
-          <a:p>
-            <a:r>
-              <a:t>same size. Real data corrected my intuition. We dropped that feature</a:t>
-            </a:r>
-          </a:p>
-          <a:p>
-            <a:r>
-              <a:t>and three others from the headline classifier.</a:t>
+              <a:t>Second feature, "ack60_fraction." This one's a little more intricate so</a:t>
+            </a:r>
+          </a:p>
+          <a:p>
+            <a:r>
+              <a:t>bear with me. When you make a TCP connection, every time you send data,</a:t>
+            </a:r>
+          </a:p>
+          <a:p>
+            <a:r>
+              <a:t>the other side sends back a tiny acknowledgment packet — sixty bytes,</a:t>
+            </a:r>
+          </a:p>
+          <a:p>
+            <a:r>
+              <a:t>usually. These are called ACKs. In normal bulk file transfers, the</a:t>
+            </a:r>
+          </a:p>
+          <a:p>
+            <a:r>
+              <a:t>receiving side waits and sends one ACK for every TWO data packets, to</a:t>
+            </a:r>
+          </a:p>
+          <a:p>
+            <a:r>
+              <a:t>save bandwidth. That's called "delayed ACK." So normal TCP has about</a:t>
+            </a:r>
+          </a:p>
+          <a:p>
+            <a:r>
+              <a:t>thirty-three percent ACKs.</a:t>
+            </a:r>
+          </a:p>
+          <a:p/>
+          <a:p>
+            <a:r>
+              <a:t>But udp2raw breaks this. udp2raw takes each WireGuard packet and wraps</a:t>
+            </a:r>
+          </a:p>
+          <a:p>
+            <a:r>
+              <a:t>it as one separate TCP segment. The receiving computer's kernel sees</a:t>
+            </a:r>
+          </a:p>
+          <a:p>
+            <a:r>
+              <a:t>these as separate arrivals and ACKs each one individually — no delayed</a:t>
+            </a:r>
+          </a:p>
+          <a:p>
+            <a:r>
+              <a:t>ACK happens. So you end up with one ACK per data packet, fifty-fifty,</a:t>
+            </a:r>
+          </a:p>
+          <a:p>
+            <a:r>
+              <a:t>and the ACK fraction climbs.</a:t>
+            </a:r>
+          </a:p>
+          <a:p/>
+          <a:p>
+            <a:r>
+              <a:t>For WireGuard-in-udp2raw, ack60_fraction is about thirty percent. For</a:t>
+            </a:r>
+          </a:p>
+          <a:p>
+            <a:r>
+              <a:t>ordinary traffic, it's about seven percent. Cohen's d of one point two</a:t>
+            </a:r>
+          </a:p>
+          <a:p>
+            <a:r>
+              <a:t>seven — still a large effect.</a:t>
+            </a:r>
+          </a:p>
+          <a:p/>
+          <a:p>
+            <a:r>
+              <a:t>The scatter plot on the right is showing all one thousand eighty-two</a:t>
+            </a:r>
+          </a:p>
+          <a:p>
+            <a:r>
+              <a:t>flows we have, plotted on these two axes. Orange dots are WireGuard.</a:t>
+            </a:r>
+          </a:p>
+          <a:p>
+            <a:r>
+              <a:t>Grey dots are normal traffic. You can see they live in completely</a:t>
+            </a:r>
+          </a:p>
+          <a:p>
+            <a:r>
+              <a:t>different regions of the plot. They barely overlap. All twenty-four of</a:t>
+            </a:r>
+          </a:p>
+          <a:p>
+            <a:r>
+              <a:t>our WireGuard flows have a bulk_fraction of at least zero point three</a:t>
+            </a:r>
+          </a:p>
+          <a:p>
+            <a:r>
+              <a:t>two. Out of one thousand fifty-eight normal flows, only four are</a:t>
+            </a:r>
+          </a:p>
+          <a:p>
+            <a:r>
+              <a:t>anywhere near the WireGuard cluster.</a:t>
+            </a:r>
+          </a:p>
+          <a:p/>
+          <a:p>
+            <a:r>
+              <a:t>Bottom-left in orange, a quick aside about scientific honesty. Going in,</a:t>
+            </a:r>
+          </a:p>
+          <a:p>
+            <a:r>
+              <a:t>I expected a different feature called "dominant_size_fraction" — meaning</a:t>
+            </a:r>
+          </a:p>
+          <a:p>
+            <a:r>
+              <a:t>how often the most-common packet size shows up — to be the smoking gun.</a:t>
+            </a:r>
+          </a:p>
+          <a:p>
+            <a:r>
+              <a:t>Turned out the data went the opposite direction from what I expected.</a:t>
+            </a:r>
+          </a:p>
+          <a:p>
+            <a:r>
+              <a:t>The reason is that the public dataset contains lots of idle "keepalive"</a:t>
+            </a:r>
+          </a:p>
+          <a:p>
+            <a:r>
+              <a:t>flows where every packet is literally identical, so they score higher on</a:t>
+            </a:r>
+          </a:p>
+          <a:p>
+            <a:r>
+              <a:t>that feature than WireGuard does. The real-world data corrected my bad</a:t>
+            </a:r>
+          </a:p>
+          <a:p>
+            <a:r>
+              <a:t>guess. We dropped that feature and three others, and the two that</a:t>
+            </a:r>
+          </a:p>
+          <a:p>
+            <a:r>
+              <a:t>survived are the ones grounded in actual protocol mechanics, not in</a:t>
+            </a:r>
+          </a:p>
+          <a:p>
+            <a:r>
+              <a:t>intuition.</a:t>
             </a:r>
           </a:p>
         </p:txBody>
@@ -1312,64 +2096,236 @@
           <a:lstStyle/>
           <a:p>
             <a:r>
-              <a:t>The big numbers on the left are the headline. 99.91 percent accuracy.</a:t>
-            </a:r>
-          </a:p>
-          <a:p>
-            <a:r>
-              <a:t>Precision of one. Zero false positives across 1058 background flows.</a:t>
-            </a:r>
-          </a:p>
-          <a:p>
-            <a:r>
-              <a:t>Recall of 0.958, twenty-three of twenty-four WG flows correctly classified.</a:t>
-            </a:r>
-          </a:p>
-          <a:p>
-            <a:r>
-              <a:t>AUC is 1.0.</a:t>
+              <a:t>OK so we took those two features from the last slide and trained the</a:t>
+            </a:r>
+          </a:p>
+          <a:p>
+            <a:r>
+              <a:t>classifier. Here are the results.</a:t>
             </a:r>
           </a:p>
           <a:p/>
           <a:p>
             <a:r>
-              <a:t>The little table below those: the two-feature Random Forest is the</a:t>
-            </a:r>
-          </a:p>
-          <a:p>
-            <a:r>
-              <a:t>headline. The eight-feature Random Forest, adding entropy, mode</a:t>
-            </a:r>
-          </a:p>
-          <a:p>
-            <a:r>
-              <a:t>concentration, packet rate, and so on, actually does WORSE. Recall drops</a:t>
-            </a:r>
-          </a:p>
-          <a:p>
-            <a:r>
-              <a:t>from 0.958 to 0.917. The extra features add variance without adding</a:t>
-            </a:r>
-          </a:p>
-          <a:p>
-            <a:r>
-              <a:t>signal. Logistic regression catches everything but pays for it with</a:t>
-            </a:r>
-          </a:p>
-          <a:p>
-            <a:r>
-              <a:t>about 3 percent false positives.</a:t>
+              <a:t>Before reading the numbers, let me quickly define them, because each one</a:t>
+            </a:r>
+          </a:p>
+          <a:p>
+            <a:r>
+              <a:t>measures something different.</a:t>
             </a:r>
           </a:p>
           <a:p/>
           <a:p>
             <a:r>
-              <a:t>On the right: confusion matrix on top, ROC on the bottom. The ROC hugs</a:t>
-            </a:r>
-          </a:p>
-          <a:p>
-            <a:r>
-              <a:t>the top-left corner.</a:t>
+              <a:t>"Accuracy" is the simplest — out of every flow we tested, how many did</a:t>
+            </a:r>
+          </a:p>
+          <a:p>
+            <a:r>
+              <a:t>we label correctly? We got ninety-nine point nine one percent. So out of</a:t>
+            </a:r>
+          </a:p>
+          <a:p>
+            <a:r>
+              <a:t>about a thousand flows, we mislabeled around one.</a:t>
+            </a:r>
+          </a:p>
+          <a:p/>
+          <a:p>
+            <a:r>
+              <a:t>"Precision" answers the question: when the classifier says "this IS</a:t>
+            </a:r>
+          </a:p>
+          <a:p>
+            <a:r>
+              <a:t>WireGuard," how often is it right? We got one point zero. That's perfect.</a:t>
+            </a:r>
+          </a:p>
+          <a:p>
+            <a:r>
+              <a:t>Zero false alarms. We never accused a normal web flow of being WireGuard.</a:t>
+            </a:r>
+          </a:p>
+          <a:p/>
+          <a:p>
+            <a:r>
+              <a:t>"Recall" is the opposite question: of all the real WireGuard flows that</a:t>
+            </a:r>
+          </a:p>
+          <a:p>
+            <a:r>
+              <a:t>existed, how many did we catch? Zero point nine five eight. That means</a:t>
+            </a:r>
+          </a:p>
+          <a:p>
+            <a:r>
+              <a:t>we caught twenty-three of the twenty-four WireGuard flows. One slipped</a:t>
+            </a:r>
+          </a:p>
+          <a:p>
+            <a:r>
+              <a:t>through. So we're slightly conservative — we miss the occasional one,</a:t>
+            </a:r>
+          </a:p>
+          <a:p>
+            <a:r>
+              <a:t>but we never falsely accuse.</a:t>
+            </a:r>
+          </a:p>
+          <a:p/>
+          <a:p>
+            <a:r>
+              <a:t>"ROC AUC" is the trickiest one to explain. Imagine you could tune the</a:t>
+            </a:r>
+          </a:p>
+          <a:p>
+            <a:r>
+              <a:t>classifier to be more paranoid — willing to call more flows WireGuard —</a:t>
+            </a:r>
+          </a:p>
+          <a:p>
+            <a:r>
+              <a:t>or more relaxed. Each setting trades false alarms for missed WireGuards.</a:t>
+            </a:r>
+          </a:p>
+          <a:p>
+            <a:r>
+              <a:t>ROC AUC is a single number that summarizes how well the classifier does</a:t>
+            </a:r>
+          </a:p>
+          <a:p>
+            <a:r>
+              <a:t>across ALL of those tunings at once. The scale is zero point five for</a:t>
+            </a:r>
+          </a:p>
+          <a:p>
+            <a:r>
+              <a:t>random guessing, one point zero for a perfect classifier. We got</a:t>
+            </a:r>
+          </a:p>
+          <a:p>
+            <a:r>
+              <a:t>one point zero. Couldn't ask for better.</a:t>
+            </a:r>
+          </a:p>
+          <a:p/>
+          <a:p>
+            <a:r>
+              <a:t>Now the smaller table below — this is showing what happens if we add</a:t>
+            </a:r>
+          </a:p>
+          <a:p>
+            <a:r>
+              <a:t>more features. The "RF, two features" row is the headline classifier we</a:t>
+            </a:r>
+          </a:p>
+          <a:p>
+            <a:r>
+              <a:t>just discussed. The "RF, eight features" row added six more measurements:</a:t>
+            </a:r>
+          </a:p>
+          <a:p>
+            <a:r>
+              <a:t>things like packet-size variety, how concentrated the sizes are, how</a:t>
+            </a:r>
+          </a:p>
+          <a:p>
+            <a:r>
+              <a:t>fast packets are flowing, and so on. You'd think more information means</a:t>
+            </a:r>
+          </a:p>
+          <a:p>
+            <a:r>
+              <a:t>better results. It doesn't. Recall actually drops a tiny bit — we catch</a:t>
+            </a:r>
+          </a:p>
+          <a:p>
+            <a:r>
+              <a:t>twenty-two flows instead of twenty-three. The extra features added noise</a:t>
+            </a:r>
+          </a:p>
+          <a:p>
+            <a:r>
+              <a:t>without adding signal. The data was telling us "those two features were</a:t>
+            </a:r>
+          </a:p>
+          <a:p>
+            <a:r>
+              <a:t>enough."</a:t>
+            </a:r>
+          </a:p>
+          <a:p/>
+          <a:p>
+            <a:r>
+              <a:t>"LR" in the third row stands for Logistic Regression, which is a simpler</a:t>
+            </a:r>
+          </a:p>
+          <a:p>
+            <a:r>
+              <a:t>type of model than Random Forest — it just tries to draw a straight line</a:t>
+            </a:r>
+          </a:p>
+          <a:p>
+            <a:r>
+              <a:t>between the two groups. It catches every single WireGuard flow but it</a:t>
+            </a:r>
+          </a:p>
+          <a:p>
+            <a:r>
+              <a:t>also raises about three percent false alarms, because the boundary</a:t>
+            </a:r>
+          </a:p>
+          <a:p>
+            <a:r>
+              <a:t>between the two groups isn't actually a straight line.</a:t>
+            </a:r>
+          </a:p>
+          <a:p/>
+          <a:p>
+            <a:r>
+              <a:t>The pictures on the right. The top one is a "confusion matrix" — it's a</a:t>
+            </a:r>
+          </a:p>
+          <a:p>
+            <a:r>
+              <a:t>two-by-two grid showing how many WireGuard flows got correctly labeled</a:t>
+            </a:r>
+          </a:p>
+          <a:p>
+            <a:r>
+              <a:t>as WireGuard, how many normal flows got correctly labeled as normal,</a:t>
+            </a:r>
+          </a:p>
+          <a:p>
+            <a:r>
+              <a:t>and the mistakes in the other two corners. Almost everything is on the</a:t>
+            </a:r>
+          </a:p>
+          <a:p>
+            <a:r>
+              <a:t>diagonal, which means almost everything is correct.</a:t>
+            </a:r>
+          </a:p>
+          <a:p/>
+          <a:p>
+            <a:r>
+              <a:t>The bottom picture is the "ROC curve" — that's where the ROC AUC number</a:t>
+            </a:r>
+          </a:p>
+          <a:p>
+            <a:r>
+              <a:t>comes from. The curve hugs the top-left corner of the plot, which is</a:t>
+            </a:r>
+          </a:p>
+          <a:p>
+            <a:r>
+              <a:t>what a near-perfect classifier looks like. A diagonal line through the</a:t>
+            </a:r>
+          </a:p>
+          <a:p>
+            <a:r>
+              <a:t>middle would mean random guessing. We're nowhere near that.</a:t>
             </a:r>
           </a:p>
         </p:txBody>
@@ -1439,64 +2395,260 @@
           <a:lstStyle/>
           <a:p>
             <a:r>
-              <a:t>Quick lit positioning so the audience knows we read.</a:t>
+              <a:t>This slide does two things. The left side puts us in conversation with</a:t>
+            </a:r>
+          </a:p>
+          <a:p>
+            <a:r>
+              <a:t>the existing research, so you know we didn't reinvent the wheel. The</a:t>
+            </a:r>
+          </a:p>
+          <a:p>
+            <a:r>
+              <a:t>right side is us being honest about what we did NOT do.</a:t>
             </a:r>
           </a:p>
           <a:p/>
           <a:p>
             <a:r>
-              <a:t>The Xue group at Michigan has the dominant line of work. Their 2022 paper</a:t>
-            </a:r>
-          </a:p>
-          <a:p>
-            <a:r>
-              <a:t>on OpenVPN gave us our methodology template. Their 2024 paper does</a:t>
-            </a:r>
-          </a:p>
-          <a:p>
-            <a:r>
-              <a:t>encapsulated-TLS-handshake fingerprinting, which doesn't fire on WireGuard</a:t>
-            </a:r>
-          </a:p>
-          <a:p>
-            <a:r>
-              <a:t>because there's no nested TLS. Their 2025 NDSS paper does cross-layer</a:t>
-            </a:r>
-          </a:p>
-          <a:p>
-            <a:r>
-              <a:t>RTT, which attenuates on the short, UDP-only flows we have. So those</a:t>
-            </a:r>
-          </a:p>
-          <a:p>
-            <a:r>
-              <a:t>protocol-agnostic methods don't already solve the WireGuard-specific case.</a:t>
-            </a:r>
-          </a:p>
-          <a:p>
-            <a:r>
-              <a:t>Protocol-specific structural features remain the available approach.</a:t>
+              <a:t>Left side. The dominant research group in this area is at the University</a:t>
+            </a:r>
+          </a:p>
+          <a:p>
+            <a:r>
+              <a:t>of Michigan, led by Diwen Xue. They have three relevant papers.</a:t>
             </a:r>
           </a:p>
           <a:p/>
           <a:p>
             <a:r>
-              <a:t>On the right, what we are NOT claiming. We don't have ISP-scale</a:t>
-            </a:r>
-          </a:p>
-          <a:p>
-            <a:r>
-              <a:t>deployment data. We tested one version of udp2raw. A motivated maintainer</a:t>
-            </a:r>
-          </a:p>
-          <a:p>
-            <a:r>
-              <a:t>could patch it to defeat both attacks. We didn't extend to the other</a:t>
-            </a:r>
-          </a:p>
-          <a:p>
-            <a:r>
-              <a:t>shims. All of that is honest scope-limiting, not handwaving.</a:t>
+              <a:t>Their 2022 paper at USENIX Security broke obfuscated OpenVPN. That's</a:t>
+            </a:r>
+          </a:p>
+          <a:p>
+            <a:r>
+              <a:t>where we got our two-stage active-plus-passive methodology. OpenVPN is</a:t>
+            </a:r>
+          </a:p>
+          <a:p>
+            <a:r>
+              <a:t>a different VPN than WireGuard, and the specific attacks don't carry</a:t>
+            </a:r>
+          </a:p>
+          <a:p>
+            <a:r>
+              <a:t>over, but the playbook does.</a:t>
+            </a:r>
+          </a:p>
+          <a:p/>
+          <a:p>
+            <a:r>
+              <a:t>Their 2024 paper looks for nested encryption handshakes — basically,</a:t>
+            </a:r>
+          </a:p>
+          <a:p>
+            <a:r>
+              <a:t>when a tool tries to disguise traffic as HTTPS, there's often a real</a:t>
+            </a:r>
+          </a:p>
+          <a:p>
+            <a:r>
+              <a:t>TLS handshake hidden inside. They look for that. It doesn't work</a:t>
+            </a:r>
+          </a:p>
+          <a:p>
+            <a:r>
+              <a:t>against WireGuard, because WireGuard doesn't use TLS at all. There's</a:t>
+            </a:r>
+          </a:p>
+          <a:p>
+            <a:r>
+              <a:t>no nested handshake to find.</a:t>
+            </a:r>
+          </a:p>
+          <a:p/>
+          <a:p>
+            <a:r>
+              <a:t>Their 2025 paper at NDSS uses timing differences between layers of the</a:t>
+            </a:r>
+          </a:p>
+          <a:p>
+            <a:r>
+              <a:t>network stack — basically measuring round-trip times at different</a:t>
+            </a:r>
+          </a:p>
+          <a:p>
+            <a:r>
+              <a:t>levels and looking for inconsistencies. It works well on long,</a:t>
+            </a:r>
+          </a:p>
+          <a:p>
+            <a:r>
+              <a:t>high-bandwidth connections. Our captures are short and use UDP, where</a:t>
+            </a:r>
+          </a:p>
+          <a:p>
+            <a:r>
+              <a:t>that timing signal is weak. So that approach doesn't really apply to</a:t>
+            </a:r>
+          </a:p>
+          <a:p>
+            <a:r>
+              <a:t>our case either.</a:t>
+            </a:r>
+          </a:p>
+          <a:p/>
+          <a:p>
+            <a:r>
+              <a:t>The bottom line is: those general-purpose techniques exist, but none of</a:t>
+            </a:r>
+          </a:p>
+          <a:p>
+            <a:r>
+              <a:t>them solve the WireGuard-in-udp2raw case specifically. So the</a:t>
+            </a:r>
+          </a:p>
+          <a:p>
+            <a:r>
+              <a:t>protocol-specific approach we took — features that come from how</a:t>
+            </a:r>
+          </a:p>
+          <a:p>
+            <a:r>
+              <a:t>WireGuard and udp2raw are actually written — is the available</a:t>
+            </a:r>
+          </a:p>
+          <a:p>
+            <a:r>
+              <a:t>approach.</a:t>
+            </a:r>
+          </a:p>
+          <a:p/>
+          <a:p>
+            <a:r>
+              <a:t>We also cite Wu et al. on the Great Firewall's entropy filter, and</a:t>
+            </a:r>
+          </a:p>
+          <a:p>
+            <a:r>
+              <a:t>older work on Shadowsocks and TLS-based circumvention tools. That gives</a:t>
+            </a:r>
+          </a:p>
+          <a:p>
+            <a:r>
+              <a:t>us the broader context.</a:t>
+            </a:r>
+          </a:p>
+          <a:p/>
+          <a:p>
+            <a:r>
+              <a:t>Right side. What we are NOT claiming.</a:t>
+            </a:r>
+          </a:p>
+          <a:p/>
+          <a:p>
+            <a:r>
+              <a:t>One — we ran this in a lab, with one client and one server. We don't</a:t>
+            </a:r>
+          </a:p>
+          <a:p>
+            <a:r>
+              <a:t>have data from actual internet service providers at scale. So we can't</a:t>
+            </a:r>
+          </a:p>
+          <a:p>
+            <a:r>
+              <a:t>say "this would work on every network in the world." It's possible some</a:t>
+            </a:r>
+          </a:p>
+          <a:p>
+            <a:r>
+              <a:t>of our signals weaken in environments we didn't test.</a:t>
+            </a:r>
+          </a:p>
+          <a:p/>
+          <a:p>
+            <a:r>
+              <a:t>Two — we tested one specific version of udp2raw, the February 2023</a:t>
+            </a:r>
+          </a:p>
+          <a:p>
+            <a:r>
+              <a:t>release. There are forks of udp2raw with slightly different behavior</a:t>
+            </a:r>
+          </a:p>
+          <a:p>
+            <a:r>
+              <a:t>that we didn't test.</a:t>
+            </a:r>
+          </a:p>
+          <a:p/>
+          <a:p>
+            <a:r>
+              <a:t>Three — both of our attacks could be defeated by patching udp2raw. If</a:t>
+            </a:r>
+          </a:p>
+          <a:p>
+            <a:r>
+              <a:t>the maintainer added delayed-ACK behavior and recommended a smaller</a:t>
+            </a:r>
+          </a:p>
+          <a:p>
+            <a:r>
+              <a:t>WireGuard packet size, our passive classifier would lose most of its</a:t>
+            </a:r>
+          </a:p>
+          <a:p>
+            <a:r>
+              <a:t>edge. If they made the TCP emulation more thorough, our active prober</a:t>
+            </a:r>
+          </a:p>
+          <a:p>
+            <a:r>
+              <a:t>would lose its edge too. We're describing the current state of the</a:t>
+            </a:r>
+          </a:p>
+          <a:p>
+            <a:r>
+              <a:t>tool, not making a permanent claim.</a:t>
+            </a:r>
+          </a:p>
+          <a:p/>
+          <a:p>
+            <a:r>
+              <a:t>Four — the active prober's third probe, the bogus ACK, is mildly</a:t>
+            </a:r>
+          </a:p>
+          <a:p>
+            <a:r>
+              <a:t>hostile. In a real deployment you'd only fire that one at hosts you</a:t>
+            </a:r>
+          </a:p>
+          <a:p>
+            <a:r>
+              <a:t>already suspect.</a:t>
+            </a:r>
+          </a:p>
+          <a:p/>
+          <a:p>
+            <a:r>
+              <a:t>Five — we didn't compare against the other obfuscation tools like</a:t>
+            </a:r>
+          </a:p>
+          <a:p>
+            <a:r>
+              <a:t>AmneziaWG, swgp-go, or wstunnel. That's left for future work.</a:t>
+            </a:r>
+          </a:p>
+          <a:p/>
+          <a:p>
+            <a:r>
+              <a:t>The point of this slide is to be honest about scope so people can trust</a:t>
+            </a:r>
+          </a:p>
+          <a:p>
+            <a:r>
+              <a:t>the parts we DID prove.</a:t>
             </a:r>
           </a:p>
         </p:txBody>
@@ -1566,87 +2718,167 @@
           <a:lstStyle/>
           <a:p>
             <a:r>
-              <a:t>Four takeaways.</a:t>
+              <a:t>Four takeaways. If you remember nothing else from this talk, remember</a:t>
+            </a:r>
+          </a:p>
+          <a:p>
+            <a:r>
+              <a:t>these.</a:t>
             </a:r>
           </a:p>
           <a:p/>
           <a:p>
             <a:r>
-              <a:t>One. WireGuard's format leaks. Known result. We re-implement it as our</a:t>
-            </a:r>
-          </a:p>
-          <a:p>
-            <a:r>
-              <a:t>baseline so we can compare honestly.</a:t>
+              <a:t>Number one. WireGuard's packets are easy to recognize on the network.</a:t>
+            </a:r>
+          </a:p>
+          <a:p>
+            <a:r>
+              <a:t>That's not news — researchers and the Great Firewall have known this</a:t>
+            </a:r>
+          </a:p>
+          <a:p>
+            <a:r>
+              <a:t>for years. We re-built the detector ourselves, in twenty-five lines of</a:t>
+            </a:r>
+          </a:p>
+          <a:p>
+            <a:r>
+              <a:t>Python, just so we have a fair baseline to compare against.</a:t>
             </a:r>
           </a:p>
           <a:p/>
           <a:p>
             <a:r>
-              <a:t>Two. udp2raw does not actually fix the leak. Eight and a half seconds</a:t>
-            </a:r>
-          </a:p>
-          <a:p>
-            <a:r>
-              <a:t>with a five-packet active prober, or two passive features at AUC 1.0.</a:t>
-            </a:r>
-          </a:p>
-          <a:p>
-            <a:r>
-              <a:t>Pick your weapon.</a:t>
+              <a:t>Number two. The most popular tool people use to hide WireGuard — udp2raw,</a:t>
+            </a:r>
+          </a:p>
+          <a:p>
+            <a:r>
+              <a:t>which has been downloaded a quarter million times — doesn't actually</a:t>
+            </a:r>
+          </a:p>
+          <a:p>
+            <a:r>
+              <a:t>hide it well. You can spot it actively in eight and a half seconds by</a:t>
+            </a:r>
+          </a:p>
+          <a:p>
+            <a:r>
+              <a:t>sending five test packets. Or you can spot it passively, just watching</a:t>
+            </a:r>
+          </a:p>
+          <a:p>
+            <a:r>
+              <a:t>traffic, with a tiny machine-learning model that's right essentially a</a:t>
+            </a:r>
+          </a:p>
+          <a:p>
+            <a:r>
+              <a:t>hundred percent of the time. Take your pick.</a:t>
             </a:r>
           </a:p>
           <a:p/>
           <a:p>
             <a:r>
-              <a:t>Three. This isn't a statistical fluke. Both detectors are grounded in</a:t>
-            </a:r>
-          </a:p>
-          <a:p>
-            <a:r>
-              <a:t>how the protocols are implemented. WireGuard pads to MTU because it does.</a:t>
-            </a:r>
-          </a:p>
-          <a:p>
-            <a:r>
-              <a:t>udp2raw acks one-to-one because it has to. udp2raw silently drops</a:t>
-            </a:r>
-          </a:p>
-          <a:p>
-            <a:r>
-              <a:t>unrecognized TCP shapes because its parser was written with one shape</a:t>
-            </a:r>
-          </a:p>
-          <a:p>
-            <a:r>
-              <a:t>in mind.</a:t>
+              <a:t>Number three. These results are not statistical flukes or lucky</a:t>
+            </a:r>
+          </a:p>
+          <a:p>
+            <a:r>
+              <a:t>patterns we found in one dataset. Both detectors come from how the</a:t>
+            </a:r>
+          </a:p>
+          <a:p>
+            <a:r>
+              <a:t>software is fundamentally written. WireGuard always pads its packets to</a:t>
+            </a:r>
+          </a:p>
+          <a:p>
+            <a:r>
+              <a:t>the maximum size — that's a deliberate design choice in the protocol.</a:t>
+            </a:r>
+          </a:p>
+          <a:p>
+            <a:r>
+              <a:t>udp2raw always acknowledges every wrapped packet one-for-one, because</a:t>
+            </a:r>
+          </a:p>
+          <a:p>
+            <a:r>
+              <a:t>that's how its wrapping mechanism works. And udp2raw silently drops</a:t>
+            </a:r>
+          </a:p>
+          <a:p>
+            <a:r>
+              <a:t>weird TCP packets because the person who wrote it only thought about</a:t>
+            </a:r>
+          </a:p>
+          <a:p>
+            <a:r>
+              <a:t>the one specific TCP pattern. These are mechanical consequences of the</a:t>
+            </a:r>
+          </a:p>
+          <a:p>
+            <a:r>
+              <a:t>code, not statistical accidents — so they should transfer to other</a:t>
+            </a:r>
+          </a:p>
+          <a:p>
+            <a:r>
+              <a:t>networks and other situations.</a:t>
             </a:r>
           </a:p>
           <a:p/>
           <a:p>
             <a:r>
-              <a:t>Four. The defenses are obvious. Delayed ACK and a smaller WireGuard MTU</a:t>
-            </a:r>
-          </a:p>
-          <a:p>
-            <a:r>
-              <a:t>kill the passive classifier. More conformant TCP emulation kills the</a:t>
-            </a:r>
-          </a:p>
-          <a:p>
-            <a:r>
-              <a:t>active prober. We sketch both in the paper but didn't patch the upstream</a:t>
-            </a:r>
-          </a:p>
-          <a:p>
-            <a:r>
-              <a:t>tool. Somebody else's pull request to write.</a:t>
+              <a:t>Number four. The defenses are not hard. If the udp2raw author added</a:t>
+            </a:r>
+          </a:p>
+          <a:p>
+            <a:r>
+              <a:t>delayed acknowledgments, and recommended users set a smaller WireGuard</a:t>
+            </a:r>
+          </a:p>
+          <a:p>
+            <a:r>
+              <a:t>packet size, the passive classifier mostly stops working. If they made</a:t>
+            </a:r>
+          </a:p>
+          <a:p>
+            <a:r>
+              <a:t>the TCP emulation more thorough — actually responding to weird probes</a:t>
+            </a:r>
+          </a:p>
+          <a:p>
+            <a:r>
+              <a:t>the way a real Linux kernel does — the active prober stops working.</a:t>
+            </a:r>
+          </a:p>
+          <a:p>
+            <a:r>
+              <a:t>We describe both fixes in the paper. We didn't actually write the patch</a:t>
+            </a:r>
+          </a:p>
+          <a:p>
+            <a:r>
+              <a:t>ourselves and submit it upstream. That's a pull request someone else</a:t>
+            </a:r>
+          </a:p>
+          <a:p>
+            <a:r>
+              <a:t>can write.</a:t>
             </a:r>
           </a:p>
           <a:p/>
           <a:p>
             <a:r>
-              <a:t>Happy to take questions.</a:t>
+              <a:t>That's the talk. Happy to take questions, and we have a live demo</a:t>
+            </a:r>
+          </a:p>
+          <a:p>
+            <a:r>
+              <a:t>ready if there's interest.</a:t>
             </a:r>
           </a:p>
         </p:txBody>

--- a/slides/WireGuard-udp2raw-detection.pptx
+++ b/slides/WireGuard-udp2raw-detection.pptx
@@ -510,149 +510,59 @@
           <a:lstStyle/>
           <a:p>
             <a:r>
-              <a:t>Hello, I'm Steven, this is Nicholas. We spent the semester building</a:t>
-            </a:r>
-          </a:p>
-          <a:p>
-            <a:r>
-              <a:t>a small WireGuard setup and then trying to break it.</a:t>
+              <a:t>Hi, I'm Steven, this is Nicholas. We spent the semester building and</a:t>
+            </a:r>
+          </a:p>
+          <a:p>
+            <a:r>
+              <a:t>breaking a WireGuard deployment.</a:t>
             </a:r>
           </a:p>
           <a:p/>
           <a:p>
             <a:r>
-              <a:t>Quick orientation before we dive in. WireGuard is a modern VPN — when</a:t>
-            </a:r>
-          </a:p>
-          <a:p>
-            <a:r>
-              <a:t>you turn it on, your traffic goes through an encrypted tunnel to a server</a:t>
-            </a:r>
-          </a:p>
-          <a:p>
-            <a:r>
-              <a:t>somewhere, and a network observer can't read what's inside. That's the</a:t>
-            </a:r>
-          </a:p>
-          <a:p>
-            <a:r>
-              <a:t>"confidentiality" part, and WireGuard does it well.</a:t>
+              <a:t>WireGuard is a modern VPN. It encrypts your traffic well, but it doesn't</a:t>
+            </a:r>
+          </a:p>
+          <a:p>
+            <a:r>
+              <a:t>try to hide that you're running a VPN — that's an explicit design choice</a:t>
+            </a:r>
+          </a:p>
+          <a:p>
+            <a:r>
+              <a:t>by its author. The question we're asking is whether the most popular</a:t>
+            </a:r>
+          </a:p>
+          <a:p>
+            <a:r>
+              <a:t>tool people use to hide WireGuard actually hides it. The tool is called</a:t>
+            </a:r>
+          </a:p>
+          <a:p>
+            <a:r>
+              <a:t>udp2raw. About 260,000 downloads, used in Iran and China, zero</a:t>
+            </a:r>
+          </a:p>
+          <a:p>
+            <a:r>
+              <a:t>peer-reviewed analysis until this paper.</a:t>
             </a:r>
           </a:p>
           <a:p/>
           <a:p>
             <a:r>
-              <a:t>The problem we're going to talk about is different. It's not about</a:t>
-            </a:r>
-          </a:p>
-          <a:p>
-            <a:r>
-              <a:t>reading the contents. It's about whether a network observer can simply</a:t>
-            </a:r>
-          </a:p>
-          <a:p>
-            <a:r>
-              <a:t>tell that you are USING a VPN at all, even without decrypting anything.</a:t>
-            </a:r>
-          </a:p>
-          <a:p>
-            <a:r>
-              <a:t>In countries that block VPNs, that distinction is the whole game.</a:t>
-            </a:r>
-          </a:p>
-          <a:p/>
-          <a:p>
-            <a:r>
-              <a:t>The story has two parts.</a:t>
-            </a:r>
-          </a:p>
-          <a:p/>
-          <a:p>
-            <a:r>
-              <a:t>Part one: WireGuard is easy to spot on the wire. Every WireGuard packet</a:t>
-            </a:r>
-          </a:p>
-          <a:p>
-            <a:r>
-              <a:t>has such a recognizable shape that you can write a detector in about</a:t>
-            </a:r>
-          </a:p>
-          <a:p>
-            <a:r>
-              <a:t>twenty-five lines of Python. The Great Firewall of China actually does</a:t>
-            </a:r>
-          </a:p>
-          <a:p>
-            <a:r>
-              <a:t>this in production.</a:t>
-            </a:r>
-          </a:p>
-          <a:p/>
-          <a:p>
-            <a:r>
-              <a:t>Part two: there's a popular open-source tool called udp2raw that's</a:t>
-            </a:r>
-          </a:p>
-          <a:p>
-            <a:r>
-              <a:t>supposed to disguise WireGuard. It has been downloaded roughly two</a:t>
-            </a:r>
-          </a:p>
-          <a:p>
-            <a:r>
-              <a:t>hundred and sixty thousand times. People in Iran and China rely on it.</a:t>
-            </a:r>
-          </a:p>
-          <a:p>
-            <a:r>
-              <a:t>And here's the thing — nobody has ever published a peer-reviewed security</a:t>
-            </a:r>
-          </a:p>
-          <a:p>
-            <a:r>
-              <a:t>analysis of it. Zero papers.</a:t>
-            </a:r>
-          </a:p>
-          <a:p/>
-          <a:p>
-            <a:r>
-              <a:t>So we did the analysis. We came up with two ways to detect WireGuard</a:t>
-            </a:r>
-          </a:p>
-          <a:p>
-            <a:r>
-              <a:t>even when it's hiding inside udp2raw. One is "active" — we send a few</a:t>
-            </a:r>
-          </a:p>
-          <a:p>
-            <a:r>
-              <a:t>test packets at the server and watch how it replies, and we can identify</a:t>
-            </a:r>
-          </a:p>
-          <a:p>
-            <a:r>
-              <a:t>it in about eight and a half seconds. The other is "passive" — we just</a:t>
-            </a:r>
-          </a:p>
-          <a:p>
-            <a:r>
-              <a:t>watch normal traffic going by, measure two simple properties of it, and</a:t>
-            </a:r>
-          </a:p>
-          <a:p>
-            <a:r>
-              <a:t>a small machine-learning model tells WireGuard apart from regular web</a:t>
-            </a:r>
-          </a:p>
-          <a:p>
-            <a:r>
-              <a:t>traffic with ninety-nine point nine percent accuracy.</a:t>
-            </a:r>
-          </a:p>
-          <a:p/>
-          <a:p>
-            <a:r>
-              <a:t>That's the talk. Let's get into it.</a:t>
+              <a:t>Two results. An active attack: send five test packets, identify a</a:t>
+            </a:r>
+          </a:p>
+          <a:p>
+            <a:r>
+              <a:t>udp2raw server in 8.5 seconds. A passive attack: watch traffic, measure</a:t>
+            </a:r>
+          </a:p>
+          <a:p>
+            <a:r>
+              <a:t>two things about it, classifier hits 99.9% accuracy.</a:t>
             </a:r>
           </a:p>
         </p:txBody>
@@ -722,157 +632,63 @@
           <a:lstStyle/>
           <a:p>
             <a:r>
-              <a:t>Two things on this slide. First the technical observation, then a</a:t>
-            </a:r>
-          </a:p>
-          <a:p>
-            <a:r>
-              <a:t>philosophical one that's important so we don't sound like we're attacking</a:t>
-            </a:r>
-          </a:p>
-          <a:p>
-            <a:r>
-              <a:t>the WireGuard project.</a:t>
+              <a:t>Every WireGuard packet starts with the same four bytes — a type byte</a:t>
+            </a:r>
+          </a:p>
+          <a:p>
+            <a:r>
+              <a:t>that's always 1, 2, 3, or 4, followed by three zero bytes. The</a:t>
+            </a:r>
+          </a:p>
+          <a:p>
+            <a:r>
+              <a:t>handshake packets are also fixed sizes: 148, 92, and 64 bytes. So you</a:t>
+            </a:r>
+          </a:p>
+          <a:p>
+            <a:r>
+              <a:t>can identify WireGuard without decrypting anything, just by looking at</a:t>
+            </a:r>
+          </a:p>
+          <a:p>
+            <a:r>
+              <a:t>the first four bytes and the length. Twenty-five lines of Python is the</a:t>
+            </a:r>
+          </a:p>
+          <a:p>
+            <a:r>
+              <a:t>whole detector. The Wu et al. paper at USENIX Security 2023 confirms</a:t>
+            </a:r>
+          </a:p>
+          <a:p>
+            <a:r>
+              <a:t>the Great Firewall does exactly this.</a:t>
             </a:r>
           </a:p>
           <a:p/>
           <a:p>
             <a:r>
-              <a:t>The technical observation. Every WireGuard packet starts with the exact</a:t>
-            </a:r>
-          </a:p>
-          <a:p>
-            <a:r>
-              <a:t>same four bytes. The first byte is a "message type" and it can only be</a:t>
-            </a:r>
-          </a:p>
-          <a:p>
-            <a:r>
-              <a:t>one of four values: one, two, three, or four. The next three bytes are</a:t>
-            </a:r>
-          </a:p>
-          <a:p>
-            <a:r>
-              <a:t>literally always zero. So if you're watching the network and you see a</a:t>
-            </a:r>
-          </a:p>
-          <a:p>
-            <a:r>
-              <a:t>packet whose first byte is one of those four values and the next three</a:t>
-            </a:r>
-          </a:p>
-          <a:p>
-            <a:r>
-              <a:t>are zero, that's already a really strong hint it's WireGuard.</a:t>
-            </a:r>
-          </a:p>
-          <a:p/>
-          <a:p>
-            <a:r>
-              <a:t>And then it gets easier. WireGuard's "handshake" — that's the initial</a:t>
-            </a:r>
-          </a:p>
-          <a:p>
-            <a:r>
-              <a:t>back-and-forth when two computers set up the encrypted connection — uses</a:t>
-            </a:r>
-          </a:p>
-          <a:p>
-            <a:r>
-              <a:t>packets of exactly fixed sizes: a hundred and forty-eight bytes, then</a:t>
-            </a:r>
-          </a:p>
-          <a:p>
-            <a:r>
-              <a:t>ninety-two, then sixty-four. So you don't even need to decrypt anything.</a:t>
-            </a:r>
-          </a:p>
-          <a:p>
-            <a:r>
-              <a:t>You just look at the first four bytes and the size of the packet, and</a:t>
-            </a:r>
-          </a:p>
-          <a:p>
-            <a:r>
-              <a:t>you know.</a:t>
-            </a:r>
-          </a:p>
-          <a:p/>
-          <a:p>
-            <a:r>
-              <a:t>You can write this whole detector in twenty-five lines of Python. We</a:t>
-            </a:r>
-          </a:p>
-          <a:p>
-            <a:r>
-              <a:t>re-implemented it ourselves as a baseline so we'd have an honest</a:t>
-            </a:r>
-          </a:p>
-          <a:p>
-            <a:r>
-              <a:t>comparison point for the rest of the paper. And this isn't theoretical —</a:t>
-            </a:r>
-          </a:p>
-          <a:p>
-            <a:r>
-              <a:t>a paper from USENIX Security 2023, by Wu and colleagues, confirms the</a:t>
-            </a:r>
-          </a:p>
-          <a:p>
-            <a:r>
-              <a:t>Great Firewall of China does exactly this in production.</a:t>
-            </a:r>
-          </a:p>
-          <a:p/>
-          <a:p>
-            <a:r>
-              <a:t>Now the philosophical point, and this matters. We are NOT saying</a:t>
-            </a:r>
-          </a:p>
-          <a:p>
-            <a:r>
-              <a:t>WireGuard has a vulnerability. The author of WireGuard, Jason Donenfeld,</a:t>
-            </a:r>
-          </a:p>
-          <a:p>
-            <a:r>
-              <a:t>wrote in his original paper back in 2017 that hiding the existence of a</a:t>
-            </a:r>
-          </a:p>
-          <a:p>
-            <a:r>
-              <a:t>VPN is explicitly not WireGuard's job. His position is that if you need</a:t>
-            </a:r>
-          </a:p>
-          <a:p>
-            <a:r>
-              <a:t>to hide that you're running a VPN, you should put another tool on top of</a:t>
-            </a:r>
-          </a:p>
-          <a:p>
-            <a:r>
-              <a:t>WireGuard to handle that.</a:t>
-            </a:r>
-          </a:p>
-          <a:p/>
-          <a:p>
-            <a:r>
-              <a:t>So the question we're actually asking is not "can you detect</a:t>
-            </a:r>
-          </a:p>
-          <a:p>
-            <a:r>
-              <a:t>WireGuard?" — that's a solved problem. The question is, "can you</a:t>
-            </a:r>
-          </a:p>
-          <a:p>
-            <a:r>
-              <a:t>detect WireGuard once someone has wrapped it inside the most popular</a:t>
-            </a:r>
-          </a:p>
-          <a:p>
-            <a:r>
-              <a:t>hiding tool people actually use?" That tool is udp2raw, and that's the</a:t>
+              <a:t>Important caveat: this is not a WireGuard vulnerability. Donenfeld's</a:t>
+            </a:r>
+          </a:p>
+          <a:p>
+            <a:r>
+              <a:t>original 2017 paper explicitly says hiding the VPN's existence is out</a:t>
+            </a:r>
+          </a:p>
+          <a:p>
+            <a:r>
+              <a:t>of scope — that's a job for a separate tool. The question isn't "can</a:t>
+            </a:r>
+          </a:p>
+          <a:p>
+            <a:r>
+              <a:t>you detect WireGuard," it's "can you detect it once it's wrapped in</a:t>
+            </a:r>
+          </a:p>
+          <a:p>
+            <a:r>
+              <a:t>the most popular hiding tool." That tool is udp2raw, which is the</a:t>
             </a:r>
           </a:p>
           <a:p>
@@ -947,194 +763,74 @@
           <a:lstStyle/>
           <a:p>
             <a:r>
-              <a:t>Two boxes at the top of the slide. They're showing the two different</a:t>
-            </a:r>
-          </a:p>
-          <a:p>
-            <a:r>
-              <a:t>ways a WireGuard client can talk to a WireGuard server in our lab. The</a:t>
-            </a:r>
-          </a:p>
-          <a:p>
-            <a:r>
-              <a:t>encryption keys are identical in both setups; the only thing that</a:t>
-            </a:r>
-          </a:p>
-          <a:p>
-            <a:r>
-              <a:t>changes is what the traffic LOOKS like to anyone watching the network.</a:t>
+              <a:t>Two paths through our lab, same WireGuard keys both ways, only the</a:t>
+            </a:r>
+          </a:p>
+          <a:p>
+            <a:r>
+              <a:t>outer transport differs. Direct path: WireGuard packets ride UDP</a:t>
+            </a:r>
+          </a:p>
+          <a:p>
+            <a:r>
+              <a:t>directly — the path the Great Firewall already detects. Obfuscated</a:t>
+            </a:r>
+          </a:p>
+          <a:p>
+            <a:r>
+              <a:t>path: udp2raw rewraps each WireGuard packet to look like a TCP segment</a:t>
+            </a:r>
+          </a:p>
+          <a:p>
+            <a:r>
+              <a:t>on port 4096. udp2raw calls this "faketcp" — it's not a real TCP</a:t>
+            </a:r>
+          </a:p>
+          <a:p>
+            <a:r>
+              <a:t>connection underneath, just shaped like one. TCP looks normal because</a:t>
+            </a:r>
+          </a:p>
+          <a:p>
+            <a:r>
+              <a:t>it's what web browsers use.</a:t>
             </a:r>
           </a:p>
           <a:p/>
           <a:p>
             <a:r>
-              <a:t>Left box: the "direct" path. WireGuard packets just go over UDP, which</a:t>
-            </a:r>
-          </a:p>
-          <a:p>
-            <a:r>
-              <a:t>is one of the two basic ways data travels on the internet. UDP is what</a:t>
-            </a:r>
-          </a:p>
-          <a:p>
-            <a:r>
-              <a:t>WireGuard normally uses. The problem is that this is what the Great</a:t>
-            </a:r>
-          </a:p>
-          <a:p>
-            <a:r>
-              <a:t>Firewall already detects and blocks, because of the obvious fingerprint</a:t>
-            </a:r>
-          </a:p>
-          <a:p>
-            <a:r>
-              <a:t>we just talked about.</a:t>
+              <a:t>Why udp2raw specifically. Roughly 259,000 binary downloads — actual</a:t>
+            </a:r>
+          </a:p>
+          <a:p>
+            <a:r>
+              <a:t>runs, not GitHub stars. Reportedly blocked at the ISP level in Iran</a:t>
+            </a:r>
+          </a:p>
+          <a:p>
+            <a:r>
+              <a:t>(udp2raw issue #505, net4people thread #253). And zero peer-reviewed</a:t>
+            </a:r>
+          </a:p>
+          <a:p>
+            <a:r>
+              <a:t>analysis: we searched USENIX, NDSS, IMC, FOCI, PETS, CCS. Nothing.</a:t>
             </a:r>
           </a:p>
           <a:p/>
           <a:p>
             <a:r>
-              <a:t>Right box: the "obfuscated" path. This is where udp2raw comes in.</a:t>
-            </a:r>
-          </a:p>
-          <a:p>
-            <a:r>
-              <a:t>udp2raw takes each WireGuard packet and re-wraps it to look like TCP</a:t>
-            </a:r>
-          </a:p>
-          <a:p>
-            <a:r>
-              <a:t>instead. TCP is the other main way data travels on the internet — it's</a:t>
-            </a:r>
-          </a:p>
-          <a:p>
-            <a:r>
-              <a:t>what your web browser uses for almost everything. The idea is that TCP</a:t>
-            </a:r>
-          </a:p>
-          <a:p>
-            <a:r>
-              <a:t>traffic is so common and so normal-looking that nobody will notice your</a:t>
-            </a:r>
-          </a:p>
-          <a:p>
-            <a:r>
-              <a:t>VPN hiding inside it. udp2raw calls this "faketcp" because it's not a</a:t>
-            </a:r>
-          </a:p>
-          <a:p>
-            <a:r>
-              <a:t>real TCP connection underneath; it's just shaped like one.</a:t>
-            </a:r>
-          </a:p>
-          <a:p/>
-          <a:p>
-            <a:r>
-              <a:t>Now, why udp2raw specifically? A few reasons.</a:t>
-            </a:r>
-          </a:p>
-          <a:p/>
-          <a:p>
-            <a:r>
-              <a:t>One — it's the dominant tool of its kind. Two hundred and fifty-nine</a:t>
-            </a:r>
-          </a:p>
-          <a:p>
-            <a:r>
-              <a:t>thousand downloads of the actual binary. That's not GitHub stars or</a:t>
-            </a:r>
-          </a:p>
-          <a:p>
-            <a:r>
-              <a:t>people bookmarking it, that's people downloading it to run. There's also</a:t>
-            </a:r>
-          </a:p>
-          <a:p>
-            <a:r>
-              <a:t>a fork for other platforms with another forty-one thousand downloads.</a:t>
-            </a:r>
-          </a:p>
-          <a:p/>
-          <a:p>
-            <a:r>
-              <a:t>Two — there's real-world evidence that governments are blocking it. An</a:t>
-            </a:r>
-          </a:p>
-          <a:p>
-            <a:r>
-              <a:t>issue on the udp2raw GitHub from 2024 documents an Iranian ISP blocking</a:t>
-            </a:r>
-          </a:p>
-          <a:p>
-            <a:r>
-              <a:t>all of its modes within seconds. There's a long-running discussion</a:t>
-            </a:r>
-          </a:p>
-          <a:p>
-            <a:r>
-              <a:t>thread about Iran's deep packet inspection — that's the term for when a</a:t>
-            </a:r>
-          </a:p>
-          <a:p>
-            <a:r>
-              <a:t>network operator looks at the contents of packets, not just where</a:t>
-            </a:r>
-          </a:p>
-          <a:p>
-            <a:r>
-              <a:t>they're going — and udp2raw is one of the tools that gets blocked.</a:t>
-            </a:r>
-          </a:p>
-          <a:p/>
-          <a:p>
-            <a:r>
-              <a:t>Three, and this is the gap we're filling — nobody has academically</a:t>
-            </a:r>
-          </a:p>
-          <a:p>
-            <a:r>
-              <a:t>analyzed it. We searched the major security conferences. USENIX, NDSS,</a:t>
-            </a:r>
-          </a:p>
-          <a:p>
-            <a:r>
-              <a:t>IMC, FOCI, PETS, CCS. These are the venues where this kind of work</a:t>
-            </a:r>
-          </a:p>
-          <a:p>
-            <a:r>
-              <a:t>gets published. Nothing on udp2raw. So this is genuinely an unstudied</a:t>
-            </a:r>
-          </a:p>
-          <a:p>
-            <a:r>
-              <a:t>target.</a:t>
-            </a:r>
-          </a:p>
-          <a:p/>
-          <a:p>
-            <a:r>
-              <a:t>One last thing — you might wonder why we don't also test other tools</a:t>
-            </a:r>
-          </a:p>
-          <a:p>
-            <a:r>
-              <a:t>like AmneziaWG or swgp-go. The answer is that those tools modify</a:t>
-            </a:r>
-          </a:p>
-          <a:p>
-            <a:r>
-              <a:t>WireGuard itself; they're a different category of fix. udp2raw is the</a:t>
-            </a:r>
-          </a:p>
-          <a:p>
-            <a:r>
-              <a:t>only big, popular, unstudied tool in the "wrap it generically" category,</a:t>
-            </a:r>
-          </a:p>
-          <a:p>
-            <a:r>
-              <a:t>so we focused there.</a:t>
+              <a:t>Other tools like AmneziaWG and swgp-go modify WireGuard itself — that's</a:t>
+            </a:r>
+          </a:p>
+          <a:p>
+            <a:r>
+              <a:t>a different category. udp2raw is the only big, unstudied tool in the</a:t>
+            </a:r>
+          </a:p>
+          <a:p>
+            <a:r>
+              <a:t>"wrap it generically" category, so that's our target.</a:t>
             </a:r>
           </a:p>
         </p:txBody>
@@ -1204,203 +900,90 @@
           <a:lstStyle/>
           <a:p>
             <a:r>
-              <a:t>Quick framing on this slide. There are two general ways to detect a</a:t>
-            </a:r>
-          </a:p>
-          <a:p>
-            <a:r>
-              <a:t>hidden service on a network. "Active" means you send something at the</a:t>
-            </a:r>
-          </a:p>
-          <a:p>
-            <a:r>
-              <a:t>server and watch how it responds. "Passive" means you don't send</a:t>
-            </a:r>
-          </a:p>
-          <a:p>
-            <a:r>
-              <a:t>anything — you just watch traffic going by and look for patterns. We do</a:t>
-            </a:r>
-          </a:p>
-          <a:p>
-            <a:r>
-              <a:t>both.</a:t>
+              <a:t>Two attacks. "Active" means we send packets and watch the reply;</a:t>
+            </a:r>
+          </a:p>
+          <a:p>
+            <a:r>
+              <a:t>"passive" means we just watch traffic going by. We didn't invent this</a:t>
+            </a:r>
+          </a:p>
+          <a:p>
+            <a:r>
+              <a:t>pattern — the Xue et al. Distinguished Paper at USENIX Security 2022</a:t>
+            </a:r>
+          </a:p>
+          <a:p>
+            <a:r>
+              <a:t>did it for OpenVPN. We apply the same template to WireGuard-in-udp2raw,</a:t>
+            </a:r>
+          </a:p>
+          <a:p>
+            <a:r>
+              <a:t>which they didn't cover.</a:t>
             </a:r>
           </a:p>
           <a:p/>
           <a:p>
             <a:r>
-              <a:t>We didn't invent this two-pronged approach. A team at the University of</a:t>
-            </a:r>
-          </a:p>
-          <a:p>
-            <a:r>
-              <a:t>Michigan led by Diwen Xue published a paper at USENIX Security 2022 that</a:t>
-            </a:r>
-          </a:p>
-          <a:p>
-            <a:r>
-              <a:t>won "Distinguished Paper" — that's the conference's top award — where</a:t>
-            </a:r>
-          </a:p>
-          <a:p>
-            <a:r>
-              <a:t>they did exactly this for a different VPN called OpenVPN. We're applying</a:t>
-            </a:r>
-          </a:p>
-          <a:p>
-            <a:r>
-              <a:t>their same playbook to WireGuard-plus-udp2raw, which their paper didn't</a:t>
-            </a:r>
-          </a:p>
-          <a:p>
-            <a:r>
-              <a:t>cover.</a:t>
+              <a:t>Left card, C1, active: five TCP probes, under nine seconds, same answer</a:t>
+            </a:r>
+          </a:p>
+          <a:p>
+            <a:r>
+              <a:t>every time. Walking through the actual probes on the next slide.</a:t>
             </a:r>
           </a:p>
           <a:p/>
           <a:p>
             <a:r>
-              <a:t>Left box, contribution one: the active prober. We send five carefully</a:t>
-            </a:r>
-          </a:p>
-          <a:p>
-            <a:r>
-              <a:t>chosen TCP packets at the target server. Five packets total. The whole</a:t>
-            </a:r>
-          </a:p>
-          <a:p>
-            <a:r>
-              <a:t>test takes under nine seconds, and we always get the same answer when</a:t>
-            </a:r>
-          </a:p>
-          <a:p>
-            <a:r>
-              <a:t>we re-run it. I'll walk through the actual packets on the next slide.</a:t>
+              <a:t>Right card, C2, passive: for each traffic flow — meaning one</a:t>
+            </a:r>
+          </a:p>
+          <a:p>
+            <a:r>
+              <a:t>conversation between two computers — we compute two numbers and feed</a:t>
+            </a:r>
+          </a:p>
+          <a:p>
+            <a:r>
+              <a:t>them to a Random Forest, which is a standard machine-learning model</a:t>
+            </a:r>
+          </a:p>
+          <a:p>
+            <a:r>
+              <a:t>that learns rules from examples. The two numbers come from how the</a:t>
+            </a:r>
+          </a:p>
+          <a:p>
+            <a:r>
+              <a:t>protocols are written: WireGuard pads every packet to the maximum size,</a:t>
+            </a:r>
+          </a:p>
+          <a:p>
+            <a:r>
+              <a:t>and udp2raw acknowledges every wrapped packet one-for-one. Those are</a:t>
+            </a:r>
+          </a:p>
+          <a:p>
+            <a:r>
+              <a:t>mechanical, not statistical.</a:t>
             </a:r>
           </a:p>
           <a:p/>
           <a:p>
             <a:r>
-              <a:t>Right box, contribution two: the passive classifier. We just watch</a:t>
-            </a:r>
-          </a:p>
-          <a:p>
-            <a:r>
-              <a:t>traffic and measure two things about each "flow." A flow is a</a:t>
-            </a:r>
-          </a:p>
-          <a:p>
-            <a:r>
-              <a:t>conversation between two computers — one IP address talking to another</a:t>
-            </a:r>
-          </a:p>
-          <a:p>
-            <a:r>
-              <a:t>on specific ports. So for every flow we see, we compute these two</a:t>
-            </a:r>
-          </a:p>
-          <a:p>
-            <a:r>
-              <a:t>numbers, and a small machine learning model uses them to decide:</a:t>
-            </a:r>
-          </a:p>
-          <a:p>
-            <a:r>
-              <a:t>WireGuard, or not?</a:t>
-            </a:r>
-          </a:p>
-          <a:p/>
-          <a:p>
-            <a:r>
-              <a:t>The two numbers are called "bulk_fraction" and "ack60_fraction." Don't</a:t>
-            </a:r>
-          </a:p>
-          <a:p>
-            <a:r>
-              <a:t>worry about what they mean yet — slide six is dedicated to explaining</a:t>
-            </a:r>
-          </a:p>
-          <a:p>
-            <a:r>
-              <a:t>them. The key thing is they're not random statistical patterns we got</a:t>
-            </a:r>
-          </a:p>
-          <a:p>
-            <a:r>
-              <a:t>lucky with. They come directly from how WireGuard and udp2raw are</a:t>
-            </a:r>
-          </a:p>
-          <a:p>
-            <a:r>
-              <a:t>written. WireGuard always pads its packets to the maximum size, and</a:t>
-            </a:r>
-          </a:p>
-          <a:p>
-            <a:r>
-              <a:t>udp2raw sends back one acknowledgment packet for every data packet it</a:t>
-            </a:r>
-          </a:p>
-          <a:p>
-            <a:r>
-              <a:t>receives. Those two implementation choices are essentially impossible to</a:t>
-            </a:r>
-          </a:p>
-          <a:p>
-            <a:r>
-              <a:t>hide.</a:t>
-            </a:r>
-          </a:p>
-          <a:p/>
-          <a:p>
-            <a:r>
-              <a:t>The model we use is called a Random Forest. Think of it as a system</a:t>
-            </a:r>
-          </a:p>
-          <a:p>
-            <a:r>
-              <a:t>that learns rules from examples — you give it a bunch of WireGuard</a:t>
-            </a:r>
-          </a:p>
-          <a:p>
-            <a:r>
-              <a:t>flows and a bunch of normal flows, and it figures out the boundary</a:t>
-            </a:r>
-          </a:p>
-          <a:p>
-            <a:r>
-              <a:t>between them. On our data, it's correct ninety-nine point nine percent</a:t>
-            </a:r>
-          </a:p>
-          <a:p>
-            <a:r>
-              <a:t>of the time.</a:t>
-            </a:r>
-          </a:p>
-          <a:p/>
-          <a:p>
-            <a:r>
-              <a:t>For training data, we captured twenty-four WireGuard flows ourselves in</a:t>
-            </a:r>
-          </a:p>
-          <a:p>
-            <a:r>
-              <a:t>the lab. For the "normal traffic" comparison, we used a public research</a:t>
-            </a:r>
-          </a:p>
-          <a:p>
-            <a:r>
-              <a:t>dataset called ISCXVPN2016, which has over a thousand recordings of</a:t>
-            </a:r>
-          </a:p>
-          <a:p>
-            <a:r>
-              <a:t>ordinary web browsing, video, email, chat, and so on. It's the standard</a:t>
-            </a:r>
-          </a:p>
-          <a:p>
-            <a:r>
-              <a:t>dataset everyone uses for this kind of work.</a:t>
+              <a:t>Trained on 24 WireGuard flows we captured ourselves, plus 1058 normal</a:t>
+            </a:r>
+          </a:p>
+          <a:p>
+            <a:r>
+              <a:t>flows from ISCXVPN2016 — the standard public dataset for this kind of</a:t>
+            </a:r>
+          </a:p>
+          <a:p>
+            <a:r>
+              <a:t>work.</a:t>
             </a:r>
           </a:p>
         </p:txBody>
@@ -1470,240 +1053,80 @@
           <a:lstStyle/>
           <a:p>
             <a:r>
-              <a:t>This is the active prober's results. Three columns — same server, three</a:t>
-            </a:r>
-          </a:p>
-          <a:p>
-            <a:r>
-              <a:t>different ports. A "port" is just a number that identifies which</a:t>
-            </a:r>
-          </a:p>
-          <a:p>
-            <a:r>
-              <a:t>service on a server you're talking to. Port twenty-two is real SSH,</a:t>
-            </a:r>
-          </a:p>
-          <a:p>
-            <a:r>
-              <a:t>which is normal remote-login software running on the kernel — that's</a:t>
-            </a:r>
-          </a:p>
-          <a:p>
-            <a:r>
-              <a:t>our "real TCP" control. Port four thousand ninety-six is where udp2raw</a:t>
-            </a:r>
-          </a:p>
-          <a:p>
-            <a:r>
-              <a:t>is listening. Port nine thousand nine hundred ninety-nine is closed,</a:t>
-            </a:r>
-          </a:p>
-          <a:p>
-            <a:r>
-              <a:t>nothing running there — that's our negative control.</a:t>
+              <a:t>Three columns, same server, three ports. Port 22 is real SSH — our</a:t>
+            </a:r>
+          </a:p>
+          <a:p>
+            <a:r>
+              <a:t>real-TCP control. Port 4096 is udp2raw. Port 9999 is closed — negative</a:t>
+            </a:r>
+          </a:p>
+          <a:p>
+            <a:r>
+              <a:t>control. TCP terms in the table: SYN starts a connection, SYN-ACK</a:t>
+            </a:r>
+          </a:p>
+          <a:p>
+            <a:r>
+              <a:t>accepts it, RST rejects, FIN closes.</a:t>
             </a:r>
           </a:p>
           <a:p/>
           <a:p>
             <a:r>
-              <a:t>Quick TCP refresher so the table reads cleanly. When two computers want</a:t>
-            </a:r>
-          </a:p>
-          <a:p>
-            <a:r>
-              <a:t>to start a TCP connection, the client sends a "SYN" packet — that's</a:t>
-            </a:r>
-          </a:p>
-          <a:p>
-            <a:r>
-              <a:t>short for synchronize, it's basically "hello, want to talk?" The server</a:t>
-            </a:r>
-          </a:p>
-          <a:p>
-            <a:r>
-              <a:t>replies with a "SYN-ACK" — "hello back, sure." That's the start of every</a:t>
-            </a:r>
-          </a:p>
-          <a:p>
-            <a:r>
-              <a:t>TCP connection. There's also "RST" — short for reset — which is what a</a:t>
-            </a:r>
-          </a:p>
-          <a:p>
-            <a:r>
-              <a:t>server sends to say "no, go away." And "FIN" — for finish — which means</a:t>
-            </a:r>
-          </a:p>
-          <a:p>
-            <a:r>
-              <a:t>"I'm done talking." Those four — SYN, SYN-ACK, RST, FIN — are most of</a:t>
-            </a:r>
-          </a:p>
-          <a:p>
-            <a:r>
-              <a:t>what you need to read this table.</a:t>
+              <a:t>The two orange "silent" probes don't help: udp2raw answers SYN</a:t>
+            </a:r>
+          </a:p>
+          <a:p>
+            <a:r>
+              <a:t>because that's the disguise, and the kernel — not udp2raw — generates</a:t>
+            </a:r>
+          </a:p>
+          <a:p>
+            <a:r>
+              <a:t>the RST on the bogus ACK.</a:t>
             </a:r>
           </a:p>
           <a:p/>
           <a:p>
             <a:r>
-              <a:t>Five rows in the table, one per probe. Look at the orange "silent"</a:t>
-            </a:r>
-          </a:p>
-          <a:p>
-            <a:r>
-              <a:t>entries in the middle column.</a:t>
+              <a:t>The signal is the other three. Probe 2 is a SYN with 32 bytes of</a:t>
+            </a:r>
+          </a:p>
+          <a:p>
+            <a:r>
+              <a:t>payload. Probe 4 is a SYN with an unusual TCP option. Probe 5 is a FIN</a:t>
+            </a:r>
+          </a:p>
+          <a:p>
+            <a:r>
+              <a:t>to a port with no connection. A real Linux kernel answers all three.</a:t>
+            </a:r>
+          </a:p>
+          <a:p>
+            <a:r>
+              <a:t>udp2raw drops all three because its parser was written for one specific</a:t>
+            </a:r>
+          </a:p>
+          <a:p>
+            <a:r>
+              <a:t>TCP shape. Count silent responses: real TCP scores 0, udp2raw scores 3.</a:t>
             </a:r>
           </a:p>
           <a:p/>
           <a:p>
             <a:r>
-              <a:t>The first probe is just a normal SYN. udp2raw answers it. Of course it</a:t>
-            </a:r>
-          </a:p>
-          <a:p>
-            <a:r>
-              <a:t>does — that's the whole point of the disguise. If it didn't answer SYNs</a:t>
-            </a:r>
-          </a:p>
-          <a:p>
-            <a:r>
-              <a:t>it wouldn't look like a TCP server at all.</a:t>
-            </a:r>
-          </a:p>
-          <a:p/>
-          <a:p>
-            <a:r>
-              <a:t>The third probe is a bogus ACK — we pretend to acknowledge a connection</a:t>
-            </a:r>
-          </a:p>
-          <a:p>
-            <a:r>
-              <a:t>that doesn't exist. udp2raw also answers this one, but here's the</a:t>
-            </a:r>
-          </a:p>
-          <a:p>
-            <a:r>
-              <a:t>subtle reason: udp2raw itself doesn't generate the response, the</a:t>
-            </a:r>
-          </a:p>
-          <a:p>
-            <a:r>
-              <a:t>underlying Linux kernel does, because udp2raw didn't recognize the</a:t>
-            </a:r>
-          </a:p>
-          <a:p>
-            <a:r>
-              <a:t>packet and the kernel emits its own reset by default. So probe one and</a:t>
-            </a:r>
-          </a:p>
-          <a:p>
-            <a:r>
-              <a:t>probe three don't help us discriminate.</a:t>
-            </a:r>
-          </a:p>
-          <a:p/>
-          <a:p>
-            <a:r>
-              <a:t>The interesting ones are probes two, four, and five. Probe two is a SYN</a:t>
-            </a:r>
-          </a:p>
-          <a:p>
-            <a:r>
-              <a:t>packet with thirty-two bytes of data attached. That's unusual but legal,</a:t>
-            </a:r>
-          </a:p>
-          <a:p>
-            <a:r>
-              <a:t>and a real Linux kernel always replies. Probe four uses an unusual TCP</a:t>
-            </a:r>
-          </a:p>
-          <a:p>
-            <a:r>
-              <a:t>option — specifically a "window scale" of fourteen, which is at the edge</a:t>
-            </a:r>
-          </a:p>
-          <a:p>
-            <a:r>
-              <a:t>of what's allowed. A real kernel still replies. Probe five is a FIN</a:t>
-            </a:r>
-          </a:p>
-          <a:p>
-            <a:r>
-              <a:t>packet — a "goodbye" packet — sent to a port where no conversation was</a:t>
-            </a:r>
-          </a:p>
-          <a:p>
-            <a:r>
-              <a:t>ever started. Real kernels reply to this too.</a:t>
-            </a:r>
-          </a:p>
-          <a:p/>
-          <a:p>
-            <a:r>
-              <a:t>udp2raw replies to none of them. Silent, silent, silent. That's the</a:t>
-            </a:r>
-          </a:p>
-          <a:p>
-            <a:r>
-              <a:t>giveaway. udp2raw was written to handle one specific TCP pattern, and</a:t>
-            </a:r>
-          </a:p>
-          <a:p>
-            <a:r>
-              <a:t>anything outside that pattern, it just drops on the floor. A real Linux</a:t>
-            </a:r>
-          </a:p>
-          <a:p>
-            <a:r>
-              <a:t>kernel never drops these — it always reacts.</a:t>
-            </a:r>
-          </a:p>
-          <a:p/>
-          <a:p>
-            <a:r>
-              <a:t>So our rule is simple: count how many of probes two, four, and five</a:t>
-            </a:r>
-          </a:p>
-          <a:p>
-            <a:r>
-              <a:t>were silent. If it's three out of three, it's udp2raw. Real TCP scores</a:t>
-            </a:r>
-          </a:p>
-          <a:p>
-            <a:r>
-              <a:t>zero out of three. Done.</a:t>
-            </a:r>
-          </a:p>
-          <a:p/>
-          <a:p>
-            <a:r>
-              <a:t>The bottom of the table is the timing. Half a second for real TCP. Eight</a:t>
-            </a:r>
-          </a:p>
-          <a:p>
-            <a:r>
-              <a:t>and a half seconds for udp2raw. The reason udp2raw takes longer is we</a:t>
-            </a:r>
-          </a:p>
-          <a:p>
-            <a:r>
-              <a:t>wait the full timeout on each of the silent probes. The closed port</a:t>
-            </a:r>
-          </a:p>
-          <a:p>
-            <a:r>
-              <a:t>takes fifteen and a half because there's nothing replying to anything.</a:t>
-            </a:r>
-          </a:p>
-          <a:p>
-            <a:r>
-              <a:t>And we ran this against udp2raw five separate times — same verdict every</a:t>
-            </a:r>
-          </a:p>
-          <a:p>
-            <a:r>
-              <a:t>time. Five out of five.</a:t>
+              <a:t>Timing: half a second for real TCP, 8.5 seconds for udp2raw (we wait</a:t>
+            </a:r>
+          </a:p>
+          <a:p>
+            <a:r>
+              <a:t>out timeouts on the silent probes), 15.5 for the closed port. Same</a:t>
+            </a:r>
+          </a:p>
+          <a:p>
+            <a:r>
+              <a:t>verdict 5 out of 5 trials.</a:t>
             </a:r>
           </a:p>
         </p:txBody>
@@ -1773,260 +1196,130 @@
           <a:lstStyle/>
           <a:p>
             <a:r>
-              <a:t>OK this is the heart of the passive classifier. Two numbers we measure</a:t>
-            </a:r>
-          </a:p>
-          <a:p>
-            <a:r>
-              <a:t>about every flow.</a:t>
+              <a:t>Two features. First: bulk_fraction is the share of packets in a flow</a:t>
+            </a:r>
+          </a:p>
+          <a:p>
+            <a:r>
+              <a:t>that are big — 1200 bytes or more. The reason it works: WireGuard pads</a:t>
+            </a:r>
+          </a:p>
+          <a:p>
+            <a:r>
+              <a:t>every packet up to near the MTU, the maximum packet size on the link,</a:t>
+            </a:r>
+          </a:p>
+          <a:p>
+            <a:r>
+              <a:t>about 1500 bytes. Web browsers don't. WireGuard flows are 55% big</a:t>
+            </a:r>
+          </a:p>
+          <a:p>
+            <a:r>
+              <a:t>packets; normal traffic is 2%. The "Cohen's d" column is a standard</a:t>
+            </a:r>
+          </a:p>
+          <a:p>
+            <a:r>
+              <a:t>measure of how cleanly two groups separate; anything over 0.8 is "large,"</a:t>
+            </a:r>
+          </a:p>
+          <a:p>
+            <a:r>
+              <a:t>and we get 3.83.</a:t>
             </a:r>
           </a:p>
           <a:p/>
           <a:p>
             <a:r>
-              <a:t>First feature, called "bulk_fraction." This is just the fraction of</a:t>
-            </a:r>
-          </a:p>
-          <a:p>
-            <a:r>
-              <a:t>packets in the flow that are "big." We defined "big" as twelve hundred</a:t>
-            </a:r>
-          </a:p>
-          <a:p>
-            <a:r>
-              <a:t>bytes or more. The reason is something called MTU — short for Maximum</a:t>
-            </a:r>
-          </a:p>
-          <a:p>
-            <a:r>
-              <a:t>Transmission Unit, which is the largest packet size a network link will</a:t>
-            </a:r>
-          </a:p>
-          <a:p>
-            <a:r>
-              <a:t>carry, usually around fifteen hundred bytes. WireGuard pads every single</a:t>
-            </a:r>
-          </a:p>
-          <a:p>
-            <a:r>
-              <a:t>one of its packets up to right near that maximum. Web browsers don't do</a:t>
-            </a:r>
-          </a:p>
-          <a:p>
-            <a:r>
-              <a:t>this. A typical web flow has a mix of big packets when you're</a:t>
-            </a:r>
-          </a:p>
-          <a:p>
-            <a:r>
-              <a:t>downloading something and tiny packets the rest of the time. So:</a:t>
+              <a:t>Second feature: ack60_fraction, the share of 60-byte TCP ACK packets.</a:t>
+            </a:r>
+          </a:p>
+          <a:p>
+            <a:r>
+              <a:t>Normal TCP uses "delayed ACK" — one acknowledgment per two data</a:t>
+            </a:r>
+          </a:p>
+          <a:p>
+            <a:r>
+              <a:t>packets, so about 33% ACKs. udp2raw breaks this. It wraps each</a:t>
+            </a:r>
+          </a:p>
+          <a:p>
+            <a:r>
+              <a:t>WireGuard packet as one separate TCP segment, the kernel ACKs each</a:t>
+            </a:r>
+          </a:p>
+          <a:p>
+            <a:r>
+              <a:t>arrival individually, and the ACK fraction climbs. We measure 30% for</a:t>
+            </a:r>
+          </a:p>
+          <a:p>
+            <a:r>
+              <a:t>WireGuard-in-udp2raw vs. 7% for normal traffic. Cohen's d of 1.27 —</a:t>
+            </a:r>
+          </a:p>
+          <a:p>
+            <a:r>
+              <a:t>still a large effect.</a:t>
             </a:r>
           </a:p>
           <a:p/>
           <a:p>
             <a:r>
-              <a:t>WireGuard flows: about fifty-five percent of their packets are big.</a:t>
-            </a:r>
-          </a:p>
-          <a:p>
-            <a:r>
-              <a:t>Normal background traffic: about two percent. That's a huge gap.</a:t>
+              <a:t>Scatter on the right: 1082 flows total. Orange is WireGuard, grey is</a:t>
+            </a:r>
+          </a:p>
+          <a:p>
+            <a:r>
+              <a:t>normal traffic. They barely overlap. All 24 WireGuard flows have</a:t>
+            </a:r>
+          </a:p>
+          <a:p>
+            <a:r>
+              <a:t>bulk_fraction at least 0.32. Only 4 of 1058 normal flows fall anywhere</a:t>
+            </a:r>
+          </a:p>
+          <a:p>
+            <a:r>
+              <a:t>near the WireGuard cluster.</a:t>
             </a:r>
           </a:p>
           <a:p/>
           <a:p>
             <a:r>
-              <a:t>The table also lists something called "Cohen's d." This is a statistics</a:t>
-            </a:r>
-          </a:p>
-          <a:p>
-            <a:r>
-              <a:t>term that measures how cleanly separated two groups of numbers are. It's</a:t>
-            </a:r>
-          </a:p>
-          <a:p>
-            <a:r>
-              <a:t>on a scale where zero point eight is already considered a "large"</a:t>
-            </a:r>
-          </a:p>
-          <a:p>
-            <a:r>
-              <a:t>difference. For bulk_fraction we get three point eight three — almost</a:t>
-            </a:r>
-          </a:p>
-          <a:p>
-            <a:r>
-              <a:t>five times the threshold for "large." This is a giant, obvious</a:t>
-            </a:r>
-          </a:p>
-          <a:p>
-            <a:r>
-              <a:t>difference, not a subtle one we squeezed out with statistics.</a:t>
-            </a:r>
-          </a:p>
-          <a:p/>
-          <a:p>
-            <a:r>
-              <a:t>Second feature, "ack60_fraction." This one's a little more intricate so</a:t>
-            </a:r>
-          </a:p>
-          <a:p>
-            <a:r>
-              <a:t>bear with me. When you make a TCP connection, every time you send data,</a:t>
-            </a:r>
-          </a:p>
-          <a:p>
-            <a:r>
-              <a:t>the other side sends back a tiny acknowledgment packet — sixty bytes,</a:t>
-            </a:r>
-          </a:p>
-          <a:p>
-            <a:r>
-              <a:t>usually. These are called ACKs. In normal bulk file transfers, the</a:t>
-            </a:r>
-          </a:p>
-          <a:p>
-            <a:r>
-              <a:t>receiving side waits and sends one ACK for every TWO data packets, to</a:t>
-            </a:r>
-          </a:p>
-          <a:p>
-            <a:r>
-              <a:t>save bandwidth. That's called "delayed ACK." So normal TCP has about</a:t>
-            </a:r>
-          </a:p>
-          <a:p>
-            <a:r>
-              <a:t>thirty-three percent ACKs.</a:t>
-            </a:r>
-          </a:p>
-          <a:p/>
-          <a:p>
-            <a:r>
-              <a:t>But udp2raw breaks this. udp2raw takes each WireGuard packet and wraps</a:t>
-            </a:r>
-          </a:p>
-          <a:p>
-            <a:r>
-              <a:t>it as one separate TCP segment. The receiving computer's kernel sees</a:t>
-            </a:r>
-          </a:p>
-          <a:p>
-            <a:r>
-              <a:t>these as separate arrivals and ACKs each one individually — no delayed</a:t>
-            </a:r>
-          </a:p>
-          <a:p>
-            <a:r>
-              <a:t>ACK happens. So you end up with one ACK per data packet, fifty-fifty,</a:t>
-            </a:r>
-          </a:p>
-          <a:p>
-            <a:r>
-              <a:t>and the ACK fraction climbs.</a:t>
-            </a:r>
-          </a:p>
-          <a:p/>
-          <a:p>
-            <a:r>
-              <a:t>For WireGuard-in-udp2raw, ack60_fraction is about thirty percent. For</a:t>
-            </a:r>
-          </a:p>
-          <a:p>
-            <a:r>
-              <a:t>ordinary traffic, it's about seven percent. Cohen's d of one point two</a:t>
-            </a:r>
-          </a:p>
-          <a:p>
-            <a:r>
-              <a:t>seven — still a large effect.</a:t>
-            </a:r>
-          </a:p>
-          <a:p/>
-          <a:p>
-            <a:r>
-              <a:t>The scatter plot on the right is showing all one thousand eighty-two</a:t>
-            </a:r>
-          </a:p>
-          <a:p>
-            <a:r>
-              <a:t>flows we have, plotted on these two axes. Orange dots are WireGuard.</a:t>
-            </a:r>
-          </a:p>
-          <a:p>
-            <a:r>
-              <a:t>Grey dots are normal traffic. You can see they live in completely</a:t>
-            </a:r>
-          </a:p>
-          <a:p>
-            <a:r>
-              <a:t>different regions of the plot. They barely overlap. All twenty-four of</a:t>
-            </a:r>
-          </a:p>
-          <a:p>
-            <a:r>
-              <a:t>our WireGuard flows have a bulk_fraction of at least zero point three</a:t>
-            </a:r>
-          </a:p>
-          <a:p>
-            <a:r>
-              <a:t>two. Out of one thousand fifty-eight normal flows, only four are</a:t>
-            </a:r>
-          </a:p>
-          <a:p>
-            <a:r>
-              <a:t>anywhere near the WireGuard cluster.</a:t>
-            </a:r>
-          </a:p>
-          <a:p/>
-          <a:p>
-            <a:r>
-              <a:t>Bottom-left in orange, a quick aside about scientific honesty. Going in,</a:t>
-            </a:r>
-          </a:p>
-          <a:p>
-            <a:r>
-              <a:t>I expected a different feature called "dominant_size_fraction" — meaning</a:t>
-            </a:r>
-          </a:p>
-          <a:p>
-            <a:r>
-              <a:t>how often the most-common packet size shows up — to be the smoking gun.</a:t>
-            </a:r>
-          </a:p>
-          <a:p>
-            <a:r>
-              <a:t>Turned out the data went the opposite direction from what I expected.</a:t>
-            </a:r>
-          </a:p>
-          <a:p>
-            <a:r>
-              <a:t>The reason is that the public dataset contains lots of idle "keepalive"</a:t>
-            </a:r>
-          </a:p>
-          <a:p>
-            <a:r>
-              <a:t>flows where every packet is literally identical, so they score higher on</a:t>
-            </a:r>
-          </a:p>
-          <a:p>
-            <a:r>
-              <a:t>that feature than WireGuard does. The real-world data corrected my bad</a:t>
-            </a:r>
-          </a:p>
-          <a:p>
-            <a:r>
-              <a:t>guess. We dropped that feature and three others, and the two that</a:t>
-            </a:r>
-          </a:p>
-          <a:p>
-            <a:r>
-              <a:t>survived are the ones grounded in actual protocol mechanics, not in</a:t>
-            </a:r>
-          </a:p>
-          <a:p>
-            <a:r>
-              <a:t>intuition.</a:t>
+              <a:t>Orange note bottom-left, brief story on scientific honesty. Going in, I</a:t>
+            </a:r>
+          </a:p>
+          <a:p>
+            <a:r>
+              <a:t>expected dominant_size_fraction — how concentrated the most common</a:t>
+            </a:r>
+          </a:p>
+          <a:p>
+            <a:r>
+              <a:t>packet size is — to be the killer feature. The real data inverted that:</a:t>
+            </a:r>
+          </a:p>
+          <a:p>
+            <a:r>
+              <a:t>the public dataset has lots of idle keepalive flows where every packet</a:t>
+            </a:r>
+          </a:p>
+          <a:p>
+            <a:r>
+              <a:t>is identical, so they score higher than WireGuard does. We dropped that</a:t>
+            </a:r>
+          </a:p>
+          <a:p>
+            <a:r>
+              <a:t>feature. The two that survived are the ones grounded in protocol</a:t>
+            </a:r>
+          </a:p>
+          <a:p>
+            <a:r>
+              <a:t>mechanics, not intuition.</a:t>
             </a:r>
           </a:p>
         </p:txBody>
@@ -2096,236 +1389,105 @@
           <a:lstStyle/>
           <a:p>
             <a:r>
-              <a:t>OK so we took those two features from the last slide and trained the</a:t>
-            </a:r>
-          </a:p>
-          <a:p>
-            <a:r>
-              <a:t>classifier. Here are the results.</a:t>
+              <a:t>Headline numbers, with definitions since some of these terms aren't</a:t>
+            </a:r>
+          </a:p>
+          <a:p>
+            <a:r>
+              <a:t>universal.</a:t>
             </a:r>
           </a:p>
           <a:p/>
           <a:p>
             <a:r>
-              <a:t>Before reading the numbers, let me quickly define them, because each one</a:t>
-            </a:r>
-          </a:p>
-          <a:p>
-            <a:r>
-              <a:t>measures something different.</a:t>
+              <a:t>Accuracy 99.91% — overall fraction labeled correctly.</a:t>
+            </a:r>
+          </a:p>
+          <a:p>
+            <a:r>
+              <a:t>Precision 1.000 — when we say "WireGuard," we're always right. Zero</a:t>
+            </a:r>
+          </a:p>
+          <a:p>
+            <a:r>
+              <a:t>false alarms on 1058 normal flows.</a:t>
+            </a:r>
+          </a:p>
+          <a:p>
+            <a:r>
+              <a:t>Recall 0.958 — we catch 23 of the 24 actual WireGuard flows. One slips</a:t>
+            </a:r>
+          </a:p>
+          <a:p>
+            <a:r>
+              <a:t>through.</a:t>
+            </a:r>
+          </a:p>
+          <a:p>
+            <a:r>
+              <a:t>ROC AUC 1.000 — a single number from 0.5 (random) to 1.0 (perfect)</a:t>
+            </a:r>
+          </a:p>
+          <a:p>
+            <a:r>
+              <a:t>that scores the classifier across all sensitivity settings. We're at</a:t>
+            </a:r>
+          </a:p>
+          <a:p>
+            <a:r>
+              <a:t>the ceiling.</a:t>
             </a:r>
           </a:p>
           <a:p/>
           <a:p>
             <a:r>
-              <a:t>"Accuracy" is the simplest — out of every flow we tested, how many did</a:t>
-            </a:r>
-          </a:p>
-          <a:p>
-            <a:r>
-              <a:t>we label correctly? We got ninety-nine point nine one percent. So out of</a:t>
-            </a:r>
-          </a:p>
-          <a:p>
-            <a:r>
-              <a:t>about a thousand flows, we mislabeled around one.</a:t>
+              <a:t>Small table below: adding more features doesn't help. The 8-feature</a:t>
+            </a:r>
+          </a:p>
+          <a:p>
+            <a:r>
+              <a:t>Random Forest catches one fewer WireGuard flow than the 2-feature</a:t>
+            </a:r>
+          </a:p>
+          <a:p>
+            <a:r>
+              <a:t>version — extra features added noise, not signal. Logistic regression</a:t>
+            </a:r>
+          </a:p>
+          <a:p>
+            <a:r>
+              <a:t>(LR), which is a simpler model that draws a straight line between the</a:t>
+            </a:r>
+          </a:p>
+          <a:p>
+            <a:r>
+              <a:t>classes, catches everything but pays with 3% false alarms because the</a:t>
+            </a:r>
+          </a:p>
+          <a:p>
+            <a:r>
+              <a:t>real boundary isn't straight.</a:t>
             </a:r>
           </a:p>
           <a:p/>
           <a:p>
             <a:r>
-              <a:t>"Precision" answers the question: when the classifier says "this IS</a:t>
-            </a:r>
-          </a:p>
-          <a:p>
-            <a:r>
-              <a:t>WireGuard," how often is it right? We got one point zero. That's perfect.</a:t>
-            </a:r>
-          </a:p>
-          <a:p>
-            <a:r>
-              <a:t>Zero false alarms. We never accused a normal web flow of being WireGuard.</a:t>
-            </a:r>
-          </a:p>
-          <a:p/>
-          <a:p>
-            <a:r>
-              <a:t>"Recall" is the opposite question: of all the real WireGuard flows that</a:t>
-            </a:r>
-          </a:p>
-          <a:p>
-            <a:r>
-              <a:t>existed, how many did we catch? Zero point nine five eight. That means</a:t>
-            </a:r>
-          </a:p>
-          <a:p>
-            <a:r>
-              <a:t>we caught twenty-three of the twenty-four WireGuard flows. One slipped</a:t>
-            </a:r>
-          </a:p>
-          <a:p>
-            <a:r>
-              <a:t>through. So we're slightly conservative — we miss the occasional one,</a:t>
-            </a:r>
-          </a:p>
-          <a:p>
-            <a:r>
-              <a:t>but we never falsely accuse.</a:t>
-            </a:r>
-          </a:p>
-          <a:p/>
-          <a:p>
-            <a:r>
-              <a:t>"ROC AUC" is the trickiest one to explain. Imagine you could tune the</a:t>
-            </a:r>
-          </a:p>
-          <a:p>
-            <a:r>
-              <a:t>classifier to be more paranoid — willing to call more flows WireGuard —</a:t>
-            </a:r>
-          </a:p>
-          <a:p>
-            <a:r>
-              <a:t>or more relaxed. Each setting trades false alarms for missed WireGuards.</a:t>
-            </a:r>
-          </a:p>
-          <a:p>
-            <a:r>
-              <a:t>ROC AUC is a single number that summarizes how well the classifier does</a:t>
-            </a:r>
-          </a:p>
-          <a:p>
-            <a:r>
-              <a:t>across ALL of those tunings at once. The scale is zero point five for</a:t>
-            </a:r>
-          </a:p>
-          <a:p>
-            <a:r>
-              <a:t>random guessing, one point zero for a perfect classifier. We got</a:t>
-            </a:r>
-          </a:p>
-          <a:p>
-            <a:r>
-              <a:t>one point zero. Couldn't ask for better.</a:t>
-            </a:r>
-          </a:p>
-          <a:p/>
-          <a:p>
-            <a:r>
-              <a:t>Now the smaller table below — this is showing what happens if we add</a:t>
-            </a:r>
-          </a:p>
-          <a:p>
-            <a:r>
-              <a:t>more features. The "RF, two features" row is the headline classifier we</a:t>
-            </a:r>
-          </a:p>
-          <a:p>
-            <a:r>
-              <a:t>just discussed. The "RF, eight features" row added six more measurements:</a:t>
-            </a:r>
-          </a:p>
-          <a:p>
-            <a:r>
-              <a:t>things like packet-size variety, how concentrated the sizes are, how</a:t>
-            </a:r>
-          </a:p>
-          <a:p>
-            <a:r>
-              <a:t>fast packets are flowing, and so on. You'd think more information means</a:t>
-            </a:r>
-          </a:p>
-          <a:p>
-            <a:r>
-              <a:t>better results. It doesn't. Recall actually drops a tiny bit — we catch</a:t>
-            </a:r>
-          </a:p>
-          <a:p>
-            <a:r>
-              <a:t>twenty-two flows instead of twenty-three. The extra features added noise</a:t>
-            </a:r>
-          </a:p>
-          <a:p>
-            <a:r>
-              <a:t>without adding signal. The data was telling us "those two features were</a:t>
-            </a:r>
-          </a:p>
-          <a:p>
-            <a:r>
-              <a:t>enough."</a:t>
-            </a:r>
-          </a:p>
-          <a:p/>
-          <a:p>
-            <a:r>
-              <a:t>"LR" in the third row stands for Logistic Regression, which is a simpler</a:t>
-            </a:r>
-          </a:p>
-          <a:p>
-            <a:r>
-              <a:t>type of model than Random Forest — it just tries to draw a straight line</a:t>
-            </a:r>
-          </a:p>
-          <a:p>
-            <a:r>
-              <a:t>between the two groups. It catches every single WireGuard flow but it</a:t>
-            </a:r>
-          </a:p>
-          <a:p>
-            <a:r>
-              <a:t>also raises about three percent false alarms, because the boundary</a:t>
-            </a:r>
-          </a:p>
-          <a:p>
-            <a:r>
-              <a:t>between the two groups isn't actually a straight line.</a:t>
-            </a:r>
-          </a:p>
-          <a:p/>
-          <a:p>
-            <a:r>
-              <a:t>The pictures on the right. The top one is a "confusion matrix" — it's a</a:t>
-            </a:r>
-          </a:p>
-          <a:p>
-            <a:r>
-              <a:t>two-by-two grid showing how many WireGuard flows got correctly labeled</a:t>
-            </a:r>
-          </a:p>
-          <a:p>
-            <a:r>
-              <a:t>as WireGuard, how many normal flows got correctly labeled as normal,</a:t>
-            </a:r>
-          </a:p>
-          <a:p>
-            <a:r>
-              <a:t>and the mistakes in the other two corners. Almost everything is on the</a:t>
-            </a:r>
-          </a:p>
-          <a:p>
-            <a:r>
-              <a:t>diagonal, which means almost everything is correct.</a:t>
-            </a:r>
-          </a:p>
-          <a:p/>
-          <a:p>
-            <a:r>
-              <a:t>The bottom picture is the "ROC curve" — that's where the ROC AUC number</a:t>
-            </a:r>
-          </a:p>
-          <a:p>
-            <a:r>
-              <a:t>comes from. The curve hugs the top-left corner of the plot, which is</a:t>
-            </a:r>
-          </a:p>
-          <a:p>
-            <a:r>
-              <a:t>what a near-perfect classifier looks like. A diagonal line through the</a:t>
-            </a:r>
-          </a:p>
-          <a:p>
-            <a:r>
-              <a:t>middle would mean random guessing. We're nowhere near that.</a:t>
+              <a:t>Right side. Confusion matrix on top — that's the 2x2 grid of correct</a:t>
+            </a:r>
+          </a:p>
+          <a:p>
+            <a:r>
+              <a:t>and incorrect labels. Almost everything sits on the diagonal. ROC curve</a:t>
+            </a:r>
+          </a:p>
+          <a:p>
+            <a:r>
+              <a:t>on the bottom hugs the top-left corner, which is the shape of a</a:t>
+            </a:r>
+          </a:p>
+          <a:p>
+            <a:r>
+              <a:t>near-perfect classifier.</a:t>
             </a:r>
           </a:p>
         </p:txBody>
@@ -2395,260 +1557,78 @@
           <a:lstStyle/>
           <a:p>
             <a:r>
-              <a:t>This slide does two things. The left side puts us in conversation with</a:t>
-            </a:r>
-          </a:p>
-          <a:p>
-            <a:r>
-              <a:t>the existing research, so you know we didn't reinvent the wheel. The</a:t>
-            </a:r>
-          </a:p>
-          <a:p>
-            <a:r>
-              <a:t>right side is us being honest about what we did NOT do.</a:t>
+              <a:t>Lit positioning so the audience knows we read. The Xue group at</a:t>
+            </a:r>
+          </a:p>
+          <a:p>
+            <a:r>
+              <a:t>Michigan has the dominant line. Their 2022 OpenVPN paper is our</a:t>
+            </a:r>
+          </a:p>
+          <a:p>
+            <a:r>
+              <a:t>methodology template. Their 2024 paper detects nested TLS handshakes —</a:t>
+            </a:r>
+          </a:p>
+          <a:p>
+            <a:r>
+              <a:t>doesn't fire on WireGuard because WireGuard doesn't use TLS. Their 2025</a:t>
+            </a:r>
+          </a:p>
+          <a:p>
+            <a:r>
+              <a:t>NDSS paper uses cross-layer round-trip-time anomalies — attenuates on</a:t>
+            </a:r>
+          </a:p>
+          <a:p>
+            <a:r>
+              <a:t>short UDP flows like ours. So those protocol-agnostic methods don't</a:t>
+            </a:r>
+          </a:p>
+          <a:p>
+            <a:r>
+              <a:t>already solve the WireGuard-in-udp2raw case. Protocol-specific</a:t>
+            </a:r>
+          </a:p>
+          <a:p>
+            <a:r>
+              <a:t>structural features remain the available approach.</a:t>
             </a:r>
           </a:p>
           <a:p/>
           <a:p>
             <a:r>
-              <a:t>Left side. The dominant research group in this area is at the University</a:t>
-            </a:r>
-          </a:p>
-          <a:p>
-            <a:r>
-              <a:t>of Michigan, led by Diwen Xue. They have three relevant papers.</a:t>
-            </a:r>
-          </a:p>
-          <a:p/>
-          <a:p>
-            <a:r>
-              <a:t>Their 2022 paper at USENIX Security broke obfuscated OpenVPN. That's</a:t>
-            </a:r>
-          </a:p>
-          <a:p>
-            <a:r>
-              <a:t>where we got our two-stage active-plus-passive methodology. OpenVPN is</a:t>
-            </a:r>
-          </a:p>
-          <a:p>
-            <a:r>
-              <a:t>a different VPN than WireGuard, and the specific attacks don't carry</a:t>
-            </a:r>
-          </a:p>
-          <a:p>
-            <a:r>
-              <a:t>over, but the playbook does.</a:t>
-            </a:r>
-          </a:p>
-          <a:p/>
-          <a:p>
-            <a:r>
-              <a:t>Their 2024 paper looks for nested encryption handshakes — basically,</a:t>
-            </a:r>
-          </a:p>
-          <a:p>
-            <a:r>
-              <a:t>when a tool tries to disguise traffic as HTTPS, there's often a real</a:t>
-            </a:r>
-          </a:p>
-          <a:p>
-            <a:r>
-              <a:t>TLS handshake hidden inside. They look for that. It doesn't work</a:t>
-            </a:r>
-          </a:p>
-          <a:p>
-            <a:r>
-              <a:t>against WireGuard, because WireGuard doesn't use TLS at all. There's</a:t>
-            </a:r>
-          </a:p>
-          <a:p>
-            <a:r>
-              <a:t>no nested handshake to find.</a:t>
-            </a:r>
-          </a:p>
-          <a:p/>
-          <a:p>
-            <a:r>
-              <a:t>Their 2025 paper at NDSS uses timing differences between layers of the</a:t>
-            </a:r>
-          </a:p>
-          <a:p>
-            <a:r>
-              <a:t>network stack — basically measuring round-trip times at different</a:t>
-            </a:r>
-          </a:p>
-          <a:p>
-            <a:r>
-              <a:t>levels and looking for inconsistencies. It works well on long,</a:t>
-            </a:r>
-          </a:p>
-          <a:p>
-            <a:r>
-              <a:t>high-bandwidth connections. Our captures are short and use UDP, where</a:t>
-            </a:r>
-          </a:p>
-          <a:p>
-            <a:r>
-              <a:t>that timing signal is weak. So that approach doesn't really apply to</a:t>
-            </a:r>
-          </a:p>
-          <a:p>
-            <a:r>
-              <a:t>our case either.</a:t>
-            </a:r>
-          </a:p>
-          <a:p/>
-          <a:p>
-            <a:r>
-              <a:t>The bottom line is: those general-purpose techniques exist, but none of</a:t>
-            </a:r>
-          </a:p>
-          <a:p>
-            <a:r>
-              <a:t>them solve the WireGuard-in-udp2raw case specifically. So the</a:t>
-            </a:r>
-          </a:p>
-          <a:p>
-            <a:r>
-              <a:t>protocol-specific approach we took — features that come from how</a:t>
-            </a:r>
-          </a:p>
-          <a:p>
-            <a:r>
-              <a:t>WireGuard and udp2raw are actually written — is the available</a:t>
-            </a:r>
-          </a:p>
-          <a:p>
-            <a:r>
-              <a:t>approach.</a:t>
-            </a:r>
-          </a:p>
-          <a:p/>
-          <a:p>
-            <a:r>
-              <a:t>We also cite Wu et al. on the Great Firewall's entropy filter, and</a:t>
-            </a:r>
-          </a:p>
-          <a:p>
-            <a:r>
-              <a:t>older work on Shadowsocks and TLS-based circumvention tools. That gives</a:t>
-            </a:r>
-          </a:p>
-          <a:p>
-            <a:r>
-              <a:t>us the broader context.</a:t>
-            </a:r>
-          </a:p>
-          <a:p/>
-          <a:p>
-            <a:r>
-              <a:t>Right side. What we are NOT claiming.</a:t>
-            </a:r>
-          </a:p>
-          <a:p/>
-          <a:p>
-            <a:r>
-              <a:t>One — we ran this in a lab, with one client and one server. We don't</a:t>
-            </a:r>
-          </a:p>
-          <a:p>
-            <a:r>
-              <a:t>have data from actual internet service providers at scale. So we can't</a:t>
-            </a:r>
-          </a:p>
-          <a:p>
-            <a:r>
-              <a:t>say "this would work on every network in the world." It's possible some</a:t>
-            </a:r>
-          </a:p>
-          <a:p>
-            <a:r>
-              <a:t>of our signals weaken in environments we didn't test.</a:t>
-            </a:r>
-          </a:p>
-          <a:p/>
-          <a:p>
-            <a:r>
-              <a:t>Two — we tested one specific version of udp2raw, the February 2023</a:t>
-            </a:r>
-          </a:p>
-          <a:p>
-            <a:r>
-              <a:t>release. There are forks of udp2raw with slightly different behavior</a:t>
-            </a:r>
-          </a:p>
-          <a:p>
-            <a:r>
-              <a:t>that we didn't test.</a:t>
-            </a:r>
-          </a:p>
-          <a:p/>
-          <a:p>
-            <a:r>
-              <a:t>Three — both of our attacks could be defeated by patching udp2raw. If</a:t>
-            </a:r>
-          </a:p>
-          <a:p>
-            <a:r>
-              <a:t>the maintainer added delayed-ACK behavior and recommended a smaller</a:t>
-            </a:r>
-          </a:p>
-          <a:p>
-            <a:r>
-              <a:t>WireGuard packet size, our passive classifier would lose most of its</a:t>
-            </a:r>
-          </a:p>
-          <a:p>
-            <a:r>
-              <a:t>edge. If they made the TCP emulation more thorough, our active prober</a:t>
-            </a:r>
-          </a:p>
-          <a:p>
-            <a:r>
-              <a:t>would lose its edge too. We're describing the current state of the</a:t>
-            </a:r>
-          </a:p>
-          <a:p>
-            <a:r>
-              <a:t>tool, not making a permanent claim.</a:t>
-            </a:r>
-          </a:p>
-          <a:p/>
-          <a:p>
-            <a:r>
-              <a:t>Four — the active prober's third probe, the bogus ACK, is mildly</a:t>
-            </a:r>
-          </a:p>
-          <a:p>
-            <a:r>
-              <a:t>hostile. In a real deployment you'd only fire that one at hosts you</a:t>
-            </a:r>
-          </a:p>
-          <a:p>
-            <a:r>
-              <a:t>already suspect.</a:t>
-            </a:r>
-          </a:p>
-          <a:p/>
-          <a:p>
-            <a:r>
-              <a:t>Five — we didn't compare against the other obfuscation tools like</a:t>
-            </a:r>
-          </a:p>
-          <a:p>
-            <a:r>
-              <a:t>AmneziaWG, swgp-go, or wstunnel. That's left for future work.</a:t>
-            </a:r>
-          </a:p>
-          <a:p/>
-          <a:p>
-            <a:r>
-              <a:t>The point of this slide is to be honest about scope so people can trust</a:t>
-            </a:r>
-          </a:p>
-          <a:p>
-            <a:r>
-              <a:t>the parts we DID prove.</a:t>
+              <a:t>Right side, what we are NOT claiming. Single client and server, no</a:t>
+            </a:r>
+          </a:p>
+          <a:p>
+            <a:r>
+              <a:t>ISP-scale data. One version of udp2raw — later forks may differ. Both</a:t>
+            </a:r>
+          </a:p>
+          <a:p>
+            <a:r>
+              <a:t>attacks are defeatable by a maintainer who patches the tool — delayed</a:t>
+            </a:r>
+          </a:p>
+          <a:p>
+            <a:r>
+              <a:t>ACK plus a smaller WireGuard MTU weakens C2. The bogus-ACK probe is</a:t>
+            </a:r>
+          </a:p>
+          <a:p>
+            <a:r>
+              <a:t>mildly hostile, so an adversary would fire it only at already-suspected</a:t>
+            </a:r>
+          </a:p>
+          <a:p>
+            <a:r>
+              <a:t>hosts. And we didn't compare against AmneziaWG, swgp-go, or wstunnel —</a:t>
+            </a:r>
+          </a:p>
+          <a:p>
+            <a:r>
+              <a:t>future work.</a:t>
             </a:r>
           </a:p>
         </p:txBody>
@@ -2718,167 +1698,77 @@
           <a:lstStyle/>
           <a:p>
             <a:r>
-              <a:t>Four takeaways. If you remember nothing else from this talk, remember</a:t>
-            </a:r>
-          </a:p>
-          <a:p>
-            <a:r>
-              <a:t>these.</a:t>
+              <a:t>Four takeaways.</a:t>
             </a:r>
           </a:p>
           <a:p/>
           <a:p>
             <a:r>
-              <a:t>Number one. WireGuard's packets are easy to recognize on the network.</a:t>
-            </a:r>
-          </a:p>
-          <a:p>
-            <a:r>
-              <a:t>That's not news — researchers and the Great Firewall have known this</a:t>
-            </a:r>
-          </a:p>
-          <a:p>
-            <a:r>
-              <a:t>for years. We re-built the detector ourselves, in twenty-five lines of</a:t>
-            </a:r>
-          </a:p>
-          <a:p>
-            <a:r>
-              <a:t>Python, just so we have a fair baseline to compare against.</a:t>
+              <a:t>One. WireGuard's wire format leaks. Known result; we re-implement it as</a:t>
+            </a:r>
+          </a:p>
+          <a:p>
+            <a:r>
+              <a:t>our baseline.</a:t>
             </a:r>
           </a:p>
           <a:p/>
           <a:p>
             <a:r>
-              <a:t>Number two. The most popular tool people use to hide WireGuard — udp2raw,</a:t>
-            </a:r>
-          </a:p>
-          <a:p>
-            <a:r>
-              <a:t>which has been downloaded a quarter million times — doesn't actually</a:t>
-            </a:r>
-          </a:p>
-          <a:p>
-            <a:r>
-              <a:t>hide it well. You can spot it actively in eight and a half seconds by</a:t>
-            </a:r>
-          </a:p>
-          <a:p>
-            <a:r>
-              <a:t>sending five test packets. Or you can spot it passively, just watching</a:t>
-            </a:r>
-          </a:p>
-          <a:p>
-            <a:r>
-              <a:t>traffic, with a tiny machine-learning model that's right essentially a</a:t>
-            </a:r>
-          </a:p>
-          <a:p>
-            <a:r>
-              <a:t>hundred percent of the time. Take your pick.</a:t>
+              <a:t>Two. udp2raw doesn't actually fix it. 8.5 seconds with the five-packet</a:t>
+            </a:r>
+          </a:p>
+          <a:p>
+            <a:r>
+              <a:t>prober, or two passive features at AUC 1.0. Pick your weapon.</a:t>
             </a:r>
           </a:p>
           <a:p/>
           <a:p>
             <a:r>
-              <a:t>Number three. These results are not statistical flukes or lucky</a:t>
-            </a:r>
-          </a:p>
-          <a:p>
-            <a:r>
-              <a:t>patterns we found in one dataset. Both detectors come from how the</a:t>
-            </a:r>
-          </a:p>
-          <a:p>
-            <a:r>
-              <a:t>software is fundamentally written. WireGuard always pads its packets to</a:t>
-            </a:r>
-          </a:p>
-          <a:p>
-            <a:r>
-              <a:t>the maximum size — that's a deliberate design choice in the protocol.</a:t>
-            </a:r>
-          </a:p>
-          <a:p>
-            <a:r>
-              <a:t>udp2raw always acknowledges every wrapped packet one-for-one, because</a:t>
-            </a:r>
-          </a:p>
-          <a:p>
-            <a:r>
-              <a:t>that's how its wrapping mechanism works. And udp2raw silently drops</a:t>
-            </a:r>
-          </a:p>
-          <a:p>
-            <a:r>
-              <a:t>weird TCP packets because the person who wrote it only thought about</a:t>
-            </a:r>
-          </a:p>
-          <a:p>
-            <a:r>
-              <a:t>the one specific TCP pattern. These are mechanical consequences of the</a:t>
-            </a:r>
-          </a:p>
-          <a:p>
-            <a:r>
-              <a:t>code, not statistical accidents — so they should transfer to other</a:t>
-            </a:r>
-          </a:p>
-          <a:p>
-            <a:r>
-              <a:t>networks and other situations.</a:t>
+              <a:t>Three. Not a statistical fluke. WireGuard pads to MTU because that's</a:t>
+            </a:r>
+          </a:p>
+          <a:p>
+            <a:r>
+              <a:t>its design. udp2raw acks 1:1 because that's how it wraps. udp2raw drops</a:t>
+            </a:r>
+          </a:p>
+          <a:p>
+            <a:r>
+              <a:t>unfamiliar TCP shapes because its parser was written for one shape.</a:t>
+            </a:r>
+          </a:p>
+          <a:p>
+            <a:r>
+              <a:t>Mechanical consequences, not accidents.</a:t>
             </a:r>
           </a:p>
           <a:p/>
           <a:p>
             <a:r>
-              <a:t>Number four. The defenses are not hard. If the udp2raw author added</a:t>
-            </a:r>
-          </a:p>
-          <a:p>
-            <a:r>
-              <a:t>delayed acknowledgments, and recommended users set a smaller WireGuard</a:t>
-            </a:r>
-          </a:p>
-          <a:p>
-            <a:r>
-              <a:t>packet size, the passive classifier mostly stops working. If they made</a:t>
-            </a:r>
-          </a:p>
-          <a:p>
-            <a:r>
-              <a:t>the TCP emulation more thorough — actually responding to weird probes</a:t>
-            </a:r>
-          </a:p>
-          <a:p>
-            <a:r>
-              <a:t>the way a real Linux kernel does — the active prober stops working.</a:t>
-            </a:r>
-          </a:p>
-          <a:p>
-            <a:r>
-              <a:t>We describe both fixes in the paper. We didn't actually write the patch</a:t>
-            </a:r>
-          </a:p>
-          <a:p>
-            <a:r>
-              <a:t>ourselves and submit it upstream. That's a pull request someone else</a:t>
-            </a:r>
-          </a:p>
-          <a:p>
-            <a:r>
-              <a:t>can write.</a:t>
+              <a:t>Four. Defenses are obvious. Delayed ACK plus a smaller WireGuard MTU</a:t>
+            </a:r>
+          </a:p>
+          <a:p>
+            <a:r>
+              <a:t>kills C2. More conformant TCP emulation kills C1. We sketch both in the</a:t>
+            </a:r>
+          </a:p>
+          <a:p>
+            <a:r>
+              <a:t>paper but didn't patch the upstream tool. Somebody else's pull request</a:t>
+            </a:r>
+          </a:p>
+          <a:p>
+            <a:r>
+              <a:t>to write.</a:t>
             </a:r>
           </a:p>
           <a:p/>
           <a:p>
             <a:r>
-              <a:t>That's the talk. Happy to take questions, and we have a live demo</a:t>
-            </a:r>
-          </a:p>
-          <a:p>
-            <a:r>
-              <a:t>ready if there's interest.</a:t>
+              <a:t>Happy to take questions. Live demo ready if there's interest.</a:t>
             </a:r>
           </a:p>
         </p:txBody>

--- a/slides/WireGuard-udp2raw-detection.pptx
+++ b/slides/WireGuard-udp2raw-detection.pptx
@@ -510,59 +510,54 @@
           <a:lstStyle/>
           <a:p>
             <a:r>
-              <a:t>Hi, I'm Steven, this is Nicholas. We spent the semester building and</a:t>
-            </a:r>
-          </a:p>
-          <a:p>
-            <a:r>
-              <a:t>breaking a WireGuard deployment.</a:t>
+              <a:t>Setup</a:t>
+            </a:r>
+          </a:p>
+          <a:p>
+            <a:r>
+              <a:t>  • WireGuard = modern VPN. Encrypts well, but doesn't try to hide that it IS a VPN.</a:t>
+            </a:r>
+          </a:p>
+          <a:p>
+            <a:r>
+              <a:t>  • Hiding the VPN is explicitly out of scope per Donenfeld's 2017 paper.</a:t>
+            </a:r>
+          </a:p>
+          <a:p>
+            <a:r>
+              <a:t>  • Question: does the most popular hiding tool actually hide it?</a:t>
             </a:r>
           </a:p>
           <a:p/>
           <a:p>
             <a:r>
-              <a:t>WireGuard is a modern VPN. It encrypts your traffic well, but it doesn't</a:t>
-            </a:r>
-          </a:p>
-          <a:p>
-            <a:r>
-              <a:t>try to hide that you're running a VPN — that's an explicit design choice</a:t>
-            </a:r>
-          </a:p>
-          <a:p>
-            <a:r>
-              <a:t>by its author. The question we're asking is whether the most popular</a:t>
-            </a:r>
-          </a:p>
-          <a:p>
-            <a:r>
-              <a:t>tool people use to hide WireGuard actually hides it. The tool is called</a:t>
-            </a:r>
-          </a:p>
-          <a:p>
-            <a:r>
-              <a:t>udp2raw. About 260,000 downloads, used in Iran and China, zero</a:t>
-            </a:r>
-          </a:p>
-          <a:p>
-            <a:r>
-              <a:t>peer-reviewed analysis until this paper.</a:t>
+              <a:t>The tool: udp2raw</a:t>
+            </a:r>
+          </a:p>
+          <a:p>
+            <a:r>
+              <a:t>  • Used in Iran and China for censorship circumvention.</a:t>
+            </a:r>
+          </a:p>
+          <a:p>
+            <a:r>
+              <a:t>  • Zero peer-reviewed analysis before this paper.</a:t>
             </a:r>
           </a:p>
           <a:p/>
           <a:p>
             <a:r>
-              <a:t>Two results. An active attack: send five test packets, identify a</a:t>
-            </a:r>
-          </a:p>
-          <a:p>
-            <a:r>
-              <a:t>udp2raw server in 8.5 seconds. A passive attack: watch traffic, measure</a:t>
-            </a:r>
-          </a:p>
-          <a:p>
-            <a:r>
-              <a:t>two things about it, classifier hits 99.9% accuracy.</a:t>
+              <a:t>Two results we'll show</a:t>
+            </a:r>
+          </a:p>
+          <a:p>
+            <a:r>
+              <a:t>  • Active attack: 5 test packets, identifies udp2raw server in 8.5 s.</a:t>
+            </a:r>
+          </a:p>
+          <a:p>
+            <a:r>
+              <a:t>  • Passive attack: 2 traffic features, classifier at 99.9% accuracy.</a:t>
             </a:r>
           </a:p>
         </p:txBody>
@@ -632,68 +627,63 @@
           <a:lstStyle/>
           <a:p>
             <a:r>
-              <a:t>Every WireGuard packet starts with the same four bytes — a type byte</a:t>
-            </a:r>
-          </a:p>
-          <a:p>
-            <a:r>
-              <a:t>that's always 1, 2, 3, or 4, followed by three zero bytes. The</a:t>
-            </a:r>
-          </a:p>
-          <a:p>
-            <a:r>
-              <a:t>handshake packets are also fixed sizes: 148, 92, and 64 bytes. So you</a:t>
-            </a:r>
-          </a:p>
-          <a:p>
-            <a:r>
-              <a:t>can identify WireGuard without decrypting anything, just by looking at</a:t>
-            </a:r>
-          </a:p>
-          <a:p>
-            <a:r>
-              <a:t>the first four bytes and the length. Twenty-five lines of Python is the</a:t>
-            </a:r>
-          </a:p>
-          <a:p>
-            <a:r>
-              <a:t>whole detector. The Wu et al. paper at USENIX Security 2023 confirms</a:t>
-            </a:r>
-          </a:p>
-          <a:p>
-            <a:r>
-              <a:t>the Great Firewall does exactly this.</a:t>
+              <a:t>Why WireGuard is easy to spot</a:t>
+            </a:r>
+          </a:p>
+          <a:p>
+            <a:r>
+              <a:t>  • First byte = message type, always 1, 2, 3, or 4.</a:t>
+            </a:r>
+          </a:p>
+          <a:p>
+            <a:r>
+              <a:t>  • Next 3 bytes = always zero.</a:t>
+            </a:r>
+          </a:p>
+          <a:p>
+            <a:r>
+              <a:t>  • Handshake packets = fixed sizes: 148, 92, 64 bytes.</a:t>
+            </a:r>
+          </a:p>
+          <a:p>
+            <a:r>
+              <a:t>  • → Identify WireGuard from first 4 bytes + packet length. No decryption needed.</a:t>
+            </a:r>
+          </a:p>
+          <a:p>
+            <a:r>
+              <a:t>  • 25-line Python detector is the whole thing.</a:t>
+            </a:r>
+          </a:p>
+          <a:p>
+            <a:r>
+              <a:t>  • Wu et al., USENIX Security 2023: Great Firewall does exactly this.</a:t>
             </a:r>
           </a:p>
           <a:p/>
           <a:p>
             <a:r>
-              <a:t>Important caveat: this is not a WireGuard vulnerability. Donenfeld's</a:t>
-            </a:r>
-          </a:p>
-          <a:p>
-            <a:r>
-              <a:t>original 2017 paper explicitly says hiding the VPN's existence is out</a:t>
-            </a:r>
-          </a:p>
-          <a:p>
-            <a:r>
-              <a:t>of scope — that's a job for a separate tool. The question isn't "can</a:t>
-            </a:r>
-          </a:p>
-          <a:p>
-            <a:r>
-              <a:t>you detect WireGuard," it's "can you detect it once it's wrapped in</a:t>
-            </a:r>
-          </a:p>
-          <a:p>
-            <a:r>
-              <a:t>the most popular hiding tool." That tool is udp2raw, which is the</a:t>
-            </a:r>
-          </a:p>
-          <a:p>
-            <a:r>
-              <a:t>next slide.</a:t>
+              <a:t>Important caveat — not a vulnerability</a:t>
+            </a:r>
+          </a:p>
+          <a:p>
+            <a:r>
+              <a:t>  • Donenfeld's 2017 paper says hiding the VPN's existence is out of scope.</a:t>
+            </a:r>
+          </a:p>
+          <a:p>
+            <a:r>
+              <a:t>  • That's a job for a separate tool on top.</a:t>
+            </a:r>
+          </a:p>
+          <a:p>
+            <a:r>
+              <a:t>  • Real question: can you detect WireGuard once it's wrapped in the popular hiding tool?</a:t>
+            </a:r>
+          </a:p>
+          <a:p>
+            <a:r>
+              <a:t>  • → That tool is udp2raw. Next slide.</a:t>
             </a:r>
           </a:p>
         </p:txBody>
@@ -763,74 +753,64 @@
           <a:lstStyle/>
           <a:p>
             <a:r>
-              <a:t>Two paths through our lab, same WireGuard keys both ways, only the</a:t>
-            </a:r>
-          </a:p>
-          <a:p>
-            <a:r>
-              <a:t>outer transport differs. Direct path: WireGuard packets ride UDP</a:t>
-            </a:r>
-          </a:p>
-          <a:p>
-            <a:r>
-              <a:t>directly — the path the Great Firewall already detects. Obfuscated</a:t>
-            </a:r>
-          </a:p>
-          <a:p>
-            <a:r>
-              <a:t>path: udp2raw rewraps each WireGuard packet to look like a TCP segment</a:t>
-            </a:r>
-          </a:p>
-          <a:p>
-            <a:r>
-              <a:t>on port 4096. udp2raw calls this "faketcp" — it's not a real TCP</a:t>
-            </a:r>
-          </a:p>
-          <a:p>
-            <a:r>
-              <a:t>connection underneath, just shaped like one. TCP looks normal because</a:t>
-            </a:r>
-          </a:p>
-          <a:p>
-            <a:r>
-              <a:t>it's what web browsers use.</a:t>
+              <a:t>Two paths in our lab (same WG keys, only the outer transport differs)</a:t>
+            </a:r>
+          </a:p>
+          <a:p>
+            <a:r>
+              <a:t>  • Direct: WireGuard over UDP. What the Great Firewall already blocks.</a:t>
+            </a:r>
+          </a:p>
+          <a:p>
+            <a:r>
+              <a:t>  • Obfuscated: udp2raw rewraps each WG packet as a TCP segment on port 4096.</a:t>
+            </a:r>
+          </a:p>
+          <a:p>
+            <a:r>
+              <a:t>  • "faketcp" = shaped like TCP but not a real TCP connection.</a:t>
+            </a:r>
+          </a:p>
+          <a:p>
+            <a:r>
+              <a:t>  • Why TCP? Looks normal — it's what web browsers use.</a:t>
             </a:r>
           </a:p>
           <a:p/>
           <a:p>
             <a:r>
-              <a:t>Why udp2raw specifically. Roughly 259,000 binary downloads — actual</a:t>
-            </a:r>
-          </a:p>
-          <a:p>
-            <a:r>
-              <a:t>runs, not GitHub stars. Reportedly blocked at the ISP level in Iran</a:t>
-            </a:r>
-          </a:p>
-          <a:p>
-            <a:r>
-              <a:t>(udp2raw issue #505, net4people thread #253). And zero peer-reviewed</a:t>
-            </a:r>
-          </a:p>
-          <a:p>
-            <a:r>
-              <a:t>analysis: we searched USENIX, NDSS, IMC, FOCI, PETS, CCS. Nothing.</a:t>
+              <a:t>Why udp2raw specifically</a:t>
+            </a:r>
+          </a:p>
+          <a:p>
+            <a:r>
+              <a:t>  • ~259,000 binary downloads (actual runs, not GitHub stars).</a:t>
+            </a:r>
+          </a:p>
+          <a:p>
+            <a:r>
+              <a:t>  • Reportedly blocked at ISP level in Iran (issue #505, net4people #253).</a:t>
+            </a:r>
+          </a:p>
+          <a:p>
+            <a:r>
+              <a:t>  • Zero peer-reviewed analysis. Searched USENIX, NDSS, IMC, FOCI, PETS, CCS.</a:t>
             </a:r>
           </a:p>
           <a:p/>
           <a:p>
             <a:r>
-              <a:t>Other tools like AmneziaWG and swgp-go modify WireGuard itself — that's</a:t>
-            </a:r>
-          </a:p>
-          <a:p>
-            <a:r>
-              <a:t>a different category. udp2raw is the only big, unstudied tool in the</a:t>
-            </a:r>
-          </a:p>
-          <a:p>
-            <a:r>
-              <a:t>"wrap it generically" category, so that's our target.</a:t>
+              <a:t>Why not other tools?</a:t>
+            </a:r>
+          </a:p>
+          <a:p>
+            <a:r>
+              <a:t>  • AmneziaWG, swgp-go = modify WireGuard itself. Different category.</a:t>
+            </a:r>
+          </a:p>
+          <a:p>
+            <a:r>
+              <a:t>  • udp2raw = only big, unstudied tool in the "wrap it generically" category.</a:t>
             </a:r>
           </a:p>
         </p:txBody>
@@ -900,90 +880,90 @@
           <a:lstStyle/>
           <a:p>
             <a:r>
-              <a:t>Two attacks. "Active" means we send packets and watch the reply;</a:t>
-            </a:r>
-          </a:p>
-          <a:p>
-            <a:r>
-              <a:t>"passive" means we just watch traffic going by. We didn't invent this</a:t>
-            </a:r>
-          </a:p>
-          <a:p>
-            <a:r>
-              <a:t>pattern — the Xue et al. Distinguished Paper at USENIX Security 2022</a:t>
-            </a:r>
-          </a:p>
-          <a:p>
-            <a:r>
-              <a:t>did it for OpenVPN. We apply the same template to WireGuard-in-udp2raw,</a:t>
-            </a:r>
-          </a:p>
-          <a:p>
-            <a:r>
-              <a:t>which they didn't cover.</a:t>
+              <a:t>Two attacks, definitions</a:t>
+            </a:r>
+          </a:p>
+          <a:p>
+            <a:r>
+              <a:t>  • Active = send packets, watch the reply.</a:t>
+            </a:r>
+          </a:p>
+          <a:p>
+            <a:r>
+              <a:t>  • Passive = just watch traffic going by.</a:t>
+            </a:r>
+          </a:p>
+          <a:p>
+            <a:r>
+              <a:t>  • Template from Xue et al., USENIX Security 2022 Distinguished Paper (did OpenVPN, not WireGuard).</a:t>
             </a:r>
           </a:p>
           <a:p/>
           <a:p>
             <a:r>
-              <a:t>Left card, C1, active: five TCP probes, under nine seconds, same answer</a:t>
-            </a:r>
-          </a:p>
-          <a:p>
-            <a:r>
-              <a:t>every time. Walking through the actual probes on the next slide.</a:t>
+              <a:t>C1 — Active (left card)</a:t>
+            </a:r>
+          </a:p>
+          <a:p>
+            <a:r>
+              <a:t>  • 5 TCP probes, under 9 seconds.</a:t>
+            </a:r>
+          </a:p>
+          <a:p>
+            <a:r>
+              <a:t>  • Same answer every time. Details next slide.</a:t>
             </a:r>
           </a:p>
           <a:p/>
           <a:p>
             <a:r>
-              <a:t>Right card, C2, passive: for each traffic flow — meaning one</a:t>
-            </a:r>
-          </a:p>
-          <a:p>
-            <a:r>
-              <a:t>conversation between two computers — we compute two numbers and feed</a:t>
-            </a:r>
-          </a:p>
-          <a:p>
-            <a:r>
-              <a:t>them to a Random Forest, which is a standard machine-learning model</a:t>
-            </a:r>
-          </a:p>
-          <a:p>
-            <a:r>
-              <a:t>that learns rules from examples. The two numbers come from how the</a:t>
-            </a:r>
-          </a:p>
-          <a:p>
-            <a:r>
-              <a:t>protocols are written: WireGuard pads every packet to the maximum size,</a:t>
-            </a:r>
-          </a:p>
-          <a:p>
-            <a:r>
-              <a:t>and udp2raw acknowledges every wrapped packet one-for-one. Those are</a:t>
-            </a:r>
-          </a:p>
-          <a:p>
-            <a:r>
-              <a:t>mechanical, not statistical.</a:t>
+              <a:t>C2 — Passive (right card)</a:t>
+            </a:r>
+          </a:p>
+          <a:p>
+            <a:r>
+              <a:t>  • Flow = one conversation between two computers.</a:t>
+            </a:r>
+          </a:p>
+          <a:p>
+            <a:r>
+              <a:t>  • For each flow, compute 2 numbers, feed to a Random Forest.</a:t>
+            </a:r>
+          </a:p>
+          <a:p>
+            <a:r>
+              <a:t>  • Random Forest (RF) = standard ML model that learns rules from examples.</a:t>
+            </a:r>
+          </a:p>
+          <a:p>
+            <a:r>
+              <a:t>  • Features are mechanical, not statistical:</a:t>
+            </a:r>
+          </a:p>
+          <a:p>
+            <a:r>
+              <a:t>      – WireGuard pads every packet to max size.</a:t>
+            </a:r>
+          </a:p>
+          <a:p>
+            <a:r>
+              <a:t>      – udp2raw acks every wrapped packet 1:1.</a:t>
             </a:r>
           </a:p>
           <a:p/>
           <a:p>
             <a:r>
-              <a:t>Trained on 24 WireGuard flows we captured ourselves, plus 1058 normal</a:t>
-            </a:r>
-          </a:p>
-          <a:p>
-            <a:r>
-              <a:t>flows from ISCXVPN2016 — the standard public dataset for this kind of</a:t>
-            </a:r>
-          </a:p>
-          <a:p>
-            <a:r>
-              <a:t>work.</a:t>
+              <a:t>Training data</a:t>
+            </a:r>
+          </a:p>
+          <a:p>
+            <a:r>
+              <a:t>  • 24 WireGuard flows we captured ourselves.</a:t>
+            </a:r>
+          </a:p>
+          <a:p>
+            <a:r>
+              <a:t>  • 1058 normal flows from ISCXVPN2016 (standard public dataset for this work).</a:t>
             </a:r>
           </a:p>
         </p:txBody>
@@ -1053,80 +1033,122 @@
           <a:lstStyle/>
           <a:p>
             <a:r>
-              <a:t>Three columns, same server, three ports. Port 22 is real SSH — our</a:t>
-            </a:r>
-          </a:p>
-          <a:p>
-            <a:r>
-              <a:t>real-TCP control. Port 4096 is udp2raw. Port 9999 is closed — negative</a:t>
-            </a:r>
-          </a:p>
-          <a:p>
-            <a:r>
-              <a:t>control. TCP terms in the table: SYN starts a connection, SYN-ACK</a:t>
-            </a:r>
-          </a:p>
-          <a:p>
-            <a:r>
-              <a:t>accepts it, RST rejects, FIN closes.</a:t>
+              <a:t>Setup — three columns, same server, three ports</a:t>
+            </a:r>
+          </a:p>
+          <a:p>
+            <a:r>
+              <a:t>  • TCP/22 = real SSH (real-TCP control).</a:t>
+            </a:r>
+          </a:p>
+          <a:p>
+            <a:r>
+              <a:t>  • TCP/4096 = udp2raw.</a:t>
+            </a:r>
+          </a:p>
+          <a:p>
+            <a:r>
+              <a:t>  • TCP/9999 = closed (negative control).</a:t>
             </a:r>
           </a:p>
           <a:p/>
           <a:p>
             <a:r>
-              <a:t>The two orange "silent" probes don't help: udp2raw answers SYN</a:t>
-            </a:r>
-          </a:p>
-          <a:p>
-            <a:r>
-              <a:t>because that's the disguise, and the kernel — not udp2raw — generates</a:t>
-            </a:r>
-          </a:p>
-          <a:p>
-            <a:r>
-              <a:t>the RST on the bogus ACK.</a:t>
+              <a:t>TCP terms for the table</a:t>
+            </a:r>
+          </a:p>
+          <a:p>
+            <a:r>
+              <a:t>  • SYN starts a connection. SYN-ACK accepts. RST rejects. FIN closes.</a:t>
             </a:r>
           </a:p>
           <a:p/>
           <a:p>
             <a:r>
-              <a:t>The signal is the other three. Probe 2 is a SYN with 32 bytes of</a:t>
-            </a:r>
-          </a:p>
-          <a:p>
-            <a:r>
-              <a:t>payload. Probe 4 is a SYN with an unusual TCP option. Probe 5 is a FIN</a:t>
-            </a:r>
-          </a:p>
-          <a:p>
-            <a:r>
-              <a:t>to a port with no connection. A real Linux kernel answers all three.</a:t>
-            </a:r>
-          </a:p>
-          <a:p>
-            <a:r>
-              <a:t>udp2raw drops all three because its parser was written for one specific</a:t>
-            </a:r>
-          </a:p>
-          <a:p>
-            <a:r>
-              <a:t>TCP shape. Count silent responses: real TCP scores 0, udp2raw scores 3.</a:t>
+              <a:t>Probes that DON'T discriminate (answered by both)</a:t>
+            </a:r>
+          </a:p>
+          <a:p>
+            <a:r>
+              <a:t>  • P1 (SYN): udp2raw answers — that's the disguise.</a:t>
+            </a:r>
+          </a:p>
+          <a:p>
+            <a:r>
+              <a:t>  • P3 (bogus ACK): kernel (not udp2raw) generates the RST.</a:t>
             </a:r>
           </a:p>
           <a:p/>
           <a:p>
             <a:r>
-              <a:t>Timing: half a second for real TCP, 8.5 seconds for udp2raw (we wait</a:t>
-            </a:r>
-          </a:p>
-          <a:p>
-            <a:r>
-              <a:t>out timeouts on the silent probes), 15.5 for the closed port. Same</a:t>
-            </a:r>
-          </a:p>
-          <a:p>
-            <a:r>
-              <a:t>verdict 5 out of 5 trials.</a:t>
+              <a:t>The signal — probes 2, 4, 5</a:t>
+            </a:r>
+          </a:p>
+          <a:p>
+            <a:r>
+              <a:t>  • P2: SYN with 32 bytes of payload.</a:t>
+            </a:r>
+          </a:p>
+          <a:p>
+            <a:r>
+              <a:t>  • P4: SYN with unusual TCP option.</a:t>
+            </a:r>
+          </a:p>
+          <a:p>
+            <a:r>
+              <a:t>  • P5: FIN to a port with no connection.</a:t>
+            </a:r>
+          </a:p>
+          <a:p>
+            <a:r>
+              <a:t>  • Real Linux kernel answers all three. udp2raw drops all three.</a:t>
+            </a:r>
+          </a:p>
+          <a:p>
+            <a:r>
+              <a:t>  • udp2raw's parser was written for one TCP shape; anything else, it ignores.</a:t>
+            </a:r>
+          </a:p>
+          <a:p/>
+          <a:p>
+            <a:r>
+              <a:t>Rule</a:t>
+            </a:r>
+          </a:p>
+          <a:p>
+            <a:r>
+              <a:t>  • Count silent responses among {P2, P4, P5}.</a:t>
+            </a:r>
+          </a:p>
+          <a:p>
+            <a:r>
+              <a:t>  • Real TCP = 0 silent. udp2raw = 3 silent.</a:t>
+            </a:r>
+          </a:p>
+          <a:p/>
+          <a:p>
+            <a:r>
+              <a:t>Timing</a:t>
+            </a:r>
+          </a:p>
+          <a:p>
+            <a:r>
+              <a:t>  • Real TCP: 0.5 s.</a:t>
+            </a:r>
+          </a:p>
+          <a:p>
+            <a:r>
+              <a:t>  • udp2raw: 8.5 s (we wait out timeouts on the silent probes).</a:t>
+            </a:r>
+          </a:p>
+          <a:p>
+            <a:r>
+              <a:t>  • Closed port: 15.5 s.</a:t>
+            </a:r>
+          </a:p>
+          <a:p>
+            <a:r>
+              <a:t>  • Same verdict 5/5 trials.</a:t>
             </a:r>
           </a:p>
         </p:txBody>
@@ -1196,130 +1218,120 @@
           <a:lstStyle/>
           <a:p>
             <a:r>
-              <a:t>Two features. First: bulk_fraction is the share of packets in a flow</a:t>
-            </a:r>
-          </a:p>
-          <a:p>
-            <a:r>
-              <a:t>that are big — 1200 bytes or more. The reason it works: WireGuard pads</a:t>
-            </a:r>
-          </a:p>
-          <a:p>
-            <a:r>
-              <a:t>every packet up to near the MTU, the maximum packet size on the link,</a:t>
-            </a:r>
-          </a:p>
-          <a:p>
-            <a:r>
-              <a:t>about 1500 bytes. Web browsers don't. WireGuard flows are 55% big</a:t>
-            </a:r>
-          </a:p>
-          <a:p>
-            <a:r>
-              <a:t>packets; normal traffic is 2%. The "Cohen's d" column is a standard</a:t>
-            </a:r>
-          </a:p>
-          <a:p>
-            <a:r>
-              <a:t>measure of how cleanly two groups separate; anything over 0.8 is "large,"</a:t>
-            </a:r>
-          </a:p>
-          <a:p>
-            <a:r>
-              <a:t>and we get 3.83.</a:t>
+              <a:t>Feature 1 — bulk_fraction</a:t>
+            </a:r>
+          </a:p>
+          <a:p>
+            <a:r>
+              <a:t>  • Share of packets in a flow that are "big" (≥1200 bytes).</a:t>
+            </a:r>
+          </a:p>
+          <a:p>
+            <a:r>
+              <a:t>  • Why it works: WireGuard pads every packet up to near MTU (~1500 B).</a:t>
+            </a:r>
+          </a:p>
+          <a:p>
+            <a:r>
+              <a:t>  • MTU (or Maximum Transmission Unit)= max packet size the link will carry.</a:t>
+            </a:r>
+          </a:p>
+          <a:p>
+            <a:r>
+              <a:t>  • WireGuard: 55% big packets. Normal: 2%.</a:t>
+            </a:r>
+          </a:p>
+          <a:p>
+            <a:r>
+              <a:t>  • Cohen's d = 3.83.</a:t>
+            </a:r>
+          </a:p>
+          <a:p>
+            <a:r>
+              <a:t>  • Cohen's d = "A measurement that quantifies the difference between two averages in units of standard deviation" Or, how cleanly two groups separate. Over 0.8 is "large." We have 3.83.</a:t>
             </a:r>
           </a:p>
           <a:p/>
           <a:p>
             <a:r>
-              <a:t>Second feature: ack60_fraction, the share of 60-byte TCP ACK packets.</a:t>
-            </a:r>
-          </a:p>
-          <a:p>
-            <a:r>
-              <a:t>Normal TCP uses "delayed ACK" — one acknowledgment per two data</a:t>
-            </a:r>
-          </a:p>
-          <a:p>
-            <a:r>
-              <a:t>packets, so about 33% ACKs. udp2raw breaks this. It wraps each</a:t>
-            </a:r>
-          </a:p>
-          <a:p>
-            <a:r>
-              <a:t>WireGuard packet as one separate TCP segment, the kernel ACKs each</a:t>
-            </a:r>
-          </a:p>
-          <a:p>
-            <a:r>
-              <a:t>arrival individually, and the ACK fraction climbs. We measure 30% for</a:t>
-            </a:r>
-          </a:p>
-          <a:p>
-            <a:r>
-              <a:t>WireGuard-in-udp2raw vs. 7% for normal traffic. Cohen's d of 1.27 —</a:t>
-            </a:r>
-          </a:p>
-          <a:p>
-            <a:r>
-              <a:t>still a large effect.</a:t>
+              <a:t>Feature 2 — ack60_fraction</a:t>
+            </a:r>
+          </a:p>
+          <a:p>
+            <a:r>
+              <a:t>  • Share of 60-byte TCP ACK packets.</a:t>
+            </a:r>
+          </a:p>
+          <a:p>
+            <a:r>
+              <a:t>  • Normal TCP uses "delayed ACK" — 1 ACK per 2 data packets, so ~33% ACKs.</a:t>
+            </a:r>
+          </a:p>
+          <a:p>
+            <a:r>
+              <a:t>  • udp2raw breaks this: each WG packet wrapped as 1 separate TCP segment.</a:t>
+            </a:r>
+          </a:p>
+          <a:p>
+            <a:r>
+              <a:t>  • Kernel ACKs each arrival individually → ACK fraction climbs.</a:t>
+            </a:r>
+          </a:p>
+          <a:p>
+            <a:r>
+              <a:t>  • WG-in-udp2raw: 30%. Normal: 7%. Cohen's d = 1.27 (still large).</a:t>
             </a:r>
           </a:p>
           <a:p/>
           <a:p>
             <a:r>
-              <a:t>Scatter on the right: 1082 flows total. Orange is WireGuard, grey is</a:t>
-            </a:r>
-          </a:p>
-          <a:p>
-            <a:r>
-              <a:t>normal traffic. They barely overlap. All 24 WireGuard flows have</a:t>
-            </a:r>
-          </a:p>
-          <a:p>
-            <a:r>
-              <a:t>bulk_fraction at least 0.32. Only 4 of 1058 normal flows fall anywhere</a:t>
-            </a:r>
-          </a:p>
-          <a:p>
-            <a:r>
-              <a:t>near the WireGuard cluster.</a:t>
+              <a:t>Scatter plot (right)</a:t>
+            </a:r>
+          </a:p>
+          <a:p>
+            <a:r>
+              <a:t>  • 1082 flows total. Orange = WireGuard. Grey = normal.</a:t>
+            </a:r>
+          </a:p>
+          <a:p>
+            <a:r>
+              <a:t>  • Barely overlap.</a:t>
+            </a:r>
+          </a:p>
+          <a:p>
+            <a:r>
+              <a:t>  • All 24 WG flows have bulk_fraction ≥ 0.32.</a:t>
+            </a:r>
+          </a:p>
+          <a:p>
+            <a:r>
+              <a:t>  • Only 4 of 1058 normal flows are anywhere near the WG cluster.</a:t>
             </a:r>
           </a:p>
           <a:p/>
           <a:p>
             <a:r>
-              <a:t>Orange note bottom-left, brief story on scientific honesty. Going in, I</a:t>
-            </a:r>
-          </a:p>
-          <a:p>
-            <a:r>
-              <a:t>expected dominant_size_fraction — how concentrated the most common</a:t>
-            </a:r>
-          </a:p>
-          <a:p>
-            <a:r>
-              <a:t>packet size is — to be the killer feature. The real data inverted that:</a:t>
-            </a:r>
-          </a:p>
-          <a:p>
-            <a:r>
-              <a:t>the public dataset has lots of idle keepalive flows where every packet</a:t>
-            </a:r>
-          </a:p>
-          <a:p>
-            <a:r>
-              <a:t>is identical, so they score higher than WireGuard does. We dropped that</a:t>
-            </a:r>
-          </a:p>
-          <a:p>
-            <a:r>
-              <a:t>feature. The two that survived are the ones grounded in protocol</a:t>
-            </a:r>
-          </a:p>
-          <a:p>
-            <a:r>
-              <a:t>mechanics, not intuition.</a:t>
+              <a:t>Orange note (bottom-left) — scientific honesty</a:t>
+            </a:r>
+          </a:p>
+          <a:p>
+            <a:r>
+              <a:t>  • I expected dominant_size_fraction to be the killer feature.</a:t>
+            </a:r>
+          </a:p>
+          <a:p>
+            <a:r>
+              <a:t>  • Real data inverted it: public dataset has idle keepalive flows where every packet is identical.</a:t>
+            </a:r>
+          </a:p>
+          <a:p>
+            <a:r>
+              <a:t>  • Those flows score HIGHER than WireGuard on that feature.</a:t>
+            </a:r>
+          </a:p>
+          <a:p>
+            <a:r>
+              <a:t>  • We dropped it. Surviving features are grounded in protocol mechanics, not intuition.</a:t>
             </a:r>
           </a:p>
         </p:txBody>
@@ -1389,105 +1401,69 @@
           <a:lstStyle/>
           <a:p>
             <a:r>
-              <a:t>Headline numbers, with definitions since some of these terms aren't</a:t>
-            </a:r>
-          </a:p>
-          <a:p>
-            <a:r>
-              <a:t>universal.</a:t>
+              <a:t>Headline numbers (with definitions)</a:t>
+            </a:r>
+          </a:p>
+          <a:p>
+            <a:r>
+              <a:t>  • Accuracy 99.91% — overall fraction labeled correctly.</a:t>
+            </a:r>
+          </a:p>
+          <a:p>
+            <a:r>
+              <a:t>  • Precision 1.000 — when we say "WireGuard," we're always right. Zero false alarms on 1058 normal flows.</a:t>
+            </a:r>
+          </a:p>
+          <a:p>
+            <a:r>
+              <a:t>  • Recall 0.958 — we catch 23 of 24 actual WG flows. One slips through.</a:t>
+            </a:r>
+          </a:p>
+          <a:p>
+            <a:r>
+              <a:t>  • ROC AUC 1.000 — single score from 0.5 (random) to 1.0 (perfect), across all sensitivity settings. We're at the ceiling.</a:t>
             </a:r>
           </a:p>
           <a:p/>
           <a:p>
             <a:r>
-              <a:t>Accuracy 99.91% — overall fraction labeled correctly.</a:t>
-            </a:r>
-          </a:p>
-          <a:p>
-            <a:r>
-              <a:t>Precision 1.000 — when we say "WireGuard," we're always right. Zero</a:t>
-            </a:r>
-          </a:p>
-          <a:p>
-            <a:r>
-              <a:t>false alarms on 1058 normal flows.</a:t>
-            </a:r>
-          </a:p>
-          <a:p>
-            <a:r>
-              <a:t>Recall 0.958 — we catch 23 of the 24 actual WireGuard flows. One slips</a:t>
-            </a:r>
-          </a:p>
-          <a:p>
-            <a:r>
-              <a:t>through.</a:t>
-            </a:r>
-          </a:p>
-          <a:p>
-            <a:r>
-              <a:t>ROC AUC 1.000 — a single number from 0.5 (random) to 1.0 (perfect)</a:t>
-            </a:r>
-          </a:p>
-          <a:p>
-            <a:r>
-              <a:t>that scores the classifier across all sensitivity settings. We're at</a:t>
-            </a:r>
-          </a:p>
-          <a:p>
-            <a:r>
-              <a:t>the ceiling.</a:t>
+              <a:t>Adding more features doesn't help (small table)</a:t>
+            </a:r>
+          </a:p>
+          <a:p>
+            <a:r>
+              <a:t>  • RF 8 features catches 1 FEWER WG flow than RF 2 features.</a:t>
+            </a:r>
+          </a:p>
+          <a:p>
+            <a:r>
+              <a:t>  • Extra features added noise, not signal.</a:t>
+            </a:r>
+          </a:p>
+          <a:p>
+            <a:r>
+              <a:t>  • LR = Logistic Regression, simpler model that draws a straight line between classes.</a:t>
+            </a:r>
+          </a:p>
+          <a:p>
+            <a:r>
+              <a:t>  • LR catches everything but raises ~3% false alarms — real boundary isn't straight.</a:t>
             </a:r>
           </a:p>
           <a:p/>
           <a:p>
             <a:r>
-              <a:t>Small table below: adding more features doesn't help. The 8-feature</a:t>
-            </a:r>
-          </a:p>
-          <a:p>
-            <a:r>
-              <a:t>Random Forest catches one fewer WireGuard flow than the 2-feature</a:t>
-            </a:r>
-          </a:p>
-          <a:p>
-            <a:r>
-              <a:t>version — extra features added noise, not signal. Logistic regression</a:t>
-            </a:r>
-          </a:p>
-          <a:p>
-            <a:r>
-              <a:t>(LR), which is a simpler model that draws a straight line between the</a:t>
-            </a:r>
-          </a:p>
-          <a:p>
-            <a:r>
-              <a:t>classes, catches everything but pays with 3% false alarms because the</a:t>
-            </a:r>
-          </a:p>
-          <a:p>
-            <a:r>
-              <a:t>real boundary isn't straight.</a:t>
-            </a:r>
-          </a:p>
-          <a:p/>
-          <a:p>
-            <a:r>
-              <a:t>Right side. Confusion matrix on top — that's the 2x2 grid of correct</a:t>
-            </a:r>
-          </a:p>
-          <a:p>
-            <a:r>
-              <a:t>and incorrect labels. Almost everything sits on the diagonal. ROC curve</a:t>
-            </a:r>
-          </a:p>
-          <a:p>
-            <a:r>
-              <a:t>on the bottom hugs the top-left corner, which is the shape of a</a:t>
-            </a:r>
-          </a:p>
-          <a:p>
-            <a:r>
-              <a:t>near-perfect classifier.</a:t>
+              <a:t>Plots on the right</a:t>
+            </a:r>
+          </a:p>
+          <a:p>
+            <a:r>
+              <a:t>  • Top = confusion matrix: 2x2 grid of correct vs incorrect labels. Almost everything on the diagonal.</a:t>
+            </a:r>
+          </a:p>
+          <a:p>
+            <a:r>
+              <a:t>  • Bottom = ROC curve hugs the top-left corner. Shape of a near-perfect classifier.</a:t>
             </a:r>
           </a:p>
         </p:txBody>
@@ -1557,78 +1533,68 @@
           <a:lstStyle/>
           <a:p>
             <a:r>
-              <a:t>Lit positioning so the audience knows we read. The Xue group at</a:t>
-            </a:r>
-          </a:p>
-          <a:p>
-            <a:r>
-              <a:t>Michigan has the dominant line. Their 2022 OpenVPN paper is our</a:t>
-            </a:r>
-          </a:p>
-          <a:p>
-            <a:r>
-              <a:t>methodology template. Their 2024 paper detects nested TLS handshakes —</a:t>
-            </a:r>
-          </a:p>
-          <a:p>
-            <a:r>
-              <a:t>doesn't fire on WireGuard because WireGuard doesn't use TLS. Their 2025</a:t>
-            </a:r>
-          </a:p>
-          <a:p>
-            <a:r>
-              <a:t>NDSS paper uses cross-layer round-trip-time anomalies — attenuates on</a:t>
-            </a:r>
-          </a:p>
-          <a:p>
-            <a:r>
-              <a:t>short UDP flows like ours. So those protocol-agnostic methods don't</a:t>
-            </a:r>
-          </a:p>
-          <a:p>
-            <a:r>
-              <a:t>already solve the WireGuard-in-udp2raw case. Protocol-specific</a:t>
-            </a:r>
-          </a:p>
-          <a:p>
-            <a:r>
-              <a:t>structural features remain the available approach.</a:t>
+              <a:t>Lit positioning — Xue group at Michigan dominates this space</a:t>
+            </a:r>
+          </a:p>
+          <a:p>
+            <a:r>
+              <a:t>  • 2022 OpenVPN paper → our methodology template.</a:t>
+            </a:r>
+          </a:p>
+          <a:p>
+            <a:r>
+              <a:t>  • 2024 paper detects nested TLS handshakes → doesn't fire (WG has no TLS).</a:t>
+            </a:r>
+          </a:p>
+          <a:p>
+            <a:r>
+              <a:t>  • 2025 NDSS uses cross-layer RTT anomalies → attenuates on our short UDP flows.</a:t>
+            </a:r>
+          </a:p>
+          <a:p>
+            <a:r>
+              <a:t>  • → Protocol-agnostic methods don't solve our case. Protocol-specific structural features remain the approach.</a:t>
             </a:r>
           </a:p>
           <a:p/>
           <a:p>
             <a:r>
-              <a:t>Right side, what we are NOT claiming. Single client and server, no</a:t>
-            </a:r>
-          </a:p>
-          <a:p>
-            <a:r>
-              <a:t>ISP-scale data. One version of udp2raw — later forks may differ. Both</a:t>
-            </a:r>
-          </a:p>
-          <a:p>
-            <a:r>
-              <a:t>attacks are defeatable by a maintainer who patches the tool — delayed</a:t>
-            </a:r>
-          </a:p>
-          <a:p>
-            <a:r>
-              <a:t>ACK plus a smaller WireGuard MTU weakens C2. The bogus-ACK probe is</a:t>
-            </a:r>
-          </a:p>
-          <a:p>
-            <a:r>
-              <a:t>mildly hostile, so an adversary would fire it only at already-suspected</a:t>
-            </a:r>
-          </a:p>
-          <a:p>
-            <a:r>
-              <a:t>hosts. And we didn't compare against AmneziaWG, swgp-go, or wstunnel —</a:t>
-            </a:r>
-          </a:p>
-          <a:p>
-            <a:r>
-              <a:t>future work.</a:t>
+              <a:t>What we are NOT claiming</a:t>
+            </a:r>
+          </a:p>
+          <a:p>
+            <a:r>
+              <a:t>  • Single client/server. No ISP-scale data.</a:t>
+            </a:r>
+          </a:p>
+          <a:p>
+            <a:r>
+              <a:t>  • One version of udp2raw (v20230206.0). Later forks may differ.</a:t>
+            </a:r>
+          </a:p>
+          <a:p>
+            <a:r>
+              <a:t>  • Defeatable by a maintainer:</a:t>
+            </a:r>
+          </a:p>
+          <a:p>
+            <a:r>
+              <a:t>      – Delayed ACK + smaller WG MTU weakens C2.</a:t>
+            </a:r>
+          </a:p>
+          <a:p>
+            <a:r>
+              <a:t>      – More conformant TCP emulation weakens C1.</a:t>
+            </a:r>
+          </a:p>
+          <a:p>
+            <a:r>
+              <a:t>  • Bogus-ACK probe (P3) is mildly hostile → fire only at already-suspected hosts.</a:t>
+            </a:r>
+          </a:p>
+          <a:p>
+            <a:r>
+              <a:t>  • Not benchmarked against AmneziaWG, a more popular obfuscator for WG, or swgp-go, wstunnel. Future work.</a:t>
             </a:r>
           </a:p>
         </p:txBody>
@@ -1698,77 +1664,90 @@
           <a:lstStyle/>
           <a:p>
             <a:r>
-              <a:t>Four takeaways.</a:t>
+              <a:t>1. WireGuard's wire format leaks</a:t>
+            </a:r>
+          </a:p>
+          <a:p>
+            <a:r>
+              <a:t>  • Known result. Re-implemented as our baseline.</a:t>
             </a:r>
           </a:p>
           <a:p/>
           <a:p>
             <a:r>
-              <a:t>One. WireGuard's wire format leaks. Known result; we re-implement it as</a:t>
-            </a:r>
-          </a:p>
-          <a:p>
-            <a:r>
-              <a:t>our baseline.</a:t>
+              <a:t>2. udp2raw doesn't fix it</a:t>
+            </a:r>
+          </a:p>
+          <a:p>
+            <a:r>
+              <a:t>  • 8.5 s with the 5-packet prober (C1).</a:t>
+            </a:r>
+          </a:p>
+          <a:p>
+            <a:r>
+              <a:t>  • 2 passive features, AUC = 1.0 (C2).</a:t>
+            </a:r>
+          </a:p>
+          <a:p>
+            <a:r>
+              <a:t>  • Pick your weapon.</a:t>
             </a:r>
           </a:p>
           <a:p/>
           <a:p>
             <a:r>
-              <a:t>Two. udp2raw doesn't actually fix it. 8.5 seconds with the five-packet</a:t>
-            </a:r>
-          </a:p>
-          <a:p>
-            <a:r>
-              <a:t>prober, or two passive features at AUC 1.0. Pick your weapon.</a:t>
+              <a:t>3. Not a statistical fluke — mechanical</a:t>
+            </a:r>
+          </a:p>
+          <a:p>
+            <a:r>
+              <a:t>  • WG pads to MTU because that's its design.</a:t>
+            </a:r>
+          </a:p>
+          <a:p>
+            <a:r>
+              <a:t>  • udp2raw acks 1:1 because that's how it wraps.</a:t>
+            </a:r>
+          </a:p>
+          <a:p>
+            <a:r>
+              <a:t>  • udp2raw drops unfamiliar TCP shapes — parser was written for one shape.</a:t>
+            </a:r>
+          </a:p>
+          <a:p>
+            <a:r>
+              <a:t>  • This is because udp2raw fakes TCP in userspace with a minimal parser to only handle the packet shapes it needs, everything else gets dropped.</a:t>
+            </a:r>
+          </a:p>
+          <a:p>
+            <a:r>
+              <a:t>           </a:t>
+            </a:r>
+          </a:p>
+          <a:p>
+            <a:r>
+              <a:t>4. Defenses are obvious</a:t>
+            </a:r>
+          </a:p>
+          <a:p>
+            <a:r>
+              <a:t>  • Delayed ACK + smaller WG MTU kills C2.</a:t>
+            </a:r>
+          </a:p>
+          <a:p>
+            <a:r>
+              <a:t>  • More conformant TCP emulation kills C1.</a:t>
+            </a:r>
+          </a:p>
+          <a:p>
+            <a:r>
+              <a:t>  • Sketched in the paper, not patched upstream. Somebody else's PR.</a:t>
             </a:r>
           </a:p>
           <a:p/>
           <a:p>
             <a:r>
-              <a:t>Three. Not a statistical fluke. WireGuard pads to MTU because that's</a:t>
-            </a:r>
-          </a:p>
-          <a:p>
-            <a:r>
-              <a:t>its design. udp2raw acks 1:1 because that's how it wraps. udp2raw drops</a:t>
-            </a:r>
-          </a:p>
-          <a:p>
-            <a:r>
-              <a:t>unfamiliar TCP shapes because its parser was written for one shape.</a:t>
-            </a:r>
-          </a:p>
-          <a:p>
-            <a:r>
-              <a:t>Mechanical consequences, not accidents.</a:t>
-            </a:r>
-          </a:p>
-          <a:p/>
-          <a:p>
-            <a:r>
-              <a:t>Four. Defenses are obvious. Delayed ACK plus a smaller WireGuard MTU</a:t>
-            </a:r>
-          </a:p>
-          <a:p>
-            <a:r>
-              <a:t>kills C2. More conformant TCP emulation kills C1. We sketch both in the</a:t>
-            </a:r>
-          </a:p>
-          <a:p>
-            <a:r>
-              <a:t>paper but didn't patch the upstream tool. Somebody else's pull request</a:t>
-            </a:r>
-          </a:p>
-          <a:p>
-            <a:r>
-              <a:t>to write.</a:t>
-            </a:r>
-          </a:p>
-          <a:p/>
-          <a:p>
-            <a:r>
-              <a:t>Happy to take questions. Live demo ready if there's interest.</a:t>
+              <a:t>Happy to take questions. LIVE DEMO NEXT.</a:t>
             </a:r>
           </a:p>
         </p:txBody>
@@ -11783,7 +11762,7 @@
                 </a:solidFill>
                 <a:latin typeface="Calibri"/>
               </a:rPr>
-              <a:t>•   Not benchmarked against AmneziaWG, swgp-go, wstunnel. Future work.</a:t>
+              <a:t>•   Not benchmarked against AmneziaWG, a more popular obfuscator for WG, or swgp-go, wstunnel. Future work.</a:t>
             </a:r>
           </a:p>
         </p:txBody>
